--- a/presentation/xyDeng_Mario_RL_ICM_Disagreement_1_1.pptx
+++ b/presentation/xyDeng_Mario_RL_ICM_Disagreement_1_1.pptx
@@ -2,18 +2,18 @@
 <file path=ppt/presentation.xml><?xml version="1.0" encoding="utf-8"?>
 <p:presentation xmlns:p="http://schemas.openxmlformats.org/presentationml/2006/main">
   <p:sldMasterIdLst>
-    <p:sldMasterId xmlns:r="http://schemas.openxmlformats.org/officeDocument/2006/relationships" id="2147483648" r:id="R45b56a4704194ca9"/>
+    <p:sldMasterId xmlns:r="http://schemas.openxmlformats.org/officeDocument/2006/relationships" id="2147483648" r:id="Re4c01f539f6949b6"/>
   </p:sldMasterIdLst>
   <p:notesMasterIdLst>
-    <p:notesMasterId xmlns:r="http://schemas.openxmlformats.org/officeDocument/2006/relationships" r:id="R3967d875dd0244e0"/>
+    <p:notesMasterId xmlns:r="http://schemas.openxmlformats.org/officeDocument/2006/relationships" r:id="R5a89cffe5f504183"/>
   </p:notesMasterIdLst>
   <p:sldIdLst>
-    <p:sldId xmlns:r="http://schemas.openxmlformats.org/officeDocument/2006/relationships" id="256" r:id="R59cc505a223043b6"/>
-    <p:sldId xmlns:r="http://schemas.openxmlformats.org/officeDocument/2006/relationships" id="257" r:id="R6e0122bb4bdc4cdb"/>
-    <p:sldId xmlns:r="http://schemas.openxmlformats.org/officeDocument/2006/relationships" id="258" r:id="R254cb4c10c5c4eda"/>
-    <p:sldId xmlns:r="http://schemas.openxmlformats.org/officeDocument/2006/relationships" id="259" r:id="R8167b30ac5d84823"/>
-    <p:sldId xmlns:r="http://schemas.openxmlformats.org/officeDocument/2006/relationships" id="260" r:id="R30a2f006da3a4853"/>
-    <p:sldId xmlns:r="http://schemas.openxmlformats.org/officeDocument/2006/relationships" id="261" r:id="R971e5fc8236a4956"/>
+    <p:sldId xmlns:r="http://schemas.openxmlformats.org/officeDocument/2006/relationships" id="256" r:id="Rb58bfebfc8a74b01"/>
+    <p:sldId xmlns:r="http://schemas.openxmlformats.org/officeDocument/2006/relationships" id="257" r:id="R18e1b91814dd413f"/>
+    <p:sldId xmlns:r="http://schemas.openxmlformats.org/officeDocument/2006/relationships" id="258" r:id="Rce3ce7ed86924803"/>
+    <p:sldId xmlns:r="http://schemas.openxmlformats.org/officeDocument/2006/relationships" id="259" r:id="Rf6afa035ee374f26"/>
+    <p:sldId xmlns:r="http://schemas.openxmlformats.org/officeDocument/2006/relationships" id="260" r:id="R66095249523841cc"/>
+    <p:sldId xmlns:r="http://schemas.openxmlformats.org/officeDocument/2006/relationships" id="261" r:id="R84eb2287979e4cef"/>
   </p:sldIdLst>
   <p:sldSz cx="12192000" cy="6858000"/>
   <p:notesSz cx="6858000" cy="9144000"/>
@@ -936,7 +936,7 @@
   </p:cSld>
   <p:clrMap bg1="lt1" tx1="dk1" bg2="lt2" tx2="dk2" accent1="accent1" accent2="accent2" accent3="accent3" accent4="accent4" accent5="accent5" accent6="accent6" hlink="hlink" folHlink="folHlink"/>
   <p:sldLayoutIdLst>
-    <p:sldLayoutId xmlns:r="http://schemas.openxmlformats.org/officeDocument/2006/relationships" id="2147483649" r:id="R8247908ed22b43e4"/>
+    <p:sldLayoutId xmlns:r="http://schemas.openxmlformats.org/officeDocument/2006/relationships" id="2147483649" r:id="R7600835ac25742d5"/>
   </p:sldLayoutIdLst>
   <p:txStyles>
     <p:titleStyle>
@@ -1487,7 +1487,7 @@
           <p:cNvPr id="1" name="">
             <a:extLst xmlns:a="http://schemas.openxmlformats.org/drawingml/2006/main">
               <a:ext uri="{FF2B5EF4-FFF2-40B4-BE49-F238E27FC236}">
-                <a16:creationId xmlns:a16="http://schemas.microsoft.com/office/drawing/2014/main" id="{00E42F72-7176-49F8-9DD6-4A41659D0262}"/>
+                <a16:creationId xmlns:a16="http://schemas.microsoft.com/office/drawing/2014/main" id="{E9618EF9-49EA-4663-9ED9-8F2A4306B11B}"/>
               </a:ext>
             </a:extLst>
           </p:cNvPr>
@@ -1499,7 +1499,7 @@
         <p:spPr>
           <a:xfrm xmlns:a="http://schemas.openxmlformats.org/drawingml/2006/main">
             <a:off x="381000" y="257175"/>
-            <a:ext cx="971550" cy="295275"/>
+            <a:ext cx="1066800" cy="295275"/>
           </a:xfrm>
           <a:prstGeom xmlns:a="http://schemas.openxmlformats.org/drawingml/2006/main" prst="roundRect">
             <a:avLst>
@@ -1527,25 +1527,25 @@
           <a:lstStyle xmlns:a="http://schemas.openxmlformats.org/drawingml/2006/main"/>
           <a:p xmlns:a="http://schemas.openxmlformats.org/drawingml/2006/main">
             <a:pPr algn="ctr">
-              <a:defRPr sz="1125" b="1">
+              <a:defRPr sz="1050" b="1">
                 <a:solidFill>
                   <a:srgbClr val="FFFFFF"/>
                 </a:solidFill>
-                <a:latin typeface="Microsoft YaHei"/>
-                <a:ea typeface="Microsoft YaHei"/>
-                <a:cs typeface="Microsoft YaHei"/>
-              </a:defRPr>
-            </a:pPr>
-            <a:r>
-              <a:rPr sz="1125" b="1">
+                <a:latin typeface="Aptos"/>
+                <a:ea typeface="Aptos"/>
+                <a:cs typeface="Aptos"/>
+              </a:defRPr>
+            </a:pPr>
+            <a:r>
+              <a:rPr sz="1050" b="1">
                 <a:solidFill>
                   <a:srgbClr val="FFFFFF"/>
                 </a:solidFill>
-                <a:latin typeface="Microsoft YaHei"/>
-                <a:ea typeface="Microsoft YaHei"/>
-                <a:cs typeface="Microsoft YaHei"/>
-              </a:rPr>
-              <a:t>方法 A</a:t>
+                <a:latin typeface="Aptos"/>
+                <a:ea typeface="Aptos"/>
+                <a:cs typeface="Aptos"/>
+              </a:rPr>
+              <a:t>Method A</a:t>
             </a:r>
           </a:p>
         </p:txBody>
@@ -1555,19 +1555,19 @@
           <p:cNvPr id="2" name="">
             <a:extLst xmlns:a="http://schemas.openxmlformats.org/drawingml/2006/main">
               <a:ext uri="{FF2B5EF4-FFF2-40B4-BE49-F238E27FC236}">
-                <a16:creationId xmlns:a16="http://schemas.microsoft.com/office/drawing/2014/main" id="{41523497-6197-4038-8E1D-EF3599106238}"/>
-              </a:ext>
-            </a:extLst>
-          </p:cNvPr>
-          <p:cNvSpPr>
-            <a:spLocks xmlns:a="http://schemas.openxmlformats.org/drawingml/2006/main" noGrp="1"/>
-          </p:cNvSpPr>
-          <p:nvPr/>
-        </p:nvSpPr>
-        <p:spPr>
-          <a:xfrm xmlns:a="http://schemas.openxmlformats.org/drawingml/2006/main">
-            <a:off x="1524000" y="190500"/>
-            <a:ext cx="7239000" cy="361950"/>
+                <a16:creationId xmlns:a16="http://schemas.microsoft.com/office/drawing/2014/main" id="{F5A32B6F-AA67-4C3B-9867-6A0AC49BC7EC}"/>
+              </a:ext>
+            </a:extLst>
+          </p:cNvPr>
+          <p:cNvSpPr>
+            <a:spLocks xmlns:a="http://schemas.openxmlformats.org/drawingml/2006/main" noGrp="1"/>
+          </p:cNvSpPr>
+          <p:nvPr/>
+        </p:nvSpPr>
+        <p:spPr>
+          <a:xfrm xmlns:a="http://schemas.openxmlformats.org/drawingml/2006/main">
+            <a:off x="1619250" y="190500"/>
+            <a:ext cx="7429500" cy="361950"/>
           </a:xfrm>
           <a:prstGeom xmlns:a="http://schemas.openxmlformats.org/drawingml/2006/main" prst="rect">
             <a:avLst/>
@@ -1587,9 +1587,9 @@
                 <a:solidFill>
                   <a:srgbClr val="202938"/>
                 </a:solidFill>
-                <a:latin typeface="Microsoft YaHei"/>
-                <a:ea typeface="Microsoft YaHei"/>
-                <a:cs typeface="Microsoft YaHei"/>
+                <a:latin typeface="Aptos"/>
+                <a:ea typeface="Aptos"/>
+                <a:cs typeface="Aptos"/>
               </a:defRPr>
             </a:pPr>
             <a:r>
@@ -1597,9 +1597,9 @@
                 <a:solidFill>
                   <a:srgbClr val="202938"/>
                 </a:solidFill>
-                <a:latin typeface="Microsoft YaHei"/>
-                <a:ea typeface="Microsoft YaHei"/>
-                <a:cs typeface="Microsoft YaHei"/>
+                <a:latin typeface="Aptos"/>
+                <a:ea typeface="Aptos"/>
+                <a:cs typeface="Aptos"/>
               </a:rPr>
               <a:t>PPO + ICM</a:t>
             </a:r>
@@ -1611,19 +1611,19 @@
           <p:cNvPr id="3" name="">
             <a:extLst xmlns:a="http://schemas.openxmlformats.org/drawingml/2006/main">
               <a:ext uri="{FF2B5EF4-FFF2-40B4-BE49-F238E27FC236}">
-                <a16:creationId xmlns:a16="http://schemas.microsoft.com/office/drawing/2014/main" id="{8C89F8A8-ABC0-4868-98D7-E23BC5A38603}"/>
-              </a:ext>
-            </a:extLst>
-          </p:cNvPr>
-          <p:cNvSpPr>
-            <a:spLocks xmlns:a="http://schemas.openxmlformats.org/drawingml/2006/main" noGrp="1"/>
-          </p:cNvSpPr>
-          <p:nvPr/>
-        </p:nvSpPr>
-        <p:spPr>
-          <a:xfrm xmlns:a="http://schemas.openxmlformats.org/drawingml/2006/main">
-            <a:off x="1524000" y="609600"/>
-            <a:ext cx="7048500" cy="209550"/>
+                <a16:creationId xmlns:a16="http://schemas.microsoft.com/office/drawing/2014/main" id="{F97A01A1-4114-463D-9016-516FBBE0AACD}"/>
+              </a:ext>
+            </a:extLst>
+          </p:cNvPr>
+          <p:cNvSpPr>
+            <a:spLocks xmlns:a="http://schemas.openxmlformats.org/drawingml/2006/main" noGrp="1"/>
+          </p:cNvSpPr>
+          <p:nvPr/>
+        </p:nvSpPr>
+        <p:spPr>
+          <a:xfrm xmlns:a="http://schemas.openxmlformats.org/drawingml/2006/main">
+            <a:off x="1619250" y="609600"/>
+            <a:ext cx="7239000" cy="209550"/>
           </a:xfrm>
           <a:prstGeom xmlns:a="http://schemas.openxmlformats.org/drawingml/2006/main" prst="rect">
             <a:avLst/>
@@ -1643,9 +1643,9 @@
                 <a:solidFill>
                   <a:srgbClr val="607084"/>
                 </a:solidFill>
-                <a:latin typeface="Microsoft YaHei"/>
-                <a:ea typeface="Microsoft YaHei"/>
-                <a:cs typeface="Microsoft YaHei"/>
+                <a:latin typeface="Aptos"/>
+                <a:ea typeface="Aptos"/>
+                <a:cs typeface="Aptos"/>
               </a:defRPr>
             </a:pPr>
             <a:r>
@@ -1653,11 +1653,11 @@
                 <a:solidFill>
                   <a:srgbClr val="607084"/>
                 </a:solidFill>
-                <a:latin typeface="Microsoft YaHei"/>
-                <a:ea typeface="Microsoft YaHei"/>
-                <a:cs typeface="Microsoft YaHei"/>
-              </a:rPr>
-              <a:t>方法机制、训练设置与内在奖励接入方式</a:t>
+                <a:latin typeface="Aptos"/>
+                <a:ea typeface="Aptos"/>
+                <a:cs typeface="Aptos"/>
+              </a:rPr>
+              <a:t>Method, setup, and intrinsic reward interface</a:t>
             </a:r>
           </a:p>
         </p:txBody>
@@ -1667,7 +1667,7 @@
           <p:cNvPr id="4" name="">
             <a:extLst xmlns:a="http://schemas.openxmlformats.org/drawingml/2006/main">
               <a:ext uri="{FF2B5EF4-FFF2-40B4-BE49-F238E27FC236}">
-                <a16:creationId xmlns:a16="http://schemas.microsoft.com/office/drawing/2014/main" id="{D0AF82D3-A664-4910-AD58-ECAB0826DF17}"/>
+                <a16:creationId xmlns:a16="http://schemas.microsoft.com/office/drawing/2014/main" id="{E132899A-D64A-497E-9CF7-CCEDA47E015E}"/>
               </a:ext>
             </a:extLst>
           </p:cNvPr>
@@ -1711,9 +1711,9 @@
                 <a:solidFill>
                   <a:srgbClr val="607084"/>
                 </a:solidFill>
-                <a:latin typeface="Microsoft YaHei"/>
-                <a:ea typeface="Microsoft YaHei"/>
-                <a:cs typeface="Microsoft YaHei"/>
+                <a:latin typeface="Aptos"/>
+                <a:ea typeface="Aptos"/>
+                <a:cs typeface="Aptos"/>
               </a:defRPr>
             </a:pPr>
             <a:r>
@@ -1721,9 +1721,9 @@
                 <a:solidFill>
                   <a:srgbClr val="607084"/>
                 </a:solidFill>
-                <a:latin typeface="Microsoft YaHei"/>
-                <a:ea typeface="Microsoft YaHei"/>
-                <a:cs typeface="Microsoft YaHei"/>
+                <a:latin typeface="Aptos"/>
+                <a:ea typeface="Aptos"/>
+                <a:cs typeface="Aptos"/>
               </a:rPr>
               <a:t>Mario RL / PPO intrinsic rewards</a:t>
             </a:r>
@@ -1734,9 +1734,9 @@
                 <a:solidFill>
                   <a:srgbClr val="607084"/>
                 </a:solidFill>
-                <a:latin typeface="Microsoft YaHei"/>
-                <a:ea typeface="Microsoft YaHei"/>
-                <a:cs typeface="Microsoft YaHei"/>
+                <a:latin typeface="Aptos"/>
+                <a:ea typeface="Aptos"/>
+                <a:cs typeface="Aptos"/>
               </a:defRPr>
             </a:pPr>
             <a:r>
@@ -1744,11 +1744,11 @@
                 <a:solidFill>
                   <a:srgbClr val="607084"/>
                 </a:solidFill>
-                <a:latin typeface="Microsoft YaHei"/>
-                <a:ea typeface="Microsoft YaHei"/>
-                <a:cs typeface="Microsoft YaHei"/>
-              </a:rPr>
-              <a:t>1M steps · seed 1 · 1-1 only</a:t>
+                <a:latin typeface="Aptos"/>
+                <a:ea typeface="Aptos"/>
+                <a:cs typeface="Aptos"/>
+              </a:rPr>
+              <a:t>1M steps | seed 1 | World 1-1</a:t>
             </a:r>
           </a:p>
         </p:txBody>
@@ -1758,7 +1758,7 @@
           <p:cNvPr id="5" name="">
             <a:extLst xmlns:a="http://schemas.openxmlformats.org/drawingml/2006/main">
               <a:ext uri="{FF2B5EF4-FFF2-40B4-BE49-F238E27FC236}">
-                <a16:creationId xmlns:a16="http://schemas.microsoft.com/office/drawing/2014/main" id="{9FE6DF5C-CFE3-49D8-809F-09D75D3AD75B}"/>
+                <a16:creationId xmlns:a16="http://schemas.microsoft.com/office/drawing/2014/main" id="{A3DA6A64-70FA-469F-983F-0994894D67A8}"/>
               </a:ext>
             </a:extLst>
           </p:cNvPr>
@@ -1791,7 +1791,7 @@
           <p:cNvPr id="6" name="">
             <a:extLst xmlns:a="http://schemas.openxmlformats.org/drawingml/2006/main">
               <a:ext uri="{FF2B5EF4-FFF2-40B4-BE49-F238E27FC236}">
-                <a16:creationId xmlns:a16="http://schemas.microsoft.com/office/drawing/2014/main" id="{FC6E75BD-4759-4304-9AFA-594EB328A583}"/>
+                <a16:creationId xmlns:a16="http://schemas.microsoft.com/office/drawing/2014/main" id="{6A4AEDB0-8A25-42FD-9B13-87EF5AF75019}"/>
               </a:ext>
             </a:extLst>
           </p:cNvPr>
@@ -1832,7 +1832,7 @@
           <p:cNvPr id="7" name="">
             <a:extLst xmlns:a="http://schemas.openxmlformats.org/drawingml/2006/main">
               <a:ext uri="{FF2B5EF4-FFF2-40B4-BE49-F238E27FC236}">
-                <a16:creationId xmlns:a16="http://schemas.microsoft.com/office/drawing/2014/main" id="{76B3D9E2-8715-46C1-A4FC-E9A3A0661A6B}"/>
+                <a16:creationId xmlns:a16="http://schemas.microsoft.com/office/drawing/2014/main" id="{4ABBC0AF-D814-42EB-A6AA-0A4EE0E29E9C}"/>
               </a:ext>
             </a:extLst>
           </p:cNvPr>
@@ -1876,9 +1876,9 @@
                 <a:solidFill>
                   <a:srgbClr val="FFFFFF"/>
                 </a:solidFill>
-                <a:latin typeface="Microsoft YaHei"/>
-                <a:ea typeface="Microsoft YaHei"/>
-                <a:cs typeface="Microsoft YaHei"/>
+                <a:latin typeface="Aptos"/>
+                <a:ea typeface="Aptos"/>
+                <a:cs typeface="Aptos"/>
               </a:defRPr>
             </a:pPr>
             <a:r>
@@ -1886,11 +1886,11 @@
                 <a:solidFill>
                   <a:srgbClr val="FFFFFF"/>
                 </a:solidFill>
-                <a:latin typeface="Microsoft YaHei"/>
-                <a:ea typeface="Microsoft YaHei"/>
-                <a:cs typeface="Microsoft YaHei"/>
-              </a:rPr>
-              <a:t>1. 方法定位</a:t>
+                <a:latin typeface="Aptos"/>
+                <a:ea typeface="Aptos"/>
+                <a:cs typeface="Aptos"/>
+              </a:rPr>
+              <a:t>1. Role</a:t>
             </a:r>
           </a:p>
         </p:txBody>
@@ -1900,18 +1900,18 @@
           <p:cNvPr id="8" name="">
             <a:extLst xmlns:a="http://schemas.openxmlformats.org/drawingml/2006/main">
               <a:ext uri="{FF2B5EF4-FFF2-40B4-BE49-F238E27FC236}">
-                <a16:creationId xmlns:a16="http://schemas.microsoft.com/office/drawing/2014/main" id="{C6C8019C-41DD-4968-B897-4E9B58719092}"/>
-              </a:ext>
-            </a:extLst>
-          </p:cNvPr>
-          <p:cNvSpPr>
-            <a:spLocks xmlns:a="http://schemas.openxmlformats.org/drawingml/2006/main" noGrp="1"/>
-          </p:cNvSpPr>
-          <p:nvPr/>
-        </p:nvSpPr>
-        <p:spPr>
-          <a:xfrm xmlns:a="http://schemas.openxmlformats.org/drawingml/2006/main">
-            <a:off x="781050" y="1647825"/>
+                <a16:creationId xmlns:a16="http://schemas.microsoft.com/office/drawing/2014/main" id="{B545F6AF-48BB-40EC-8314-3EA956A834F3}"/>
+              </a:ext>
+            </a:extLst>
+          </p:cNvPr>
+          <p:cNvSpPr>
+            <a:spLocks xmlns:a="http://schemas.openxmlformats.org/drawingml/2006/main" noGrp="1"/>
+          </p:cNvSpPr>
+          <p:nvPr/>
+        </p:nvSpPr>
+        <p:spPr>
+          <a:xfrm xmlns:a="http://schemas.openxmlformats.org/drawingml/2006/main">
+            <a:off x="781050" y="1657350"/>
             <a:ext cx="3048000" cy="838200"/>
           </a:xfrm>
           <a:prstGeom xmlns:a="http://schemas.openxmlformats.org/drawingml/2006/main" prst="rect">
@@ -1932,9 +1932,9 @@
                 <a:solidFill>
                   <a:srgbClr val="202938"/>
                 </a:solidFill>
-                <a:latin typeface="Microsoft YaHei"/>
-                <a:ea typeface="Microsoft YaHei"/>
-                <a:cs typeface="Microsoft YaHei"/>
+                <a:latin typeface="Aptos"/>
+                <a:ea typeface="Aptos"/>
+                <a:cs typeface="Aptos"/>
               </a:defRPr>
             </a:pPr>
             <a:r>
@@ -1942,9 +1942,9 @@
                 <a:solidFill>
                   <a:srgbClr val="202938"/>
                 </a:solidFill>
-                <a:latin typeface="Microsoft YaHei"/>
-                <a:ea typeface="Microsoft YaHei"/>
-                <a:cs typeface="Microsoft YaHei"/>
+                <a:latin typeface="Aptos"/>
+                <a:ea typeface="Aptos"/>
+                <a:cs typeface="Aptos"/>
               </a:rPr>
               <a:t>Learns inverse and forward dynamics in latent space.</a:t>
             </a:r>
@@ -1955,9 +1955,9 @@
                 <a:solidFill>
                   <a:srgbClr val="202938"/>
                 </a:solidFill>
-                <a:latin typeface="Microsoft YaHei"/>
-                <a:ea typeface="Microsoft YaHei"/>
-                <a:cs typeface="Microsoft YaHei"/>
+                <a:latin typeface="Aptos"/>
+                <a:ea typeface="Aptos"/>
+                <a:cs typeface="Aptos"/>
               </a:defRPr>
             </a:pPr>
             <a:r>
@@ -1965,11 +1965,11 @@
                 <a:solidFill>
                   <a:srgbClr val="202938"/>
                 </a:solidFill>
-                <a:latin typeface="Microsoft YaHei"/>
-                <a:ea typeface="Microsoft YaHei"/>
-                <a:cs typeface="Microsoft YaHei"/>
-              </a:rPr>
-              <a:t>Curiosity reward is the forward prediction error.</a:t>
+                <a:latin typeface="Aptos"/>
+                <a:ea typeface="Aptos"/>
+                <a:cs typeface="Aptos"/>
+              </a:rPr>
+              <a:t>Intrinsic reward is forward prediction error.</a:t>
             </a:r>
           </a:p>
           <a:p xmlns:a="http://schemas.openxmlformats.org/drawingml/2006/main">
@@ -1978,9 +1978,9 @@
                 <a:solidFill>
                   <a:srgbClr val="202938"/>
                 </a:solidFill>
-                <a:latin typeface="Microsoft YaHei"/>
-                <a:ea typeface="Microsoft YaHei"/>
-                <a:cs typeface="Microsoft YaHei"/>
+                <a:latin typeface="Aptos"/>
+                <a:ea typeface="Aptos"/>
+                <a:cs typeface="Aptos"/>
               </a:defRPr>
             </a:pPr>
             <a:r>
@@ -1988,11 +1988,11 @@
                 <a:solidFill>
                   <a:srgbClr val="202938"/>
                 </a:solidFill>
-                <a:latin typeface="Microsoft YaHei"/>
-                <a:ea typeface="Microsoft YaHei"/>
-                <a:cs typeface="Microsoft YaHei"/>
-              </a:rPr>
-              <a:t>PPO receives r_total = r_ext + β·r_ICM.</a:t>
+                <a:latin typeface="Aptos"/>
+                <a:ea typeface="Aptos"/>
+                <a:cs typeface="Aptos"/>
+              </a:rPr>
+              <a:t>PPO uses r_total = r_ext + beta*r_ICM.</a:t>
             </a:r>
           </a:p>
         </p:txBody>
@@ -2002,7 +2002,7 @@
           <p:cNvPr id="9" name="">
             <a:extLst xmlns:a="http://schemas.openxmlformats.org/drawingml/2006/main">
               <a:ext uri="{FF2B5EF4-FFF2-40B4-BE49-F238E27FC236}">
-                <a16:creationId xmlns:a16="http://schemas.microsoft.com/office/drawing/2014/main" id="{253AC8CD-6DAC-4449-904C-A3F49DC22C2B}"/>
+                <a16:creationId xmlns:a16="http://schemas.microsoft.com/office/drawing/2014/main" id="{E76ADF4C-A7A5-44BA-B057-8F5449D28808}"/>
               </a:ext>
             </a:extLst>
           </p:cNvPr>
@@ -2034,9 +2034,9 @@
                 <a:solidFill>
                   <a:srgbClr val="607084"/>
                 </a:solidFill>
-                <a:latin typeface="Microsoft YaHei"/>
-                <a:ea typeface="Microsoft YaHei"/>
-                <a:cs typeface="Microsoft YaHei"/>
+                <a:latin typeface="Aptos"/>
+                <a:ea typeface="Aptos"/>
+                <a:cs typeface="Aptos"/>
               </a:defRPr>
             </a:pPr>
             <a:r>
@@ -2044,11 +2044,11 @@
                 <a:solidFill>
                   <a:srgbClr val="607084"/>
                 </a:solidFill>
-                <a:latin typeface="Microsoft YaHei"/>
-                <a:ea typeface="Microsoft YaHei"/>
-                <a:cs typeface="Microsoft YaHei"/>
-              </a:rPr>
-              <a:t>共同 backbone: PPO + CNN Actor-Critic；方法差异集中在 intrinsic reward module.</a:t>
+                <a:latin typeface="Aptos"/>
+                <a:ea typeface="Aptos"/>
+                <a:cs typeface="Aptos"/>
+              </a:rPr>
+              <a:t>Shared backbone: PPO + CNN Actor-Critic. Only the intrinsic reward module changes.</a:t>
             </a:r>
           </a:p>
         </p:txBody>
@@ -2058,7 +2058,7 @@
           <p:cNvPr id="10" name="">
             <a:extLst xmlns:a="http://schemas.openxmlformats.org/drawingml/2006/main">
               <a:ext uri="{FF2B5EF4-FFF2-40B4-BE49-F238E27FC236}">
-                <a16:creationId xmlns:a16="http://schemas.microsoft.com/office/drawing/2014/main" id="{9A888EE8-2BFD-4F86-BAD8-78054A3EAFAE}"/>
+                <a16:creationId xmlns:a16="http://schemas.microsoft.com/office/drawing/2014/main" id="{E7A22CF2-9580-4BB8-AE20-11CE1B7A0084}"/>
               </a:ext>
             </a:extLst>
           </p:cNvPr>
@@ -2099,7 +2099,7 @@
           <p:cNvPr id="11" name="">
             <a:extLst xmlns:a="http://schemas.openxmlformats.org/drawingml/2006/main">
               <a:ext uri="{FF2B5EF4-FFF2-40B4-BE49-F238E27FC236}">
-                <a16:creationId xmlns:a16="http://schemas.microsoft.com/office/drawing/2014/main" id="{39D19C9A-589B-4CC5-B19C-DC14F58F4C14}"/>
+                <a16:creationId xmlns:a16="http://schemas.microsoft.com/office/drawing/2014/main" id="{A76C042F-4C4C-4D49-ADFD-90FD895253A8}"/>
               </a:ext>
             </a:extLst>
           </p:cNvPr>
@@ -2111,7 +2111,7 @@
         <p:spPr>
           <a:xfrm xmlns:a="http://schemas.openxmlformats.org/drawingml/2006/main">
             <a:off x="4591050" y="1228725"/>
-            <a:ext cx="1143000" cy="285750"/>
+            <a:ext cx="1238250" cy="285750"/>
           </a:xfrm>
           <a:prstGeom xmlns:a="http://schemas.openxmlformats.org/drawingml/2006/main" prst="roundRect">
             <a:avLst>
@@ -2143,9 +2143,9 @@
                 <a:solidFill>
                   <a:srgbClr val="FFFFFF"/>
                 </a:solidFill>
-                <a:latin typeface="Microsoft YaHei"/>
-                <a:ea typeface="Microsoft YaHei"/>
-                <a:cs typeface="Microsoft YaHei"/>
+                <a:latin typeface="Aptos"/>
+                <a:ea typeface="Aptos"/>
+                <a:cs typeface="Aptos"/>
               </a:defRPr>
             </a:pPr>
             <a:r>
@@ -2153,11 +2153,11 @@
                 <a:solidFill>
                   <a:srgbClr val="FFFFFF"/>
                 </a:solidFill>
-                <a:latin typeface="Microsoft YaHei"/>
-                <a:ea typeface="Microsoft YaHei"/>
-                <a:cs typeface="Microsoft YaHei"/>
-              </a:rPr>
-              <a:t>2. 关键超参数</a:t>
+                <a:latin typeface="Aptos"/>
+                <a:ea typeface="Aptos"/>
+                <a:cs typeface="Aptos"/>
+              </a:rPr>
+              <a:t>2. Key settings</a:t>
             </a:r>
           </a:p>
         </p:txBody>
@@ -2192,11 +2192,11 @@
                           <a:solidFill>
                             <a:srgbClr val="202938"/>
                           </a:solidFill>
-                          <a:latin typeface="Microsoft YaHei"/>
-                          <a:ea typeface="Microsoft YaHei"/>
-                          <a:cs typeface="Microsoft YaHei"/>
+                          <a:latin typeface="Aptos"/>
+                          <a:ea typeface="Aptos"/>
+                          <a:cs typeface="Aptos"/>
                         </a:rPr>
-                        <a:t>项</a:t>
+                        <a:t>Item</a:t>
                       </a:r>
                     </a:p>
                   </a:txBody>
@@ -2217,11 +2217,11 @@
                           <a:solidFill>
                             <a:srgbClr val="202938"/>
                           </a:solidFill>
-                          <a:latin typeface="Microsoft YaHei"/>
-                          <a:ea typeface="Microsoft YaHei"/>
-                          <a:cs typeface="Microsoft YaHei"/>
+                          <a:latin typeface="Aptos"/>
+                          <a:ea typeface="Aptos"/>
+                          <a:cs typeface="Aptos"/>
                         </a:rPr>
-                        <a:t>值</a:t>
+                        <a:t>Value</a:t>
                       </a:r>
                     </a:p>
                   </a:txBody>
@@ -2244,9 +2244,9 @@
                           <a:solidFill>
                             <a:srgbClr val="202938"/>
                           </a:solidFill>
-                          <a:latin typeface="Microsoft YaHei"/>
-                          <a:ea typeface="Microsoft YaHei"/>
-                          <a:cs typeface="Microsoft YaHei"/>
+                          <a:latin typeface="Aptos"/>
+                          <a:ea typeface="Aptos"/>
+                          <a:cs typeface="Aptos"/>
                         </a:rPr>
                         <a:t>Intrinsic type</a:t>
                       </a:r>
@@ -2288,9 +2288,9 @@
                           <a:solidFill>
                             <a:srgbClr val="202938"/>
                           </a:solidFill>
-                          <a:latin typeface="Microsoft YaHei"/>
-                          <a:ea typeface="Microsoft YaHei"/>
-                          <a:cs typeface="Microsoft YaHei"/>
+                          <a:latin typeface="Aptos"/>
+                          <a:ea typeface="Aptos"/>
+                          <a:cs typeface="Aptos"/>
                         </a:rPr>
                         <a:t>beta</a:t>
                       </a:r>
@@ -2332,9 +2332,9 @@
                           <a:solidFill>
                             <a:srgbClr val="202938"/>
                           </a:solidFill>
-                          <a:latin typeface="Microsoft YaHei"/>
-                          <a:ea typeface="Microsoft YaHei"/>
-                          <a:cs typeface="Microsoft YaHei"/>
+                          <a:latin typeface="Aptos"/>
+                          <a:ea typeface="Aptos"/>
+                          <a:cs typeface="Aptos"/>
                         </a:rPr>
                         <a:t>latent_dim</a:t>
                       </a:r>
@@ -2376,9 +2376,9 @@
                           <a:solidFill>
                             <a:srgbClr val="202938"/>
                           </a:solidFill>
-                          <a:latin typeface="Microsoft YaHei"/>
-                          <a:ea typeface="Microsoft YaHei"/>
-                          <a:cs typeface="Microsoft YaHei"/>
+                          <a:latin typeface="Aptos"/>
+                          <a:ea typeface="Aptos"/>
+                          <a:cs typeface="Aptos"/>
                         </a:rPr>
                         <a:t>module lr</a:t>
                       </a:r>
@@ -2420,9 +2420,9 @@
                           <a:solidFill>
                             <a:srgbClr val="202938"/>
                           </a:solidFill>
-                          <a:latin typeface="Microsoft YaHei"/>
-                          <a:ea typeface="Microsoft YaHei"/>
-                          <a:cs typeface="Microsoft YaHei"/>
+                          <a:latin typeface="Aptos"/>
+                          <a:ea typeface="Aptos"/>
+                          <a:cs typeface="Aptos"/>
                         </a:rPr>
                         <a:t>batch/update</a:t>
                       </a:r>
@@ -2461,7 +2461,7 @@
           <p:cNvPr id="13" name="">
             <a:extLst xmlns:a="http://schemas.openxmlformats.org/drawingml/2006/main">
               <a:ext uri="{FF2B5EF4-FFF2-40B4-BE49-F238E27FC236}">
-                <a16:creationId xmlns:a16="http://schemas.microsoft.com/office/drawing/2014/main" id="{97BFD431-19A4-41C1-9021-9723F634C4FF}"/>
+                <a16:creationId xmlns:a16="http://schemas.microsoft.com/office/drawing/2014/main" id="{D98A2D54-155E-44F4-B91B-284B6AADD2C2}"/>
               </a:ext>
             </a:extLst>
           </p:cNvPr>
@@ -2502,7 +2502,7 @@
           <p:cNvPr id="14" name="">
             <a:extLst xmlns:a="http://schemas.openxmlformats.org/drawingml/2006/main">
               <a:ext uri="{FF2B5EF4-FFF2-40B4-BE49-F238E27FC236}">
-                <a16:creationId xmlns:a16="http://schemas.microsoft.com/office/drawing/2014/main" id="{F12E35F1-25DB-4033-A0F5-0A8611FC5647}"/>
+                <a16:creationId xmlns:a16="http://schemas.microsoft.com/office/drawing/2014/main" id="{4DA89215-705A-4639-B004-CEC9695487C7}"/>
               </a:ext>
             </a:extLst>
           </p:cNvPr>
@@ -2546,9 +2546,9 @@
                 <a:solidFill>
                   <a:srgbClr val="FFFFFF"/>
                 </a:solidFill>
-                <a:latin typeface="Microsoft YaHei"/>
-                <a:ea typeface="Microsoft YaHei"/>
-                <a:cs typeface="Microsoft YaHei"/>
+                <a:latin typeface="Aptos"/>
+                <a:ea typeface="Aptos"/>
+                <a:cs typeface="Aptos"/>
               </a:defRPr>
             </a:pPr>
             <a:r>
@@ -2556,11 +2556,11 @@
                 <a:solidFill>
                   <a:srgbClr val="FFFFFF"/>
                 </a:solidFill>
-                <a:latin typeface="Microsoft YaHei"/>
-                <a:ea typeface="Microsoft YaHei"/>
-                <a:cs typeface="Microsoft YaHei"/>
-              </a:rPr>
-              <a:t>3. 实验协议</a:t>
+                <a:latin typeface="Aptos"/>
+                <a:ea typeface="Aptos"/>
+                <a:cs typeface="Aptos"/>
+              </a:rPr>
+              <a:t>3. Protocol</a:t>
             </a:r>
           </a:p>
         </p:txBody>
@@ -2595,11 +2595,11 @@
                           <a:solidFill>
                             <a:srgbClr val="202938"/>
                           </a:solidFill>
-                          <a:latin typeface="Microsoft YaHei"/>
-                          <a:ea typeface="Microsoft YaHei"/>
-                          <a:cs typeface="Microsoft YaHei"/>
+                          <a:latin typeface="Aptos"/>
+                          <a:ea typeface="Aptos"/>
+                          <a:cs typeface="Aptos"/>
                         </a:rPr>
-                        <a:t>项</a:t>
+                        <a:t>Item</a:t>
                       </a:r>
                     </a:p>
                   </a:txBody>
@@ -2620,11 +2620,11 @@
                           <a:solidFill>
                             <a:srgbClr val="202938"/>
                           </a:solidFill>
-                          <a:latin typeface="Microsoft YaHei"/>
-                          <a:ea typeface="Microsoft YaHei"/>
-                          <a:cs typeface="Microsoft YaHei"/>
+                          <a:latin typeface="Aptos"/>
+                          <a:ea typeface="Aptos"/>
+                          <a:cs typeface="Aptos"/>
                         </a:rPr>
-                        <a:t>值</a:t>
+                        <a:t>Value</a:t>
                       </a:r>
                     </a:p>
                   </a:txBody>
@@ -2647,11 +2647,11 @@
                           <a:solidFill>
                             <a:srgbClr val="202938"/>
                           </a:solidFill>
-                          <a:latin typeface="Microsoft YaHei"/>
-                          <a:ea typeface="Microsoft YaHei"/>
-                          <a:cs typeface="Microsoft YaHei"/>
+                          <a:latin typeface="Aptos"/>
+                          <a:ea typeface="Aptos"/>
+                          <a:cs typeface="Aptos"/>
                         </a:rPr>
-                        <a:t>训练环境</a:t>
+                        <a:t>Train env</a:t>
                       </a:r>
                     </a:p>
                   </a:txBody>
@@ -2691,11 +2691,11 @@
                           <a:solidFill>
                             <a:srgbClr val="202938"/>
                           </a:solidFill>
-                          <a:latin typeface="Microsoft YaHei"/>
-                          <a:ea typeface="Microsoft YaHei"/>
-                          <a:cs typeface="Microsoft YaHei"/>
+                          <a:latin typeface="Aptos"/>
+                          <a:ea typeface="Aptos"/>
+                          <a:cs typeface="Aptos"/>
                         </a:rPr>
-                        <a:t>输入</a:t>
+                        <a:t>Input</a:t>
                       </a:r>
                     </a:p>
                   </a:txBody>
@@ -2735,11 +2735,11 @@
                           <a:solidFill>
                             <a:srgbClr val="202938"/>
                           </a:solidFill>
-                          <a:latin typeface="Microsoft YaHei"/>
-                          <a:ea typeface="Microsoft YaHei"/>
-                          <a:cs typeface="Microsoft YaHei"/>
+                          <a:latin typeface="Aptos"/>
+                          <a:ea typeface="Aptos"/>
+                          <a:cs typeface="Aptos"/>
                         </a:rPr>
-                        <a:t>动作</a:t>
+                        <a:t>Actions</a:t>
                       </a:r>
                     </a:p>
                   </a:txBody>
@@ -2779,11 +2779,11 @@
                           <a:solidFill>
                             <a:srgbClr val="202938"/>
                           </a:solidFill>
-                          <a:latin typeface="Microsoft YaHei"/>
-                          <a:ea typeface="Microsoft YaHei"/>
-                          <a:cs typeface="Microsoft YaHei"/>
+                          <a:latin typeface="Aptos"/>
+                          <a:ea typeface="Aptos"/>
+                          <a:cs typeface="Aptos"/>
                         </a:rPr>
-                        <a:t>训练步数</a:t>
+                        <a:t>Budget</a:t>
                       </a:r>
                     </a:p>
                   </a:txBody>
@@ -2823,11 +2823,11 @@
                           <a:solidFill>
                             <a:srgbClr val="202938"/>
                           </a:solidFill>
-                          <a:latin typeface="Microsoft YaHei"/>
-                          <a:ea typeface="Microsoft YaHei"/>
-                          <a:cs typeface="Microsoft YaHei"/>
+                          <a:latin typeface="Aptos"/>
+                          <a:ea typeface="Aptos"/>
+                          <a:cs typeface="Aptos"/>
                         </a:rPr>
-                        <a:t>评估</a:t>
+                        <a:t>Eval</a:t>
                       </a:r>
                     </a:p>
                   </a:txBody>
@@ -2867,11 +2867,11 @@
                           <a:solidFill>
                             <a:srgbClr val="202938"/>
                           </a:solidFill>
-                          <a:latin typeface="Microsoft YaHei"/>
-                          <a:ea typeface="Microsoft YaHei"/>
-                          <a:cs typeface="Microsoft YaHei"/>
+                          <a:latin typeface="Aptos"/>
+                          <a:ea typeface="Aptos"/>
+                          <a:cs typeface="Aptos"/>
                         </a:rPr>
-                        <a:t>seed</a:t>
+                        <a:t>Seed</a:t>
                       </a:r>
                     </a:p>
                   </a:txBody>
@@ -2908,7 +2908,7 @@
           <p:cNvPr id="16" name="">
             <a:extLst xmlns:a="http://schemas.openxmlformats.org/drawingml/2006/main">
               <a:ext uri="{FF2B5EF4-FFF2-40B4-BE49-F238E27FC236}">
-                <a16:creationId xmlns:a16="http://schemas.microsoft.com/office/drawing/2014/main" id="{6CB10D95-1C19-4DA7-B823-A6717D043873}"/>
+                <a16:creationId xmlns:a16="http://schemas.microsoft.com/office/drawing/2014/main" id="{445C508A-9C6C-4775-BC1D-BA9DA8EE705C}"/>
               </a:ext>
             </a:extLst>
           </p:cNvPr>
@@ -2949,7 +2949,7 @@
           <p:cNvPr id="17" name="">
             <a:extLst xmlns:a="http://schemas.openxmlformats.org/drawingml/2006/main">
               <a:ext uri="{FF2B5EF4-FFF2-40B4-BE49-F238E27FC236}">
-                <a16:creationId xmlns:a16="http://schemas.microsoft.com/office/drawing/2014/main" id="{70D04B39-C7C5-4921-B9A2-1BE9EB9BF102}"/>
+                <a16:creationId xmlns:a16="http://schemas.microsoft.com/office/drawing/2014/main" id="{EA47A055-8A5C-4489-A0A7-967CEA814268}"/>
               </a:ext>
             </a:extLst>
           </p:cNvPr>
@@ -2981,9 +2981,9 @@
                 <a:solidFill>
                   <a:srgbClr val="005CA8"/>
                 </a:solidFill>
-                <a:latin typeface="Microsoft YaHei"/>
-                <a:ea typeface="Microsoft YaHei"/>
-                <a:cs typeface="Microsoft YaHei"/>
+                <a:latin typeface="Aptos"/>
+                <a:ea typeface="Aptos"/>
+                <a:cs typeface="Aptos"/>
               </a:defRPr>
             </a:pPr>
             <a:r>
@@ -2991,11 +2991,11 @@
                 <a:solidFill>
                   <a:srgbClr val="005CA8"/>
                 </a:solidFill>
-                <a:latin typeface="Microsoft YaHei"/>
-                <a:ea typeface="Microsoft YaHei"/>
-                <a:cs typeface="Microsoft YaHei"/>
-              </a:rPr>
-              <a:t>训练数据流</a:t>
+                <a:latin typeface="Aptos"/>
+                <a:ea typeface="Aptos"/>
+                <a:cs typeface="Aptos"/>
+              </a:rPr>
+              <a:t>Training flow</a:t>
             </a:r>
           </a:p>
         </p:txBody>
@@ -3005,7 +3005,7 @@
           <p:cNvPr id="18" name="">
             <a:extLst xmlns:a="http://schemas.openxmlformats.org/drawingml/2006/main">
               <a:ext uri="{FF2B5EF4-FFF2-40B4-BE49-F238E27FC236}">
-                <a16:creationId xmlns:a16="http://schemas.microsoft.com/office/drawing/2014/main" id="{FF08B103-BDD1-42C8-97B9-364D69119AA3}"/>
+                <a16:creationId xmlns:a16="http://schemas.microsoft.com/office/drawing/2014/main" id="{3D034065-DDFF-4F7B-B0C8-1D99BA712548}"/>
               </a:ext>
             </a:extLst>
           </p:cNvPr>
@@ -3049,9 +3049,9 @@
                 <a:solidFill>
                   <a:srgbClr val="202938"/>
                 </a:solidFill>
-                <a:latin typeface="Microsoft YaHei"/>
-                <a:ea typeface="Microsoft YaHei"/>
-                <a:cs typeface="Microsoft YaHei"/>
+                <a:latin typeface="Aptos"/>
+                <a:ea typeface="Aptos"/>
+                <a:cs typeface="Aptos"/>
               </a:defRPr>
             </a:pPr>
             <a:r>
@@ -3059,9 +3059,9 @@
                 <a:solidFill>
                   <a:srgbClr val="202938"/>
                 </a:solidFill>
-                <a:latin typeface="Microsoft YaHei"/>
-                <a:ea typeface="Microsoft YaHei"/>
-                <a:cs typeface="Microsoft YaHei"/>
+                <a:latin typeface="Aptos"/>
+                <a:ea typeface="Aptos"/>
+                <a:cs typeface="Aptos"/>
               </a:rPr>
               <a:t>Observation</a:t>
             </a:r>
@@ -3072,9 +3072,9 @@
                 <a:solidFill>
                   <a:srgbClr val="202938"/>
                 </a:solidFill>
-                <a:latin typeface="Microsoft YaHei"/>
-                <a:ea typeface="Microsoft YaHei"/>
-                <a:cs typeface="Microsoft YaHei"/>
+                <a:latin typeface="Aptos"/>
+                <a:ea typeface="Aptos"/>
+                <a:cs typeface="Aptos"/>
               </a:defRPr>
             </a:pPr>
             <a:r>
@@ -3082,11 +3082,11 @@
                 <a:solidFill>
                   <a:srgbClr val="202938"/>
                 </a:solidFill>
-                <a:latin typeface="Microsoft YaHei"/>
-                <a:ea typeface="Microsoft YaHei"/>
-                <a:cs typeface="Microsoft YaHei"/>
-              </a:rPr>
-              <a:t>4×84×84</a:t>
+                <a:latin typeface="Aptos"/>
+                <a:ea typeface="Aptos"/>
+                <a:cs typeface="Aptos"/>
+              </a:rPr>
+              <a:t>4x84x84</a:t>
             </a:r>
           </a:p>
         </p:txBody>
@@ -3096,7 +3096,7 @@
           <p:cNvPr id="19" name="">
             <a:extLst xmlns:a="http://schemas.openxmlformats.org/drawingml/2006/main">
               <a:ext uri="{FF2B5EF4-FFF2-40B4-BE49-F238E27FC236}">
-                <a16:creationId xmlns:a16="http://schemas.microsoft.com/office/drawing/2014/main" id="{A46A98A7-0B94-4158-A3DA-43FF55D8072A}"/>
+                <a16:creationId xmlns:a16="http://schemas.microsoft.com/office/drawing/2014/main" id="{5E15AAB5-5622-4D4C-82E4-6C289CFD1105}"/>
               </a:ext>
             </a:extLst>
           </p:cNvPr>
@@ -3140,9 +3140,9 @@
                 <a:solidFill>
                   <a:srgbClr val="202938"/>
                 </a:solidFill>
-                <a:latin typeface="Microsoft YaHei"/>
-                <a:ea typeface="Microsoft YaHei"/>
-                <a:cs typeface="Microsoft YaHei"/>
+                <a:latin typeface="Aptos"/>
+                <a:ea typeface="Aptos"/>
+                <a:cs typeface="Aptos"/>
               </a:defRPr>
             </a:pPr>
             <a:r>
@@ -3150,9 +3150,9 @@
                 <a:solidFill>
                   <a:srgbClr val="202938"/>
                 </a:solidFill>
-                <a:latin typeface="Microsoft YaHei"/>
-                <a:ea typeface="Microsoft YaHei"/>
-                <a:cs typeface="Microsoft YaHei"/>
+                <a:latin typeface="Aptos"/>
+                <a:ea typeface="Aptos"/>
+                <a:cs typeface="Aptos"/>
               </a:rPr>
               <a:t>CNN</a:t>
             </a:r>
@@ -3163,9 +3163,9 @@
                 <a:solidFill>
                   <a:srgbClr val="202938"/>
                 </a:solidFill>
-                <a:latin typeface="Microsoft YaHei"/>
-                <a:ea typeface="Microsoft YaHei"/>
-                <a:cs typeface="Microsoft YaHei"/>
+                <a:latin typeface="Aptos"/>
+                <a:ea typeface="Aptos"/>
+                <a:cs typeface="Aptos"/>
               </a:defRPr>
             </a:pPr>
             <a:r>
@@ -3173,9 +3173,9 @@
                 <a:solidFill>
                   <a:srgbClr val="202938"/>
                 </a:solidFill>
-                <a:latin typeface="Microsoft YaHei"/>
-                <a:ea typeface="Microsoft YaHei"/>
-                <a:cs typeface="Microsoft YaHei"/>
+                <a:latin typeface="Aptos"/>
+                <a:ea typeface="Aptos"/>
+                <a:cs typeface="Aptos"/>
               </a:rPr>
               <a:t>Actor-Critic</a:t>
             </a:r>
@@ -3187,7 +3187,7 @@
           <p:cNvPr id="20" name="">
             <a:extLst xmlns:a="http://schemas.openxmlformats.org/drawingml/2006/main">
               <a:ext uri="{FF2B5EF4-FFF2-40B4-BE49-F238E27FC236}">
-                <a16:creationId xmlns:a16="http://schemas.microsoft.com/office/drawing/2014/main" id="{2D94C28D-6F40-454B-82D7-88C84F331B51}"/>
+                <a16:creationId xmlns:a16="http://schemas.microsoft.com/office/drawing/2014/main" id="{380F6385-6643-460A-B0DD-8546FBF8C7AC}"/>
               </a:ext>
             </a:extLst>
           </p:cNvPr>
@@ -3231,9 +3231,9 @@
                 <a:solidFill>
                   <a:srgbClr val="202938"/>
                 </a:solidFill>
-                <a:latin typeface="Microsoft YaHei"/>
-                <a:ea typeface="Microsoft YaHei"/>
-                <a:cs typeface="Microsoft YaHei"/>
+                <a:latin typeface="Aptos"/>
+                <a:ea typeface="Aptos"/>
+                <a:cs typeface="Aptos"/>
               </a:defRPr>
             </a:pPr>
             <a:r>
@@ -3241,9 +3241,9 @@
                 <a:solidFill>
                   <a:srgbClr val="202938"/>
                 </a:solidFill>
-                <a:latin typeface="Microsoft YaHei"/>
-                <a:ea typeface="Microsoft YaHei"/>
-                <a:cs typeface="Microsoft YaHei"/>
+                <a:latin typeface="Aptos"/>
+                <a:ea typeface="Aptos"/>
+                <a:cs typeface="Aptos"/>
               </a:rPr>
               <a:t>Policy / Value</a:t>
             </a:r>
@@ -3254,9 +3254,9 @@
                 <a:solidFill>
                   <a:srgbClr val="202938"/>
                 </a:solidFill>
-                <a:latin typeface="Microsoft YaHei"/>
-                <a:ea typeface="Microsoft YaHei"/>
-                <a:cs typeface="Microsoft YaHei"/>
+                <a:latin typeface="Aptos"/>
+                <a:ea typeface="Aptos"/>
+                <a:cs typeface="Aptos"/>
               </a:defRPr>
             </a:pPr>
             <a:r>
@@ -3264,9 +3264,9 @@
                 <a:solidFill>
                   <a:srgbClr val="202938"/>
                 </a:solidFill>
-                <a:latin typeface="Microsoft YaHei"/>
-                <a:ea typeface="Microsoft YaHei"/>
-                <a:cs typeface="Microsoft YaHei"/>
+                <a:latin typeface="Aptos"/>
+                <a:ea typeface="Aptos"/>
+                <a:cs typeface="Aptos"/>
               </a:rPr>
               <a:t>PPO update</a:t>
             </a:r>
@@ -3278,7 +3278,7 @@
           <p:cNvPr id="21" name="">
             <a:extLst xmlns:a="http://schemas.openxmlformats.org/drawingml/2006/main">
               <a:ext uri="{FF2B5EF4-FFF2-40B4-BE49-F238E27FC236}">
-                <a16:creationId xmlns:a16="http://schemas.microsoft.com/office/drawing/2014/main" id="{F50ADE1C-0114-4DCF-A27F-F8E66C1CBF74}"/>
+                <a16:creationId xmlns:a16="http://schemas.microsoft.com/office/drawing/2014/main" id="{30BAF24A-9832-4E90-9412-8CED29C62325}"/>
               </a:ext>
             </a:extLst>
           </p:cNvPr>
@@ -3322,9 +3322,9 @@
                 <a:solidFill>
                   <a:srgbClr val="202938"/>
                 </a:solidFill>
-                <a:latin typeface="Microsoft YaHei"/>
-                <a:ea typeface="Microsoft YaHei"/>
-                <a:cs typeface="Microsoft YaHei"/>
+                <a:latin typeface="Aptos"/>
+                <a:ea typeface="Aptos"/>
+                <a:cs typeface="Aptos"/>
               </a:defRPr>
             </a:pPr>
             <a:r>
@@ -3332,9 +3332,9 @@
                 <a:solidFill>
                   <a:srgbClr val="202938"/>
                 </a:solidFill>
-                <a:latin typeface="Microsoft YaHei"/>
-                <a:ea typeface="Microsoft YaHei"/>
-                <a:cs typeface="Microsoft YaHei"/>
+                <a:latin typeface="Aptos"/>
+                <a:ea typeface="Aptos"/>
+                <a:cs typeface="Aptos"/>
               </a:rPr>
               <a:t>ICM</a:t>
             </a:r>
@@ -3345,9 +3345,9 @@
                 <a:solidFill>
                   <a:srgbClr val="202938"/>
                 </a:solidFill>
-                <a:latin typeface="Microsoft YaHei"/>
-                <a:ea typeface="Microsoft YaHei"/>
-                <a:cs typeface="Microsoft YaHei"/>
+                <a:latin typeface="Aptos"/>
+                <a:ea typeface="Aptos"/>
+                <a:cs typeface="Aptos"/>
               </a:defRPr>
             </a:pPr>
             <a:r>
@@ -3355,9 +3355,9 @@
                 <a:solidFill>
                   <a:srgbClr val="202938"/>
                 </a:solidFill>
-                <a:latin typeface="Microsoft YaHei"/>
-                <a:ea typeface="Microsoft YaHei"/>
-                <a:cs typeface="Microsoft YaHei"/>
+                <a:latin typeface="Aptos"/>
+                <a:ea typeface="Aptos"/>
+                <a:cs typeface="Aptos"/>
               </a:rPr>
               <a:t>intrinsic module</a:t>
             </a:r>
@@ -3369,7 +3369,7 @@
           <p:cNvPr id="22" name="">
             <a:extLst xmlns:a="http://schemas.openxmlformats.org/drawingml/2006/main">
               <a:ext uri="{FF2B5EF4-FFF2-40B4-BE49-F238E27FC236}">
-                <a16:creationId xmlns:a16="http://schemas.microsoft.com/office/drawing/2014/main" id="{20E7D4E1-D4B1-4568-A29F-0CDD29F8DF1C}"/>
+                <a16:creationId xmlns:a16="http://schemas.microsoft.com/office/drawing/2014/main" id="{F170FAA3-669A-4821-B578-6900045D14DA}"/>
               </a:ext>
             </a:extLst>
           </p:cNvPr>
@@ -3413,9 +3413,9 @@
                 <a:solidFill>
                   <a:srgbClr val="202938"/>
                 </a:solidFill>
-                <a:latin typeface="Microsoft YaHei"/>
-                <a:ea typeface="Microsoft YaHei"/>
-                <a:cs typeface="Microsoft YaHei"/>
+                <a:latin typeface="Aptos"/>
+                <a:ea typeface="Aptos"/>
+                <a:cs typeface="Aptos"/>
               </a:defRPr>
             </a:pPr>
             <a:r>
@@ -3423,9 +3423,9 @@
                 <a:solidFill>
                   <a:srgbClr val="202938"/>
                 </a:solidFill>
-                <a:latin typeface="Microsoft YaHei"/>
-                <a:ea typeface="Microsoft YaHei"/>
-                <a:cs typeface="Microsoft YaHei"/>
+                <a:latin typeface="Aptos"/>
+                <a:ea typeface="Aptos"/>
+                <a:cs typeface="Aptos"/>
               </a:rPr>
               <a:t>r_total = r_ext</a:t>
             </a:r>
@@ -3436,9 +3436,9 @@
                 <a:solidFill>
                   <a:srgbClr val="202938"/>
                 </a:solidFill>
-                <a:latin typeface="Microsoft YaHei"/>
-                <a:ea typeface="Microsoft YaHei"/>
-                <a:cs typeface="Microsoft YaHei"/>
+                <a:latin typeface="Aptos"/>
+                <a:ea typeface="Aptos"/>
+                <a:cs typeface="Aptos"/>
               </a:defRPr>
             </a:pPr>
             <a:r>
@@ -3446,11 +3446,11 @@
                 <a:solidFill>
                   <a:srgbClr val="202938"/>
                 </a:solidFill>
-                <a:latin typeface="Microsoft YaHei"/>
-                <a:ea typeface="Microsoft YaHei"/>
-                <a:cs typeface="Microsoft YaHei"/>
-              </a:rPr>
-              <a:t>+ β·r_int</a:t>
+                <a:latin typeface="Aptos"/>
+                <a:ea typeface="Aptos"/>
+                <a:cs typeface="Aptos"/>
+              </a:rPr>
+              <a:t>+ beta*r_int</a:t>
             </a:r>
           </a:p>
         </p:txBody>
@@ -3460,7 +3460,7 @@
           <p:cNvPr id="23" name="">
             <a:extLst xmlns:a="http://schemas.openxmlformats.org/drawingml/2006/main">
               <a:ext uri="{FF2B5EF4-FFF2-40B4-BE49-F238E27FC236}">
-                <a16:creationId xmlns:a16="http://schemas.microsoft.com/office/drawing/2014/main" id="{13A7BD17-D6FE-4391-8E5D-E25B129C277B}"/>
+                <a16:creationId xmlns:a16="http://schemas.microsoft.com/office/drawing/2014/main" id="{0BE327BF-F353-45C5-AA8C-20AA65A0FA2F}"/>
               </a:ext>
             </a:extLst>
           </p:cNvPr>
@@ -3491,7 +3491,7 @@
           <p:cNvPr id="24" name="">
             <a:extLst xmlns:a="http://schemas.openxmlformats.org/drawingml/2006/main">
               <a:ext uri="{FF2B5EF4-FFF2-40B4-BE49-F238E27FC236}">
-                <a16:creationId xmlns:a16="http://schemas.microsoft.com/office/drawing/2014/main" id="{A3947824-73BB-4D34-8551-B88930DA66D8}"/>
+                <a16:creationId xmlns:a16="http://schemas.microsoft.com/office/drawing/2014/main" id="{04CBEE71-511B-48DA-8F52-7ACD21034186}"/>
               </a:ext>
             </a:extLst>
           </p:cNvPr>
@@ -3522,7 +3522,7 @@
           <p:cNvPr id="25" name="">
             <a:extLst xmlns:a="http://schemas.openxmlformats.org/drawingml/2006/main">
               <a:ext uri="{FF2B5EF4-FFF2-40B4-BE49-F238E27FC236}">
-                <a16:creationId xmlns:a16="http://schemas.microsoft.com/office/drawing/2014/main" id="{93B3C7EE-75F4-4359-953B-0C2081D46DF3}"/>
+                <a16:creationId xmlns:a16="http://schemas.microsoft.com/office/drawing/2014/main" id="{D65C64EC-763F-410D-A10F-373303C8D4D2}"/>
               </a:ext>
             </a:extLst>
           </p:cNvPr>
@@ -3553,7 +3553,7 @@
           <p:cNvPr id="26" name="">
             <a:extLst xmlns:a="http://schemas.openxmlformats.org/drawingml/2006/main">
               <a:ext uri="{FF2B5EF4-FFF2-40B4-BE49-F238E27FC236}">
-                <a16:creationId xmlns:a16="http://schemas.microsoft.com/office/drawing/2014/main" id="{275224CF-1DB3-442B-81CC-BCD5D8F2D02A}"/>
+                <a16:creationId xmlns:a16="http://schemas.microsoft.com/office/drawing/2014/main" id="{6ACDA8ED-093A-43B0-A64E-AF40F9E90C16}"/>
               </a:ext>
             </a:extLst>
           </p:cNvPr>
@@ -3584,7 +3584,7 @@
           <p:cNvPr id="27" name="">
             <a:extLst xmlns:a="http://schemas.openxmlformats.org/drawingml/2006/main">
               <a:ext uri="{FF2B5EF4-FFF2-40B4-BE49-F238E27FC236}">
-                <a16:creationId xmlns:a16="http://schemas.microsoft.com/office/drawing/2014/main" id="{C6BC8AB6-447E-4E29-A2CC-55B08A3C87E2}"/>
+                <a16:creationId xmlns:a16="http://schemas.microsoft.com/office/drawing/2014/main" id="{1EBF6BB2-9D27-42C8-A1A2-6932016A2AE7}"/>
               </a:ext>
             </a:extLst>
           </p:cNvPr>
@@ -3615,7 +3615,7 @@
           <p:cNvPr id="28" name="">
             <a:extLst xmlns:a="http://schemas.openxmlformats.org/drawingml/2006/main">
               <a:ext uri="{FF2B5EF4-FFF2-40B4-BE49-F238E27FC236}">
-                <a16:creationId xmlns:a16="http://schemas.microsoft.com/office/drawing/2014/main" id="{FF9FB079-B856-4A7C-BAF7-0F19BC88B17B}"/>
+                <a16:creationId xmlns:a16="http://schemas.microsoft.com/office/drawing/2014/main" id="{46C6AE82-0ED9-4E82-BEC0-2EEF5DA6A8A5}"/>
               </a:ext>
             </a:extLst>
           </p:cNvPr>
@@ -3656,7 +3656,7 @@
           <p:cNvPr id="29" name="">
             <a:extLst xmlns:a="http://schemas.openxmlformats.org/drawingml/2006/main">
               <a:ext uri="{FF2B5EF4-FFF2-40B4-BE49-F238E27FC236}">
-                <a16:creationId xmlns:a16="http://schemas.microsoft.com/office/drawing/2014/main" id="{14DF52F3-C280-4079-BFC0-5691A1925912}"/>
+                <a16:creationId xmlns:a16="http://schemas.microsoft.com/office/drawing/2014/main" id="{6BA69A28-1619-4543-BB4D-E8DDB3330139}"/>
               </a:ext>
             </a:extLst>
           </p:cNvPr>
@@ -3700,9 +3700,9 @@
                 <a:solidFill>
                   <a:srgbClr val="FFFFFF"/>
                 </a:solidFill>
-                <a:latin typeface="Microsoft YaHei"/>
-                <a:ea typeface="Microsoft YaHei"/>
-                <a:cs typeface="Microsoft YaHei"/>
+                <a:latin typeface="Aptos"/>
+                <a:ea typeface="Aptos"/>
+                <a:cs typeface="Aptos"/>
               </a:defRPr>
             </a:pPr>
             <a:r>
@@ -3710,11 +3710,11 @@
                 <a:solidFill>
                   <a:srgbClr val="FFFFFF"/>
                 </a:solidFill>
-                <a:latin typeface="Microsoft YaHei"/>
-                <a:ea typeface="Microsoft YaHei"/>
-                <a:cs typeface="Microsoft YaHei"/>
-              </a:rPr>
-              <a:t>4. 训练观测</a:t>
+                <a:latin typeface="Aptos"/>
+                <a:ea typeface="Aptos"/>
+                <a:cs typeface="Aptos"/>
+              </a:rPr>
+              <a:t>4. Signals</a:t>
             </a:r>
           </a:p>
         </p:txBody>
@@ -3728,7 +3728,7 @@
           <p:nvPr/>
         </p:nvPicPr>
         <p:blipFill>
-          <a:blip xmlns:r="http://schemas.openxmlformats.org/officeDocument/2006/relationships" xmlns:a="http://schemas.openxmlformats.org/drawingml/2006/main" r:embed="R5603abb086a449f8"/>
+          <a:blip xmlns:r="http://schemas.openxmlformats.org/officeDocument/2006/relationships" xmlns:a="http://schemas.openxmlformats.org/drawingml/2006/main" r:embed="R8fc15cbf5c12433d"/>
           <a:stretch xmlns:a="http://schemas.openxmlformats.org/drawingml/2006/main"/>
         </p:blipFill>
         <p:spPr>
@@ -3750,7 +3750,7 @@
           <p:nvPr/>
         </p:nvPicPr>
         <p:blipFill>
-          <a:blip xmlns:r="http://schemas.openxmlformats.org/officeDocument/2006/relationships" xmlns:a="http://schemas.openxmlformats.org/drawingml/2006/main" r:embed="R4b7a9b75fc7845ed"/>
+          <a:blip xmlns:r="http://schemas.openxmlformats.org/officeDocument/2006/relationships" xmlns:a="http://schemas.openxmlformats.org/drawingml/2006/main" r:embed="Rfc16d06ac6c243b4"/>
           <a:stretch xmlns:a="http://schemas.openxmlformats.org/drawingml/2006/main"/>
         </p:blipFill>
         <p:spPr>
@@ -3768,7 +3768,7 @@
           <p:cNvPr id="32" name="">
             <a:extLst xmlns:a="http://schemas.openxmlformats.org/drawingml/2006/main">
               <a:ext uri="{FF2B5EF4-FFF2-40B4-BE49-F238E27FC236}">
-                <a16:creationId xmlns:a16="http://schemas.microsoft.com/office/drawing/2014/main" id="{447268B8-539F-4E0F-85B5-1E59D3EB4E7C}"/>
+                <a16:creationId xmlns:a16="http://schemas.microsoft.com/office/drawing/2014/main" id="{7C978951-E1B0-4434-9263-FA6DB8083BE5}"/>
               </a:ext>
             </a:extLst>
           </p:cNvPr>
@@ -3809,7 +3809,7 @@
           <p:cNvPr id="33" name="">
             <a:extLst xmlns:a="http://schemas.openxmlformats.org/drawingml/2006/main">
               <a:ext uri="{FF2B5EF4-FFF2-40B4-BE49-F238E27FC236}">
-                <a16:creationId xmlns:a16="http://schemas.microsoft.com/office/drawing/2014/main" id="{89156256-32DD-4D55-AF38-011171228FBA}"/>
+                <a16:creationId xmlns:a16="http://schemas.microsoft.com/office/drawing/2014/main" id="{5E909580-B10B-4FFA-9455-DDA035A47FDF}"/>
               </a:ext>
             </a:extLst>
           </p:cNvPr>
@@ -3841,9 +3841,9 @@
                 <a:solidFill>
                   <a:srgbClr val="607084"/>
                 </a:solidFill>
-                <a:latin typeface="Microsoft YaHei"/>
-                <a:ea typeface="Microsoft YaHei"/>
-                <a:cs typeface="Microsoft YaHei"/>
+                <a:latin typeface="Aptos"/>
+                <a:ea typeface="Aptos"/>
+                <a:cs typeface="Aptos"/>
               </a:defRPr>
             </a:pPr>
             <a:r>
@@ -3851,11 +3851,11 @@
                 <a:solidFill>
                   <a:srgbClr val="607084"/>
                 </a:solidFill>
-                <a:latin typeface="Microsoft YaHei"/>
-                <a:ea typeface="Microsoft YaHei"/>
-                <a:cs typeface="Microsoft YaHei"/>
-              </a:rPr>
-              <a:t>validation sample</a:t>
+                <a:latin typeface="Aptos"/>
+                <a:ea typeface="Aptos"/>
+                <a:cs typeface="Aptos"/>
+              </a:rPr>
+              <a:t>validation</a:t>
             </a:r>
           </a:p>
         </p:txBody>
@@ -3865,7 +3865,7 @@
           <p:cNvPr id="34" name="">
             <a:extLst xmlns:a="http://schemas.openxmlformats.org/drawingml/2006/main">
               <a:ext uri="{FF2B5EF4-FFF2-40B4-BE49-F238E27FC236}">
-                <a16:creationId xmlns:a16="http://schemas.microsoft.com/office/drawing/2014/main" id="{C534CEB7-A7F6-4857-A04C-97BEE1438969}"/>
+                <a16:creationId xmlns:a16="http://schemas.microsoft.com/office/drawing/2014/main" id="{1BD57560-3B0F-444E-92C1-C66C5DAF226A}"/>
               </a:ext>
             </a:extLst>
           </p:cNvPr>
@@ -3921,7 +3921,7 @@
           <p:cNvPr id="35" name="">
             <a:extLst xmlns:a="http://schemas.openxmlformats.org/drawingml/2006/main">
               <a:ext uri="{FF2B5EF4-FFF2-40B4-BE49-F238E27FC236}">
-                <a16:creationId xmlns:a16="http://schemas.microsoft.com/office/drawing/2014/main" id="{8BE40C3B-3944-4CF7-A774-94058B9840A1}"/>
+                <a16:creationId xmlns:a16="http://schemas.microsoft.com/office/drawing/2014/main" id="{C30D0015-3CB8-4B20-BAAC-E5FAFF38402C}"/>
               </a:ext>
             </a:extLst>
           </p:cNvPr>
@@ -3953,9 +3953,9 @@
                 <a:solidFill>
                   <a:srgbClr val="607084"/>
                 </a:solidFill>
-                <a:latin typeface="Microsoft YaHei"/>
-                <a:ea typeface="Microsoft YaHei"/>
-                <a:cs typeface="Microsoft YaHei"/>
+                <a:latin typeface="Aptos"/>
+                <a:ea typeface="Aptos"/>
+                <a:cs typeface="Aptos"/>
               </a:defRPr>
             </a:pPr>
             <a:r>
@@ -3963,9 +3963,9 @@
                 <a:solidFill>
                   <a:srgbClr val="607084"/>
                 </a:solidFill>
-                <a:latin typeface="Microsoft YaHei"/>
-                <a:ea typeface="Microsoft YaHei"/>
-                <a:cs typeface="Microsoft YaHei"/>
+                <a:latin typeface="Aptos"/>
+                <a:ea typeface="Aptos"/>
+                <a:cs typeface="Aptos"/>
               </a:rPr>
               <a:t>best step 900k</a:t>
             </a:r>
@@ -3977,7 +3977,7 @@
           <p:cNvPr id="36" name="">
             <a:extLst xmlns:a="http://schemas.openxmlformats.org/drawingml/2006/main">
               <a:ext uri="{FF2B5EF4-FFF2-40B4-BE49-F238E27FC236}">
-                <a16:creationId xmlns:a16="http://schemas.microsoft.com/office/drawing/2014/main" id="{507E8E26-ABCC-41CE-B8AB-BFA6DF8716FB}"/>
+                <a16:creationId xmlns:a16="http://schemas.microsoft.com/office/drawing/2014/main" id="{D83EB98A-2C4B-4E1D-82ED-4B954AE311D5}"/>
               </a:ext>
             </a:extLst>
           </p:cNvPr>
@@ -4018,7 +4018,7 @@
           <p:cNvPr id="37" name="">
             <a:extLst xmlns:a="http://schemas.openxmlformats.org/drawingml/2006/main">
               <a:ext uri="{FF2B5EF4-FFF2-40B4-BE49-F238E27FC236}">
-                <a16:creationId xmlns:a16="http://schemas.microsoft.com/office/drawing/2014/main" id="{6CC99450-DAD7-4458-971C-80D68B377ED3}"/>
+                <a16:creationId xmlns:a16="http://schemas.microsoft.com/office/drawing/2014/main" id="{6E91D8A5-C66F-4C59-A0DF-D2FC6DF9344E}"/>
               </a:ext>
             </a:extLst>
           </p:cNvPr>
@@ -4050,9 +4050,9 @@
                 <a:solidFill>
                   <a:srgbClr val="607084"/>
                 </a:solidFill>
-                <a:latin typeface="Microsoft YaHei"/>
-                <a:ea typeface="Microsoft YaHei"/>
-                <a:cs typeface="Microsoft YaHei"/>
+                <a:latin typeface="Aptos"/>
+                <a:ea typeface="Aptos"/>
+                <a:cs typeface="Aptos"/>
               </a:defRPr>
             </a:pPr>
             <a:r>
@@ -4060,11 +4060,11 @@
                 <a:solidFill>
                   <a:srgbClr val="607084"/>
                 </a:solidFill>
-                <a:latin typeface="Microsoft YaHei"/>
-                <a:ea typeface="Microsoft YaHei"/>
-                <a:cs typeface="Microsoft YaHei"/>
-              </a:rPr>
-              <a:t>test sample</a:t>
+                <a:latin typeface="Aptos"/>
+                <a:ea typeface="Aptos"/>
+                <a:cs typeface="Aptos"/>
+              </a:rPr>
+              <a:t>test</a:t>
             </a:r>
           </a:p>
         </p:txBody>
@@ -4074,7 +4074,7 @@
           <p:cNvPr id="38" name="">
             <a:extLst xmlns:a="http://schemas.openxmlformats.org/drawingml/2006/main">
               <a:ext uri="{FF2B5EF4-FFF2-40B4-BE49-F238E27FC236}">
-                <a16:creationId xmlns:a16="http://schemas.microsoft.com/office/drawing/2014/main" id="{14754748-1E6A-4820-81F1-083F23A2BCCB}"/>
+                <a16:creationId xmlns:a16="http://schemas.microsoft.com/office/drawing/2014/main" id="{807FBD7D-F92B-4C38-8BDA-134025A8D460}"/>
               </a:ext>
             </a:extLst>
           </p:cNvPr>
@@ -4130,7 +4130,7 @@
           <p:cNvPr id="39" name="">
             <a:extLst xmlns:a="http://schemas.openxmlformats.org/drawingml/2006/main">
               <a:ext uri="{FF2B5EF4-FFF2-40B4-BE49-F238E27FC236}">
-                <a16:creationId xmlns:a16="http://schemas.microsoft.com/office/drawing/2014/main" id="{DD450DAC-D468-4D13-8224-48705687EC74}"/>
+                <a16:creationId xmlns:a16="http://schemas.microsoft.com/office/drawing/2014/main" id="{3C3BCCE1-17B0-4B75-92E9-4DC833143188}"/>
               </a:ext>
             </a:extLst>
           </p:cNvPr>
@@ -4162,9 +4162,9 @@
                 <a:solidFill>
                   <a:srgbClr val="607084"/>
                 </a:solidFill>
-                <a:latin typeface="Microsoft YaHei"/>
-                <a:ea typeface="Microsoft YaHei"/>
-                <a:cs typeface="Microsoft YaHei"/>
+                <a:latin typeface="Aptos"/>
+                <a:ea typeface="Aptos"/>
+                <a:cs typeface="Aptos"/>
               </a:defRPr>
             </a:pPr>
             <a:r>
@@ -4172,11 +4172,11 @@
                 <a:solidFill>
                   <a:srgbClr val="607084"/>
                 </a:solidFill>
-                <a:latin typeface="Microsoft YaHei"/>
-                <a:ea typeface="Microsoft YaHei"/>
-                <a:cs typeface="Microsoft YaHei"/>
-              </a:rPr>
-              <a:t>5-episode sample mean</a:t>
+                <a:latin typeface="Aptos"/>
+                <a:ea typeface="Aptos"/>
+                <a:cs typeface="Aptos"/>
+              </a:rPr>
+              <a:t>sample mean</a:t>
             </a:r>
           </a:p>
         </p:txBody>
@@ -4186,7 +4186,7 @@
           <p:cNvPr id="40" name="">
             <a:extLst xmlns:a="http://schemas.openxmlformats.org/drawingml/2006/main">
               <a:ext uri="{FF2B5EF4-FFF2-40B4-BE49-F238E27FC236}">
-                <a16:creationId xmlns:a16="http://schemas.microsoft.com/office/drawing/2014/main" id="{FF993ED4-12A1-4B91-B838-724AFE074DA3}"/>
+                <a16:creationId xmlns:a16="http://schemas.microsoft.com/office/drawing/2014/main" id="{CBAB7D14-AFC7-4EC8-B330-4FE96BC4A9B5}"/>
               </a:ext>
             </a:extLst>
           </p:cNvPr>
@@ -4227,7 +4227,7 @@
           <p:cNvPr id="41" name="">
             <a:extLst xmlns:a="http://schemas.openxmlformats.org/drawingml/2006/main">
               <a:ext uri="{FF2B5EF4-FFF2-40B4-BE49-F238E27FC236}">
-                <a16:creationId xmlns:a16="http://schemas.microsoft.com/office/drawing/2014/main" id="{E1BCE6C3-DA6F-4AEB-BCA6-F88DA67F0B37}"/>
+                <a16:creationId xmlns:a16="http://schemas.microsoft.com/office/drawing/2014/main" id="{4A6CFB54-C06F-41B1-BA80-B4055FB18DF4}"/>
               </a:ext>
             </a:extLst>
           </p:cNvPr>
@@ -4259,9 +4259,9 @@
                 <a:solidFill>
                   <a:srgbClr val="607084"/>
                 </a:solidFill>
-                <a:latin typeface="Microsoft YaHei"/>
-                <a:ea typeface="Microsoft YaHei"/>
-                <a:cs typeface="Microsoft YaHei"/>
+                <a:latin typeface="Aptos"/>
+                <a:ea typeface="Aptos"/>
+                <a:cs typeface="Aptos"/>
               </a:defRPr>
             </a:pPr>
             <a:r>
@@ -4269,9 +4269,9 @@
                 <a:solidFill>
                   <a:srgbClr val="607084"/>
                 </a:solidFill>
-                <a:latin typeface="Microsoft YaHei"/>
-                <a:ea typeface="Microsoft YaHei"/>
-                <a:cs typeface="Microsoft YaHei"/>
+                <a:latin typeface="Aptos"/>
+                <a:ea typeface="Aptos"/>
+                <a:cs typeface="Aptos"/>
               </a:rPr>
               <a:t>train terminal</a:t>
             </a:r>
@@ -4283,7 +4283,7 @@
           <p:cNvPr id="42" name="">
             <a:extLst xmlns:a="http://schemas.openxmlformats.org/drawingml/2006/main">
               <a:ext uri="{FF2B5EF4-FFF2-40B4-BE49-F238E27FC236}">
-                <a16:creationId xmlns:a16="http://schemas.microsoft.com/office/drawing/2014/main" id="{40492435-2DAA-4B42-BE36-063B019F6C10}"/>
+                <a16:creationId xmlns:a16="http://schemas.microsoft.com/office/drawing/2014/main" id="{7922EE4E-4B49-4AE5-ACF0-FCB3F99C923F}"/>
               </a:ext>
             </a:extLst>
           </p:cNvPr>
@@ -4339,7 +4339,7 @@
           <p:cNvPr id="43" name="">
             <a:extLst xmlns:a="http://schemas.openxmlformats.org/drawingml/2006/main">
               <a:ext uri="{FF2B5EF4-FFF2-40B4-BE49-F238E27FC236}">
-                <a16:creationId xmlns:a16="http://schemas.microsoft.com/office/drawing/2014/main" id="{2C206BED-8409-4F03-A758-EA96FC093C7D}"/>
+                <a16:creationId xmlns:a16="http://schemas.microsoft.com/office/drawing/2014/main" id="{F5C24428-2E34-4C01-A03B-FDD93704BD5D}"/>
               </a:ext>
             </a:extLst>
           </p:cNvPr>
@@ -4371,9 +4371,9 @@
                 <a:solidFill>
                   <a:srgbClr val="607084"/>
                 </a:solidFill>
-                <a:latin typeface="Microsoft YaHei"/>
-                <a:ea typeface="Microsoft YaHei"/>
-                <a:cs typeface="Microsoft YaHei"/>
+                <a:latin typeface="Aptos"/>
+                <a:ea typeface="Aptos"/>
+                <a:cs typeface="Aptos"/>
               </a:defRPr>
             </a:pPr>
             <a:r>
@@ -4381,9 +4381,9 @@
                 <a:solidFill>
                   <a:srgbClr val="607084"/>
                 </a:solidFill>
-                <a:latin typeface="Microsoft YaHei"/>
-                <a:ea typeface="Microsoft YaHei"/>
-                <a:cs typeface="Microsoft YaHei"/>
+                <a:latin typeface="Aptos"/>
+                <a:ea typeface="Aptos"/>
+                <a:cs typeface="Aptos"/>
               </a:rPr>
               <a:t>4 inferred terminal episodes</a:t>
             </a:r>
@@ -4395,7 +4395,7 @@
           <p:cNvPr id="44" name="">
             <a:extLst xmlns:a="http://schemas.openxmlformats.org/drawingml/2006/main">
               <a:ext uri="{FF2B5EF4-FFF2-40B4-BE49-F238E27FC236}">
-                <a16:creationId xmlns:a16="http://schemas.microsoft.com/office/drawing/2014/main" id="{46371C0A-5EC6-4EAB-829C-FA6387B52915}"/>
+                <a16:creationId xmlns:a16="http://schemas.microsoft.com/office/drawing/2014/main" id="{9B5500D3-F7C3-47FE-8C8E-B7A8C23D7C27}"/>
               </a:ext>
             </a:extLst>
           </p:cNvPr>
@@ -4436,7 +4436,7 @@
           <p:cNvPr id="45" name="">
             <a:extLst xmlns:a="http://schemas.openxmlformats.org/drawingml/2006/main">
               <a:ext uri="{FF2B5EF4-FFF2-40B4-BE49-F238E27FC236}">
-                <a16:creationId xmlns:a16="http://schemas.microsoft.com/office/drawing/2014/main" id="{5570237D-ACF6-4061-8541-A398FD939F52}"/>
+                <a16:creationId xmlns:a16="http://schemas.microsoft.com/office/drawing/2014/main" id="{E484EC87-9F43-4061-B290-87D5169119CC}"/>
               </a:ext>
             </a:extLst>
           </p:cNvPr>
@@ -4468,9 +4468,9 @@
                 <a:solidFill>
                   <a:srgbClr val="607084"/>
                 </a:solidFill>
-                <a:latin typeface="Microsoft YaHei"/>
-                <a:ea typeface="Microsoft YaHei"/>
-                <a:cs typeface="Microsoft YaHei"/>
+                <a:latin typeface="Aptos"/>
+                <a:ea typeface="Aptos"/>
+                <a:cs typeface="Aptos"/>
               </a:defRPr>
             </a:pPr>
             <a:r>
@@ -4478,9 +4478,9 @@
                 <a:solidFill>
                   <a:srgbClr val="607084"/>
                 </a:solidFill>
-                <a:latin typeface="Microsoft YaHei"/>
-                <a:ea typeface="Microsoft YaHei"/>
-                <a:cs typeface="Microsoft YaHei"/>
+                <a:latin typeface="Aptos"/>
+                <a:ea typeface="Aptos"/>
+                <a:cs typeface="Aptos"/>
               </a:rPr>
               <a:t>device</a:t>
             </a:r>
@@ -4492,7 +4492,7 @@
           <p:cNvPr id="46" name="">
             <a:extLst xmlns:a="http://schemas.openxmlformats.org/drawingml/2006/main">
               <a:ext uri="{FF2B5EF4-FFF2-40B4-BE49-F238E27FC236}">
-                <a16:creationId xmlns:a16="http://schemas.microsoft.com/office/drawing/2014/main" id="{C49BC532-3EBB-4E40-A2B4-32087D72E2FD}"/>
+                <a16:creationId xmlns:a16="http://schemas.microsoft.com/office/drawing/2014/main" id="{400240AA-297C-44BF-802D-DE3E6B85860C}"/>
               </a:ext>
             </a:extLst>
           </p:cNvPr>
@@ -4548,7 +4548,7 @@
           <p:cNvPr id="47" name="">
             <a:extLst xmlns:a="http://schemas.openxmlformats.org/drawingml/2006/main">
               <a:ext uri="{FF2B5EF4-FFF2-40B4-BE49-F238E27FC236}">
-                <a16:creationId xmlns:a16="http://schemas.microsoft.com/office/drawing/2014/main" id="{2CE2EF23-A7E8-460E-93F3-EBCE48CD96E2}"/>
+                <a16:creationId xmlns:a16="http://schemas.microsoft.com/office/drawing/2014/main" id="{208F6CFB-DF63-4C15-9431-163C7EACA6E6}"/>
               </a:ext>
             </a:extLst>
           </p:cNvPr>
@@ -4580,9 +4580,9 @@
                 <a:solidFill>
                   <a:srgbClr val="607084"/>
                 </a:solidFill>
-                <a:latin typeface="Microsoft YaHei"/>
-                <a:ea typeface="Microsoft YaHei"/>
-                <a:cs typeface="Microsoft YaHei"/>
+                <a:latin typeface="Aptos"/>
+                <a:ea typeface="Aptos"/>
+                <a:cs typeface="Aptos"/>
               </a:defRPr>
             </a:pPr>
             <a:r>
@@ -4590,11 +4590,11 @@
                 <a:solidFill>
                   <a:srgbClr val="607084"/>
                 </a:solidFill>
-                <a:latin typeface="Microsoft YaHei"/>
-                <a:ea typeface="Microsoft YaHei"/>
-                <a:cs typeface="Microsoft YaHei"/>
-              </a:rPr>
-              <a:t>CUDA · 8.54 sec / 1k</a:t>
+                <a:latin typeface="Aptos"/>
+                <a:ea typeface="Aptos"/>
+                <a:cs typeface="Aptos"/>
+              </a:rPr>
+              <a:t>CUDA | 8.54 sec/1k</a:t>
             </a:r>
           </a:p>
         </p:txBody>
@@ -4604,19 +4604,19 @@
           <p:cNvPr id="48" name="">
             <a:extLst xmlns:a="http://schemas.openxmlformats.org/drawingml/2006/main">
               <a:ext uri="{FF2B5EF4-FFF2-40B4-BE49-F238E27FC236}">
-                <a16:creationId xmlns:a16="http://schemas.microsoft.com/office/drawing/2014/main" id="{83FFC767-FB37-4076-BF2C-D760F1F9B7DE}"/>
-              </a:ext>
-            </a:extLst>
-          </p:cNvPr>
-          <p:cNvSpPr>
-            <a:spLocks xmlns:a="http://schemas.openxmlformats.org/drawingml/2006/main" noGrp="1"/>
-          </p:cNvSpPr>
-          <p:nvPr/>
-        </p:nvSpPr>
-        <p:spPr>
-          <a:xfrm xmlns:a="http://schemas.openxmlformats.org/drawingml/2006/main">
-            <a:off x="2400300" y="6572250"/>
-            <a:ext cx="7810500" cy="152400"/>
+                <a16:creationId xmlns:a16="http://schemas.microsoft.com/office/drawing/2014/main" id="{B46B58E8-7EEB-40FA-9B76-8AB1BFEBE000}"/>
+              </a:ext>
+            </a:extLst>
+          </p:cNvPr>
+          <p:cNvSpPr>
+            <a:spLocks xmlns:a="http://schemas.openxmlformats.org/drawingml/2006/main" noGrp="1"/>
+          </p:cNvSpPr>
+          <p:nvPr/>
+        </p:nvSpPr>
+        <p:spPr>
+          <a:xfrm xmlns:a="http://schemas.openxmlformats.org/drawingml/2006/main">
+            <a:off x="2190750" y="6572250"/>
+            <a:ext cx="8191500" cy="152400"/>
           </a:xfrm>
           <a:prstGeom xmlns:a="http://schemas.openxmlformats.org/drawingml/2006/main" prst="rect">
             <a:avLst/>
@@ -4636,9 +4636,9 @@
                 <a:solidFill>
                   <a:srgbClr val="607084"/>
                 </a:solidFill>
-                <a:latin typeface="Microsoft YaHei"/>
-                <a:ea typeface="Microsoft YaHei"/>
-                <a:cs typeface="Microsoft YaHei"/>
+                <a:latin typeface="Aptos"/>
+                <a:ea typeface="Aptos"/>
+                <a:cs typeface="Aptos"/>
               </a:defRPr>
             </a:pPr>
             <a:r>
@@ -4646,11 +4646,11 @@
                 <a:solidFill>
                   <a:srgbClr val="607084"/>
                 </a:solidFill>
-                <a:latin typeface="Microsoft YaHei"/>
-                <a:ea typeface="Microsoft YaHei"/>
-                <a:cs typeface="Microsoft YaHei"/>
-              </a:rPr>
-              <a:t>Evidence: xyDeng 1M selected 1-1 runs; metrics from best_summary.json, one_million_run_metrics.csv, and training_completion_audit.md.</a:t>
+                <a:latin typeface="Aptos"/>
+                <a:ea typeface="Aptos"/>
+                <a:cs typeface="Aptos"/>
+              </a:rPr>
+              <a:t>Evidence: selected 1M World 1-1 runs, best_summary.json, one_million_run_metrics.csv, and training_completion_audit.md.</a:t>
             </a:r>
           </a:p>
         </p:txBody>
@@ -4658,7 +4658,7 @@
     </p:spTree>
     <p:extLst>
       <p:ext uri="{BB962C8B-B14F-4D97-AF65-F5344CB8AC3E}">
-        <p14:creationId xmlns:p14="http://schemas.microsoft.com/office/powerpoint/2010/main" val="526828763"/>
+        <p14:creationId xmlns:p14="http://schemas.microsoft.com/office/powerpoint/2010/main" val="1861053553"/>
       </p:ext>
     </p:extLst>
   </p:cSld>
@@ -4689,7 +4689,7 @@
           <p:cNvPr id="1" name="">
             <a:extLst xmlns:a="http://schemas.openxmlformats.org/drawingml/2006/main">
               <a:ext uri="{FF2B5EF4-FFF2-40B4-BE49-F238E27FC236}">
-                <a16:creationId xmlns:a16="http://schemas.microsoft.com/office/drawing/2014/main" id="{9A97E8FA-60C8-420D-9FD1-A83D1EA35819}"/>
+                <a16:creationId xmlns:a16="http://schemas.microsoft.com/office/drawing/2014/main" id="{5B062023-E6FC-4016-BB0A-56D32897B1F0}"/>
               </a:ext>
             </a:extLst>
           </p:cNvPr>
@@ -4701,7 +4701,7 @@
         <p:spPr>
           <a:xfrm xmlns:a="http://schemas.openxmlformats.org/drawingml/2006/main">
             <a:off x="381000" y="257175"/>
-            <a:ext cx="971550" cy="295275"/>
+            <a:ext cx="1066800" cy="295275"/>
           </a:xfrm>
           <a:prstGeom xmlns:a="http://schemas.openxmlformats.org/drawingml/2006/main" prst="roundRect">
             <a:avLst>
@@ -4729,25 +4729,25 @@
           <a:lstStyle xmlns:a="http://schemas.openxmlformats.org/drawingml/2006/main"/>
           <a:p xmlns:a="http://schemas.openxmlformats.org/drawingml/2006/main">
             <a:pPr algn="ctr">
-              <a:defRPr sz="1125" b="1">
+              <a:defRPr sz="1050" b="1">
                 <a:solidFill>
                   <a:srgbClr val="FFFFFF"/>
                 </a:solidFill>
-                <a:latin typeface="Microsoft YaHei"/>
-                <a:ea typeface="Microsoft YaHei"/>
-                <a:cs typeface="Microsoft YaHei"/>
-              </a:defRPr>
-            </a:pPr>
-            <a:r>
-              <a:rPr sz="1125" b="1">
+                <a:latin typeface="Aptos"/>
+                <a:ea typeface="Aptos"/>
+                <a:cs typeface="Aptos"/>
+              </a:defRPr>
+            </a:pPr>
+            <a:r>
+              <a:rPr sz="1050" b="1">
                 <a:solidFill>
                   <a:srgbClr val="FFFFFF"/>
                 </a:solidFill>
-                <a:latin typeface="Microsoft YaHei"/>
-                <a:ea typeface="Microsoft YaHei"/>
-                <a:cs typeface="Microsoft YaHei"/>
-              </a:rPr>
-              <a:t>方法 A</a:t>
+                <a:latin typeface="Aptos"/>
+                <a:ea typeface="Aptos"/>
+                <a:cs typeface="Aptos"/>
+              </a:rPr>
+              <a:t>Method A</a:t>
             </a:r>
           </a:p>
         </p:txBody>
@@ -4757,19 +4757,19 @@
           <p:cNvPr id="2" name="">
             <a:extLst xmlns:a="http://schemas.openxmlformats.org/drawingml/2006/main">
               <a:ext uri="{FF2B5EF4-FFF2-40B4-BE49-F238E27FC236}">
-                <a16:creationId xmlns:a16="http://schemas.microsoft.com/office/drawing/2014/main" id="{26A48733-971C-40CA-94BC-F23FFFD28905}"/>
-              </a:ext>
-            </a:extLst>
-          </p:cNvPr>
-          <p:cNvSpPr>
-            <a:spLocks xmlns:a="http://schemas.openxmlformats.org/drawingml/2006/main" noGrp="1"/>
-          </p:cNvSpPr>
-          <p:nvPr/>
-        </p:nvSpPr>
-        <p:spPr>
-          <a:xfrm xmlns:a="http://schemas.openxmlformats.org/drawingml/2006/main">
-            <a:off x="1524000" y="190500"/>
-            <a:ext cx="7239000" cy="361950"/>
+                <a16:creationId xmlns:a16="http://schemas.microsoft.com/office/drawing/2014/main" id="{7D42D936-4BD2-4CEE-8A75-C7C2589F6C1B}"/>
+              </a:ext>
+            </a:extLst>
+          </p:cNvPr>
+          <p:cNvSpPr>
+            <a:spLocks xmlns:a="http://schemas.openxmlformats.org/drawingml/2006/main" noGrp="1"/>
+          </p:cNvSpPr>
+          <p:nvPr/>
+        </p:nvSpPr>
+        <p:spPr>
+          <a:xfrm xmlns:a="http://schemas.openxmlformats.org/drawingml/2006/main">
+            <a:off x="1619250" y="190500"/>
+            <a:ext cx="7429500" cy="361950"/>
           </a:xfrm>
           <a:prstGeom xmlns:a="http://schemas.openxmlformats.org/drawingml/2006/main" prst="rect">
             <a:avLst/>
@@ -4789,9 +4789,9 @@
                 <a:solidFill>
                   <a:srgbClr val="202938"/>
                 </a:solidFill>
-                <a:latin typeface="Microsoft YaHei"/>
-                <a:ea typeface="Microsoft YaHei"/>
-                <a:cs typeface="Microsoft YaHei"/>
+                <a:latin typeface="Aptos"/>
+                <a:ea typeface="Aptos"/>
+                <a:cs typeface="Aptos"/>
               </a:defRPr>
             </a:pPr>
             <a:r>
@@ -4799,11 +4799,11 @@
                 <a:solidFill>
                   <a:srgbClr val="202938"/>
                 </a:solidFill>
-                <a:latin typeface="Microsoft YaHei"/>
-                <a:ea typeface="Microsoft YaHei"/>
-                <a:cs typeface="Microsoft YaHei"/>
-              </a:rPr>
-              <a:t>PPO + ICM: 1-1 sample outcomes</a:t>
+                <a:latin typeface="Aptos"/>
+                <a:ea typeface="Aptos"/>
+                <a:cs typeface="Aptos"/>
+              </a:rPr>
+              <a:t>PPO + ICM: World 1-1 outcomes</a:t>
             </a:r>
           </a:p>
         </p:txBody>
@@ -4813,19 +4813,19 @@
           <p:cNvPr id="3" name="">
             <a:extLst xmlns:a="http://schemas.openxmlformats.org/drawingml/2006/main">
               <a:ext uri="{FF2B5EF4-FFF2-40B4-BE49-F238E27FC236}">
-                <a16:creationId xmlns:a16="http://schemas.microsoft.com/office/drawing/2014/main" id="{8BB9EEA5-139F-459D-8CE2-440EA5B80D54}"/>
-              </a:ext>
-            </a:extLst>
-          </p:cNvPr>
-          <p:cNvSpPr>
-            <a:spLocks xmlns:a="http://schemas.openxmlformats.org/drawingml/2006/main" noGrp="1"/>
-          </p:cNvSpPr>
-          <p:nvPr/>
-        </p:nvSpPr>
-        <p:spPr>
-          <a:xfrm xmlns:a="http://schemas.openxmlformats.org/drawingml/2006/main">
-            <a:off x="1524000" y="609600"/>
-            <a:ext cx="7048500" cy="209550"/>
+                <a16:creationId xmlns:a16="http://schemas.microsoft.com/office/drawing/2014/main" id="{ED8A54F3-578D-4781-9601-2011C6774A17}"/>
+              </a:ext>
+            </a:extLst>
+          </p:cNvPr>
+          <p:cNvSpPr>
+            <a:spLocks xmlns:a="http://schemas.openxmlformats.org/drawingml/2006/main" noGrp="1"/>
+          </p:cNvSpPr>
+          <p:nvPr/>
+        </p:nvSpPr>
+        <p:spPr>
+          <a:xfrm xmlns:a="http://schemas.openxmlformats.org/drawingml/2006/main">
+            <a:off x="1619250" y="609600"/>
+            <a:ext cx="7239000" cy="209550"/>
           </a:xfrm>
           <a:prstGeom xmlns:a="http://schemas.openxmlformats.org/drawingml/2006/main" prst="rect">
             <a:avLst/>
@@ -4845,9 +4845,9 @@
                 <a:solidFill>
                   <a:srgbClr val="607084"/>
                 </a:solidFill>
-                <a:latin typeface="Microsoft YaHei"/>
-                <a:ea typeface="Microsoft YaHei"/>
-                <a:cs typeface="Microsoft YaHei"/>
+                <a:latin typeface="Aptos"/>
+                <a:ea typeface="Aptos"/>
+                <a:cs typeface="Aptos"/>
               </a:defRPr>
             </a:pPr>
             <a:r>
@@ -4855,11 +4855,11 @@
                 <a:solidFill>
                   <a:srgbClr val="607084"/>
                 </a:solidFill>
-                <a:latin typeface="Microsoft YaHei"/>
-                <a:ea typeface="Microsoft YaHei"/>
-                <a:cs typeface="Microsoft YaHei"/>
-              </a:rPr>
-              <a:t>通关/进度、total_reward 与 max_x_pos 观察</a:t>
+                <a:latin typeface="Aptos"/>
+                <a:ea typeface="Aptos"/>
+                <a:cs typeface="Aptos"/>
+              </a:rPr>
+              <a:t>Progress, reward, and video evidence</a:t>
             </a:r>
           </a:p>
         </p:txBody>
@@ -4869,7 +4869,7 @@
           <p:cNvPr id="4" name="">
             <a:extLst xmlns:a="http://schemas.openxmlformats.org/drawingml/2006/main">
               <a:ext uri="{FF2B5EF4-FFF2-40B4-BE49-F238E27FC236}">
-                <a16:creationId xmlns:a16="http://schemas.microsoft.com/office/drawing/2014/main" id="{F5E5BC61-EA4D-4A81-B6D9-E65DAA33BD39}"/>
+                <a16:creationId xmlns:a16="http://schemas.microsoft.com/office/drawing/2014/main" id="{33DAA313-2597-471F-8138-DFACD101887A}"/>
               </a:ext>
             </a:extLst>
           </p:cNvPr>
@@ -4913,9 +4913,9 @@
                 <a:solidFill>
                   <a:srgbClr val="607084"/>
                 </a:solidFill>
-                <a:latin typeface="Microsoft YaHei"/>
-                <a:ea typeface="Microsoft YaHei"/>
-                <a:cs typeface="Microsoft YaHei"/>
+                <a:latin typeface="Aptos"/>
+                <a:ea typeface="Aptos"/>
+                <a:cs typeface="Aptos"/>
               </a:defRPr>
             </a:pPr>
             <a:r>
@@ -4923,9 +4923,9 @@
                 <a:solidFill>
                   <a:srgbClr val="607084"/>
                 </a:solidFill>
-                <a:latin typeface="Microsoft YaHei"/>
-                <a:ea typeface="Microsoft YaHei"/>
-                <a:cs typeface="Microsoft YaHei"/>
+                <a:latin typeface="Aptos"/>
+                <a:ea typeface="Aptos"/>
+                <a:cs typeface="Aptos"/>
               </a:rPr>
               <a:t>Mario RL / PPO intrinsic rewards</a:t>
             </a:r>
@@ -4936,9 +4936,9 @@
                 <a:solidFill>
                   <a:srgbClr val="607084"/>
                 </a:solidFill>
-                <a:latin typeface="Microsoft YaHei"/>
-                <a:ea typeface="Microsoft YaHei"/>
-                <a:cs typeface="Microsoft YaHei"/>
+                <a:latin typeface="Aptos"/>
+                <a:ea typeface="Aptos"/>
+                <a:cs typeface="Aptos"/>
               </a:defRPr>
             </a:pPr>
             <a:r>
@@ -4946,11 +4946,11 @@
                 <a:solidFill>
                   <a:srgbClr val="607084"/>
                 </a:solidFill>
-                <a:latin typeface="Microsoft YaHei"/>
-                <a:ea typeface="Microsoft YaHei"/>
-                <a:cs typeface="Microsoft YaHei"/>
-              </a:rPr>
-              <a:t>1M steps · seed 1 · 1-1 only</a:t>
+                <a:latin typeface="Aptos"/>
+                <a:ea typeface="Aptos"/>
+                <a:cs typeface="Aptos"/>
+              </a:rPr>
+              <a:t>1M steps | seed 1 | World 1-1</a:t>
             </a:r>
           </a:p>
         </p:txBody>
@@ -4960,7 +4960,7 @@
           <p:cNvPr id="5" name="">
             <a:extLst xmlns:a="http://schemas.openxmlformats.org/drawingml/2006/main">
               <a:ext uri="{FF2B5EF4-FFF2-40B4-BE49-F238E27FC236}">
-                <a16:creationId xmlns:a16="http://schemas.microsoft.com/office/drawing/2014/main" id="{70979C48-9430-4DBB-BBBE-46525E09A2EE}"/>
+                <a16:creationId xmlns:a16="http://schemas.microsoft.com/office/drawing/2014/main" id="{1CA022D7-A909-4454-ABF5-D62C88C8FB8E}"/>
               </a:ext>
             </a:extLst>
           </p:cNvPr>
@@ -4993,7 +4993,7 @@
           <p:cNvPr id="6" name="">
             <a:extLst xmlns:a="http://schemas.openxmlformats.org/drawingml/2006/main">
               <a:ext uri="{FF2B5EF4-FFF2-40B4-BE49-F238E27FC236}">
-                <a16:creationId xmlns:a16="http://schemas.microsoft.com/office/drawing/2014/main" id="{3DBE165E-C84F-4EB4-846F-A545738752D4}"/>
+                <a16:creationId xmlns:a16="http://schemas.microsoft.com/office/drawing/2014/main" id="{41E05F45-375E-460B-8B3C-75472CC71BDA}"/>
               </a:ext>
             </a:extLst>
           </p:cNvPr>
@@ -5034,7 +5034,7 @@
           <p:cNvPr id="7" name="">
             <a:extLst xmlns:a="http://schemas.openxmlformats.org/drawingml/2006/main">
               <a:ext uri="{FF2B5EF4-FFF2-40B4-BE49-F238E27FC236}">
-                <a16:creationId xmlns:a16="http://schemas.microsoft.com/office/drawing/2014/main" id="{DF00FB8F-9C36-4040-B123-E49D28B08268}"/>
+                <a16:creationId xmlns:a16="http://schemas.microsoft.com/office/drawing/2014/main" id="{BCA5BD1C-7C84-4DCA-93A0-4F2FF2EF228B}"/>
               </a:ext>
             </a:extLst>
           </p:cNvPr>
@@ -5066,9 +5066,9 @@
                 <a:solidFill>
                   <a:srgbClr val="005CA8"/>
                 </a:solidFill>
-                <a:latin typeface="Microsoft YaHei"/>
-                <a:ea typeface="Microsoft YaHei"/>
-                <a:cs typeface="Microsoft YaHei"/>
+                <a:latin typeface="Aptos"/>
+                <a:ea typeface="Aptos"/>
+                <a:cs typeface="Aptos"/>
               </a:defRPr>
             </a:pPr>
             <a:r>
@@ -5076,11 +5076,11 @@
                 <a:solidFill>
                   <a:srgbClr val="005CA8"/>
                 </a:solidFill>
-                <a:latin typeface="Microsoft YaHei"/>
-                <a:ea typeface="Microsoft YaHei"/>
-                <a:cs typeface="Microsoft YaHei"/>
-              </a:rPr>
-              <a:t>评估口径</a:t>
+                <a:latin typeface="Aptos"/>
+                <a:ea typeface="Aptos"/>
+                <a:cs typeface="Aptos"/>
+              </a:rPr>
+              <a:t>Scope</a:t>
             </a:r>
           </a:p>
         </p:txBody>
@@ -5090,7 +5090,7 @@
           <p:cNvPr id="8" name="">
             <a:extLst xmlns:a="http://schemas.openxmlformats.org/drawingml/2006/main">
               <a:ext uri="{FF2B5EF4-FFF2-40B4-BE49-F238E27FC236}">
-                <a16:creationId xmlns:a16="http://schemas.microsoft.com/office/drawing/2014/main" id="{9C32441E-997F-431D-9933-D994623CCF64}"/>
+                <a16:creationId xmlns:a16="http://schemas.microsoft.com/office/drawing/2014/main" id="{CF3F0617-8B3E-43FD-8347-4F5C88E03FF3}"/>
               </a:ext>
             </a:extLst>
           </p:cNvPr>
@@ -5122,9 +5122,9 @@
                 <a:solidFill>
                   <a:srgbClr val="202938"/>
                 </a:solidFill>
-                <a:latin typeface="Microsoft YaHei"/>
-                <a:ea typeface="Microsoft YaHei"/>
-                <a:cs typeface="Microsoft YaHei"/>
+                <a:latin typeface="Aptos"/>
+                <a:ea typeface="Aptos"/>
+                <a:cs typeface="Aptos"/>
               </a:defRPr>
             </a:pPr>
             <a:r>
@@ -5132,11 +5132,11 @@
                 <a:solidFill>
                   <a:srgbClr val="202938"/>
                 </a:solidFill>
-                <a:latin typeface="Microsoft YaHei"/>
-                <a:ea typeface="Microsoft YaHei"/>
-                <a:cs typeface="Microsoft YaHei"/>
-              </a:rPr>
-              <a:t>训练与验证均限定 SuperMarioBros-1-1-v0；sample 模式用于 best checkpoint；视频为 sample20 / best-sample 搜索结果。</a:t>
+                <a:latin typeface="Aptos"/>
+                <a:ea typeface="Aptos"/>
+                <a:cs typeface="Aptos"/>
+              </a:rPr>
+              <a:t>Train, validation, and test are all on SuperMarioBros-1-1-v0. Best checkpoints use sample-mode validation.</a:t>
             </a:r>
           </a:p>
         </p:txBody>
@@ -5146,7 +5146,7 @@
           <p:cNvPr id="9" name="">
             <a:extLst xmlns:a="http://schemas.openxmlformats.org/drawingml/2006/main">
               <a:ext uri="{FF2B5EF4-FFF2-40B4-BE49-F238E27FC236}">
-                <a16:creationId xmlns:a16="http://schemas.microsoft.com/office/drawing/2014/main" id="{20D93061-2902-4AEE-A3C6-A6DA12413527}"/>
+                <a16:creationId xmlns:a16="http://schemas.microsoft.com/office/drawing/2014/main" id="{FBB35B6B-6528-4FB5-A7B8-D27DBE2A31EF}"/>
               </a:ext>
             </a:extLst>
           </p:cNvPr>
@@ -5187,7 +5187,7 @@
           <p:cNvPr id="10" name="">
             <a:extLst xmlns:a="http://schemas.openxmlformats.org/drawingml/2006/main">
               <a:ext uri="{FF2B5EF4-FFF2-40B4-BE49-F238E27FC236}">
-                <a16:creationId xmlns:a16="http://schemas.microsoft.com/office/drawing/2014/main" id="{950D52B9-1F86-4D3B-BCB2-F84365A472E8}"/>
+                <a16:creationId xmlns:a16="http://schemas.microsoft.com/office/drawing/2014/main" id="{768A86CE-592A-477B-8E91-0DA703740366}"/>
               </a:ext>
             </a:extLst>
           </p:cNvPr>
@@ -5231,9 +5231,9 @@
                 <a:solidFill>
                   <a:srgbClr val="FFFFFF"/>
                 </a:solidFill>
-                <a:latin typeface="Microsoft YaHei"/>
-                <a:ea typeface="Microsoft YaHei"/>
-                <a:cs typeface="Microsoft YaHei"/>
+                <a:latin typeface="Aptos"/>
+                <a:ea typeface="Aptos"/>
+                <a:cs typeface="Aptos"/>
               </a:defRPr>
             </a:pPr>
             <a:r>
@@ -5241,9 +5241,9 @@
                 <a:solidFill>
                   <a:srgbClr val="FFFFFF"/>
                 </a:solidFill>
-                <a:latin typeface="Microsoft YaHei"/>
-                <a:ea typeface="Microsoft YaHei"/>
-                <a:cs typeface="Microsoft YaHei"/>
+                <a:latin typeface="Aptos"/>
+                <a:ea typeface="Aptos"/>
+                <a:cs typeface="Aptos"/>
               </a:rPr>
               <a:t>1-1 training evidence</a:t>
             </a:r>
@@ -5255,19 +5255,19 @@
           <p:cNvPr id="11" name="">
             <a:extLst xmlns:a="http://schemas.openxmlformats.org/drawingml/2006/main">
               <a:ext uri="{FF2B5EF4-FFF2-40B4-BE49-F238E27FC236}">
-                <a16:creationId xmlns:a16="http://schemas.microsoft.com/office/drawing/2014/main" id="{ED09D159-96F7-4CC6-B321-B2F507E31E4E}"/>
-              </a:ext>
-            </a:extLst>
-          </p:cNvPr>
-          <p:cNvSpPr>
-            <a:spLocks xmlns:a="http://schemas.openxmlformats.org/drawingml/2006/main" noGrp="1"/>
-          </p:cNvSpPr>
-          <p:nvPr/>
-        </p:nvSpPr>
-        <p:spPr>
-          <a:xfrm xmlns:a="http://schemas.openxmlformats.org/drawingml/2006/main">
-            <a:off x="752475" y="2324100"/>
-            <a:ext cx="2952750" cy="666750"/>
+                <a16:creationId xmlns:a16="http://schemas.microsoft.com/office/drawing/2014/main" id="{64F4F25B-9F5E-49C7-AFA5-DBEB3BFABA59}"/>
+              </a:ext>
+            </a:extLst>
+          </p:cNvPr>
+          <p:cNvSpPr>
+            <a:spLocks xmlns:a="http://schemas.openxmlformats.org/drawingml/2006/main" noGrp="1"/>
+          </p:cNvSpPr>
+          <p:nvPr/>
+        </p:nvSpPr>
+        <p:spPr>
+          <a:xfrm xmlns:a="http://schemas.openxmlformats.org/drawingml/2006/main">
+            <a:off x="752475" y="2381250"/>
+            <a:ext cx="2952750" cy="552450"/>
           </a:xfrm>
           <a:prstGeom xmlns:a="http://schemas.openxmlformats.org/drawingml/2006/main" prst="rect">
             <a:avLst/>
@@ -5287,9 +5287,9 @@
                 <a:solidFill>
                   <a:srgbClr val="005CA8"/>
                 </a:solidFill>
-                <a:latin typeface="Microsoft YaHei"/>
-                <a:ea typeface="Microsoft YaHei"/>
-                <a:cs typeface="Microsoft YaHei"/>
+                <a:latin typeface="Aptos"/>
+                <a:ea typeface="Aptos"/>
+                <a:cs typeface="Aptos"/>
               </a:defRPr>
             </a:pPr>
             <a:r>
@@ -5297,9 +5297,9 @@
                 <a:solidFill>
                   <a:srgbClr val="005CA8"/>
                 </a:solidFill>
-                <a:latin typeface="Microsoft YaHei"/>
-                <a:ea typeface="Microsoft YaHei"/>
-                <a:cs typeface="Microsoft YaHei"/>
+                <a:latin typeface="Aptos"/>
+                <a:ea typeface="Aptos"/>
+                <a:cs typeface="Aptos"/>
               </a:rPr>
               <a:t>4 episodes reached</a:t>
             </a:r>
@@ -5310,9 +5310,9 @@
                 <a:solidFill>
                   <a:srgbClr val="005CA8"/>
                 </a:solidFill>
-                <a:latin typeface="Microsoft YaHei"/>
-                <a:ea typeface="Microsoft YaHei"/>
-                <a:cs typeface="Microsoft YaHei"/>
+                <a:latin typeface="Aptos"/>
+                <a:ea typeface="Aptos"/>
+                <a:cs typeface="Aptos"/>
               </a:defRPr>
             </a:pPr>
             <a:r>
@@ -5320,9 +5320,9 @@
                 <a:solidFill>
                   <a:srgbClr val="005CA8"/>
                 </a:solidFill>
-                <a:latin typeface="Microsoft YaHei"/>
-                <a:ea typeface="Microsoft YaHei"/>
-                <a:cs typeface="Microsoft YaHei"/>
+                <a:latin typeface="Aptos"/>
+                <a:ea typeface="Aptos"/>
+                <a:cs typeface="Aptos"/>
               </a:rPr>
               <a:t>final_x=3161</a:t>
             </a:r>
@@ -5334,7 +5334,7 @@
           <p:cNvPr id="12" name="">
             <a:extLst xmlns:a="http://schemas.openxmlformats.org/drawingml/2006/main">
               <a:ext uri="{FF2B5EF4-FFF2-40B4-BE49-F238E27FC236}">
-                <a16:creationId xmlns:a16="http://schemas.microsoft.com/office/drawing/2014/main" id="{5F824663-3ED7-46FD-9115-8DEE89C4DE99}"/>
+                <a16:creationId xmlns:a16="http://schemas.microsoft.com/office/drawing/2014/main" id="{F29442AA-A95A-4715-82B2-7013DF6974D7}"/>
               </a:ext>
             </a:extLst>
           </p:cNvPr>
@@ -5366,9 +5366,9 @@
                 <a:solidFill>
                   <a:srgbClr val="607084"/>
                 </a:solidFill>
-                <a:latin typeface="Microsoft YaHei"/>
-                <a:ea typeface="Microsoft YaHei"/>
-                <a:cs typeface="Microsoft YaHei"/>
+                <a:latin typeface="Aptos"/>
+                <a:ea typeface="Aptos"/>
+                <a:cs typeface="Aptos"/>
               </a:defRPr>
             </a:pPr>
             <a:r>
@@ -5376,11 +5376,11 @@
                 <a:solidFill>
                   <a:srgbClr val="607084"/>
                 </a:solidFill>
-                <a:latin typeface="Microsoft YaHei"/>
-                <a:ea typeface="Microsoft YaHei"/>
-                <a:cs typeface="Microsoft YaHei"/>
-              </a:rPr>
-              <a:t>Original selected run has no flag_get column; completion is inferred from terminal x_pos and high reward.</a:t>
+                <a:latin typeface="Aptos"/>
+                <a:ea typeface="Aptos"/>
+                <a:cs typeface="Aptos"/>
+              </a:rPr>
+              <a:t>No flag_get column in the selected run. Completion is inferred from terminal x_pos and high reward.</a:t>
             </a:r>
           </a:p>
         </p:txBody>
@@ -5390,7 +5390,7 @@
           <p:cNvPr id="13" name="">
             <a:extLst xmlns:a="http://schemas.openxmlformats.org/drawingml/2006/main">
               <a:ext uri="{FF2B5EF4-FFF2-40B4-BE49-F238E27FC236}">
-                <a16:creationId xmlns:a16="http://schemas.microsoft.com/office/drawing/2014/main" id="{D2A44292-B859-4AEB-8BBE-068251C7920F}"/>
+                <a16:creationId xmlns:a16="http://schemas.microsoft.com/office/drawing/2014/main" id="{F861550B-5605-492A-A90F-CD0F8814FFE1}"/>
               </a:ext>
             </a:extLst>
           </p:cNvPr>
@@ -5431,7 +5431,7 @@
           <p:cNvPr id="14" name="">
             <a:extLst xmlns:a="http://schemas.openxmlformats.org/drawingml/2006/main">
               <a:ext uri="{FF2B5EF4-FFF2-40B4-BE49-F238E27FC236}">
-                <a16:creationId xmlns:a16="http://schemas.microsoft.com/office/drawing/2014/main" id="{D63D4EA8-7C0B-4292-9972-B4904859D5FF}"/>
+                <a16:creationId xmlns:a16="http://schemas.microsoft.com/office/drawing/2014/main" id="{6738C1C8-C057-4135-9006-CEAF7302A145}"/>
               </a:ext>
             </a:extLst>
           </p:cNvPr>
@@ -5463,9 +5463,9 @@
                 <a:solidFill>
                   <a:srgbClr val="607084"/>
                 </a:solidFill>
-                <a:latin typeface="Microsoft YaHei"/>
-                <a:ea typeface="Microsoft YaHei"/>
-                <a:cs typeface="Microsoft YaHei"/>
+                <a:latin typeface="Aptos"/>
+                <a:ea typeface="Aptos"/>
+                <a:cs typeface="Aptos"/>
               </a:defRPr>
             </a:pPr>
             <a:r>
@@ -5473,11 +5473,11 @@
                 <a:solidFill>
                   <a:srgbClr val="607084"/>
                 </a:solidFill>
-                <a:latin typeface="Microsoft YaHei"/>
-                <a:ea typeface="Microsoft YaHei"/>
-                <a:cs typeface="Microsoft YaHei"/>
-              </a:rPr>
-              <a:t>ep</a:t>
+                <a:latin typeface="Aptos"/>
+                <a:ea typeface="Aptos"/>
+                <a:cs typeface="Aptos"/>
+              </a:rPr>
+              <a:t>episodes</a:t>
             </a:r>
           </a:p>
         </p:txBody>
@@ -5487,7 +5487,7 @@
           <p:cNvPr id="15" name="">
             <a:extLst xmlns:a="http://schemas.openxmlformats.org/drawingml/2006/main">
               <a:ext uri="{FF2B5EF4-FFF2-40B4-BE49-F238E27FC236}">
-                <a16:creationId xmlns:a16="http://schemas.microsoft.com/office/drawing/2014/main" id="{F9EAED1C-400C-45A7-A520-B4902F31D8D2}"/>
+                <a16:creationId xmlns:a16="http://schemas.microsoft.com/office/drawing/2014/main" id="{8DB9911B-D05B-4B56-AEA5-312FDC3F936F}"/>
               </a:ext>
             </a:extLst>
           </p:cNvPr>
@@ -5515,7 +5515,7 @@
           <a:lstStyle xmlns:a="http://schemas.openxmlformats.org/drawingml/2006/main"/>
           <a:p xmlns:a="http://schemas.openxmlformats.org/drawingml/2006/main">
             <a:pPr>
-              <a:defRPr sz="1200" b="1">
+              <a:defRPr sz="1350" b="1">
                 <a:solidFill>
                   <a:srgbClr val="005CA8"/>
                 </a:solidFill>
@@ -5525,7 +5525,7 @@
               </a:defRPr>
             </a:pPr>
             <a:r>
-              <a:rPr sz="1200" b="1">
+              <a:rPr sz="1350" b="1">
                 <a:solidFill>
                   <a:srgbClr val="005CA8"/>
                 </a:solidFill>
@@ -5543,7 +5543,7 @@
           <p:cNvPr id="16" name="">
             <a:extLst xmlns:a="http://schemas.openxmlformats.org/drawingml/2006/main">
               <a:ext uri="{FF2B5EF4-FFF2-40B4-BE49-F238E27FC236}">
-                <a16:creationId xmlns:a16="http://schemas.microsoft.com/office/drawing/2014/main" id="{FDEDBC81-F9C4-4C8C-820A-7B8F31B65AC1}"/>
+                <a16:creationId xmlns:a16="http://schemas.microsoft.com/office/drawing/2014/main" id="{77794C43-A444-44CD-889E-4C4CABBC3B64}"/>
               </a:ext>
             </a:extLst>
           </p:cNvPr>
@@ -5575,9 +5575,9 @@
                 <a:solidFill>
                   <a:srgbClr val="607084"/>
                 </a:solidFill>
-                <a:latin typeface="Microsoft YaHei"/>
-                <a:ea typeface="Microsoft YaHei"/>
-                <a:cs typeface="Microsoft YaHei"/>
+                <a:latin typeface="Aptos"/>
+                <a:ea typeface="Aptos"/>
+                <a:cs typeface="Aptos"/>
               </a:defRPr>
             </a:pPr>
             <a:r>
@@ -5585,11 +5585,11 @@
                 <a:solidFill>
                   <a:srgbClr val="607084"/>
                 </a:solidFill>
-                <a:latin typeface="Microsoft YaHei"/>
-                <a:ea typeface="Microsoft YaHei"/>
-                <a:cs typeface="Microsoft YaHei"/>
-              </a:rPr>
-              <a:t>training episodes</a:t>
+                <a:latin typeface="Aptos"/>
+                <a:ea typeface="Aptos"/>
+                <a:cs typeface="Aptos"/>
+              </a:rPr>
+              <a:t>training</a:t>
             </a:r>
           </a:p>
         </p:txBody>
@@ -5599,7 +5599,7 @@
           <p:cNvPr id="17" name="">
             <a:extLst xmlns:a="http://schemas.openxmlformats.org/drawingml/2006/main">
               <a:ext uri="{FF2B5EF4-FFF2-40B4-BE49-F238E27FC236}">
-                <a16:creationId xmlns:a16="http://schemas.microsoft.com/office/drawing/2014/main" id="{B3E6FEB4-CFA3-45E9-BDE2-4EA25756D098}"/>
+                <a16:creationId xmlns:a16="http://schemas.microsoft.com/office/drawing/2014/main" id="{2B9A4A64-2828-4EDC-A229-6BF25C35DE53}"/>
               </a:ext>
             </a:extLst>
           </p:cNvPr>
@@ -5640,7 +5640,7 @@
           <p:cNvPr id="18" name="">
             <a:extLst xmlns:a="http://schemas.openxmlformats.org/drawingml/2006/main">
               <a:ext uri="{FF2B5EF4-FFF2-40B4-BE49-F238E27FC236}">
-                <a16:creationId xmlns:a16="http://schemas.microsoft.com/office/drawing/2014/main" id="{E7CE6F85-41C7-458D-A4ED-A98E4E7386E5}"/>
+                <a16:creationId xmlns:a16="http://schemas.microsoft.com/office/drawing/2014/main" id="{2118F825-3F21-416E-BD3F-9E77FDA98322}"/>
               </a:ext>
             </a:extLst>
           </p:cNvPr>
@@ -5672,9 +5672,9 @@
                 <a:solidFill>
                   <a:srgbClr val="607084"/>
                 </a:solidFill>
-                <a:latin typeface="Microsoft YaHei"/>
-                <a:ea typeface="Microsoft YaHei"/>
-                <a:cs typeface="Microsoft YaHei"/>
+                <a:latin typeface="Aptos"/>
+                <a:ea typeface="Aptos"/>
+                <a:cs typeface="Aptos"/>
               </a:defRPr>
             </a:pPr>
             <a:r>
@@ -5682,11 +5682,11 @@
                 <a:solidFill>
                   <a:srgbClr val="607084"/>
                 </a:solidFill>
-                <a:latin typeface="Microsoft YaHei"/>
-                <a:ea typeface="Microsoft YaHei"/>
-                <a:cs typeface="Microsoft YaHei"/>
-              </a:rPr>
-              <a:t>R</a:t>
+                <a:latin typeface="Aptos"/>
+                <a:ea typeface="Aptos"/>
+                <a:cs typeface="Aptos"/>
+              </a:rPr>
+              <a:t>reward</a:t>
             </a:r>
           </a:p>
         </p:txBody>
@@ -5696,7 +5696,7 @@
           <p:cNvPr id="19" name="">
             <a:extLst xmlns:a="http://schemas.openxmlformats.org/drawingml/2006/main">
               <a:ext uri="{FF2B5EF4-FFF2-40B4-BE49-F238E27FC236}">
-                <a16:creationId xmlns:a16="http://schemas.microsoft.com/office/drawing/2014/main" id="{D9C6B1D1-F971-420B-AC75-7E4A99332732}"/>
+                <a16:creationId xmlns:a16="http://schemas.microsoft.com/office/drawing/2014/main" id="{842C4CB6-E735-4ACE-BD41-09FD6282239A}"/>
               </a:ext>
             </a:extLst>
           </p:cNvPr>
@@ -5752,7 +5752,7 @@
           <p:cNvPr id="20" name="">
             <a:extLst xmlns:a="http://schemas.openxmlformats.org/drawingml/2006/main">
               <a:ext uri="{FF2B5EF4-FFF2-40B4-BE49-F238E27FC236}">
-                <a16:creationId xmlns:a16="http://schemas.microsoft.com/office/drawing/2014/main" id="{19FAA568-C806-4E0A-80C9-F5DBB18C50D3}"/>
+                <a16:creationId xmlns:a16="http://schemas.microsoft.com/office/drawing/2014/main" id="{6F6006E6-A5E9-456A-80BA-A46CF68A3F67}"/>
               </a:ext>
             </a:extLst>
           </p:cNvPr>
@@ -5784,9 +5784,9 @@
                 <a:solidFill>
                   <a:srgbClr val="607084"/>
                 </a:solidFill>
-                <a:latin typeface="Microsoft YaHei"/>
-                <a:ea typeface="Microsoft YaHei"/>
-                <a:cs typeface="Microsoft YaHei"/>
+                <a:latin typeface="Aptos"/>
+                <a:ea typeface="Aptos"/>
+                <a:cs typeface="Aptos"/>
               </a:defRPr>
             </a:pPr>
             <a:r>
@@ -5794,11 +5794,11 @@
                 <a:solidFill>
                   <a:srgbClr val="607084"/>
                 </a:solidFill>
-                <a:latin typeface="Microsoft YaHei"/>
-                <a:ea typeface="Microsoft YaHei"/>
-                <a:cs typeface="Microsoft YaHei"/>
-              </a:rPr>
-              <a:t>best training reward</a:t>
+                <a:latin typeface="Aptos"/>
+                <a:ea typeface="Aptos"/>
+                <a:cs typeface="Aptos"/>
+              </a:rPr>
+              <a:t>best train</a:t>
             </a:r>
           </a:p>
         </p:txBody>
@@ -5808,7 +5808,7 @@
           <p:cNvPr id="21" name="">
             <a:extLst xmlns:a="http://schemas.openxmlformats.org/drawingml/2006/main">
               <a:ext uri="{FF2B5EF4-FFF2-40B4-BE49-F238E27FC236}">
-                <a16:creationId xmlns:a16="http://schemas.microsoft.com/office/drawing/2014/main" id="{19BF509C-3535-4EDC-94CF-EF5FA8CBFC66}"/>
+                <a16:creationId xmlns:a16="http://schemas.microsoft.com/office/drawing/2014/main" id="{14FE113D-C12A-438B-BFD6-E246DFD7AD7E}"/>
               </a:ext>
             </a:extLst>
           </p:cNvPr>
@@ -5849,7 +5849,7 @@
           <p:cNvPr id="22" name="">
             <a:extLst xmlns:a="http://schemas.openxmlformats.org/drawingml/2006/main">
               <a:ext uri="{FF2B5EF4-FFF2-40B4-BE49-F238E27FC236}">
-                <a16:creationId xmlns:a16="http://schemas.microsoft.com/office/drawing/2014/main" id="{7AFDD3DB-F177-4D73-8B4D-8F0BDE995781}"/>
+                <a16:creationId xmlns:a16="http://schemas.microsoft.com/office/drawing/2014/main" id="{8B770263-494D-4EDF-819C-F2E277C8A5B6}"/>
               </a:ext>
             </a:extLst>
           </p:cNvPr>
@@ -5881,9 +5881,9 @@
                 <a:solidFill>
                   <a:srgbClr val="607084"/>
                 </a:solidFill>
-                <a:latin typeface="Microsoft YaHei"/>
-                <a:ea typeface="Microsoft YaHei"/>
-                <a:cs typeface="Microsoft YaHei"/>
+                <a:latin typeface="Aptos"/>
+                <a:ea typeface="Aptos"/>
+                <a:cs typeface="Aptos"/>
               </a:defRPr>
             </a:pPr>
             <a:r>
@@ -5891,11 +5891,11 @@
                 <a:solidFill>
                   <a:srgbClr val="607084"/>
                 </a:solidFill>
-                <a:latin typeface="Microsoft YaHei"/>
-                <a:ea typeface="Microsoft YaHei"/>
-                <a:cs typeface="Microsoft YaHei"/>
-              </a:rPr>
-              <a:t>x</a:t>
+                <a:latin typeface="Aptos"/>
+                <a:ea typeface="Aptos"/>
+                <a:cs typeface="Aptos"/>
+              </a:rPr>
+              <a:t>max_x</a:t>
             </a:r>
           </a:p>
         </p:txBody>
@@ -5905,7 +5905,7 @@
           <p:cNvPr id="23" name="">
             <a:extLst xmlns:a="http://schemas.openxmlformats.org/drawingml/2006/main">
               <a:ext uri="{FF2B5EF4-FFF2-40B4-BE49-F238E27FC236}">
-                <a16:creationId xmlns:a16="http://schemas.microsoft.com/office/drawing/2014/main" id="{062E6278-3FB7-487F-9CDD-723E8552978D}"/>
+                <a16:creationId xmlns:a16="http://schemas.microsoft.com/office/drawing/2014/main" id="{F0747EE5-C709-4448-B220-039F730A1517}"/>
               </a:ext>
             </a:extLst>
           </p:cNvPr>
@@ -5961,7 +5961,7 @@
           <p:cNvPr id="24" name="">
             <a:extLst xmlns:a="http://schemas.openxmlformats.org/drawingml/2006/main">
               <a:ext uri="{FF2B5EF4-FFF2-40B4-BE49-F238E27FC236}">
-                <a16:creationId xmlns:a16="http://schemas.microsoft.com/office/drawing/2014/main" id="{904E726A-A21E-4CCF-857D-E9FDD96F042C}"/>
+                <a16:creationId xmlns:a16="http://schemas.microsoft.com/office/drawing/2014/main" id="{ACE1E391-217B-4504-91B4-BA91F4E209DE}"/>
               </a:ext>
             </a:extLst>
           </p:cNvPr>
@@ -5993,9 +5993,9 @@
                 <a:solidFill>
                   <a:srgbClr val="607084"/>
                 </a:solidFill>
-                <a:latin typeface="Microsoft YaHei"/>
-                <a:ea typeface="Microsoft YaHei"/>
-                <a:cs typeface="Microsoft YaHei"/>
+                <a:latin typeface="Aptos"/>
+                <a:ea typeface="Aptos"/>
+                <a:cs typeface="Aptos"/>
               </a:defRPr>
             </a:pPr>
             <a:r>
@@ -6003,11 +6003,11 @@
                 <a:solidFill>
                   <a:srgbClr val="607084"/>
                 </a:solidFill>
-                <a:latin typeface="Microsoft YaHei"/>
-                <a:ea typeface="Microsoft YaHei"/>
-                <a:cs typeface="Microsoft YaHei"/>
-              </a:rPr>
-              <a:t>max x_pos</a:t>
+                <a:latin typeface="Aptos"/>
+                <a:ea typeface="Aptos"/>
+                <a:cs typeface="Aptos"/>
+              </a:rPr>
+              <a:t>train max</a:t>
             </a:r>
           </a:p>
         </p:txBody>
@@ -6017,7 +6017,7 @@
           <p:cNvPr id="25" name="">
             <a:extLst xmlns:a="http://schemas.openxmlformats.org/drawingml/2006/main">
               <a:ext uri="{FF2B5EF4-FFF2-40B4-BE49-F238E27FC236}">
-                <a16:creationId xmlns:a16="http://schemas.microsoft.com/office/drawing/2014/main" id="{9985381E-2C9C-4BD2-BF97-BA465908E415}"/>
+                <a16:creationId xmlns:a16="http://schemas.microsoft.com/office/drawing/2014/main" id="{079A4C35-F90F-4CBB-BB42-5A583BEE4D0B}"/>
               </a:ext>
             </a:extLst>
           </p:cNvPr>
@@ -6058,7 +6058,7 @@
           <p:cNvPr id="26" name="">
             <a:extLst xmlns:a="http://schemas.openxmlformats.org/drawingml/2006/main">
               <a:ext uri="{FF2B5EF4-FFF2-40B4-BE49-F238E27FC236}">
-                <a16:creationId xmlns:a16="http://schemas.microsoft.com/office/drawing/2014/main" id="{7E35FF83-38E5-4A85-B7F7-4A9B909DA822}"/>
+                <a16:creationId xmlns:a16="http://schemas.microsoft.com/office/drawing/2014/main" id="{742E5B02-E8B0-4168-A40D-2548C6732772}"/>
               </a:ext>
             </a:extLst>
           </p:cNvPr>
@@ -6090,9 +6090,9 @@
                 <a:solidFill>
                   <a:srgbClr val="607084"/>
                 </a:solidFill>
-                <a:latin typeface="Microsoft YaHei"/>
-                <a:ea typeface="Microsoft YaHei"/>
-                <a:cs typeface="Microsoft YaHei"/>
+                <a:latin typeface="Aptos"/>
+                <a:ea typeface="Aptos"/>
+                <a:cs typeface="Aptos"/>
               </a:defRPr>
             </a:pPr>
             <a:r>
@@ -6100,11 +6100,11 @@
                 <a:solidFill>
                   <a:srgbClr val="607084"/>
                 </a:solidFill>
-                <a:latin typeface="Microsoft YaHei"/>
-                <a:ea typeface="Microsoft YaHei"/>
-                <a:cs typeface="Microsoft YaHei"/>
-              </a:rPr>
-              <a:t>reward vs progress</a:t>
+                <a:latin typeface="Aptos"/>
+                <a:ea typeface="Aptos"/>
+                <a:cs typeface="Aptos"/>
+              </a:rPr>
+              <a:t>reward/prog.</a:t>
             </a:r>
           </a:p>
         </p:txBody>
@@ -6114,7 +6114,7 @@
           <p:cNvPr id="27" name="">
             <a:extLst xmlns:a="http://schemas.openxmlformats.org/drawingml/2006/main">
               <a:ext uri="{FF2B5EF4-FFF2-40B4-BE49-F238E27FC236}">
-                <a16:creationId xmlns:a16="http://schemas.microsoft.com/office/drawing/2014/main" id="{1EC7DED9-F8A3-4317-A0C1-BF5D5A7557CF}"/>
+                <a16:creationId xmlns:a16="http://schemas.microsoft.com/office/drawing/2014/main" id="{A90034EF-380E-4828-A92C-5BBEB7F3FCB3}"/>
               </a:ext>
             </a:extLst>
           </p:cNvPr>
@@ -6160,7 +6160,7 @@
                 <a:ea typeface="Arial"/>
                 <a:cs typeface="Arial"/>
               </a:rPr>
-              <a:t>不同步</a:t>
+              <a:t>Diff.</a:t>
             </a:r>
           </a:p>
         </p:txBody>
@@ -6170,7 +6170,7 @@
           <p:cNvPr id="28" name="">
             <a:extLst xmlns:a="http://schemas.openxmlformats.org/drawingml/2006/main">
               <a:ext uri="{FF2B5EF4-FFF2-40B4-BE49-F238E27FC236}">
-                <a16:creationId xmlns:a16="http://schemas.microsoft.com/office/drawing/2014/main" id="{3A78971E-CAD6-486E-8CC2-CA121A8322FB}"/>
+                <a16:creationId xmlns:a16="http://schemas.microsoft.com/office/drawing/2014/main" id="{AC0E9096-E229-4807-AD07-15A1EC5567C3}"/>
               </a:ext>
             </a:extLst>
           </p:cNvPr>
@@ -6202,9 +6202,9 @@
                 <a:solidFill>
                   <a:srgbClr val="607084"/>
                 </a:solidFill>
-                <a:latin typeface="Microsoft YaHei"/>
-                <a:ea typeface="Microsoft YaHei"/>
-                <a:cs typeface="Microsoft YaHei"/>
+                <a:latin typeface="Aptos"/>
+                <a:ea typeface="Aptos"/>
+                <a:cs typeface="Aptos"/>
               </a:defRPr>
             </a:pPr>
             <a:r>
@@ -6212,11 +6212,11 @@
                 <a:solidFill>
                   <a:srgbClr val="607084"/>
                 </a:solidFill>
-                <a:latin typeface="Microsoft YaHei"/>
-                <a:ea typeface="Microsoft YaHei"/>
-                <a:cs typeface="Microsoft YaHei"/>
-              </a:rPr>
-              <a:t>video best &lt; train terminal</a:t>
+                <a:latin typeface="Aptos"/>
+                <a:ea typeface="Aptos"/>
+                <a:cs typeface="Aptos"/>
+              </a:rPr>
+              <a:t>video &lt; train</a:t>
             </a:r>
           </a:p>
         </p:txBody>
@@ -6226,7 +6226,7 @@
           <p:cNvPr id="29" name="">
             <a:extLst xmlns:a="http://schemas.openxmlformats.org/drawingml/2006/main">
               <a:ext uri="{FF2B5EF4-FFF2-40B4-BE49-F238E27FC236}">
-                <a16:creationId xmlns:a16="http://schemas.microsoft.com/office/drawing/2014/main" id="{49D96AA0-F1A0-4913-B7C4-B370D4E65FB7}"/>
+                <a16:creationId xmlns:a16="http://schemas.microsoft.com/office/drawing/2014/main" id="{C8B6D493-5962-47FE-A49D-165946F08135}"/>
               </a:ext>
             </a:extLst>
           </p:cNvPr>
@@ -6267,7 +6267,7 @@
           <p:cNvPr id="30" name="">
             <a:extLst xmlns:a="http://schemas.openxmlformats.org/drawingml/2006/main">
               <a:ext uri="{FF2B5EF4-FFF2-40B4-BE49-F238E27FC236}">
-                <a16:creationId xmlns:a16="http://schemas.microsoft.com/office/drawing/2014/main" id="{02D876EC-82B0-4B7A-9C32-C54F2FB476F2}"/>
+                <a16:creationId xmlns:a16="http://schemas.microsoft.com/office/drawing/2014/main" id="{9DD95E93-4F13-4182-869B-DADA503E7A26}"/>
               </a:ext>
             </a:extLst>
           </p:cNvPr>
@@ -6299,9 +6299,9 @@
                 <a:solidFill>
                   <a:srgbClr val="607084"/>
                 </a:solidFill>
-                <a:latin typeface="Microsoft YaHei"/>
-                <a:ea typeface="Microsoft YaHei"/>
-                <a:cs typeface="Microsoft YaHei"/>
+                <a:latin typeface="Aptos"/>
+                <a:ea typeface="Aptos"/>
+                <a:cs typeface="Aptos"/>
               </a:defRPr>
             </a:pPr>
             <a:r>
@@ -6309,11 +6309,11 @@
                 <a:solidFill>
                   <a:srgbClr val="607084"/>
                 </a:solidFill>
-                <a:latin typeface="Microsoft YaHei"/>
-                <a:ea typeface="Microsoft YaHei"/>
-                <a:cs typeface="Microsoft YaHei"/>
-              </a:rPr>
-              <a:t>通关 / 进度</a:t>
+                <a:latin typeface="Aptos"/>
+                <a:ea typeface="Aptos"/>
+                <a:cs typeface="Aptos"/>
+              </a:rPr>
+              <a:t>Clear / progress</a:t>
             </a:r>
           </a:p>
         </p:txBody>
@@ -6323,7 +6323,7 @@
           <p:cNvPr id="31" name="">
             <a:extLst xmlns:a="http://schemas.openxmlformats.org/drawingml/2006/main">
               <a:ext uri="{FF2B5EF4-FFF2-40B4-BE49-F238E27FC236}">
-                <a16:creationId xmlns:a16="http://schemas.microsoft.com/office/drawing/2014/main" id="{8C6E0D85-E9A1-4011-A304-A9A98A5E049F}"/>
+                <a16:creationId xmlns:a16="http://schemas.microsoft.com/office/drawing/2014/main" id="{5FFC2EAF-AAEB-41C9-BED5-CE62786F9730}"/>
               </a:ext>
             </a:extLst>
           </p:cNvPr>
@@ -6355,9 +6355,9 @@
                 <a:solidFill>
                   <a:srgbClr val="005CA8"/>
                 </a:solidFill>
-                <a:latin typeface="Microsoft YaHei"/>
-                <a:ea typeface="Microsoft YaHei"/>
-                <a:cs typeface="Microsoft YaHei"/>
+                <a:latin typeface="Aptos"/>
+                <a:ea typeface="Aptos"/>
+                <a:cs typeface="Aptos"/>
               </a:defRPr>
             </a:pPr>
             <a:r>
@@ -6365,11 +6365,11 @@
                 <a:solidFill>
                   <a:srgbClr val="005CA8"/>
                 </a:solidFill>
-                <a:latin typeface="Microsoft YaHei"/>
-                <a:ea typeface="Microsoft YaHei"/>
-                <a:cs typeface="Microsoft YaHei"/>
-              </a:rPr>
-              <a:t>达到 x=3161</a:t>
+                <a:latin typeface="Aptos"/>
+                <a:ea typeface="Aptos"/>
+                <a:cs typeface="Aptos"/>
+              </a:rPr>
+              <a:t>Reached x=3161</a:t>
             </a:r>
           </a:p>
         </p:txBody>
@@ -6379,7 +6379,7 @@
           <p:cNvPr id="32" name="">
             <a:extLst xmlns:a="http://schemas.openxmlformats.org/drawingml/2006/main">
               <a:ext uri="{FF2B5EF4-FFF2-40B4-BE49-F238E27FC236}">
-                <a16:creationId xmlns:a16="http://schemas.microsoft.com/office/drawing/2014/main" id="{0B123596-9D47-4307-A22C-9B2576863E4D}"/>
+                <a16:creationId xmlns:a16="http://schemas.microsoft.com/office/drawing/2014/main" id="{6BD146CC-C774-4CF7-9793-FC5323B008C0}"/>
               </a:ext>
             </a:extLst>
           </p:cNvPr>
@@ -6411,9 +6411,9 @@
                 <a:solidFill>
                   <a:srgbClr val="607084"/>
                 </a:solidFill>
-                <a:latin typeface="Microsoft YaHei"/>
-                <a:ea typeface="Microsoft YaHei"/>
-                <a:cs typeface="Microsoft YaHei"/>
+                <a:latin typeface="Aptos"/>
+                <a:ea typeface="Aptos"/>
+                <a:cs typeface="Aptos"/>
               </a:defRPr>
             </a:pPr>
             <a:r>
@@ -6421,9 +6421,9 @@
                 <a:solidFill>
                   <a:srgbClr val="607084"/>
                 </a:solidFill>
-                <a:latin typeface="Microsoft YaHei"/>
-                <a:ea typeface="Microsoft YaHei"/>
-                <a:cs typeface="Microsoft YaHei"/>
+                <a:latin typeface="Aptos"/>
+                <a:ea typeface="Aptos"/>
+                <a:cs typeface="Aptos"/>
               </a:rPr>
               <a:t>max_x = 3161 / 3161</a:t>
             </a:r>
@@ -6435,42 +6435,7 @@
           <p:cNvPr id="33" name="">
             <a:extLst xmlns:a="http://schemas.openxmlformats.org/drawingml/2006/main">
               <a:ext uri="{FF2B5EF4-FFF2-40B4-BE49-F238E27FC236}">
-                <a16:creationId xmlns:a16="http://schemas.microsoft.com/office/drawing/2014/main" id="{F86062E7-E4DD-42B8-9AAC-B220E91E5926}"/>
-              </a:ext>
-            </a:extLst>
-          </p:cNvPr>
-          <p:cNvSpPr>
-            <a:spLocks xmlns:a="http://schemas.openxmlformats.org/drawingml/2006/main" noGrp="1"/>
-          </p:cNvSpPr>
-          <p:nvPr/>
-        </p:nvSpPr>
-        <p:spPr>
-          <a:xfrm xmlns:a="http://schemas.openxmlformats.org/drawingml/2006/main">
-            <a:off x="4371975" y="2847975"/>
-            <a:ext cx="3533775" cy="85725"/>
-          </a:xfrm>
-          <a:prstGeom xmlns:a="http://schemas.openxmlformats.org/drawingml/2006/main" prst="roundRect">
-            <a:avLst>
-              <a:gd name="adj" fmla="val 44444"/>
-            </a:avLst>
-          </a:prstGeom>
-          <a:solidFill xmlns:a="http://schemas.openxmlformats.org/drawingml/2006/main">
-            <a:srgbClr val="DDE6EF"/>
-          </a:solidFill>
-          <a:ln xmlns:a="http://schemas.openxmlformats.org/drawingml/2006/main" w="0">
-            <a:solidFill>
-              <a:srgbClr val="DDE6EF"/>
-            </a:solidFill>
-            <a:prstDash val="solid"/>
-          </a:ln>
-        </p:spPr>
-      </p:sp>
-      <p:sp>
-        <p:nvSpPr>
-          <p:cNvPr id="34" name="">
-            <a:extLst xmlns:a="http://schemas.openxmlformats.org/drawingml/2006/main">
-              <a:ext uri="{FF2B5EF4-FFF2-40B4-BE49-F238E27FC236}">
-                <a16:creationId xmlns:a16="http://schemas.microsoft.com/office/drawing/2014/main" id="{B7FA16E7-1BC8-485E-AFAA-88C8901A6E59}"/>
+                <a16:creationId xmlns:a16="http://schemas.microsoft.com/office/drawing/2014/main" id="{A563FBB3-5388-467E-9795-082E323DE047}"/>
               </a:ext>
             </a:extLst>
           </p:cNvPr>
@@ -6502,7 +6467,7 @@
       </p:sp>
       <p:graphicFrame>
         <p:nvGraphicFramePr>
-          <p:cNvPr id="82" name=""/>
+          <p:cNvPr id="80" name=""/>
           <p:cNvGraphicFramePr/>
           <p:nvPr/>
         </p:nvGraphicFramePr>
@@ -6532,11 +6497,11 @@
                           <a:solidFill>
                             <a:srgbClr val="202938"/>
                           </a:solidFill>
-                          <a:latin typeface="Microsoft YaHei"/>
-                          <a:ea typeface="Microsoft YaHei"/>
-                          <a:cs typeface="Microsoft YaHei"/>
+                          <a:latin typeface="Aptos"/>
+                          <a:ea typeface="Aptos"/>
+                          <a:cs typeface="Aptos"/>
                         </a:rPr>
-                        <a:t>1000000 steps</a:t>
+                        <a:t>1M steps</a:t>
                       </a:r>
                     </a:p>
                   </a:txBody>
@@ -6557,9 +6522,9 @@
                           <a:solidFill>
                             <a:srgbClr val="202938"/>
                           </a:solidFill>
-                          <a:latin typeface="Microsoft YaHei"/>
-                          <a:ea typeface="Microsoft YaHei"/>
-                          <a:cs typeface="Microsoft YaHei"/>
+                          <a:latin typeface="Aptos"/>
+                          <a:ea typeface="Aptos"/>
+                          <a:cs typeface="Aptos"/>
                         </a:rPr>
                         <a:t>mean</a:t>
                       </a:r>
@@ -6582,9 +6547,9 @@
                           <a:solidFill>
                             <a:srgbClr val="202938"/>
                           </a:solidFill>
-                          <a:latin typeface="Microsoft YaHei"/>
-                          <a:ea typeface="Microsoft YaHei"/>
-                          <a:cs typeface="Microsoft YaHei"/>
+                          <a:latin typeface="Aptos"/>
+                          <a:ea typeface="Aptos"/>
+                          <a:cs typeface="Aptos"/>
                         </a:rPr>
                         <a:t>best</a:t>
                       </a:r>
@@ -6607,9 +6572,9 @@
                           <a:solidFill>
                             <a:srgbClr val="202938"/>
                           </a:solidFill>
-                          <a:latin typeface="Microsoft YaHei"/>
-                          <a:ea typeface="Microsoft YaHei"/>
-                          <a:cs typeface="Microsoft YaHei"/>
+                          <a:latin typeface="Aptos"/>
+                          <a:ea typeface="Aptos"/>
+                          <a:cs typeface="Aptos"/>
                         </a:rPr>
                         <a:t>max</a:t>
                       </a:r>
@@ -6634,9 +6599,9 @@
                           <a:solidFill>
                             <a:srgbClr val="202938"/>
                           </a:solidFill>
-                          <a:latin typeface="Microsoft YaHei"/>
-                          <a:ea typeface="Microsoft YaHei"/>
-                          <a:cs typeface="Microsoft YaHei"/>
+                          <a:latin typeface="Aptos"/>
+                          <a:ea typeface="Aptos"/>
+                          <a:cs typeface="Aptos"/>
                         </a:rPr>
                         <a:t>val max_x</a:t>
                       </a:r>
@@ -6720,9 +6685,9 @@
                           <a:solidFill>
                             <a:srgbClr val="202938"/>
                           </a:solidFill>
-                          <a:latin typeface="Microsoft YaHei"/>
-                          <a:ea typeface="Microsoft YaHei"/>
-                          <a:cs typeface="Microsoft YaHei"/>
+                          <a:latin typeface="Aptos"/>
+                          <a:ea typeface="Aptos"/>
+                          <a:cs typeface="Aptos"/>
                         </a:rPr>
                         <a:t>test max_x</a:t>
                       </a:r>
@@ -6800,10 +6765,10 @@
       </p:graphicFrame>
       <p:sp>
         <p:nvSpPr>
-          <p:cNvPr id="36" name="">
-            <a:extLst xmlns:a="http://schemas.openxmlformats.org/drawingml/2006/main">
-              <a:ext uri="{FF2B5EF4-FFF2-40B4-BE49-F238E27FC236}">
-                <a16:creationId xmlns:a16="http://schemas.microsoft.com/office/drawing/2014/main" id="{F7E499F4-C356-4A90-B0AB-109136B59501}"/>
+          <p:cNvPr id="35" name="">
+            <a:extLst xmlns:a="http://schemas.openxmlformats.org/drawingml/2006/main">
+              <a:ext uri="{FF2B5EF4-FFF2-40B4-BE49-F238E27FC236}">
+                <a16:creationId xmlns:a16="http://schemas.microsoft.com/office/drawing/2014/main" id="{0F9AE7C3-6E86-445E-BE76-F540BF1BB0A6}"/>
               </a:ext>
             </a:extLst>
           </p:cNvPr>
@@ -6841,10 +6806,10 @@
       </p:sp>
       <p:sp>
         <p:nvSpPr>
-          <p:cNvPr id="37" name="">
-            <a:extLst xmlns:a="http://schemas.openxmlformats.org/drawingml/2006/main">
-              <a:ext uri="{FF2B5EF4-FFF2-40B4-BE49-F238E27FC236}">
-                <a16:creationId xmlns:a16="http://schemas.microsoft.com/office/drawing/2014/main" id="{09F73D57-F57A-4815-AE77-4075CA4F2C2D}"/>
+          <p:cNvPr id="36" name="">
+            <a:extLst xmlns:a="http://schemas.openxmlformats.org/drawingml/2006/main">
+              <a:ext uri="{FF2B5EF4-FFF2-40B4-BE49-F238E27FC236}">
+                <a16:creationId xmlns:a16="http://schemas.microsoft.com/office/drawing/2014/main" id="{FCC68E2F-F3F8-404F-8EA2-12B21B77D20A}"/>
               </a:ext>
             </a:extLst>
           </p:cNvPr>
@@ -6888,9 +6853,9 @@
                 <a:solidFill>
                   <a:srgbClr val="FFFFFF"/>
                 </a:solidFill>
-                <a:latin typeface="Microsoft YaHei"/>
-                <a:ea typeface="Microsoft YaHei"/>
-                <a:cs typeface="Microsoft YaHei"/>
+                <a:latin typeface="Aptos"/>
+                <a:ea typeface="Aptos"/>
+                <a:cs typeface="Aptos"/>
               </a:defRPr>
             </a:pPr>
             <a:r>
@@ -6898,21 +6863,21 @@
                 <a:solidFill>
                   <a:srgbClr val="FFFFFF"/>
                 </a:solidFill>
-                <a:latin typeface="Microsoft YaHei"/>
-                <a:ea typeface="Microsoft YaHei"/>
-                <a:cs typeface="Microsoft YaHei"/>
-              </a:rPr>
-              <a:t>best recorded video</a:t>
-            </a:r>
-          </a:p>
-        </p:txBody>
-      </p:sp>
-      <p:sp>
-        <p:nvSpPr>
-          <p:cNvPr id="38" name="">
-            <a:extLst xmlns:a="http://schemas.openxmlformats.org/drawingml/2006/main">
-              <a:ext uri="{FF2B5EF4-FFF2-40B4-BE49-F238E27FC236}">
-                <a16:creationId xmlns:a16="http://schemas.microsoft.com/office/drawing/2014/main" id="{7485CE6A-F16E-4DB8-86FE-7B7CACE2D30A}"/>
+                <a:latin typeface="Aptos"/>
+                <a:ea typeface="Aptos"/>
+                <a:cs typeface="Aptos"/>
+              </a:rPr>
+              <a:t>best saved video</a:t>
+            </a:r>
+          </a:p>
+        </p:txBody>
+      </p:sp>
+      <p:sp>
+        <p:nvSpPr>
+          <p:cNvPr id="37" name="">
+            <a:extLst xmlns:a="http://schemas.openxmlformats.org/drawingml/2006/main">
+              <a:ext uri="{FF2B5EF4-FFF2-40B4-BE49-F238E27FC236}">
+                <a16:creationId xmlns:a16="http://schemas.microsoft.com/office/drawing/2014/main" id="{B5DE6A7F-7796-4D6F-8810-5529E7F2EF78}"/>
               </a:ext>
             </a:extLst>
           </p:cNvPr>
@@ -6965,10 +6930,10 @@
       </p:sp>
       <p:sp>
         <p:nvSpPr>
-          <p:cNvPr id="39" name="">
-            <a:extLst xmlns:a="http://schemas.openxmlformats.org/drawingml/2006/main">
-              <a:ext uri="{FF2B5EF4-FFF2-40B4-BE49-F238E27FC236}">
-                <a16:creationId xmlns:a16="http://schemas.microsoft.com/office/drawing/2014/main" id="{D06B7EEC-8930-4CFE-8B65-8C7C3BB866D1}"/>
+          <p:cNvPr id="38" name="">
+            <a:extLst xmlns:a="http://schemas.openxmlformats.org/drawingml/2006/main">
+              <a:ext uri="{FF2B5EF4-FFF2-40B4-BE49-F238E27FC236}">
+                <a16:creationId xmlns:a16="http://schemas.microsoft.com/office/drawing/2014/main" id="{D35BD4F1-447D-4F2A-8AA8-D98083878E19}"/>
               </a:ext>
             </a:extLst>
           </p:cNvPr>
@@ -7021,10 +6986,10 @@
       </p:sp>
       <p:sp>
         <p:nvSpPr>
-          <p:cNvPr id="40" name="">
-            <a:extLst xmlns:a="http://schemas.openxmlformats.org/drawingml/2006/main">
-              <a:ext uri="{FF2B5EF4-FFF2-40B4-BE49-F238E27FC236}">
-                <a16:creationId xmlns:a16="http://schemas.microsoft.com/office/drawing/2014/main" id="{5F540736-2900-486A-BE10-37F34ADCCA12}"/>
+          <p:cNvPr id="39" name="">
+            <a:extLst xmlns:a="http://schemas.openxmlformats.org/drawingml/2006/main">
+              <a:ext uri="{FF2B5EF4-FFF2-40B4-BE49-F238E27FC236}">
+                <a16:creationId xmlns:a16="http://schemas.microsoft.com/office/drawing/2014/main" id="{7F5BDEA5-B25A-4043-AE5D-77370272A4F8}"/>
               </a:ext>
             </a:extLst>
           </p:cNvPr>
@@ -7056,9 +7021,9 @@
                 <a:solidFill>
                   <a:srgbClr val="607084"/>
                 </a:solidFill>
-                <a:latin typeface="Microsoft YaHei"/>
-                <a:ea typeface="Microsoft YaHei"/>
-                <a:cs typeface="Microsoft YaHei"/>
+                <a:latin typeface="Aptos"/>
+                <a:ea typeface="Aptos"/>
+                <a:cs typeface="Aptos"/>
               </a:defRPr>
             </a:pPr>
             <a:r>
@@ -7066,21 +7031,21 @@
                 <a:solidFill>
                   <a:srgbClr val="607084"/>
                 </a:solidFill>
-                <a:latin typeface="Microsoft YaHei"/>
-                <a:ea typeface="Microsoft YaHei"/>
-                <a:cs typeface="Microsoft YaHei"/>
-              </a:rPr>
-              <a:t>录制视频未观察到完整通关；训练日志提供终点 x 证据。</a:t>
-            </a:r>
-          </a:p>
-        </p:txBody>
-      </p:sp>
-      <p:sp>
-        <p:nvSpPr>
-          <p:cNvPr id="41" name="">
-            <a:extLst xmlns:a="http://schemas.openxmlformats.org/drawingml/2006/main">
-              <a:ext uri="{FF2B5EF4-FFF2-40B4-BE49-F238E27FC236}">
-                <a16:creationId xmlns:a16="http://schemas.microsoft.com/office/drawing/2014/main" id="{2BCAB212-12F0-4176-953B-309457CFC753}"/>
+                <a:latin typeface="Aptos"/>
+                <a:ea typeface="Aptos"/>
+                <a:cs typeface="Aptos"/>
+              </a:rPr>
+              <a:t>Saved videos show rollouts, not confirmed clears. Training logs provide terminal x evidence.</a:t>
+            </a:r>
+          </a:p>
+        </p:txBody>
+      </p:sp>
+      <p:sp>
+        <p:nvSpPr>
+          <p:cNvPr id="40" name="">
+            <a:extLst xmlns:a="http://schemas.openxmlformats.org/drawingml/2006/main">
+              <a:ext uri="{FF2B5EF4-FFF2-40B4-BE49-F238E27FC236}">
+                <a16:creationId xmlns:a16="http://schemas.microsoft.com/office/drawing/2014/main" id="{6F203CA1-9D7C-46E7-8DBB-374FF4AE1649}"/>
               </a:ext>
             </a:extLst>
           </p:cNvPr>
@@ -7118,10 +7083,10 @@
       </p:sp>
       <p:sp>
         <p:nvSpPr>
-          <p:cNvPr id="42" name="">
-            <a:extLst xmlns:a="http://schemas.openxmlformats.org/drawingml/2006/main">
-              <a:ext uri="{FF2B5EF4-FFF2-40B4-BE49-F238E27FC236}">
-                <a16:creationId xmlns:a16="http://schemas.microsoft.com/office/drawing/2014/main" id="{63128854-6B6C-4303-84BC-B22F585788C5}"/>
+          <p:cNvPr id="41" name="">
+            <a:extLst xmlns:a="http://schemas.openxmlformats.org/drawingml/2006/main">
+              <a:ext uri="{FF2B5EF4-FFF2-40B4-BE49-F238E27FC236}">
+                <a16:creationId xmlns:a16="http://schemas.microsoft.com/office/drawing/2014/main" id="{631D10AF-D8EB-4E4E-AF2D-D4968B9B69C8}"/>
               </a:ext>
             </a:extLst>
           </p:cNvPr>
@@ -7165,9 +7130,9 @@
                 <a:solidFill>
                   <a:srgbClr val="FFFFFF"/>
                 </a:solidFill>
-                <a:latin typeface="Microsoft YaHei"/>
-                <a:ea typeface="Microsoft YaHei"/>
-                <a:cs typeface="Microsoft YaHei"/>
+                <a:latin typeface="Aptos"/>
+                <a:ea typeface="Aptos"/>
+                <a:cs typeface="Aptos"/>
               </a:defRPr>
             </a:pPr>
             <a:r>
@@ -7175,25 +7140,25 @@
                 <a:solidFill>
                   <a:srgbClr val="FFFFFF"/>
                 </a:solidFill>
-                <a:latin typeface="Microsoft YaHei"/>
-                <a:ea typeface="Microsoft YaHei"/>
-                <a:cs typeface="Microsoft YaHei"/>
-              </a:rPr>
-              <a:t>Reward–progress consistency</a:t>
+                <a:latin typeface="Aptos"/>
+                <a:ea typeface="Aptos"/>
+                <a:cs typeface="Aptos"/>
+              </a:rPr>
+              <a:t>Reward-progress consistency</a:t>
             </a:r>
           </a:p>
         </p:txBody>
       </p:sp>
       <p:pic>
         <p:nvPicPr>
-          <p:cNvPr id="90" name=""/>
+          <p:cNvPr id="88" name=""/>
           <p:cNvPicPr>
             <a:picLocks xmlns:a="http://schemas.openxmlformats.org/drawingml/2006/main" noChangeAspect="1"/>
           </p:cNvPicPr>
           <p:nvPr/>
         </p:nvPicPr>
         <p:blipFill>
-          <a:blip xmlns:r="http://schemas.openxmlformats.org/officeDocument/2006/relationships" xmlns:a="http://schemas.openxmlformats.org/drawingml/2006/main" r:embed="R7cd40cb114664cc1"/>
+          <a:blip xmlns:r="http://schemas.openxmlformats.org/officeDocument/2006/relationships" xmlns:a="http://schemas.openxmlformats.org/drawingml/2006/main" r:embed="R73c177ff76fb4f95"/>
           <a:stretch xmlns:a="http://schemas.openxmlformats.org/drawingml/2006/main"/>
         </p:blipFill>
         <p:spPr>
@@ -7208,14 +7173,14 @@
       </p:pic>
       <p:pic>
         <p:nvPicPr>
-          <p:cNvPr id="91" name=""/>
+          <p:cNvPr id="89" name=""/>
           <p:cNvPicPr>
             <a:picLocks xmlns:a="http://schemas.openxmlformats.org/drawingml/2006/main" noChangeAspect="1"/>
           </p:cNvPicPr>
           <p:nvPr/>
         </p:nvPicPr>
         <p:blipFill>
-          <a:blip xmlns:r="http://schemas.openxmlformats.org/officeDocument/2006/relationships" xmlns:a="http://schemas.openxmlformats.org/drawingml/2006/main" r:embed="R07334acf4a604a66"/>
+          <a:blip xmlns:r="http://schemas.openxmlformats.org/officeDocument/2006/relationships" xmlns:a="http://schemas.openxmlformats.org/drawingml/2006/main" r:embed="R609a1e3b03ca4ca8"/>
           <a:stretch xmlns:a="http://schemas.openxmlformats.org/drawingml/2006/main"/>
         </p:blipFill>
         <p:spPr>
@@ -7230,10 +7195,10 @@
       </p:pic>
       <p:sp>
         <p:nvSpPr>
-          <p:cNvPr id="45" name="">
-            <a:extLst xmlns:a="http://schemas.openxmlformats.org/drawingml/2006/main">
-              <a:ext uri="{FF2B5EF4-FFF2-40B4-BE49-F238E27FC236}">
-                <a16:creationId xmlns:a16="http://schemas.microsoft.com/office/drawing/2014/main" id="{2E9713E9-E975-44CA-992C-159D81138EE3}"/>
+          <p:cNvPr id="44" name="">
+            <a:extLst xmlns:a="http://schemas.openxmlformats.org/drawingml/2006/main">
+              <a:ext uri="{FF2B5EF4-FFF2-40B4-BE49-F238E27FC236}">
+                <a16:creationId xmlns:a16="http://schemas.microsoft.com/office/drawing/2014/main" id="{7C23411F-4B76-43B1-BEF6-38091412DD94}"/>
               </a:ext>
             </a:extLst>
           </p:cNvPr>
@@ -7271,10 +7236,10 @@
       </p:sp>
       <p:sp>
         <p:nvSpPr>
-          <p:cNvPr id="46" name="">
-            <a:extLst xmlns:a="http://schemas.openxmlformats.org/drawingml/2006/main">
-              <a:ext uri="{FF2B5EF4-FFF2-40B4-BE49-F238E27FC236}">
-                <a16:creationId xmlns:a16="http://schemas.microsoft.com/office/drawing/2014/main" id="{327FFE00-91AA-4252-B0DE-629516F4E0F8}"/>
+          <p:cNvPr id="45" name="">
+            <a:extLst xmlns:a="http://schemas.openxmlformats.org/drawingml/2006/main">
+              <a:ext uri="{FF2B5EF4-FFF2-40B4-BE49-F238E27FC236}">
+                <a16:creationId xmlns:a16="http://schemas.microsoft.com/office/drawing/2014/main" id="{D7C1B8C4-F3EB-43C8-AD99-2ED0A30F4E25}"/>
               </a:ext>
             </a:extLst>
           </p:cNvPr>
@@ -7306,9 +7271,9 @@
                 <a:solidFill>
                   <a:srgbClr val="202938"/>
                 </a:solidFill>
-                <a:latin typeface="Microsoft YaHei"/>
-                <a:ea typeface="Microsoft YaHei"/>
-                <a:cs typeface="Microsoft YaHei"/>
+                <a:latin typeface="Aptos"/>
+                <a:ea typeface="Aptos"/>
+                <a:cs typeface="Aptos"/>
               </a:defRPr>
             </a:pPr>
             <a:r>
@@ -7316,33 +7281,33 @@
                 <a:solidFill>
                   <a:srgbClr val="202938"/>
                 </a:solidFill>
-                <a:latin typeface="Microsoft YaHei"/>
-                <a:ea typeface="Microsoft YaHei"/>
-                <a:cs typeface="Microsoft YaHei"/>
-              </a:rPr>
-              <a:t>ICM has stronger mean validation progress in the selected run, but the best sampled video did not visibly complete 1-1.</a:t>
-            </a:r>
-          </a:p>
-        </p:txBody>
-      </p:sp>
-      <p:sp>
-        <p:nvSpPr>
-          <p:cNvPr id="47" name="">
-            <a:extLst xmlns:a="http://schemas.openxmlformats.org/drawingml/2006/main">
-              <a:ext uri="{FF2B5EF4-FFF2-40B4-BE49-F238E27FC236}">
-                <a16:creationId xmlns:a16="http://schemas.microsoft.com/office/drawing/2014/main" id="{9093E0A6-12D3-4C67-B7F4-F9E0714BAB8B}"/>
-              </a:ext>
-            </a:extLst>
-          </p:cNvPr>
-          <p:cNvSpPr>
-            <a:spLocks xmlns:a="http://schemas.openxmlformats.org/drawingml/2006/main" noGrp="1"/>
-          </p:cNvSpPr>
-          <p:nvPr/>
-        </p:nvSpPr>
-        <p:spPr>
-          <a:xfrm xmlns:a="http://schemas.openxmlformats.org/drawingml/2006/main">
-            <a:off x="2400300" y="6572250"/>
-            <a:ext cx="7810500" cy="152400"/>
+                <a:latin typeface="Aptos"/>
+                <a:ea typeface="Aptos"/>
+                <a:cs typeface="Aptos"/>
+              </a:rPr>
+              <a:t>ICM gives stronger mean validation progress, but its saved rollout does not show a confirmed clear.</a:t>
+            </a:r>
+          </a:p>
+        </p:txBody>
+      </p:sp>
+      <p:sp>
+        <p:nvSpPr>
+          <p:cNvPr id="46" name="">
+            <a:extLst xmlns:a="http://schemas.openxmlformats.org/drawingml/2006/main">
+              <a:ext uri="{FF2B5EF4-FFF2-40B4-BE49-F238E27FC236}">
+                <a16:creationId xmlns:a16="http://schemas.microsoft.com/office/drawing/2014/main" id="{7309EEE6-61E7-4442-8508-9DD1C325A929}"/>
+              </a:ext>
+            </a:extLst>
+          </p:cNvPr>
+          <p:cNvSpPr>
+            <a:spLocks xmlns:a="http://schemas.openxmlformats.org/drawingml/2006/main" noGrp="1"/>
+          </p:cNvSpPr>
+          <p:nvPr/>
+        </p:nvSpPr>
+        <p:spPr>
+          <a:xfrm xmlns:a="http://schemas.openxmlformats.org/drawingml/2006/main">
+            <a:off x="2190750" y="6572250"/>
+            <a:ext cx="8191500" cy="152400"/>
           </a:xfrm>
           <a:prstGeom xmlns:a="http://schemas.openxmlformats.org/drawingml/2006/main" prst="rect">
             <a:avLst/>
@@ -7362,9 +7327,9 @@
                 <a:solidFill>
                   <a:srgbClr val="607084"/>
                 </a:solidFill>
-                <a:latin typeface="Microsoft YaHei"/>
-                <a:ea typeface="Microsoft YaHei"/>
-                <a:cs typeface="Microsoft YaHei"/>
+                <a:latin typeface="Aptos"/>
+                <a:ea typeface="Aptos"/>
+                <a:cs typeface="Aptos"/>
               </a:defRPr>
             </a:pPr>
             <a:r>
@@ -7372,11 +7337,11 @@
                 <a:solidFill>
                   <a:srgbClr val="607084"/>
                 </a:solidFill>
-                <a:latin typeface="Microsoft YaHei"/>
-                <a:ea typeface="Microsoft YaHei"/>
-                <a:cs typeface="Microsoft YaHei"/>
-              </a:rPr>
-              <a:t>Evidence: final_selected_runs_1_1 plus xyDeng/videos; training completion is reported conservatively from x_pos unless flag_get is logged.</a:t>
+                <a:latin typeface="Aptos"/>
+                <a:ea typeface="Aptos"/>
+                <a:cs typeface="Aptos"/>
+              </a:rPr>
+              <a:t>Evidence: final_selected_runs_1_1 and xyDeng/videos. Completion claims are conservative.</a:t>
             </a:r>
           </a:p>
         </p:txBody>
@@ -7384,7 +7349,7 @@
     </p:spTree>
     <p:extLst>
       <p:ext uri="{BB962C8B-B14F-4D97-AF65-F5344CB8AC3E}">
-        <p14:creationId xmlns:p14="http://schemas.microsoft.com/office/powerpoint/2010/main" val="1187310186"/>
+        <p14:creationId xmlns:p14="http://schemas.microsoft.com/office/powerpoint/2010/main" val="1859704097"/>
       </p:ext>
     </p:extLst>
   </p:cSld>
@@ -7415,7 +7380,7 @@
           <p:cNvPr id="1" name="">
             <a:extLst xmlns:a="http://schemas.openxmlformats.org/drawingml/2006/main">
               <a:ext uri="{FF2B5EF4-FFF2-40B4-BE49-F238E27FC236}">
-                <a16:creationId xmlns:a16="http://schemas.microsoft.com/office/drawing/2014/main" id="{A4E727FE-7D74-4F68-9AEC-6279891D486C}"/>
+                <a16:creationId xmlns:a16="http://schemas.microsoft.com/office/drawing/2014/main" id="{68B42EC6-06A6-4361-992B-1029D324AA93}"/>
               </a:ext>
             </a:extLst>
           </p:cNvPr>
@@ -7427,7 +7392,7 @@
         <p:spPr>
           <a:xfrm xmlns:a="http://schemas.openxmlformats.org/drawingml/2006/main">
             <a:off x="381000" y="257175"/>
-            <a:ext cx="971550" cy="295275"/>
+            <a:ext cx="1066800" cy="295275"/>
           </a:xfrm>
           <a:prstGeom xmlns:a="http://schemas.openxmlformats.org/drawingml/2006/main" prst="roundRect">
             <a:avLst>
@@ -7455,25 +7420,25 @@
           <a:lstStyle xmlns:a="http://schemas.openxmlformats.org/drawingml/2006/main"/>
           <a:p xmlns:a="http://schemas.openxmlformats.org/drawingml/2006/main">
             <a:pPr algn="ctr">
-              <a:defRPr sz="1125" b="1">
+              <a:defRPr sz="1050" b="1">
                 <a:solidFill>
                   <a:srgbClr val="FFFFFF"/>
                 </a:solidFill>
-                <a:latin typeface="Microsoft YaHei"/>
-                <a:ea typeface="Microsoft YaHei"/>
-                <a:cs typeface="Microsoft YaHei"/>
-              </a:defRPr>
-            </a:pPr>
-            <a:r>
-              <a:rPr sz="1125" b="1">
+                <a:latin typeface="Aptos"/>
+                <a:ea typeface="Aptos"/>
+                <a:cs typeface="Aptos"/>
+              </a:defRPr>
+            </a:pPr>
+            <a:r>
+              <a:rPr sz="1050" b="1">
                 <a:solidFill>
                   <a:srgbClr val="FFFFFF"/>
                 </a:solidFill>
-                <a:latin typeface="Microsoft YaHei"/>
-                <a:ea typeface="Microsoft YaHei"/>
-                <a:cs typeface="Microsoft YaHei"/>
-              </a:rPr>
-              <a:t>方法 B</a:t>
+                <a:latin typeface="Aptos"/>
+                <a:ea typeface="Aptos"/>
+                <a:cs typeface="Aptos"/>
+              </a:rPr>
+              <a:t>Method B</a:t>
             </a:r>
           </a:p>
         </p:txBody>
@@ -7483,19 +7448,19 @@
           <p:cNvPr id="2" name="">
             <a:extLst xmlns:a="http://schemas.openxmlformats.org/drawingml/2006/main">
               <a:ext uri="{FF2B5EF4-FFF2-40B4-BE49-F238E27FC236}">
-                <a16:creationId xmlns:a16="http://schemas.microsoft.com/office/drawing/2014/main" id="{78E242E6-445C-406D-B8D1-58EAD8E7A5C7}"/>
-              </a:ext>
-            </a:extLst>
-          </p:cNvPr>
-          <p:cNvSpPr>
-            <a:spLocks xmlns:a="http://schemas.openxmlformats.org/drawingml/2006/main" noGrp="1"/>
-          </p:cNvSpPr>
-          <p:nvPr/>
-        </p:nvSpPr>
-        <p:spPr>
-          <a:xfrm xmlns:a="http://schemas.openxmlformats.org/drawingml/2006/main">
-            <a:off x="1524000" y="190500"/>
-            <a:ext cx="7239000" cy="361950"/>
+                <a16:creationId xmlns:a16="http://schemas.microsoft.com/office/drawing/2014/main" id="{B35D23FC-5F46-4D6C-9733-EC0D34B00187}"/>
+              </a:ext>
+            </a:extLst>
+          </p:cNvPr>
+          <p:cNvSpPr>
+            <a:spLocks xmlns:a="http://schemas.openxmlformats.org/drawingml/2006/main" noGrp="1"/>
+          </p:cNvSpPr>
+          <p:nvPr/>
+        </p:nvSpPr>
+        <p:spPr>
+          <a:xfrm xmlns:a="http://schemas.openxmlformats.org/drawingml/2006/main">
+            <a:off x="1619250" y="190500"/>
+            <a:ext cx="7429500" cy="361950"/>
           </a:xfrm>
           <a:prstGeom xmlns:a="http://schemas.openxmlformats.org/drawingml/2006/main" prst="rect">
             <a:avLst/>
@@ -7515,9 +7480,9 @@
                 <a:solidFill>
                   <a:srgbClr val="202938"/>
                 </a:solidFill>
-                <a:latin typeface="Microsoft YaHei"/>
-                <a:ea typeface="Microsoft YaHei"/>
-                <a:cs typeface="Microsoft YaHei"/>
+                <a:latin typeface="Aptos"/>
+                <a:ea typeface="Aptos"/>
+                <a:cs typeface="Aptos"/>
               </a:defRPr>
             </a:pPr>
             <a:r>
@@ -7525,9 +7490,9 @@
                 <a:solidFill>
                   <a:srgbClr val="202938"/>
                 </a:solidFill>
-                <a:latin typeface="Microsoft YaHei"/>
-                <a:ea typeface="Microsoft YaHei"/>
-                <a:cs typeface="Microsoft YaHei"/>
+                <a:latin typeface="Aptos"/>
+                <a:ea typeface="Aptos"/>
+                <a:cs typeface="Aptos"/>
               </a:rPr>
               <a:t>PPO + Disagreement</a:t>
             </a:r>
@@ -7539,19 +7504,19 @@
           <p:cNvPr id="3" name="">
             <a:extLst xmlns:a="http://schemas.openxmlformats.org/drawingml/2006/main">
               <a:ext uri="{FF2B5EF4-FFF2-40B4-BE49-F238E27FC236}">
-                <a16:creationId xmlns:a16="http://schemas.microsoft.com/office/drawing/2014/main" id="{DE47A5A8-B290-4EFC-B455-5074FADEA98D}"/>
-              </a:ext>
-            </a:extLst>
-          </p:cNvPr>
-          <p:cNvSpPr>
-            <a:spLocks xmlns:a="http://schemas.openxmlformats.org/drawingml/2006/main" noGrp="1"/>
-          </p:cNvSpPr>
-          <p:nvPr/>
-        </p:nvSpPr>
-        <p:spPr>
-          <a:xfrm xmlns:a="http://schemas.openxmlformats.org/drawingml/2006/main">
-            <a:off x="1524000" y="609600"/>
-            <a:ext cx="7048500" cy="209550"/>
+                <a16:creationId xmlns:a16="http://schemas.microsoft.com/office/drawing/2014/main" id="{6D943A96-4B5E-4004-A41C-0467898B12E2}"/>
+              </a:ext>
+            </a:extLst>
+          </p:cNvPr>
+          <p:cNvSpPr>
+            <a:spLocks xmlns:a="http://schemas.openxmlformats.org/drawingml/2006/main" noGrp="1"/>
+          </p:cNvSpPr>
+          <p:nvPr/>
+        </p:nvSpPr>
+        <p:spPr>
+          <a:xfrm xmlns:a="http://schemas.openxmlformats.org/drawingml/2006/main">
+            <a:off x="1619250" y="609600"/>
+            <a:ext cx="7239000" cy="209550"/>
           </a:xfrm>
           <a:prstGeom xmlns:a="http://schemas.openxmlformats.org/drawingml/2006/main" prst="rect">
             <a:avLst/>
@@ -7571,9 +7536,9 @@
                 <a:solidFill>
                   <a:srgbClr val="607084"/>
                 </a:solidFill>
-                <a:latin typeface="Microsoft YaHei"/>
-                <a:ea typeface="Microsoft YaHei"/>
-                <a:cs typeface="Microsoft YaHei"/>
+                <a:latin typeface="Aptos"/>
+                <a:ea typeface="Aptos"/>
+                <a:cs typeface="Aptos"/>
               </a:defRPr>
             </a:pPr>
             <a:r>
@@ -7581,11 +7546,11 @@
                 <a:solidFill>
                   <a:srgbClr val="607084"/>
                 </a:solidFill>
-                <a:latin typeface="Microsoft YaHei"/>
-                <a:ea typeface="Microsoft YaHei"/>
-                <a:cs typeface="Microsoft YaHei"/>
-              </a:rPr>
-              <a:t>方法机制、训练设置与内在奖励接入方式</a:t>
+                <a:latin typeface="Aptos"/>
+                <a:ea typeface="Aptos"/>
+                <a:cs typeface="Aptos"/>
+              </a:rPr>
+              <a:t>Method, setup, and intrinsic reward interface</a:t>
             </a:r>
           </a:p>
         </p:txBody>
@@ -7595,7 +7560,7 @@
           <p:cNvPr id="4" name="">
             <a:extLst xmlns:a="http://schemas.openxmlformats.org/drawingml/2006/main">
               <a:ext uri="{FF2B5EF4-FFF2-40B4-BE49-F238E27FC236}">
-                <a16:creationId xmlns:a16="http://schemas.microsoft.com/office/drawing/2014/main" id="{17EBB6F4-8267-4391-AA6D-AEC76BDD1EC5}"/>
+                <a16:creationId xmlns:a16="http://schemas.microsoft.com/office/drawing/2014/main" id="{70705B03-BBEB-4C3B-AA11-5AB1C30DA253}"/>
               </a:ext>
             </a:extLst>
           </p:cNvPr>
@@ -7639,9 +7604,9 @@
                 <a:solidFill>
                   <a:srgbClr val="607084"/>
                 </a:solidFill>
-                <a:latin typeface="Microsoft YaHei"/>
-                <a:ea typeface="Microsoft YaHei"/>
-                <a:cs typeface="Microsoft YaHei"/>
+                <a:latin typeface="Aptos"/>
+                <a:ea typeface="Aptos"/>
+                <a:cs typeface="Aptos"/>
               </a:defRPr>
             </a:pPr>
             <a:r>
@@ -7649,9 +7614,9 @@
                 <a:solidFill>
                   <a:srgbClr val="607084"/>
                 </a:solidFill>
-                <a:latin typeface="Microsoft YaHei"/>
-                <a:ea typeface="Microsoft YaHei"/>
-                <a:cs typeface="Microsoft YaHei"/>
+                <a:latin typeface="Aptos"/>
+                <a:ea typeface="Aptos"/>
+                <a:cs typeface="Aptos"/>
               </a:rPr>
               <a:t>Mario RL / PPO intrinsic rewards</a:t>
             </a:r>
@@ -7662,9 +7627,9 @@
                 <a:solidFill>
                   <a:srgbClr val="607084"/>
                 </a:solidFill>
-                <a:latin typeface="Microsoft YaHei"/>
-                <a:ea typeface="Microsoft YaHei"/>
-                <a:cs typeface="Microsoft YaHei"/>
+                <a:latin typeface="Aptos"/>
+                <a:ea typeface="Aptos"/>
+                <a:cs typeface="Aptos"/>
               </a:defRPr>
             </a:pPr>
             <a:r>
@@ -7672,11 +7637,11 @@
                 <a:solidFill>
                   <a:srgbClr val="607084"/>
                 </a:solidFill>
-                <a:latin typeface="Microsoft YaHei"/>
-                <a:ea typeface="Microsoft YaHei"/>
-                <a:cs typeface="Microsoft YaHei"/>
-              </a:rPr>
-              <a:t>1M steps · seed 1 · 1-1 only</a:t>
+                <a:latin typeface="Aptos"/>
+                <a:ea typeface="Aptos"/>
+                <a:cs typeface="Aptos"/>
+              </a:rPr>
+              <a:t>1M steps | seed 1 | World 1-1</a:t>
             </a:r>
           </a:p>
         </p:txBody>
@@ -7686,7 +7651,7 @@
           <p:cNvPr id="5" name="">
             <a:extLst xmlns:a="http://schemas.openxmlformats.org/drawingml/2006/main">
               <a:ext uri="{FF2B5EF4-FFF2-40B4-BE49-F238E27FC236}">
-                <a16:creationId xmlns:a16="http://schemas.microsoft.com/office/drawing/2014/main" id="{C4AD0681-8B5C-4D86-A6A3-A9213A7C01C7}"/>
+                <a16:creationId xmlns:a16="http://schemas.microsoft.com/office/drawing/2014/main" id="{E677989A-37BC-4825-8DEB-B7E7BEE7F454}"/>
               </a:ext>
             </a:extLst>
           </p:cNvPr>
@@ -7719,7 +7684,7 @@
           <p:cNvPr id="6" name="">
             <a:extLst xmlns:a="http://schemas.openxmlformats.org/drawingml/2006/main">
               <a:ext uri="{FF2B5EF4-FFF2-40B4-BE49-F238E27FC236}">
-                <a16:creationId xmlns:a16="http://schemas.microsoft.com/office/drawing/2014/main" id="{1877BEA9-EBE9-4C89-8BDB-C0B5641B2465}"/>
+                <a16:creationId xmlns:a16="http://schemas.microsoft.com/office/drawing/2014/main" id="{AD8D76DE-A25D-4D2B-A077-EB7C7E40FAAE}"/>
               </a:ext>
             </a:extLst>
           </p:cNvPr>
@@ -7760,7 +7725,7 @@
           <p:cNvPr id="7" name="">
             <a:extLst xmlns:a="http://schemas.openxmlformats.org/drawingml/2006/main">
               <a:ext uri="{FF2B5EF4-FFF2-40B4-BE49-F238E27FC236}">
-                <a16:creationId xmlns:a16="http://schemas.microsoft.com/office/drawing/2014/main" id="{B2190C0C-4AE5-4BF9-98C1-B82BB751DB83}"/>
+                <a16:creationId xmlns:a16="http://schemas.microsoft.com/office/drawing/2014/main" id="{0210B085-64C4-49D8-A95D-F16B4CE2C5A1}"/>
               </a:ext>
             </a:extLst>
           </p:cNvPr>
@@ -7804,9 +7769,9 @@
                 <a:solidFill>
                   <a:srgbClr val="FFFFFF"/>
                 </a:solidFill>
-                <a:latin typeface="Microsoft YaHei"/>
-                <a:ea typeface="Microsoft YaHei"/>
-                <a:cs typeface="Microsoft YaHei"/>
+                <a:latin typeface="Aptos"/>
+                <a:ea typeface="Aptos"/>
+                <a:cs typeface="Aptos"/>
               </a:defRPr>
             </a:pPr>
             <a:r>
@@ -7814,11 +7779,11 @@
                 <a:solidFill>
                   <a:srgbClr val="FFFFFF"/>
                 </a:solidFill>
-                <a:latin typeface="Microsoft YaHei"/>
-                <a:ea typeface="Microsoft YaHei"/>
-                <a:cs typeface="Microsoft YaHei"/>
-              </a:rPr>
-              <a:t>1. 方法定位</a:t>
+                <a:latin typeface="Aptos"/>
+                <a:ea typeface="Aptos"/>
+                <a:cs typeface="Aptos"/>
+              </a:rPr>
+              <a:t>1. Role</a:t>
             </a:r>
           </a:p>
         </p:txBody>
@@ -7828,18 +7793,18 @@
           <p:cNvPr id="8" name="">
             <a:extLst xmlns:a="http://schemas.openxmlformats.org/drawingml/2006/main">
               <a:ext uri="{FF2B5EF4-FFF2-40B4-BE49-F238E27FC236}">
-                <a16:creationId xmlns:a16="http://schemas.microsoft.com/office/drawing/2014/main" id="{F6E100F8-1433-409A-A6DD-826994DCB69D}"/>
-              </a:ext>
-            </a:extLst>
-          </p:cNvPr>
-          <p:cNvSpPr>
-            <a:spLocks xmlns:a="http://schemas.openxmlformats.org/drawingml/2006/main" noGrp="1"/>
-          </p:cNvSpPr>
-          <p:nvPr/>
-        </p:nvSpPr>
-        <p:spPr>
-          <a:xfrm xmlns:a="http://schemas.openxmlformats.org/drawingml/2006/main">
-            <a:off x="781050" y="1647825"/>
+                <a16:creationId xmlns:a16="http://schemas.microsoft.com/office/drawing/2014/main" id="{01363AF3-7EF6-40FD-B9C8-DB315FEBA479}"/>
+              </a:ext>
+            </a:extLst>
+          </p:cNvPr>
+          <p:cNvSpPr>
+            <a:spLocks xmlns:a="http://schemas.openxmlformats.org/drawingml/2006/main" noGrp="1"/>
+          </p:cNvSpPr>
+          <p:nvPr/>
+        </p:nvSpPr>
+        <p:spPr>
+          <a:xfrm xmlns:a="http://schemas.openxmlformats.org/drawingml/2006/main">
+            <a:off x="781050" y="1657350"/>
             <a:ext cx="3048000" cy="838200"/>
           </a:xfrm>
           <a:prstGeom xmlns:a="http://schemas.openxmlformats.org/drawingml/2006/main" prst="rect">
@@ -7860,9 +7825,9 @@
                 <a:solidFill>
                   <a:srgbClr val="202938"/>
                 </a:solidFill>
-                <a:latin typeface="Microsoft YaHei"/>
-                <a:ea typeface="Microsoft YaHei"/>
-                <a:cs typeface="Microsoft YaHei"/>
+                <a:latin typeface="Aptos"/>
+                <a:ea typeface="Aptos"/>
+                <a:cs typeface="Aptos"/>
               </a:defRPr>
             </a:pPr>
             <a:r>
@@ -7870,9 +7835,9 @@
                 <a:solidFill>
                   <a:srgbClr val="202938"/>
                 </a:solidFill>
-                <a:latin typeface="Microsoft YaHei"/>
-                <a:ea typeface="Microsoft YaHei"/>
-                <a:cs typeface="Microsoft YaHei"/>
+                <a:latin typeface="Aptos"/>
+                <a:ea typeface="Aptos"/>
+                <a:cs typeface="Aptos"/>
               </a:rPr>
               <a:t>Trains an ensemble of forward models.</a:t>
             </a:r>
@@ -7883,9 +7848,9 @@
                 <a:solidFill>
                   <a:srgbClr val="202938"/>
                 </a:solidFill>
-                <a:latin typeface="Microsoft YaHei"/>
-                <a:ea typeface="Microsoft YaHei"/>
-                <a:cs typeface="Microsoft YaHei"/>
+                <a:latin typeface="Aptos"/>
+                <a:ea typeface="Aptos"/>
+                <a:cs typeface="Aptos"/>
               </a:defRPr>
             </a:pPr>
             <a:r>
@@ -7893,11 +7858,11 @@
                 <a:solidFill>
                   <a:srgbClr val="202938"/>
                 </a:solidFill>
-                <a:latin typeface="Microsoft YaHei"/>
-                <a:ea typeface="Microsoft YaHei"/>
-                <a:cs typeface="Microsoft YaHei"/>
-              </a:rPr>
-              <a:t>Intrinsic reward is prediction variance / disagreement.</a:t>
+                <a:latin typeface="Aptos"/>
+                <a:ea typeface="Aptos"/>
+                <a:cs typeface="Aptos"/>
+              </a:rPr>
+              <a:t>Intrinsic reward is prediction disagreement.</a:t>
             </a:r>
           </a:p>
           <a:p xmlns:a="http://schemas.openxmlformats.org/drawingml/2006/main">
@@ -7906,9 +7871,9 @@
                 <a:solidFill>
                   <a:srgbClr val="202938"/>
                 </a:solidFill>
-                <a:latin typeface="Microsoft YaHei"/>
-                <a:ea typeface="Microsoft YaHei"/>
-                <a:cs typeface="Microsoft YaHei"/>
+                <a:latin typeface="Aptos"/>
+                <a:ea typeface="Aptos"/>
+                <a:cs typeface="Aptos"/>
               </a:defRPr>
             </a:pPr>
             <a:r>
@@ -7916,11 +7881,11 @@
                 <a:solidFill>
                   <a:srgbClr val="202938"/>
                 </a:solidFill>
-                <a:latin typeface="Microsoft YaHei"/>
-                <a:ea typeface="Microsoft YaHei"/>
-                <a:cs typeface="Microsoft YaHei"/>
-              </a:rPr>
-              <a:t>PPO is pushed toward states with high model uncertainty.</a:t>
+                <a:latin typeface="Aptos"/>
+                <a:ea typeface="Aptos"/>
+                <a:cs typeface="Aptos"/>
+              </a:rPr>
+              <a:t>PPO explores states with high model uncertainty.</a:t>
             </a:r>
           </a:p>
         </p:txBody>
@@ -7930,7 +7895,7 @@
           <p:cNvPr id="9" name="">
             <a:extLst xmlns:a="http://schemas.openxmlformats.org/drawingml/2006/main">
               <a:ext uri="{FF2B5EF4-FFF2-40B4-BE49-F238E27FC236}">
-                <a16:creationId xmlns:a16="http://schemas.microsoft.com/office/drawing/2014/main" id="{AB97AE57-A422-4733-A487-5DFFFE69583B}"/>
+                <a16:creationId xmlns:a16="http://schemas.microsoft.com/office/drawing/2014/main" id="{D6092ED5-096E-4228-8AD7-81D46F1B6B91}"/>
               </a:ext>
             </a:extLst>
           </p:cNvPr>
@@ -7962,9 +7927,9 @@
                 <a:solidFill>
                   <a:srgbClr val="607084"/>
                 </a:solidFill>
-                <a:latin typeface="Microsoft YaHei"/>
-                <a:ea typeface="Microsoft YaHei"/>
-                <a:cs typeface="Microsoft YaHei"/>
+                <a:latin typeface="Aptos"/>
+                <a:ea typeface="Aptos"/>
+                <a:cs typeface="Aptos"/>
               </a:defRPr>
             </a:pPr>
             <a:r>
@@ -7972,11 +7937,11 @@
                 <a:solidFill>
                   <a:srgbClr val="607084"/>
                 </a:solidFill>
-                <a:latin typeface="Microsoft YaHei"/>
-                <a:ea typeface="Microsoft YaHei"/>
-                <a:cs typeface="Microsoft YaHei"/>
-              </a:rPr>
-              <a:t>共同 backbone: PPO + CNN Actor-Critic；方法差异集中在 intrinsic reward module.</a:t>
+                <a:latin typeface="Aptos"/>
+                <a:ea typeface="Aptos"/>
+                <a:cs typeface="Aptos"/>
+              </a:rPr>
+              <a:t>Shared backbone: PPO + CNN Actor-Critic. Only the intrinsic reward module changes.</a:t>
             </a:r>
           </a:p>
         </p:txBody>
@@ -7986,7 +7951,7 @@
           <p:cNvPr id="10" name="">
             <a:extLst xmlns:a="http://schemas.openxmlformats.org/drawingml/2006/main">
               <a:ext uri="{FF2B5EF4-FFF2-40B4-BE49-F238E27FC236}">
-                <a16:creationId xmlns:a16="http://schemas.microsoft.com/office/drawing/2014/main" id="{755BEAF6-CE1D-4930-A852-DBAB99564F81}"/>
+                <a16:creationId xmlns:a16="http://schemas.microsoft.com/office/drawing/2014/main" id="{45D22926-17F0-4CCC-BF3D-A545E5C86636}"/>
               </a:ext>
             </a:extLst>
           </p:cNvPr>
@@ -8027,7 +7992,7 @@
           <p:cNvPr id="11" name="">
             <a:extLst xmlns:a="http://schemas.openxmlformats.org/drawingml/2006/main">
               <a:ext uri="{FF2B5EF4-FFF2-40B4-BE49-F238E27FC236}">
-                <a16:creationId xmlns:a16="http://schemas.microsoft.com/office/drawing/2014/main" id="{C7A810DE-59BB-4937-BF57-774467F0CCF4}"/>
+                <a16:creationId xmlns:a16="http://schemas.microsoft.com/office/drawing/2014/main" id="{DEC843EB-5D13-403E-A288-41D735F19102}"/>
               </a:ext>
             </a:extLst>
           </p:cNvPr>
@@ -8039,7 +8004,7 @@
         <p:spPr>
           <a:xfrm xmlns:a="http://schemas.openxmlformats.org/drawingml/2006/main">
             <a:off x="4591050" y="1228725"/>
-            <a:ext cx="1143000" cy="285750"/>
+            <a:ext cx="1238250" cy="285750"/>
           </a:xfrm>
           <a:prstGeom xmlns:a="http://schemas.openxmlformats.org/drawingml/2006/main" prst="roundRect">
             <a:avLst>
@@ -8071,9 +8036,9 @@
                 <a:solidFill>
                   <a:srgbClr val="FFFFFF"/>
                 </a:solidFill>
-                <a:latin typeface="Microsoft YaHei"/>
-                <a:ea typeface="Microsoft YaHei"/>
-                <a:cs typeface="Microsoft YaHei"/>
+                <a:latin typeface="Aptos"/>
+                <a:ea typeface="Aptos"/>
+                <a:cs typeface="Aptos"/>
               </a:defRPr>
             </a:pPr>
             <a:r>
@@ -8081,11 +8046,11 @@
                 <a:solidFill>
                   <a:srgbClr val="FFFFFF"/>
                 </a:solidFill>
-                <a:latin typeface="Microsoft YaHei"/>
-                <a:ea typeface="Microsoft YaHei"/>
-                <a:cs typeface="Microsoft YaHei"/>
-              </a:rPr>
-              <a:t>2. 关键超参数</a:t>
+                <a:latin typeface="Aptos"/>
+                <a:ea typeface="Aptos"/>
+                <a:cs typeface="Aptos"/>
+              </a:rPr>
+              <a:t>2. Key settings</a:t>
             </a:r>
           </a:p>
         </p:txBody>
@@ -8120,11 +8085,11 @@
                           <a:solidFill>
                             <a:srgbClr val="202938"/>
                           </a:solidFill>
-                          <a:latin typeface="Microsoft YaHei"/>
-                          <a:ea typeface="Microsoft YaHei"/>
-                          <a:cs typeface="Microsoft YaHei"/>
+                          <a:latin typeface="Aptos"/>
+                          <a:ea typeface="Aptos"/>
+                          <a:cs typeface="Aptos"/>
                         </a:rPr>
-                        <a:t>项</a:t>
+                        <a:t>Item</a:t>
                       </a:r>
                     </a:p>
                   </a:txBody>
@@ -8145,11 +8110,11 @@
                           <a:solidFill>
                             <a:srgbClr val="202938"/>
                           </a:solidFill>
-                          <a:latin typeface="Microsoft YaHei"/>
-                          <a:ea typeface="Microsoft YaHei"/>
-                          <a:cs typeface="Microsoft YaHei"/>
+                          <a:latin typeface="Aptos"/>
+                          <a:ea typeface="Aptos"/>
+                          <a:cs typeface="Aptos"/>
                         </a:rPr>
-                        <a:t>值</a:t>
+                        <a:t>Value</a:t>
                       </a:r>
                     </a:p>
                   </a:txBody>
@@ -8172,9 +8137,9 @@
                           <a:solidFill>
                             <a:srgbClr val="202938"/>
                           </a:solidFill>
-                          <a:latin typeface="Microsoft YaHei"/>
-                          <a:ea typeface="Microsoft YaHei"/>
-                          <a:cs typeface="Microsoft YaHei"/>
+                          <a:latin typeface="Aptos"/>
+                          <a:ea typeface="Aptos"/>
+                          <a:cs typeface="Aptos"/>
                         </a:rPr>
                         <a:t>Intrinsic type</a:t>
                       </a:r>
@@ -8216,9 +8181,9 @@
                           <a:solidFill>
                             <a:srgbClr val="202938"/>
                           </a:solidFill>
-                          <a:latin typeface="Microsoft YaHei"/>
-                          <a:ea typeface="Microsoft YaHei"/>
-                          <a:cs typeface="Microsoft YaHei"/>
+                          <a:latin typeface="Aptos"/>
+                          <a:ea typeface="Aptos"/>
+                          <a:cs typeface="Aptos"/>
                         </a:rPr>
                         <a:t>beta</a:t>
                       </a:r>
@@ -8260,9 +8225,9 @@
                           <a:solidFill>
                             <a:srgbClr val="202938"/>
                           </a:solidFill>
-                          <a:latin typeface="Microsoft YaHei"/>
-                          <a:ea typeface="Microsoft YaHei"/>
-                          <a:cs typeface="Microsoft YaHei"/>
+                          <a:latin typeface="Aptos"/>
+                          <a:ea typeface="Aptos"/>
+                          <a:cs typeface="Aptos"/>
                         </a:rPr>
                         <a:t>ensemble_size</a:t>
                       </a:r>
@@ -8304,9 +8269,9 @@
                           <a:solidFill>
                             <a:srgbClr val="202938"/>
                           </a:solidFill>
-                          <a:latin typeface="Microsoft YaHei"/>
-                          <a:ea typeface="Microsoft YaHei"/>
-                          <a:cs typeface="Microsoft YaHei"/>
+                          <a:latin typeface="Aptos"/>
+                          <a:ea typeface="Aptos"/>
+                          <a:cs typeface="Aptos"/>
                         </a:rPr>
                         <a:t>latent_dim</a:t>
                       </a:r>
@@ -8348,9 +8313,9 @@
                           <a:solidFill>
                             <a:srgbClr val="202938"/>
                           </a:solidFill>
-                          <a:latin typeface="Microsoft YaHei"/>
-                          <a:ea typeface="Microsoft YaHei"/>
-                          <a:cs typeface="Microsoft YaHei"/>
+                          <a:latin typeface="Aptos"/>
+                          <a:ea typeface="Aptos"/>
+                          <a:cs typeface="Aptos"/>
                         </a:rPr>
                         <a:t>batch/update</a:t>
                       </a:r>
@@ -8389,7 +8354,7 @@
           <p:cNvPr id="13" name="">
             <a:extLst xmlns:a="http://schemas.openxmlformats.org/drawingml/2006/main">
               <a:ext uri="{FF2B5EF4-FFF2-40B4-BE49-F238E27FC236}">
-                <a16:creationId xmlns:a16="http://schemas.microsoft.com/office/drawing/2014/main" id="{FF42C975-4DCC-465B-BB35-5B12BC6553DD}"/>
+                <a16:creationId xmlns:a16="http://schemas.microsoft.com/office/drawing/2014/main" id="{03661867-C13E-454D-B085-3623484839F3}"/>
               </a:ext>
             </a:extLst>
           </p:cNvPr>
@@ -8430,7 +8395,7 @@
           <p:cNvPr id="14" name="">
             <a:extLst xmlns:a="http://schemas.openxmlformats.org/drawingml/2006/main">
               <a:ext uri="{FF2B5EF4-FFF2-40B4-BE49-F238E27FC236}">
-                <a16:creationId xmlns:a16="http://schemas.microsoft.com/office/drawing/2014/main" id="{6D68A3DF-16D8-42A1-8257-17D1537961D7}"/>
+                <a16:creationId xmlns:a16="http://schemas.microsoft.com/office/drawing/2014/main" id="{C7C1FBED-CF6E-42C1-988B-B6A0270DA267}"/>
               </a:ext>
             </a:extLst>
           </p:cNvPr>
@@ -8474,9 +8439,9 @@
                 <a:solidFill>
                   <a:srgbClr val="FFFFFF"/>
                 </a:solidFill>
-                <a:latin typeface="Microsoft YaHei"/>
-                <a:ea typeface="Microsoft YaHei"/>
-                <a:cs typeface="Microsoft YaHei"/>
+                <a:latin typeface="Aptos"/>
+                <a:ea typeface="Aptos"/>
+                <a:cs typeface="Aptos"/>
               </a:defRPr>
             </a:pPr>
             <a:r>
@@ -8484,11 +8449,11 @@
                 <a:solidFill>
                   <a:srgbClr val="FFFFFF"/>
                 </a:solidFill>
-                <a:latin typeface="Microsoft YaHei"/>
-                <a:ea typeface="Microsoft YaHei"/>
-                <a:cs typeface="Microsoft YaHei"/>
-              </a:rPr>
-              <a:t>3. 实验协议</a:t>
+                <a:latin typeface="Aptos"/>
+                <a:ea typeface="Aptos"/>
+                <a:cs typeface="Aptos"/>
+              </a:rPr>
+              <a:t>3. Protocol</a:t>
             </a:r>
           </a:p>
         </p:txBody>
@@ -8523,11 +8488,11 @@
                           <a:solidFill>
                             <a:srgbClr val="202938"/>
                           </a:solidFill>
-                          <a:latin typeface="Microsoft YaHei"/>
-                          <a:ea typeface="Microsoft YaHei"/>
-                          <a:cs typeface="Microsoft YaHei"/>
+                          <a:latin typeface="Aptos"/>
+                          <a:ea typeface="Aptos"/>
+                          <a:cs typeface="Aptos"/>
                         </a:rPr>
-                        <a:t>项</a:t>
+                        <a:t>Item</a:t>
                       </a:r>
                     </a:p>
                   </a:txBody>
@@ -8548,11 +8513,11 @@
                           <a:solidFill>
                             <a:srgbClr val="202938"/>
                           </a:solidFill>
-                          <a:latin typeface="Microsoft YaHei"/>
-                          <a:ea typeface="Microsoft YaHei"/>
-                          <a:cs typeface="Microsoft YaHei"/>
+                          <a:latin typeface="Aptos"/>
+                          <a:ea typeface="Aptos"/>
+                          <a:cs typeface="Aptos"/>
                         </a:rPr>
-                        <a:t>值</a:t>
+                        <a:t>Value</a:t>
                       </a:r>
                     </a:p>
                   </a:txBody>
@@ -8575,11 +8540,11 @@
                           <a:solidFill>
                             <a:srgbClr val="202938"/>
                           </a:solidFill>
-                          <a:latin typeface="Microsoft YaHei"/>
-                          <a:ea typeface="Microsoft YaHei"/>
-                          <a:cs typeface="Microsoft YaHei"/>
+                          <a:latin typeface="Aptos"/>
+                          <a:ea typeface="Aptos"/>
+                          <a:cs typeface="Aptos"/>
                         </a:rPr>
-                        <a:t>训练环境</a:t>
+                        <a:t>Train env</a:t>
                       </a:r>
                     </a:p>
                   </a:txBody>
@@ -8619,11 +8584,11 @@
                           <a:solidFill>
                             <a:srgbClr val="202938"/>
                           </a:solidFill>
-                          <a:latin typeface="Microsoft YaHei"/>
-                          <a:ea typeface="Microsoft YaHei"/>
-                          <a:cs typeface="Microsoft YaHei"/>
+                          <a:latin typeface="Aptos"/>
+                          <a:ea typeface="Aptos"/>
+                          <a:cs typeface="Aptos"/>
                         </a:rPr>
-                        <a:t>输入</a:t>
+                        <a:t>Input</a:t>
                       </a:r>
                     </a:p>
                   </a:txBody>
@@ -8663,11 +8628,11 @@
                           <a:solidFill>
                             <a:srgbClr val="202938"/>
                           </a:solidFill>
-                          <a:latin typeface="Microsoft YaHei"/>
-                          <a:ea typeface="Microsoft YaHei"/>
-                          <a:cs typeface="Microsoft YaHei"/>
+                          <a:latin typeface="Aptos"/>
+                          <a:ea typeface="Aptos"/>
+                          <a:cs typeface="Aptos"/>
                         </a:rPr>
-                        <a:t>动作</a:t>
+                        <a:t>Actions</a:t>
                       </a:r>
                     </a:p>
                   </a:txBody>
@@ -8707,11 +8672,11 @@
                           <a:solidFill>
                             <a:srgbClr val="202938"/>
                           </a:solidFill>
-                          <a:latin typeface="Microsoft YaHei"/>
-                          <a:ea typeface="Microsoft YaHei"/>
-                          <a:cs typeface="Microsoft YaHei"/>
+                          <a:latin typeface="Aptos"/>
+                          <a:ea typeface="Aptos"/>
+                          <a:cs typeface="Aptos"/>
                         </a:rPr>
-                        <a:t>训练步数</a:t>
+                        <a:t>Budget</a:t>
                       </a:r>
                     </a:p>
                   </a:txBody>
@@ -8751,11 +8716,11 @@
                           <a:solidFill>
                             <a:srgbClr val="202938"/>
                           </a:solidFill>
-                          <a:latin typeface="Microsoft YaHei"/>
-                          <a:ea typeface="Microsoft YaHei"/>
-                          <a:cs typeface="Microsoft YaHei"/>
+                          <a:latin typeface="Aptos"/>
+                          <a:ea typeface="Aptos"/>
+                          <a:cs typeface="Aptos"/>
                         </a:rPr>
-                        <a:t>评估</a:t>
+                        <a:t>Eval</a:t>
                       </a:r>
                     </a:p>
                   </a:txBody>
@@ -8795,11 +8760,11 @@
                           <a:solidFill>
                             <a:srgbClr val="202938"/>
                           </a:solidFill>
-                          <a:latin typeface="Microsoft YaHei"/>
-                          <a:ea typeface="Microsoft YaHei"/>
-                          <a:cs typeface="Microsoft YaHei"/>
+                          <a:latin typeface="Aptos"/>
+                          <a:ea typeface="Aptos"/>
+                          <a:cs typeface="Aptos"/>
                         </a:rPr>
-                        <a:t>seed</a:t>
+                        <a:t>Seed</a:t>
                       </a:r>
                     </a:p>
                   </a:txBody>
@@ -8836,7 +8801,7 @@
           <p:cNvPr id="16" name="">
             <a:extLst xmlns:a="http://schemas.openxmlformats.org/drawingml/2006/main">
               <a:ext uri="{FF2B5EF4-FFF2-40B4-BE49-F238E27FC236}">
-                <a16:creationId xmlns:a16="http://schemas.microsoft.com/office/drawing/2014/main" id="{8D67AABD-CFB9-4D4B-8EF8-59EB072EE7D9}"/>
+                <a16:creationId xmlns:a16="http://schemas.microsoft.com/office/drawing/2014/main" id="{4BE1A863-F23F-454B-A564-4ED7C8C32339}"/>
               </a:ext>
             </a:extLst>
           </p:cNvPr>
@@ -8877,7 +8842,7 @@
           <p:cNvPr id="17" name="">
             <a:extLst xmlns:a="http://schemas.openxmlformats.org/drawingml/2006/main">
               <a:ext uri="{FF2B5EF4-FFF2-40B4-BE49-F238E27FC236}">
-                <a16:creationId xmlns:a16="http://schemas.microsoft.com/office/drawing/2014/main" id="{0AFE3088-7628-422D-8C2E-12FFA06D831D}"/>
+                <a16:creationId xmlns:a16="http://schemas.microsoft.com/office/drawing/2014/main" id="{ADC98EE0-BE20-48A2-A5D1-4B004B8DB11E}"/>
               </a:ext>
             </a:extLst>
           </p:cNvPr>
@@ -8909,9 +8874,9 @@
                 <a:solidFill>
                   <a:srgbClr val="6243B6"/>
                 </a:solidFill>
-                <a:latin typeface="Microsoft YaHei"/>
-                <a:ea typeface="Microsoft YaHei"/>
-                <a:cs typeface="Microsoft YaHei"/>
+                <a:latin typeface="Aptos"/>
+                <a:ea typeface="Aptos"/>
+                <a:cs typeface="Aptos"/>
               </a:defRPr>
             </a:pPr>
             <a:r>
@@ -8919,11 +8884,11 @@
                 <a:solidFill>
                   <a:srgbClr val="6243B6"/>
                 </a:solidFill>
-                <a:latin typeface="Microsoft YaHei"/>
-                <a:ea typeface="Microsoft YaHei"/>
-                <a:cs typeface="Microsoft YaHei"/>
-              </a:rPr>
-              <a:t>训练数据流</a:t>
+                <a:latin typeface="Aptos"/>
+                <a:ea typeface="Aptos"/>
+                <a:cs typeface="Aptos"/>
+              </a:rPr>
+              <a:t>Training flow</a:t>
             </a:r>
           </a:p>
         </p:txBody>
@@ -8933,7 +8898,7 @@
           <p:cNvPr id="18" name="">
             <a:extLst xmlns:a="http://schemas.openxmlformats.org/drawingml/2006/main">
               <a:ext uri="{FF2B5EF4-FFF2-40B4-BE49-F238E27FC236}">
-                <a16:creationId xmlns:a16="http://schemas.microsoft.com/office/drawing/2014/main" id="{ED11D5CB-41EA-4E4C-874E-D621A1B6A611}"/>
+                <a16:creationId xmlns:a16="http://schemas.microsoft.com/office/drawing/2014/main" id="{63489CF7-76D2-4956-ADBF-54192F505AD5}"/>
               </a:ext>
             </a:extLst>
           </p:cNvPr>
@@ -8977,9 +8942,9 @@
                 <a:solidFill>
                   <a:srgbClr val="202938"/>
                 </a:solidFill>
-                <a:latin typeface="Microsoft YaHei"/>
-                <a:ea typeface="Microsoft YaHei"/>
-                <a:cs typeface="Microsoft YaHei"/>
+                <a:latin typeface="Aptos"/>
+                <a:ea typeface="Aptos"/>
+                <a:cs typeface="Aptos"/>
               </a:defRPr>
             </a:pPr>
             <a:r>
@@ -8987,9 +8952,9 @@
                 <a:solidFill>
                   <a:srgbClr val="202938"/>
                 </a:solidFill>
-                <a:latin typeface="Microsoft YaHei"/>
-                <a:ea typeface="Microsoft YaHei"/>
-                <a:cs typeface="Microsoft YaHei"/>
+                <a:latin typeface="Aptos"/>
+                <a:ea typeface="Aptos"/>
+                <a:cs typeface="Aptos"/>
               </a:rPr>
               <a:t>Observation</a:t>
             </a:r>
@@ -9000,9 +8965,9 @@
                 <a:solidFill>
                   <a:srgbClr val="202938"/>
                 </a:solidFill>
-                <a:latin typeface="Microsoft YaHei"/>
-                <a:ea typeface="Microsoft YaHei"/>
-                <a:cs typeface="Microsoft YaHei"/>
+                <a:latin typeface="Aptos"/>
+                <a:ea typeface="Aptos"/>
+                <a:cs typeface="Aptos"/>
               </a:defRPr>
             </a:pPr>
             <a:r>
@@ -9010,11 +8975,11 @@
                 <a:solidFill>
                   <a:srgbClr val="202938"/>
                 </a:solidFill>
-                <a:latin typeface="Microsoft YaHei"/>
-                <a:ea typeface="Microsoft YaHei"/>
-                <a:cs typeface="Microsoft YaHei"/>
-              </a:rPr>
-              <a:t>4×84×84</a:t>
+                <a:latin typeface="Aptos"/>
+                <a:ea typeface="Aptos"/>
+                <a:cs typeface="Aptos"/>
+              </a:rPr>
+              <a:t>4x84x84</a:t>
             </a:r>
           </a:p>
         </p:txBody>
@@ -9024,7 +8989,7 @@
           <p:cNvPr id="19" name="">
             <a:extLst xmlns:a="http://schemas.openxmlformats.org/drawingml/2006/main">
               <a:ext uri="{FF2B5EF4-FFF2-40B4-BE49-F238E27FC236}">
-                <a16:creationId xmlns:a16="http://schemas.microsoft.com/office/drawing/2014/main" id="{2759A805-0B29-45F0-B918-C4B4AA0DF0F6}"/>
+                <a16:creationId xmlns:a16="http://schemas.microsoft.com/office/drawing/2014/main" id="{E500E80D-BA08-41F7-A2CF-0F53B2C72338}"/>
               </a:ext>
             </a:extLst>
           </p:cNvPr>
@@ -9068,9 +9033,9 @@
                 <a:solidFill>
                   <a:srgbClr val="202938"/>
                 </a:solidFill>
-                <a:latin typeface="Microsoft YaHei"/>
-                <a:ea typeface="Microsoft YaHei"/>
-                <a:cs typeface="Microsoft YaHei"/>
+                <a:latin typeface="Aptos"/>
+                <a:ea typeface="Aptos"/>
+                <a:cs typeface="Aptos"/>
               </a:defRPr>
             </a:pPr>
             <a:r>
@@ -9078,9 +9043,9 @@
                 <a:solidFill>
                   <a:srgbClr val="202938"/>
                 </a:solidFill>
-                <a:latin typeface="Microsoft YaHei"/>
-                <a:ea typeface="Microsoft YaHei"/>
-                <a:cs typeface="Microsoft YaHei"/>
+                <a:latin typeface="Aptos"/>
+                <a:ea typeface="Aptos"/>
+                <a:cs typeface="Aptos"/>
               </a:rPr>
               <a:t>CNN</a:t>
             </a:r>
@@ -9091,9 +9056,9 @@
                 <a:solidFill>
                   <a:srgbClr val="202938"/>
                 </a:solidFill>
-                <a:latin typeface="Microsoft YaHei"/>
-                <a:ea typeface="Microsoft YaHei"/>
-                <a:cs typeface="Microsoft YaHei"/>
+                <a:latin typeface="Aptos"/>
+                <a:ea typeface="Aptos"/>
+                <a:cs typeface="Aptos"/>
               </a:defRPr>
             </a:pPr>
             <a:r>
@@ -9101,9 +9066,9 @@
                 <a:solidFill>
                   <a:srgbClr val="202938"/>
                 </a:solidFill>
-                <a:latin typeface="Microsoft YaHei"/>
-                <a:ea typeface="Microsoft YaHei"/>
-                <a:cs typeface="Microsoft YaHei"/>
+                <a:latin typeface="Aptos"/>
+                <a:ea typeface="Aptos"/>
+                <a:cs typeface="Aptos"/>
               </a:rPr>
               <a:t>Actor-Critic</a:t>
             </a:r>
@@ -9115,7 +9080,7 @@
           <p:cNvPr id="20" name="">
             <a:extLst xmlns:a="http://schemas.openxmlformats.org/drawingml/2006/main">
               <a:ext uri="{FF2B5EF4-FFF2-40B4-BE49-F238E27FC236}">
-                <a16:creationId xmlns:a16="http://schemas.microsoft.com/office/drawing/2014/main" id="{6B28BCC1-B922-42DB-97CB-7823517886E2}"/>
+                <a16:creationId xmlns:a16="http://schemas.microsoft.com/office/drawing/2014/main" id="{9BFBE5E0-A0FA-46FC-98F6-B37F7CCE147E}"/>
               </a:ext>
             </a:extLst>
           </p:cNvPr>
@@ -9159,9 +9124,9 @@
                 <a:solidFill>
                   <a:srgbClr val="202938"/>
                 </a:solidFill>
-                <a:latin typeface="Microsoft YaHei"/>
-                <a:ea typeface="Microsoft YaHei"/>
-                <a:cs typeface="Microsoft YaHei"/>
+                <a:latin typeface="Aptos"/>
+                <a:ea typeface="Aptos"/>
+                <a:cs typeface="Aptos"/>
               </a:defRPr>
             </a:pPr>
             <a:r>
@@ -9169,9 +9134,9 @@
                 <a:solidFill>
                   <a:srgbClr val="202938"/>
                 </a:solidFill>
-                <a:latin typeface="Microsoft YaHei"/>
-                <a:ea typeface="Microsoft YaHei"/>
-                <a:cs typeface="Microsoft YaHei"/>
+                <a:latin typeface="Aptos"/>
+                <a:ea typeface="Aptos"/>
+                <a:cs typeface="Aptos"/>
               </a:rPr>
               <a:t>Policy / Value</a:t>
             </a:r>
@@ -9182,9 +9147,9 @@
                 <a:solidFill>
                   <a:srgbClr val="202938"/>
                 </a:solidFill>
-                <a:latin typeface="Microsoft YaHei"/>
-                <a:ea typeface="Microsoft YaHei"/>
-                <a:cs typeface="Microsoft YaHei"/>
+                <a:latin typeface="Aptos"/>
+                <a:ea typeface="Aptos"/>
+                <a:cs typeface="Aptos"/>
               </a:defRPr>
             </a:pPr>
             <a:r>
@@ -9192,9 +9157,9 @@
                 <a:solidFill>
                   <a:srgbClr val="202938"/>
                 </a:solidFill>
-                <a:latin typeface="Microsoft YaHei"/>
-                <a:ea typeface="Microsoft YaHei"/>
-                <a:cs typeface="Microsoft YaHei"/>
+                <a:latin typeface="Aptos"/>
+                <a:ea typeface="Aptos"/>
+                <a:cs typeface="Aptos"/>
               </a:rPr>
               <a:t>PPO update</a:t>
             </a:r>
@@ -9206,7 +9171,7 @@
           <p:cNvPr id="21" name="">
             <a:extLst xmlns:a="http://schemas.openxmlformats.org/drawingml/2006/main">
               <a:ext uri="{FF2B5EF4-FFF2-40B4-BE49-F238E27FC236}">
-                <a16:creationId xmlns:a16="http://schemas.microsoft.com/office/drawing/2014/main" id="{28EAED33-4207-4A37-98CD-C389BFD8DDD9}"/>
+                <a16:creationId xmlns:a16="http://schemas.microsoft.com/office/drawing/2014/main" id="{3A7AA8EF-913D-49E6-B93C-8BAEFD5E43AA}"/>
               </a:ext>
             </a:extLst>
           </p:cNvPr>
@@ -9250,9 +9215,9 @@
                 <a:solidFill>
                   <a:srgbClr val="202938"/>
                 </a:solidFill>
-                <a:latin typeface="Microsoft YaHei"/>
-                <a:ea typeface="Microsoft YaHei"/>
-                <a:cs typeface="Microsoft YaHei"/>
+                <a:latin typeface="Aptos"/>
+                <a:ea typeface="Aptos"/>
+                <a:cs typeface="Aptos"/>
               </a:defRPr>
             </a:pPr>
             <a:r>
@@ -9260,9 +9225,9 @@
                 <a:solidFill>
                   <a:srgbClr val="202938"/>
                 </a:solidFill>
-                <a:latin typeface="Microsoft YaHei"/>
-                <a:ea typeface="Microsoft YaHei"/>
-                <a:cs typeface="Microsoft YaHei"/>
+                <a:latin typeface="Aptos"/>
+                <a:ea typeface="Aptos"/>
+                <a:cs typeface="Aptos"/>
               </a:rPr>
               <a:t>Disagreement</a:t>
             </a:r>
@@ -9273,9 +9238,9 @@
                 <a:solidFill>
                   <a:srgbClr val="202938"/>
                 </a:solidFill>
-                <a:latin typeface="Microsoft YaHei"/>
-                <a:ea typeface="Microsoft YaHei"/>
-                <a:cs typeface="Microsoft YaHei"/>
+                <a:latin typeface="Aptos"/>
+                <a:ea typeface="Aptos"/>
+                <a:cs typeface="Aptos"/>
               </a:defRPr>
             </a:pPr>
             <a:r>
@@ -9283,9 +9248,9 @@
                 <a:solidFill>
                   <a:srgbClr val="202938"/>
                 </a:solidFill>
-                <a:latin typeface="Microsoft YaHei"/>
-                <a:ea typeface="Microsoft YaHei"/>
-                <a:cs typeface="Microsoft YaHei"/>
+                <a:latin typeface="Aptos"/>
+                <a:ea typeface="Aptos"/>
+                <a:cs typeface="Aptos"/>
               </a:rPr>
               <a:t>intrinsic module</a:t>
             </a:r>
@@ -9297,7 +9262,7 @@
           <p:cNvPr id="22" name="">
             <a:extLst xmlns:a="http://schemas.openxmlformats.org/drawingml/2006/main">
               <a:ext uri="{FF2B5EF4-FFF2-40B4-BE49-F238E27FC236}">
-                <a16:creationId xmlns:a16="http://schemas.microsoft.com/office/drawing/2014/main" id="{A89B3839-4982-4603-BF3D-D14A883AF2EF}"/>
+                <a16:creationId xmlns:a16="http://schemas.microsoft.com/office/drawing/2014/main" id="{486ED785-5678-42ED-9731-629C7187EC67}"/>
               </a:ext>
             </a:extLst>
           </p:cNvPr>
@@ -9341,9 +9306,9 @@
                 <a:solidFill>
                   <a:srgbClr val="202938"/>
                 </a:solidFill>
-                <a:latin typeface="Microsoft YaHei"/>
-                <a:ea typeface="Microsoft YaHei"/>
-                <a:cs typeface="Microsoft YaHei"/>
+                <a:latin typeface="Aptos"/>
+                <a:ea typeface="Aptos"/>
+                <a:cs typeface="Aptos"/>
               </a:defRPr>
             </a:pPr>
             <a:r>
@@ -9351,9 +9316,9 @@
                 <a:solidFill>
                   <a:srgbClr val="202938"/>
                 </a:solidFill>
-                <a:latin typeface="Microsoft YaHei"/>
-                <a:ea typeface="Microsoft YaHei"/>
-                <a:cs typeface="Microsoft YaHei"/>
+                <a:latin typeface="Aptos"/>
+                <a:ea typeface="Aptos"/>
+                <a:cs typeface="Aptos"/>
               </a:rPr>
               <a:t>r_total = r_ext</a:t>
             </a:r>
@@ -9364,9 +9329,9 @@
                 <a:solidFill>
                   <a:srgbClr val="202938"/>
                 </a:solidFill>
-                <a:latin typeface="Microsoft YaHei"/>
-                <a:ea typeface="Microsoft YaHei"/>
-                <a:cs typeface="Microsoft YaHei"/>
+                <a:latin typeface="Aptos"/>
+                <a:ea typeface="Aptos"/>
+                <a:cs typeface="Aptos"/>
               </a:defRPr>
             </a:pPr>
             <a:r>
@@ -9374,11 +9339,11 @@
                 <a:solidFill>
                   <a:srgbClr val="202938"/>
                 </a:solidFill>
-                <a:latin typeface="Microsoft YaHei"/>
-                <a:ea typeface="Microsoft YaHei"/>
-                <a:cs typeface="Microsoft YaHei"/>
-              </a:rPr>
-              <a:t>+ β·r_int</a:t>
+                <a:latin typeface="Aptos"/>
+                <a:ea typeface="Aptos"/>
+                <a:cs typeface="Aptos"/>
+              </a:rPr>
+              <a:t>+ beta*r_int</a:t>
             </a:r>
           </a:p>
         </p:txBody>
@@ -9388,7 +9353,7 @@
           <p:cNvPr id="23" name="">
             <a:extLst xmlns:a="http://schemas.openxmlformats.org/drawingml/2006/main">
               <a:ext uri="{FF2B5EF4-FFF2-40B4-BE49-F238E27FC236}">
-                <a16:creationId xmlns:a16="http://schemas.microsoft.com/office/drawing/2014/main" id="{C1904C8D-59D0-4054-9461-E25173730179}"/>
+                <a16:creationId xmlns:a16="http://schemas.microsoft.com/office/drawing/2014/main" id="{6460676B-EE6B-40D9-9C1C-B43F2F638237}"/>
               </a:ext>
             </a:extLst>
           </p:cNvPr>
@@ -9419,7 +9384,7 @@
           <p:cNvPr id="24" name="">
             <a:extLst xmlns:a="http://schemas.openxmlformats.org/drawingml/2006/main">
               <a:ext uri="{FF2B5EF4-FFF2-40B4-BE49-F238E27FC236}">
-                <a16:creationId xmlns:a16="http://schemas.microsoft.com/office/drawing/2014/main" id="{A66957BD-6678-4B29-8173-FA5F10B163AE}"/>
+                <a16:creationId xmlns:a16="http://schemas.microsoft.com/office/drawing/2014/main" id="{4E9C1A28-BB16-4A92-8CE7-BEED9B27D05C}"/>
               </a:ext>
             </a:extLst>
           </p:cNvPr>
@@ -9450,7 +9415,7 @@
           <p:cNvPr id="25" name="">
             <a:extLst xmlns:a="http://schemas.openxmlformats.org/drawingml/2006/main">
               <a:ext uri="{FF2B5EF4-FFF2-40B4-BE49-F238E27FC236}">
-                <a16:creationId xmlns:a16="http://schemas.microsoft.com/office/drawing/2014/main" id="{59A31309-B7C7-438A-85AD-E1361D69B724}"/>
+                <a16:creationId xmlns:a16="http://schemas.microsoft.com/office/drawing/2014/main" id="{0D467A03-5621-4487-B5CC-1F530A6F844B}"/>
               </a:ext>
             </a:extLst>
           </p:cNvPr>
@@ -9481,7 +9446,7 @@
           <p:cNvPr id="26" name="">
             <a:extLst xmlns:a="http://schemas.openxmlformats.org/drawingml/2006/main">
               <a:ext uri="{FF2B5EF4-FFF2-40B4-BE49-F238E27FC236}">
-                <a16:creationId xmlns:a16="http://schemas.microsoft.com/office/drawing/2014/main" id="{62223C10-7506-4627-B7C1-AC7A356283E0}"/>
+                <a16:creationId xmlns:a16="http://schemas.microsoft.com/office/drawing/2014/main" id="{701EE331-A7F5-4BBB-96CC-FBE57A7D1A33}"/>
               </a:ext>
             </a:extLst>
           </p:cNvPr>
@@ -9512,7 +9477,7 @@
           <p:cNvPr id="27" name="">
             <a:extLst xmlns:a="http://schemas.openxmlformats.org/drawingml/2006/main">
               <a:ext uri="{FF2B5EF4-FFF2-40B4-BE49-F238E27FC236}">
-                <a16:creationId xmlns:a16="http://schemas.microsoft.com/office/drawing/2014/main" id="{A6C62E00-CFE8-46F3-87AE-4BD2B22EE059}"/>
+                <a16:creationId xmlns:a16="http://schemas.microsoft.com/office/drawing/2014/main" id="{CFEC3EDD-42C4-4BE2-A5BD-787F47B03186}"/>
               </a:ext>
             </a:extLst>
           </p:cNvPr>
@@ -9543,7 +9508,7 @@
           <p:cNvPr id="28" name="">
             <a:extLst xmlns:a="http://schemas.openxmlformats.org/drawingml/2006/main">
               <a:ext uri="{FF2B5EF4-FFF2-40B4-BE49-F238E27FC236}">
-                <a16:creationId xmlns:a16="http://schemas.microsoft.com/office/drawing/2014/main" id="{BFD6665E-3B69-4EE8-8A37-736A62C18699}"/>
+                <a16:creationId xmlns:a16="http://schemas.microsoft.com/office/drawing/2014/main" id="{B275D865-BE28-4350-BA71-0A9F794B1189}"/>
               </a:ext>
             </a:extLst>
           </p:cNvPr>
@@ -9584,7 +9549,7 @@
           <p:cNvPr id="29" name="">
             <a:extLst xmlns:a="http://schemas.openxmlformats.org/drawingml/2006/main">
               <a:ext uri="{FF2B5EF4-FFF2-40B4-BE49-F238E27FC236}">
-                <a16:creationId xmlns:a16="http://schemas.microsoft.com/office/drawing/2014/main" id="{FE7CE993-F525-4550-A6A2-C0FF422C60EC}"/>
+                <a16:creationId xmlns:a16="http://schemas.microsoft.com/office/drawing/2014/main" id="{648F152C-7CA7-48B0-91B5-AF78487074BC}"/>
               </a:ext>
             </a:extLst>
           </p:cNvPr>
@@ -9628,9 +9593,9 @@
                 <a:solidFill>
                   <a:srgbClr val="FFFFFF"/>
                 </a:solidFill>
-                <a:latin typeface="Microsoft YaHei"/>
-                <a:ea typeface="Microsoft YaHei"/>
-                <a:cs typeface="Microsoft YaHei"/>
+                <a:latin typeface="Aptos"/>
+                <a:ea typeface="Aptos"/>
+                <a:cs typeface="Aptos"/>
               </a:defRPr>
             </a:pPr>
             <a:r>
@@ -9638,11 +9603,11 @@
                 <a:solidFill>
                   <a:srgbClr val="FFFFFF"/>
                 </a:solidFill>
-                <a:latin typeface="Microsoft YaHei"/>
-                <a:ea typeface="Microsoft YaHei"/>
-                <a:cs typeface="Microsoft YaHei"/>
-              </a:rPr>
-              <a:t>4. 训练观测</a:t>
+                <a:latin typeface="Aptos"/>
+                <a:ea typeface="Aptos"/>
+                <a:cs typeface="Aptos"/>
+              </a:rPr>
+              <a:t>4. Signals</a:t>
             </a:r>
           </a:p>
         </p:txBody>
@@ -9656,7 +9621,7 @@
           <p:nvPr/>
         </p:nvPicPr>
         <p:blipFill>
-          <a:blip xmlns:r="http://schemas.openxmlformats.org/officeDocument/2006/relationships" xmlns:a="http://schemas.openxmlformats.org/drawingml/2006/main" r:embed="Rf3322813a1314c00"/>
+          <a:blip xmlns:r="http://schemas.openxmlformats.org/officeDocument/2006/relationships" xmlns:a="http://schemas.openxmlformats.org/drawingml/2006/main" r:embed="R77980323a2d54d68"/>
           <a:stretch xmlns:a="http://schemas.openxmlformats.org/drawingml/2006/main"/>
         </p:blipFill>
         <p:spPr>
@@ -9678,7 +9643,7 @@
           <p:nvPr/>
         </p:nvPicPr>
         <p:blipFill>
-          <a:blip xmlns:r="http://schemas.openxmlformats.org/officeDocument/2006/relationships" xmlns:a="http://schemas.openxmlformats.org/drawingml/2006/main" r:embed="Rfb771aec34b848ed"/>
+          <a:blip xmlns:r="http://schemas.openxmlformats.org/officeDocument/2006/relationships" xmlns:a="http://schemas.openxmlformats.org/drawingml/2006/main" r:embed="R30697d2d1e724d94"/>
           <a:stretch xmlns:a="http://schemas.openxmlformats.org/drawingml/2006/main"/>
         </p:blipFill>
         <p:spPr>
@@ -9696,7 +9661,7 @@
           <p:cNvPr id="32" name="">
             <a:extLst xmlns:a="http://schemas.openxmlformats.org/drawingml/2006/main">
               <a:ext uri="{FF2B5EF4-FFF2-40B4-BE49-F238E27FC236}">
-                <a16:creationId xmlns:a16="http://schemas.microsoft.com/office/drawing/2014/main" id="{62D5F9E5-1632-44F4-943F-8DA6FD7E3699}"/>
+                <a16:creationId xmlns:a16="http://schemas.microsoft.com/office/drawing/2014/main" id="{4FAF71EC-7763-4E51-AF02-2C51A05AA2E1}"/>
               </a:ext>
             </a:extLst>
           </p:cNvPr>
@@ -9737,7 +9702,7 @@
           <p:cNvPr id="33" name="">
             <a:extLst xmlns:a="http://schemas.openxmlformats.org/drawingml/2006/main">
               <a:ext uri="{FF2B5EF4-FFF2-40B4-BE49-F238E27FC236}">
-                <a16:creationId xmlns:a16="http://schemas.microsoft.com/office/drawing/2014/main" id="{0D9F4FD6-29F7-488E-91CF-E7BF88BA55F2}"/>
+                <a16:creationId xmlns:a16="http://schemas.microsoft.com/office/drawing/2014/main" id="{08CF4DD9-2B01-49EF-8148-F15394E9B0DB}"/>
               </a:ext>
             </a:extLst>
           </p:cNvPr>
@@ -9769,9 +9734,9 @@
                 <a:solidFill>
                   <a:srgbClr val="607084"/>
                 </a:solidFill>
-                <a:latin typeface="Microsoft YaHei"/>
-                <a:ea typeface="Microsoft YaHei"/>
-                <a:cs typeface="Microsoft YaHei"/>
+                <a:latin typeface="Aptos"/>
+                <a:ea typeface="Aptos"/>
+                <a:cs typeface="Aptos"/>
               </a:defRPr>
             </a:pPr>
             <a:r>
@@ -9779,11 +9744,11 @@
                 <a:solidFill>
                   <a:srgbClr val="607084"/>
                 </a:solidFill>
-                <a:latin typeface="Microsoft YaHei"/>
-                <a:ea typeface="Microsoft YaHei"/>
-                <a:cs typeface="Microsoft YaHei"/>
-              </a:rPr>
-              <a:t>validation sample</a:t>
+                <a:latin typeface="Aptos"/>
+                <a:ea typeface="Aptos"/>
+                <a:cs typeface="Aptos"/>
+              </a:rPr>
+              <a:t>validation</a:t>
             </a:r>
           </a:p>
         </p:txBody>
@@ -9793,7 +9758,7 @@
           <p:cNvPr id="34" name="">
             <a:extLst xmlns:a="http://schemas.openxmlformats.org/drawingml/2006/main">
               <a:ext uri="{FF2B5EF4-FFF2-40B4-BE49-F238E27FC236}">
-                <a16:creationId xmlns:a16="http://schemas.microsoft.com/office/drawing/2014/main" id="{386FEDBA-EC16-4AF9-BB16-D906E3DCAB9D}"/>
+                <a16:creationId xmlns:a16="http://schemas.microsoft.com/office/drawing/2014/main" id="{37BA9DBA-9036-4A88-A2E8-232659DD8B28}"/>
               </a:ext>
             </a:extLst>
           </p:cNvPr>
@@ -9849,7 +9814,7 @@
           <p:cNvPr id="35" name="">
             <a:extLst xmlns:a="http://schemas.openxmlformats.org/drawingml/2006/main">
               <a:ext uri="{FF2B5EF4-FFF2-40B4-BE49-F238E27FC236}">
-                <a16:creationId xmlns:a16="http://schemas.microsoft.com/office/drawing/2014/main" id="{617EA28F-B9B3-46C8-BD3E-26415C61258E}"/>
+                <a16:creationId xmlns:a16="http://schemas.microsoft.com/office/drawing/2014/main" id="{9F5B4F57-7BBC-4A0F-9C42-D91FA0EE645C}"/>
               </a:ext>
             </a:extLst>
           </p:cNvPr>
@@ -9881,9 +9846,9 @@
                 <a:solidFill>
                   <a:srgbClr val="607084"/>
                 </a:solidFill>
-                <a:latin typeface="Microsoft YaHei"/>
-                <a:ea typeface="Microsoft YaHei"/>
-                <a:cs typeface="Microsoft YaHei"/>
+                <a:latin typeface="Aptos"/>
+                <a:ea typeface="Aptos"/>
+                <a:cs typeface="Aptos"/>
               </a:defRPr>
             </a:pPr>
             <a:r>
@@ -9891,9 +9856,9 @@
                 <a:solidFill>
                   <a:srgbClr val="607084"/>
                 </a:solidFill>
-                <a:latin typeface="Microsoft YaHei"/>
-                <a:ea typeface="Microsoft YaHei"/>
-                <a:cs typeface="Microsoft YaHei"/>
+                <a:latin typeface="Aptos"/>
+                <a:ea typeface="Aptos"/>
+                <a:cs typeface="Aptos"/>
               </a:rPr>
               <a:t>best step 950k</a:t>
             </a:r>
@@ -9905,7 +9870,7 @@
           <p:cNvPr id="36" name="">
             <a:extLst xmlns:a="http://schemas.openxmlformats.org/drawingml/2006/main">
               <a:ext uri="{FF2B5EF4-FFF2-40B4-BE49-F238E27FC236}">
-                <a16:creationId xmlns:a16="http://schemas.microsoft.com/office/drawing/2014/main" id="{6EB4879A-F51E-41DE-B5E2-62161FC7EB1A}"/>
+                <a16:creationId xmlns:a16="http://schemas.microsoft.com/office/drawing/2014/main" id="{9ACE53C9-E763-4F56-8A73-7574A4495781}"/>
               </a:ext>
             </a:extLst>
           </p:cNvPr>
@@ -9946,7 +9911,7 @@
           <p:cNvPr id="37" name="">
             <a:extLst xmlns:a="http://schemas.openxmlformats.org/drawingml/2006/main">
               <a:ext uri="{FF2B5EF4-FFF2-40B4-BE49-F238E27FC236}">
-                <a16:creationId xmlns:a16="http://schemas.microsoft.com/office/drawing/2014/main" id="{804238DF-66FA-4173-967A-61EA4C88F15C}"/>
+                <a16:creationId xmlns:a16="http://schemas.microsoft.com/office/drawing/2014/main" id="{FC7C2205-3F84-4D01-BD44-65D483C72DF9}"/>
               </a:ext>
             </a:extLst>
           </p:cNvPr>
@@ -9978,9 +9943,9 @@
                 <a:solidFill>
                   <a:srgbClr val="607084"/>
                 </a:solidFill>
-                <a:latin typeface="Microsoft YaHei"/>
-                <a:ea typeface="Microsoft YaHei"/>
-                <a:cs typeface="Microsoft YaHei"/>
+                <a:latin typeface="Aptos"/>
+                <a:ea typeface="Aptos"/>
+                <a:cs typeface="Aptos"/>
               </a:defRPr>
             </a:pPr>
             <a:r>
@@ -9988,11 +9953,11 @@
                 <a:solidFill>
                   <a:srgbClr val="607084"/>
                 </a:solidFill>
-                <a:latin typeface="Microsoft YaHei"/>
-                <a:ea typeface="Microsoft YaHei"/>
-                <a:cs typeface="Microsoft YaHei"/>
-              </a:rPr>
-              <a:t>test sample</a:t>
+                <a:latin typeface="Aptos"/>
+                <a:ea typeface="Aptos"/>
+                <a:cs typeface="Aptos"/>
+              </a:rPr>
+              <a:t>test</a:t>
             </a:r>
           </a:p>
         </p:txBody>
@@ -10002,7 +9967,7 @@
           <p:cNvPr id="38" name="">
             <a:extLst xmlns:a="http://schemas.openxmlformats.org/drawingml/2006/main">
               <a:ext uri="{FF2B5EF4-FFF2-40B4-BE49-F238E27FC236}">
-                <a16:creationId xmlns:a16="http://schemas.microsoft.com/office/drawing/2014/main" id="{C1A1E9E3-9DCC-49E3-9261-8F639D89EF38}"/>
+                <a16:creationId xmlns:a16="http://schemas.microsoft.com/office/drawing/2014/main" id="{0CA16472-5185-438F-9213-A255C3BACAE3}"/>
               </a:ext>
             </a:extLst>
           </p:cNvPr>
@@ -10058,7 +10023,7 @@
           <p:cNvPr id="39" name="">
             <a:extLst xmlns:a="http://schemas.openxmlformats.org/drawingml/2006/main">
               <a:ext uri="{FF2B5EF4-FFF2-40B4-BE49-F238E27FC236}">
-                <a16:creationId xmlns:a16="http://schemas.microsoft.com/office/drawing/2014/main" id="{8422D9F9-CC7E-41D7-9A35-0C7CEE429A2A}"/>
+                <a16:creationId xmlns:a16="http://schemas.microsoft.com/office/drawing/2014/main" id="{311A6B1B-AE83-4E42-978E-263C7346CB86}"/>
               </a:ext>
             </a:extLst>
           </p:cNvPr>
@@ -10090,9 +10055,9 @@
                 <a:solidFill>
                   <a:srgbClr val="607084"/>
                 </a:solidFill>
-                <a:latin typeface="Microsoft YaHei"/>
-                <a:ea typeface="Microsoft YaHei"/>
-                <a:cs typeface="Microsoft YaHei"/>
+                <a:latin typeface="Aptos"/>
+                <a:ea typeface="Aptos"/>
+                <a:cs typeface="Aptos"/>
               </a:defRPr>
             </a:pPr>
             <a:r>
@@ -10100,11 +10065,11 @@
                 <a:solidFill>
                   <a:srgbClr val="607084"/>
                 </a:solidFill>
-                <a:latin typeface="Microsoft YaHei"/>
-                <a:ea typeface="Microsoft YaHei"/>
-                <a:cs typeface="Microsoft YaHei"/>
-              </a:rPr>
-              <a:t>5-episode sample mean</a:t>
+                <a:latin typeface="Aptos"/>
+                <a:ea typeface="Aptos"/>
+                <a:cs typeface="Aptos"/>
+              </a:rPr>
+              <a:t>sample mean</a:t>
             </a:r>
           </a:p>
         </p:txBody>
@@ -10114,7 +10079,7 @@
           <p:cNvPr id="40" name="">
             <a:extLst xmlns:a="http://schemas.openxmlformats.org/drawingml/2006/main">
               <a:ext uri="{FF2B5EF4-FFF2-40B4-BE49-F238E27FC236}">
-                <a16:creationId xmlns:a16="http://schemas.microsoft.com/office/drawing/2014/main" id="{857B3C44-2168-4B77-B75E-764866C3D2B8}"/>
+                <a16:creationId xmlns:a16="http://schemas.microsoft.com/office/drawing/2014/main" id="{F3E3FD66-FE47-4BAA-AB6F-15732E3363AC}"/>
               </a:ext>
             </a:extLst>
           </p:cNvPr>
@@ -10155,7 +10120,7 @@
           <p:cNvPr id="41" name="">
             <a:extLst xmlns:a="http://schemas.openxmlformats.org/drawingml/2006/main">
               <a:ext uri="{FF2B5EF4-FFF2-40B4-BE49-F238E27FC236}">
-                <a16:creationId xmlns:a16="http://schemas.microsoft.com/office/drawing/2014/main" id="{E157E9D3-C31B-4CBC-BF18-B5E0A90EB1C2}"/>
+                <a16:creationId xmlns:a16="http://schemas.microsoft.com/office/drawing/2014/main" id="{A422CE61-8091-4DFF-AA06-B1542481995D}"/>
               </a:ext>
             </a:extLst>
           </p:cNvPr>
@@ -10187,9 +10152,9 @@
                 <a:solidFill>
                   <a:srgbClr val="607084"/>
                 </a:solidFill>
-                <a:latin typeface="Microsoft YaHei"/>
-                <a:ea typeface="Microsoft YaHei"/>
-                <a:cs typeface="Microsoft YaHei"/>
+                <a:latin typeface="Aptos"/>
+                <a:ea typeface="Aptos"/>
+                <a:cs typeface="Aptos"/>
               </a:defRPr>
             </a:pPr>
             <a:r>
@@ -10197,9 +10162,9 @@
                 <a:solidFill>
                   <a:srgbClr val="607084"/>
                 </a:solidFill>
-                <a:latin typeface="Microsoft YaHei"/>
-                <a:ea typeface="Microsoft YaHei"/>
-                <a:cs typeface="Microsoft YaHei"/>
+                <a:latin typeface="Aptos"/>
+                <a:ea typeface="Aptos"/>
+                <a:cs typeface="Aptos"/>
               </a:rPr>
               <a:t>train terminal</a:t>
             </a:r>
@@ -10211,7 +10176,7 @@
           <p:cNvPr id="42" name="">
             <a:extLst xmlns:a="http://schemas.openxmlformats.org/drawingml/2006/main">
               <a:ext uri="{FF2B5EF4-FFF2-40B4-BE49-F238E27FC236}">
-                <a16:creationId xmlns:a16="http://schemas.microsoft.com/office/drawing/2014/main" id="{E1766A55-8F76-40F7-A841-9E77303B65B8}"/>
+                <a16:creationId xmlns:a16="http://schemas.microsoft.com/office/drawing/2014/main" id="{05EC65C8-3886-4BD8-BE77-1C008CD96806}"/>
               </a:ext>
             </a:extLst>
           </p:cNvPr>
@@ -10267,7 +10232,7 @@
           <p:cNvPr id="43" name="">
             <a:extLst xmlns:a="http://schemas.openxmlformats.org/drawingml/2006/main">
               <a:ext uri="{FF2B5EF4-FFF2-40B4-BE49-F238E27FC236}">
-                <a16:creationId xmlns:a16="http://schemas.microsoft.com/office/drawing/2014/main" id="{154EF7FB-5903-46D3-87C8-0048E482F10B}"/>
+                <a16:creationId xmlns:a16="http://schemas.microsoft.com/office/drawing/2014/main" id="{79DCC43C-B43A-47C6-9804-1F0276BFFD74}"/>
               </a:ext>
             </a:extLst>
           </p:cNvPr>
@@ -10299,9 +10264,9 @@
                 <a:solidFill>
                   <a:srgbClr val="607084"/>
                 </a:solidFill>
-                <a:latin typeface="Microsoft YaHei"/>
-                <a:ea typeface="Microsoft YaHei"/>
-                <a:cs typeface="Microsoft YaHei"/>
+                <a:latin typeface="Aptos"/>
+                <a:ea typeface="Aptos"/>
+                <a:cs typeface="Aptos"/>
               </a:defRPr>
             </a:pPr>
             <a:r>
@@ -10309,9 +10274,9 @@
                 <a:solidFill>
                   <a:srgbClr val="607084"/>
                 </a:solidFill>
-                <a:latin typeface="Microsoft YaHei"/>
-                <a:ea typeface="Microsoft YaHei"/>
-                <a:cs typeface="Microsoft YaHei"/>
+                <a:latin typeface="Aptos"/>
+                <a:ea typeface="Aptos"/>
+                <a:cs typeface="Aptos"/>
               </a:rPr>
               <a:t>1 inferred terminal episode</a:t>
             </a:r>
@@ -10323,7 +10288,7 @@
           <p:cNvPr id="44" name="">
             <a:extLst xmlns:a="http://schemas.openxmlformats.org/drawingml/2006/main">
               <a:ext uri="{FF2B5EF4-FFF2-40B4-BE49-F238E27FC236}">
-                <a16:creationId xmlns:a16="http://schemas.microsoft.com/office/drawing/2014/main" id="{D0A176C9-BB00-42F3-9226-594B456080A6}"/>
+                <a16:creationId xmlns:a16="http://schemas.microsoft.com/office/drawing/2014/main" id="{0C83D8A3-9D34-486A-8054-06152B722C51}"/>
               </a:ext>
             </a:extLst>
           </p:cNvPr>
@@ -10364,7 +10329,7 @@
           <p:cNvPr id="45" name="">
             <a:extLst xmlns:a="http://schemas.openxmlformats.org/drawingml/2006/main">
               <a:ext uri="{FF2B5EF4-FFF2-40B4-BE49-F238E27FC236}">
-                <a16:creationId xmlns:a16="http://schemas.microsoft.com/office/drawing/2014/main" id="{66823BB9-9DB4-4247-9F5E-29A874FCDF0F}"/>
+                <a16:creationId xmlns:a16="http://schemas.microsoft.com/office/drawing/2014/main" id="{A8A084C4-BD7D-48CF-BBD9-5ED4F6AC9C20}"/>
               </a:ext>
             </a:extLst>
           </p:cNvPr>
@@ -10396,9 +10361,9 @@
                 <a:solidFill>
                   <a:srgbClr val="607084"/>
                 </a:solidFill>
-                <a:latin typeface="Microsoft YaHei"/>
-                <a:ea typeface="Microsoft YaHei"/>
-                <a:cs typeface="Microsoft YaHei"/>
+                <a:latin typeface="Aptos"/>
+                <a:ea typeface="Aptos"/>
+                <a:cs typeface="Aptos"/>
               </a:defRPr>
             </a:pPr>
             <a:r>
@@ -10406,9 +10371,9 @@
                 <a:solidFill>
                   <a:srgbClr val="607084"/>
                 </a:solidFill>
-                <a:latin typeface="Microsoft YaHei"/>
-                <a:ea typeface="Microsoft YaHei"/>
-                <a:cs typeface="Microsoft YaHei"/>
+                <a:latin typeface="Aptos"/>
+                <a:ea typeface="Aptos"/>
+                <a:cs typeface="Aptos"/>
               </a:rPr>
               <a:t>device</a:t>
             </a:r>
@@ -10420,7 +10385,7 @@
           <p:cNvPr id="46" name="">
             <a:extLst xmlns:a="http://schemas.openxmlformats.org/drawingml/2006/main">
               <a:ext uri="{FF2B5EF4-FFF2-40B4-BE49-F238E27FC236}">
-                <a16:creationId xmlns:a16="http://schemas.microsoft.com/office/drawing/2014/main" id="{B11090DD-73B2-466B-A1DF-91920EB355DA}"/>
+                <a16:creationId xmlns:a16="http://schemas.microsoft.com/office/drawing/2014/main" id="{FC954FC7-5933-4EE7-ADD5-354E567489DE}"/>
               </a:ext>
             </a:extLst>
           </p:cNvPr>
@@ -10476,7 +10441,7 @@
           <p:cNvPr id="47" name="">
             <a:extLst xmlns:a="http://schemas.openxmlformats.org/drawingml/2006/main">
               <a:ext uri="{FF2B5EF4-FFF2-40B4-BE49-F238E27FC236}">
-                <a16:creationId xmlns:a16="http://schemas.microsoft.com/office/drawing/2014/main" id="{A09E03EF-3732-4B98-A84E-E486F6FC2BC8}"/>
+                <a16:creationId xmlns:a16="http://schemas.microsoft.com/office/drawing/2014/main" id="{A9A137D7-9440-4BCA-8227-5AA5EF2CF9E5}"/>
               </a:ext>
             </a:extLst>
           </p:cNvPr>
@@ -10508,9 +10473,9 @@
                 <a:solidFill>
                   <a:srgbClr val="607084"/>
                 </a:solidFill>
-                <a:latin typeface="Microsoft YaHei"/>
-                <a:ea typeface="Microsoft YaHei"/>
-                <a:cs typeface="Microsoft YaHei"/>
+                <a:latin typeface="Aptos"/>
+                <a:ea typeface="Aptos"/>
+                <a:cs typeface="Aptos"/>
               </a:defRPr>
             </a:pPr>
             <a:r>
@@ -10518,11 +10483,11 @@
                 <a:solidFill>
                   <a:srgbClr val="607084"/>
                 </a:solidFill>
-                <a:latin typeface="Microsoft YaHei"/>
-                <a:ea typeface="Microsoft YaHei"/>
-                <a:cs typeface="Microsoft YaHei"/>
-              </a:rPr>
-              <a:t>12.01 sec / 1k</a:t>
+                <a:latin typeface="Aptos"/>
+                <a:ea typeface="Aptos"/>
+                <a:cs typeface="Aptos"/>
+              </a:rPr>
+              <a:t>12.01 sec/1k</a:t>
             </a:r>
           </a:p>
         </p:txBody>
@@ -10532,19 +10497,19 @@
           <p:cNvPr id="48" name="">
             <a:extLst xmlns:a="http://schemas.openxmlformats.org/drawingml/2006/main">
               <a:ext uri="{FF2B5EF4-FFF2-40B4-BE49-F238E27FC236}">
-                <a16:creationId xmlns:a16="http://schemas.microsoft.com/office/drawing/2014/main" id="{6D1FBD31-56D2-4208-ADEA-E8F5FF6BF740}"/>
-              </a:ext>
-            </a:extLst>
-          </p:cNvPr>
-          <p:cNvSpPr>
-            <a:spLocks xmlns:a="http://schemas.openxmlformats.org/drawingml/2006/main" noGrp="1"/>
-          </p:cNvSpPr>
-          <p:nvPr/>
-        </p:nvSpPr>
-        <p:spPr>
-          <a:xfrm xmlns:a="http://schemas.openxmlformats.org/drawingml/2006/main">
-            <a:off x="2400300" y="6572250"/>
-            <a:ext cx="7810500" cy="152400"/>
+                <a16:creationId xmlns:a16="http://schemas.microsoft.com/office/drawing/2014/main" id="{575B7621-3E3A-4D4A-912F-FE2B375D5496}"/>
+              </a:ext>
+            </a:extLst>
+          </p:cNvPr>
+          <p:cNvSpPr>
+            <a:spLocks xmlns:a="http://schemas.openxmlformats.org/drawingml/2006/main" noGrp="1"/>
+          </p:cNvSpPr>
+          <p:nvPr/>
+        </p:nvSpPr>
+        <p:spPr>
+          <a:xfrm xmlns:a="http://schemas.openxmlformats.org/drawingml/2006/main">
+            <a:off x="2190750" y="6572250"/>
+            <a:ext cx="8191500" cy="152400"/>
           </a:xfrm>
           <a:prstGeom xmlns:a="http://schemas.openxmlformats.org/drawingml/2006/main" prst="rect">
             <a:avLst/>
@@ -10564,9 +10529,9 @@
                 <a:solidFill>
                   <a:srgbClr val="607084"/>
                 </a:solidFill>
-                <a:latin typeface="Microsoft YaHei"/>
-                <a:ea typeface="Microsoft YaHei"/>
-                <a:cs typeface="Microsoft YaHei"/>
+                <a:latin typeface="Aptos"/>
+                <a:ea typeface="Aptos"/>
+                <a:cs typeface="Aptos"/>
               </a:defRPr>
             </a:pPr>
             <a:r>
@@ -10574,11 +10539,11 @@
                 <a:solidFill>
                   <a:srgbClr val="607084"/>
                 </a:solidFill>
-                <a:latin typeface="Microsoft YaHei"/>
-                <a:ea typeface="Microsoft YaHei"/>
-                <a:cs typeface="Microsoft YaHei"/>
-              </a:rPr>
-              <a:t>Evidence: xyDeng 1M selected 1-1 runs; metrics from best_summary.json, one_million_run_metrics.csv, and training_completion_audit.md.</a:t>
+                <a:latin typeface="Aptos"/>
+                <a:ea typeface="Aptos"/>
+                <a:cs typeface="Aptos"/>
+              </a:rPr>
+              <a:t>Evidence: selected 1M World 1-1 runs, best_summary.json, one_million_run_metrics.csv, and training_completion_audit.md.</a:t>
             </a:r>
           </a:p>
         </p:txBody>
@@ -10586,7 +10551,7 @@
     </p:spTree>
     <p:extLst>
       <p:ext uri="{BB962C8B-B14F-4D97-AF65-F5344CB8AC3E}">
-        <p14:creationId xmlns:p14="http://schemas.microsoft.com/office/powerpoint/2010/main" val="1316021039"/>
+        <p14:creationId xmlns:p14="http://schemas.microsoft.com/office/powerpoint/2010/main" val="1791344085"/>
       </p:ext>
     </p:extLst>
   </p:cSld>
@@ -10617,7 +10582,7 @@
           <p:cNvPr id="1" name="">
             <a:extLst xmlns:a="http://schemas.openxmlformats.org/drawingml/2006/main">
               <a:ext uri="{FF2B5EF4-FFF2-40B4-BE49-F238E27FC236}">
-                <a16:creationId xmlns:a16="http://schemas.microsoft.com/office/drawing/2014/main" id="{FAE3896D-4916-4569-86A1-2D7ACC38DD8C}"/>
+                <a16:creationId xmlns:a16="http://schemas.microsoft.com/office/drawing/2014/main" id="{B11234E3-B5E0-48BF-8712-5A82EA5AE5C8}"/>
               </a:ext>
             </a:extLst>
           </p:cNvPr>
@@ -10629,7 +10594,7 @@
         <p:spPr>
           <a:xfrm xmlns:a="http://schemas.openxmlformats.org/drawingml/2006/main">
             <a:off x="381000" y="257175"/>
-            <a:ext cx="971550" cy="295275"/>
+            <a:ext cx="1066800" cy="295275"/>
           </a:xfrm>
           <a:prstGeom xmlns:a="http://schemas.openxmlformats.org/drawingml/2006/main" prst="roundRect">
             <a:avLst>
@@ -10657,25 +10622,25 @@
           <a:lstStyle xmlns:a="http://schemas.openxmlformats.org/drawingml/2006/main"/>
           <a:p xmlns:a="http://schemas.openxmlformats.org/drawingml/2006/main">
             <a:pPr algn="ctr">
-              <a:defRPr sz="1125" b="1">
+              <a:defRPr sz="1050" b="1">
                 <a:solidFill>
                   <a:srgbClr val="FFFFFF"/>
                 </a:solidFill>
-                <a:latin typeface="Microsoft YaHei"/>
-                <a:ea typeface="Microsoft YaHei"/>
-                <a:cs typeface="Microsoft YaHei"/>
-              </a:defRPr>
-            </a:pPr>
-            <a:r>
-              <a:rPr sz="1125" b="1">
+                <a:latin typeface="Aptos"/>
+                <a:ea typeface="Aptos"/>
+                <a:cs typeface="Aptos"/>
+              </a:defRPr>
+            </a:pPr>
+            <a:r>
+              <a:rPr sz="1050" b="1">
                 <a:solidFill>
                   <a:srgbClr val="FFFFFF"/>
                 </a:solidFill>
-                <a:latin typeface="Microsoft YaHei"/>
-                <a:ea typeface="Microsoft YaHei"/>
-                <a:cs typeface="Microsoft YaHei"/>
-              </a:rPr>
-              <a:t>方法 B</a:t>
+                <a:latin typeface="Aptos"/>
+                <a:ea typeface="Aptos"/>
+                <a:cs typeface="Aptos"/>
+              </a:rPr>
+              <a:t>Method B</a:t>
             </a:r>
           </a:p>
         </p:txBody>
@@ -10685,19 +10650,19 @@
           <p:cNvPr id="2" name="">
             <a:extLst xmlns:a="http://schemas.openxmlformats.org/drawingml/2006/main">
               <a:ext uri="{FF2B5EF4-FFF2-40B4-BE49-F238E27FC236}">
-                <a16:creationId xmlns:a16="http://schemas.microsoft.com/office/drawing/2014/main" id="{F88CD84D-3E53-422A-941A-CB1BD730F3B5}"/>
-              </a:ext>
-            </a:extLst>
-          </p:cNvPr>
-          <p:cNvSpPr>
-            <a:spLocks xmlns:a="http://schemas.openxmlformats.org/drawingml/2006/main" noGrp="1"/>
-          </p:cNvSpPr>
-          <p:nvPr/>
-        </p:nvSpPr>
-        <p:spPr>
-          <a:xfrm xmlns:a="http://schemas.openxmlformats.org/drawingml/2006/main">
-            <a:off x="1524000" y="190500"/>
-            <a:ext cx="7239000" cy="361950"/>
+                <a16:creationId xmlns:a16="http://schemas.microsoft.com/office/drawing/2014/main" id="{C9A4139A-BCF4-4C78-965D-4D91EBAC63B7}"/>
+              </a:ext>
+            </a:extLst>
+          </p:cNvPr>
+          <p:cNvSpPr>
+            <a:spLocks xmlns:a="http://schemas.openxmlformats.org/drawingml/2006/main" noGrp="1"/>
+          </p:cNvSpPr>
+          <p:nvPr/>
+        </p:nvSpPr>
+        <p:spPr>
+          <a:xfrm xmlns:a="http://schemas.openxmlformats.org/drawingml/2006/main">
+            <a:off x="1619250" y="190500"/>
+            <a:ext cx="7429500" cy="361950"/>
           </a:xfrm>
           <a:prstGeom xmlns:a="http://schemas.openxmlformats.org/drawingml/2006/main" prst="rect">
             <a:avLst/>
@@ -10717,9 +10682,9 @@
                 <a:solidFill>
                   <a:srgbClr val="202938"/>
                 </a:solidFill>
-                <a:latin typeface="Microsoft YaHei"/>
-                <a:ea typeface="Microsoft YaHei"/>
-                <a:cs typeface="Microsoft YaHei"/>
+                <a:latin typeface="Aptos"/>
+                <a:ea typeface="Aptos"/>
+                <a:cs typeface="Aptos"/>
               </a:defRPr>
             </a:pPr>
             <a:r>
@@ -10727,11 +10692,11 @@
                 <a:solidFill>
                   <a:srgbClr val="202938"/>
                 </a:solidFill>
-                <a:latin typeface="Microsoft YaHei"/>
-                <a:ea typeface="Microsoft YaHei"/>
-                <a:cs typeface="Microsoft YaHei"/>
-              </a:rPr>
-              <a:t>PPO + Disagreement: 1-1 sample outcomes</a:t>
+                <a:latin typeface="Aptos"/>
+                <a:ea typeface="Aptos"/>
+                <a:cs typeface="Aptos"/>
+              </a:rPr>
+              <a:t>PPO + Disagreement: World 1-1 outcomes</a:t>
             </a:r>
           </a:p>
         </p:txBody>
@@ -10741,19 +10706,19 @@
           <p:cNvPr id="3" name="">
             <a:extLst xmlns:a="http://schemas.openxmlformats.org/drawingml/2006/main">
               <a:ext uri="{FF2B5EF4-FFF2-40B4-BE49-F238E27FC236}">
-                <a16:creationId xmlns:a16="http://schemas.microsoft.com/office/drawing/2014/main" id="{DFAA62D8-E594-407C-BEAA-E6BA1B220F64}"/>
-              </a:ext>
-            </a:extLst>
-          </p:cNvPr>
-          <p:cNvSpPr>
-            <a:spLocks xmlns:a="http://schemas.openxmlformats.org/drawingml/2006/main" noGrp="1"/>
-          </p:cNvSpPr>
-          <p:nvPr/>
-        </p:nvSpPr>
-        <p:spPr>
-          <a:xfrm xmlns:a="http://schemas.openxmlformats.org/drawingml/2006/main">
-            <a:off x="1524000" y="609600"/>
-            <a:ext cx="7048500" cy="209550"/>
+                <a16:creationId xmlns:a16="http://schemas.microsoft.com/office/drawing/2014/main" id="{AF7D741A-4CB8-4A71-A17A-1ACF760D64C8}"/>
+              </a:ext>
+            </a:extLst>
+          </p:cNvPr>
+          <p:cNvSpPr>
+            <a:spLocks xmlns:a="http://schemas.openxmlformats.org/drawingml/2006/main" noGrp="1"/>
+          </p:cNvSpPr>
+          <p:nvPr/>
+        </p:nvSpPr>
+        <p:spPr>
+          <a:xfrm xmlns:a="http://schemas.openxmlformats.org/drawingml/2006/main">
+            <a:off x="1619250" y="609600"/>
+            <a:ext cx="7239000" cy="209550"/>
           </a:xfrm>
           <a:prstGeom xmlns:a="http://schemas.openxmlformats.org/drawingml/2006/main" prst="rect">
             <a:avLst/>
@@ -10773,9 +10738,9 @@
                 <a:solidFill>
                   <a:srgbClr val="607084"/>
                 </a:solidFill>
-                <a:latin typeface="Microsoft YaHei"/>
-                <a:ea typeface="Microsoft YaHei"/>
-                <a:cs typeface="Microsoft YaHei"/>
+                <a:latin typeface="Aptos"/>
+                <a:ea typeface="Aptos"/>
+                <a:cs typeface="Aptos"/>
               </a:defRPr>
             </a:pPr>
             <a:r>
@@ -10783,11 +10748,11 @@
                 <a:solidFill>
                   <a:srgbClr val="607084"/>
                 </a:solidFill>
-                <a:latin typeface="Microsoft YaHei"/>
-                <a:ea typeface="Microsoft YaHei"/>
-                <a:cs typeface="Microsoft YaHei"/>
-              </a:rPr>
-              <a:t>通关/进度、total_reward 与 max_x_pos 观察</a:t>
+                <a:latin typeface="Aptos"/>
+                <a:ea typeface="Aptos"/>
+                <a:cs typeface="Aptos"/>
+              </a:rPr>
+              <a:t>Progress, reward, and video evidence</a:t>
             </a:r>
           </a:p>
         </p:txBody>
@@ -10797,7 +10762,7 @@
           <p:cNvPr id="4" name="">
             <a:extLst xmlns:a="http://schemas.openxmlformats.org/drawingml/2006/main">
               <a:ext uri="{FF2B5EF4-FFF2-40B4-BE49-F238E27FC236}">
-                <a16:creationId xmlns:a16="http://schemas.microsoft.com/office/drawing/2014/main" id="{053BF09A-F4D9-48D2-941E-894CB8AF4B92}"/>
+                <a16:creationId xmlns:a16="http://schemas.microsoft.com/office/drawing/2014/main" id="{0783C5E6-5E8C-4E6D-A1B0-AFBDDC862514}"/>
               </a:ext>
             </a:extLst>
           </p:cNvPr>
@@ -10841,9 +10806,9 @@
                 <a:solidFill>
                   <a:srgbClr val="607084"/>
                 </a:solidFill>
-                <a:latin typeface="Microsoft YaHei"/>
-                <a:ea typeface="Microsoft YaHei"/>
-                <a:cs typeface="Microsoft YaHei"/>
+                <a:latin typeface="Aptos"/>
+                <a:ea typeface="Aptos"/>
+                <a:cs typeface="Aptos"/>
               </a:defRPr>
             </a:pPr>
             <a:r>
@@ -10851,9 +10816,9 @@
                 <a:solidFill>
                   <a:srgbClr val="607084"/>
                 </a:solidFill>
-                <a:latin typeface="Microsoft YaHei"/>
-                <a:ea typeface="Microsoft YaHei"/>
-                <a:cs typeface="Microsoft YaHei"/>
+                <a:latin typeface="Aptos"/>
+                <a:ea typeface="Aptos"/>
+                <a:cs typeface="Aptos"/>
               </a:rPr>
               <a:t>Mario RL / PPO intrinsic rewards</a:t>
             </a:r>
@@ -10864,9 +10829,9 @@
                 <a:solidFill>
                   <a:srgbClr val="607084"/>
                 </a:solidFill>
-                <a:latin typeface="Microsoft YaHei"/>
-                <a:ea typeface="Microsoft YaHei"/>
-                <a:cs typeface="Microsoft YaHei"/>
+                <a:latin typeface="Aptos"/>
+                <a:ea typeface="Aptos"/>
+                <a:cs typeface="Aptos"/>
               </a:defRPr>
             </a:pPr>
             <a:r>
@@ -10874,11 +10839,11 @@
                 <a:solidFill>
                   <a:srgbClr val="607084"/>
                 </a:solidFill>
-                <a:latin typeface="Microsoft YaHei"/>
-                <a:ea typeface="Microsoft YaHei"/>
-                <a:cs typeface="Microsoft YaHei"/>
-              </a:rPr>
-              <a:t>1M steps · seed 1 · 1-1 only</a:t>
+                <a:latin typeface="Aptos"/>
+                <a:ea typeface="Aptos"/>
+                <a:cs typeface="Aptos"/>
+              </a:rPr>
+              <a:t>1M steps | seed 1 | World 1-1</a:t>
             </a:r>
           </a:p>
         </p:txBody>
@@ -10888,7 +10853,7 @@
           <p:cNvPr id="5" name="">
             <a:extLst xmlns:a="http://schemas.openxmlformats.org/drawingml/2006/main">
               <a:ext uri="{FF2B5EF4-FFF2-40B4-BE49-F238E27FC236}">
-                <a16:creationId xmlns:a16="http://schemas.microsoft.com/office/drawing/2014/main" id="{D146778A-5FCB-48CC-B1CF-66D2566A8BF5}"/>
+                <a16:creationId xmlns:a16="http://schemas.microsoft.com/office/drawing/2014/main" id="{9EB5A27D-4A09-47E3-80B6-3975FA3A64E9}"/>
               </a:ext>
             </a:extLst>
           </p:cNvPr>
@@ -10921,7 +10886,7 @@
           <p:cNvPr id="6" name="">
             <a:extLst xmlns:a="http://schemas.openxmlformats.org/drawingml/2006/main">
               <a:ext uri="{FF2B5EF4-FFF2-40B4-BE49-F238E27FC236}">
-                <a16:creationId xmlns:a16="http://schemas.microsoft.com/office/drawing/2014/main" id="{FD1CEB72-9695-43D8-AFA9-BB9C112F8DB3}"/>
+                <a16:creationId xmlns:a16="http://schemas.microsoft.com/office/drawing/2014/main" id="{CCBCC89F-CB1B-4523-AD60-8ED975A54407}"/>
               </a:ext>
             </a:extLst>
           </p:cNvPr>
@@ -10962,7 +10927,7 @@
           <p:cNvPr id="7" name="">
             <a:extLst xmlns:a="http://schemas.openxmlformats.org/drawingml/2006/main">
               <a:ext uri="{FF2B5EF4-FFF2-40B4-BE49-F238E27FC236}">
-                <a16:creationId xmlns:a16="http://schemas.microsoft.com/office/drawing/2014/main" id="{DB0F7C8C-90D1-47F2-92B8-B94541C9102F}"/>
+                <a16:creationId xmlns:a16="http://schemas.microsoft.com/office/drawing/2014/main" id="{0A817925-44DC-439D-A6E9-A44653AAD4C6}"/>
               </a:ext>
             </a:extLst>
           </p:cNvPr>
@@ -10994,9 +10959,9 @@
                 <a:solidFill>
                   <a:srgbClr val="6243B6"/>
                 </a:solidFill>
-                <a:latin typeface="Microsoft YaHei"/>
-                <a:ea typeface="Microsoft YaHei"/>
-                <a:cs typeface="Microsoft YaHei"/>
+                <a:latin typeface="Aptos"/>
+                <a:ea typeface="Aptos"/>
+                <a:cs typeface="Aptos"/>
               </a:defRPr>
             </a:pPr>
             <a:r>
@@ -11004,11 +10969,11 @@
                 <a:solidFill>
                   <a:srgbClr val="6243B6"/>
                 </a:solidFill>
-                <a:latin typeface="Microsoft YaHei"/>
-                <a:ea typeface="Microsoft YaHei"/>
-                <a:cs typeface="Microsoft YaHei"/>
-              </a:rPr>
-              <a:t>评估口径</a:t>
+                <a:latin typeface="Aptos"/>
+                <a:ea typeface="Aptos"/>
+                <a:cs typeface="Aptos"/>
+              </a:rPr>
+              <a:t>Scope</a:t>
             </a:r>
           </a:p>
         </p:txBody>
@@ -11018,7 +10983,7 @@
           <p:cNvPr id="8" name="">
             <a:extLst xmlns:a="http://schemas.openxmlformats.org/drawingml/2006/main">
               <a:ext uri="{FF2B5EF4-FFF2-40B4-BE49-F238E27FC236}">
-                <a16:creationId xmlns:a16="http://schemas.microsoft.com/office/drawing/2014/main" id="{1D48F109-596C-4D92-8D4A-8CCE9732A70D}"/>
+                <a16:creationId xmlns:a16="http://schemas.microsoft.com/office/drawing/2014/main" id="{690FD096-928E-4E52-8C4D-4CED1C9E968A}"/>
               </a:ext>
             </a:extLst>
           </p:cNvPr>
@@ -11050,9 +11015,9 @@
                 <a:solidFill>
                   <a:srgbClr val="202938"/>
                 </a:solidFill>
-                <a:latin typeface="Microsoft YaHei"/>
-                <a:ea typeface="Microsoft YaHei"/>
-                <a:cs typeface="Microsoft YaHei"/>
+                <a:latin typeface="Aptos"/>
+                <a:ea typeface="Aptos"/>
+                <a:cs typeface="Aptos"/>
               </a:defRPr>
             </a:pPr>
             <a:r>
@@ -11060,11 +11025,11 @@
                 <a:solidFill>
                   <a:srgbClr val="202938"/>
                 </a:solidFill>
-                <a:latin typeface="Microsoft YaHei"/>
-                <a:ea typeface="Microsoft YaHei"/>
-                <a:cs typeface="Microsoft YaHei"/>
-              </a:rPr>
-              <a:t>训练与验证均限定 SuperMarioBros-1-1-v0；sample 模式用于 best checkpoint；视频为 sample20 / best-sample 搜索结果。</a:t>
+                <a:latin typeface="Aptos"/>
+                <a:ea typeface="Aptos"/>
+                <a:cs typeface="Aptos"/>
+              </a:rPr>
+              <a:t>Train, validation, and test are all on SuperMarioBros-1-1-v0. Best checkpoints use sample-mode validation.</a:t>
             </a:r>
           </a:p>
         </p:txBody>
@@ -11074,7 +11039,7 @@
           <p:cNvPr id="9" name="">
             <a:extLst xmlns:a="http://schemas.openxmlformats.org/drawingml/2006/main">
               <a:ext uri="{FF2B5EF4-FFF2-40B4-BE49-F238E27FC236}">
-                <a16:creationId xmlns:a16="http://schemas.microsoft.com/office/drawing/2014/main" id="{06CBA9D2-4872-48A3-B639-98DD2F968AFC}"/>
+                <a16:creationId xmlns:a16="http://schemas.microsoft.com/office/drawing/2014/main" id="{85343690-70A6-4E1B-B9F6-80594190A6A6}"/>
               </a:ext>
             </a:extLst>
           </p:cNvPr>
@@ -11115,7 +11080,7 @@
           <p:cNvPr id="10" name="">
             <a:extLst xmlns:a="http://schemas.openxmlformats.org/drawingml/2006/main">
               <a:ext uri="{FF2B5EF4-FFF2-40B4-BE49-F238E27FC236}">
-                <a16:creationId xmlns:a16="http://schemas.microsoft.com/office/drawing/2014/main" id="{B78A08AE-0581-450F-BEE3-A73F7C5C21F7}"/>
+                <a16:creationId xmlns:a16="http://schemas.microsoft.com/office/drawing/2014/main" id="{9EF058A8-A3EA-4425-AD24-C7CCBF5B5993}"/>
               </a:ext>
             </a:extLst>
           </p:cNvPr>
@@ -11159,9 +11124,9 @@
                 <a:solidFill>
                   <a:srgbClr val="FFFFFF"/>
                 </a:solidFill>
-                <a:latin typeface="Microsoft YaHei"/>
-                <a:ea typeface="Microsoft YaHei"/>
-                <a:cs typeface="Microsoft YaHei"/>
+                <a:latin typeface="Aptos"/>
+                <a:ea typeface="Aptos"/>
+                <a:cs typeface="Aptos"/>
               </a:defRPr>
             </a:pPr>
             <a:r>
@@ -11169,9 +11134,9 @@
                 <a:solidFill>
                   <a:srgbClr val="FFFFFF"/>
                 </a:solidFill>
-                <a:latin typeface="Microsoft YaHei"/>
-                <a:ea typeface="Microsoft YaHei"/>
-                <a:cs typeface="Microsoft YaHei"/>
+                <a:latin typeface="Aptos"/>
+                <a:ea typeface="Aptos"/>
+                <a:cs typeface="Aptos"/>
               </a:rPr>
               <a:t>1-1 training evidence</a:t>
             </a:r>
@@ -11183,19 +11148,19 @@
           <p:cNvPr id="11" name="">
             <a:extLst xmlns:a="http://schemas.openxmlformats.org/drawingml/2006/main">
               <a:ext uri="{FF2B5EF4-FFF2-40B4-BE49-F238E27FC236}">
-                <a16:creationId xmlns:a16="http://schemas.microsoft.com/office/drawing/2014/main" id="{AEDEDCD1-2595-4EC3-A566-B37AE121405D}"/>
-              </a:ext>
-            </a:extLst>
-          </p:cNvPr>
-          <p:cNvSpPr>
-            <a:spLocks xmlns:a="http://schemas.openxmlformats.org/drawingml/2006/main" noGrp="1"/>
-          </p:cNvSpPr>
-          <p:nvPr/>
-        </p:nvSpPr>
-        <p:spPr>
-          <a:xfrm xmlns:a="http://schemas.openxmlformats.org/drawingml/2006/main">
-            <a:off x="752475" y="2324100"/>
-            <a:ext cx="2952750" cy="666750"/>
+                <a16:creationId xmlns:a16="http://schemas.microsoft.com/office/drawing/2014/main" id="{051C8E49-968C-4DDB-875D-172A9E17B763}"/>
+              </a:ext>
+            </a:extLst>
+          </p:cNvPr>
+          <p:cNvSpPr>
+            <a:spLocks xmlns:a="http://schemas.openxmlformats.org/drawingml/2006/main" noGrp="1"/>
+          </p:cNvSpPr>
+          <p:nvPr/>
+        </p:nvSpPr>
+        <p:spPr>
+          <a:xfrm xmlns:a="http://schemas.openxmlformats.org/drawingml/2006/main">
+            <a:off x="752475" y="2381250"/>
+            <a:ext cx="2952750" cy="552450"/>
           </a:xfrm>
           <a:prstGeom xmlns:a="http://schemas.openxmlformats.org/drawingml/2006/main" prst="rect">
             <a:avLst/>
@@ -11215,9 +11180,9 @@
                 <a:solidFill>
                   <a:srgbClr val="6243B6"/>
                 </a:solidFill>
-                <a:latin typeface="Microsoft YaHei"/>
-                <a:ea typeface="Microsoft YaHei"/>
-                <a:cs typeface="Microsoft YaHei"/>
+                <a:latin typeface="Aptos"/>
+                <a:ea typeface="Aptos"/>
+                <a:cs typeface="Aptos"/>
               </a:defRPr>
             </a:pPr>
             <a:r>
@@ -11225,9 +11190,9 @@
                 <a:solidFill>
                   <a:srgbClr val="6243B6"/>
                 </a:solidFill>
-                <a:latin typeface="Microsoft YaHei"/>
-                <a:ea typeface="Microsoft YaHei"/>
-                <a:cs typeface="Microsoft YaHei"/>
+                <a:latin typeface="Aptos"/>
+                <a:ea typeface="Aptos"/>
+                <a:cs typeface="Aptos"/>
               </a:rPr>
               <a:t>1 episode reached</a:t>
             </a:r>
@@ -11238,9 +11203,9 @@
                 <a:solidFill>
                   <a:srgbClr val="6243B6"/>
                 </a:solidFill>
-                <a:latin typeface="Microsoft YaHei"/>
-                <a:ea typeface="Microsoft YaHei"/>
-                <a:cs typeface="Microsoft YaHei"/>
+                <a:latin typeface="Aptos"/>
+                <a:ea typeface="Aptos"/>
+                <a:cs typeface="Aptos"/>
               </a:defRPr>
             </a:pPr>
             <a:r>
@@ -11248,9 +11213,9 @@
                 <a:solidFill>
                   <a:srgbClr val="6243B6"/>
                 </a:solidFill>
-                <a:latin typeface="Microsoft YaHei"/>
-                <a:ea typeface="Microsoft YaHei"/>
-                <a:cs typeface="Microsoft YaHei"/>
+                <a:latin typeface="Aptos"/>
+                <a:ea typeface="Aptos"/>
+                <a:cs typeface="Aptos"/>
               </a:rPr>
               <a:t>max_x=3161</a:t>
             </a:r>
@@ -11262,7 +11227,7 @@
           <p:cNvPr id="12" name="">
             <a:extLst xmlns:a="http://schemas.openxmlformats.org/drawingml/2006/main">
               <a:ext uri="{FF2B5EF4-FFF2-40B4-BE49-F238E27FC236}">
-                <a16:creationId xmlns:a16="http://schemas.microsoft.com/office/drawing/2014/main" id="{5B5EB338-1CE1-46ED-A4A6-2F857C800EED}"/>
+                <a16:creationId xmlns:a16="http://schemas.microsoft.com/office/drawing/2014/main" id="{AF9BA4A3-9810-4DD9-9EBA-80FA43B4A6D3}"/>
               </a:ext>
             </a:extLst>
           </p:cNvPr>
@@ -11294,9 +11259,9 @@
                 <a:solidFill>
                   <a:srgbClr val="607084"/>
                 </a:solidFill>
-                <a:latin typeface="Microsoft YaHei"/>
-                <a:ea typeface="Microsoft YaHei"/>
-                <a:cs typeface="Microsoft YaHei"/>
+                <a:latin typeface="Aptos"/>
+                <a:ea typeface="Aptos"/>
+                <a:cs typeface="Aptos"/>
               </a:defRPr>
             </a:pPr>
             <a:r>
@@ -11304,11 +11269,11 @@
                 <a:solidFill>
                   <a:srgbClr val="607084"/>
                 </a:solidFill>
-                <a:latin typeface="Microsoft YaHei"/>
-                <a:ea typeface="Microsoft YaHei"/>
-                <a:cs typeface="Microsoft YaHei"/>
-              </a:rPr>
-              <a:t>Original selected 1-1 run has inferred completion evidence; broader notes include later flag logging but this PPT uses selected 1-1 evidence.</a:t>
+                <a:latin typeface="Aptos"/>
+                <a:ea typeface="Aptos"/>
+                <a:cs typeface="Aptos"/>
+              </a:rPr>
+              <a:t>The selected run gives inferred terminal-progress evidence. The deck uses only World 1-1 results.</a:t>
             </a:r>
           </a:p>
         </p:txBody>
@@ -11318,7 +11283,7 @@
           <p:cNvPr id="13" name="">
             <a:extLst xmlns:a="http://schemas.openxmlformats.org/drawingml/2006/main">
               <a:ext uri="{FF2B5EF4-FFF2-40B4-BE49-F238E27FC236}">
-                <a16:creationId xmlns:a16="http://schemas.microsoft.com/office/drawing/2014/main" id="{AAA1A3F9-FE93-4870-B755-1CC73610B1DB}"/>
+                <a16:creationId xmlns:a16="http://schemas.microsoft.com/office/drawing/2014/main" id="{0C5594D2-AB02-43FB-AF22-71B5B9632E32}"/>
               </a:ext>
             </a:extLst>
           </p:cNvPr>
@@ -11359,7 +11324,7 @@
           <p:cNvPr id="14" name="">
             <a:extLst xmlns:a="http://schemas.openxmlformats.org/drawingml/2006/main">
               <a:ext uri="{FF2B5EF4-FFF2-40B4-BE49-F238E27FC236}">
-                <a16:creationId xmlns:a16="http://schemas.microsoft.com/office/drawing/2014/main" id="{53180778-F818-45E5-B529-C4BB466C9CB3}"/>
+                <a16:creationId xmlns:a16="http://schemas.microsoft.com/office/drawing/2014/main" id="{2F62177A-2D0D-46DE-BF25-ADABE473B9EE}"/>
               </a:ext>
             </a:extLst>
           </p:cNvPr>
@@ -11391,9 +11356,9 @@
                 <a:solidFill>
                   <a:srgbClr val="607084"/>
                 </a:solidFill>
-                <a:latin typeface="Microsoft YaHei"/>
-                <a:ea typeface="Microsoft YaHei"/>
-                <a:cs typeface="Microsoft YaHei"/>
+                <a:latin typeface="Aptos"/>
+                <a:ea typeface="Aptos"/>
+                <a:cs typeface="Aptos"/>
               </a:defRPr>
             </a:pPr>
             <a:r>
@@ -11401,11 +11366,11 @@
                 <a:solidFill>
                   <a:srgbClr val="607084"/>
                 </a:solidFill>
-                <a:latin typeface="Microsoft YaHei"/>
-                <a:ea typeface="Microsoft YaHei"/>
-                <a:cs typeface="Microsoft YaHei"/>
-              </a:rPr>
-              <a:t>ep</a:t>
+                <a:latin typeface="Aptos"/>
+                <a:ea typeface="Aptos"/>
+                <a:cs typeface="Aptos"/>
+              </a:rPr>
+              <a:t>episodes</a:t>
             </a:r>
           </a:p>
         </p:txBody>
@@ -11415,7 +11380,7 @@
           <p:cNvPr id="15" name="">
             <a:extLst xmlns:a="http://schemas.openxmlformats.org/drawingml/2006/main">
               <a:ext uri="{FF2B5EF4-FFF2-40B4-BE49-F238E27FC236}">
-                <a16:creationId xmlns:a16="http://schemas.microsoft.com/office/drawing/2014/main" id="{02C99FB6-6045-4247-9A2A-8022EE036325}"/>
+                <a16:creationId xmlns:a16="http://schemas.microsoft.com/office/drawing/2014/main" id="{B9E37675-3CD0-47E3-962E-62897910D35B}"/>
               </a:ext>
             </a:extLst>
           </p:cNvPr>
@@ -11443,7 +11408,7 @@
           <a:lstStyle xmlns:a="http://schemas.openxmlformats.org/drawingml/2006/main"/>
           <a:p xmlns:a="http://schemas.openxmlformats.org/drawingml/2006/main">
             <a:pPr>
-              <a:defRPr sz="1200" b="1">
+              <a:defRPr sz="1350" b="1">
                 <a:solidFill>
                   <a:srgbClr val="6243B6"/>
                 </a:solidFill>
@@ -11453,7 +11418,7 @@
               </a:defRPr>
             </a:pPr>
             <a:r>
-              <a:rPr sz="1200" b="1">
+              <a:rPr sz="1350" b="1">
                 <a:solidFill>
                   <a:srgbClr val="6243B6"/>
                 </a:solidFill>
@@ -11471,7 +11436,7 @@
           <p:cNvPr id="16" name="">
             <a:extLst xmlns:a="http://schemas.openxmlformats.org/drawingml/2006/main">
               <a:ext uri="{FF2B5EF4-FFF2-40B4-BE49-F238E27FC236}">
-                <a16:creationId xmlns:a16="http://schemas.microsoft.com/office/drawing/2014/main" id="{843BADA4-7111-4F3F-87A5-FCADA32D9075}"/>
+                <a16:creationId xmlns:a16="http://schemas.microsoft.com/office/drawing/2014/main" id="{70EA22A7-1510-42AC-B1D0-8ED46389E6F9}"/>
               </a:ext>
             </a:extLst>
           </p:cNvPr>
@@ -11503,9 +11468,9 @@
                 <a:solidFill>
                   <a:srgbClr val="607084"/>
                 </a:solidFill>
-                <a:latin typeface="Microsoft YaHei"/>
-                <a:ea typeface="Microsoft YaHei"/>
-                <a:cs typeface="Microsoft YaHei"/>
+                <a:latin typeface="Aptos"/>
+                <a:ea typeface="Aptos"/>
+                <a:cs typeface="Aptos"/>
               </a:defRPr>
             </a:pPr>
             <a:r>
@@ -11513,11 +11478,11 @@
                 <a:solidFill>
                   <a:srgbClr val="607084"/>
                 </a:solidFill>
-                <a:latin typeface="Microsoft YaHei"/>
-                <a:ea typeface="Microsoft YaHei"/>
-                <a:cs typeface="Microsoft YaHei"/>
-              </a:rPr>
-              <a:t>training episodes</a:t>
+                <a:latin typeface="Aptos"/>
+                <a:ea typeface="Aptos"/>
+                <a:cs typeface="Aptos"/>
+              </a:rPr>
+              <a:t>training</a:t>
             </a:r>
           </a:p>
         </p:txBody>
@@ -11527,7 +11492,7 @@
           <p:cNvPr id="17" name="">
             <a:extLst xmlns:a="http://schemas.openxmlformats.org/drawingml/2006/main">
               <a:ext uri="{FF2B5EF4-FFF2-40B4-BE49-F238E27FC236}">
-                <a16:creationId xmlns:a16="http://schemas.microsoft.com/office/drawing/2014/main" id="{B8A67F7B-4D79-4021-804A-80E08E53B82F}"/>
+                <a16:creationId xmlns:a16="http://schemas.microsoft.com/office/drawing/2014/main" id="{3A757AEA-3515-43B3-93B0-9973B1A8B4D4}"/>
               </a:ext>
             </a:extLst>
           </p:cNvPr>
@@ -11568,7 +11533,7 @@
           <p:cNvPr id="18" name="">
             <a:extLst xmlns:a="http://schemas.openxmlformats.org/drawingml/2006/main">
               <a:ext uri="{FF2B5EF4-FFF2-40B4-BE49-F238E27FC236}">
-                <a16:creationId xmlns:a16="http://schemas.microsoft.com/office/drawing/2014/main" id="{BF6553EC-22F6-44E4-AAF5-0F68A8627801}"/>
+                <a16:creationId xmlns:a16="http://schemas.microsoft.com/office/drawing/2014/main" id="{D9FF93D3-9A68-4311-A5C0-072FD5CD0A45}"/>
               </a:ext>
             </a:extLst>
           </p:cNvPr>
@@ -11600,9 +11565,9 @@
                 <a:solidFill>
                   <a:srgbClr val="607084"/>
                 </a:solidFill>
-                <a:latin typeface="Microsoft YaHei"/>
-                <a:ea typeface="Microsoft YaHei"/>
-                <a:cs typeface="Microsoft YaHei"/>
+                <a:latin typeface="Aptos"/>
+                <a:ea typeface="Aptos"/>
+                <a:cs typeface="Aptos"/>
               </a:defRPr>
             </a:pPr>
             <a:r>
@@ -11610,11 +11575,11 @@
                 <a:solidFill>
                   <a:srgbClr val="607084"/>
                 </a:solidFill>
-                <a:latin typeface="Microsoft YaHei"/>
-                <a:ea typeface="Microsoft YaHei"/>
-                <a:cs typeface="Microsoft YaHei"/>
-              </a:rPr>
-              <a:t>R</a:t>
+                <a:latin typeface="Aptos"/>
+                <a:ea typeface="Aptos"/>
+                <a:cs typeface="Aptos"/>
+              </a:rPr>
+              <a:t>reward</a:t>
             </a:r>
           </a:p>
         </p:txBody>
@@ -11624,7 +11589,7 @@
           <p:cNvPr id="19" name="">
             <a:extLst xmlns:a="http://schemas.openxmlformats.org/drawingml/2006/main">
               <a:ext uri="{FF2B5EF4-FFF2-40B4-BE49-F238E27FC236}">
-                <a16:creationId xmlns:a16="http://schemas.microsoft.com/office/drawing/2014/main" id="{80923970-6A7A-4889-8F1B-3C75D39BECE4}"/>
+                <a16:creationId xmlns:a16="http://schemas.microsoft.com/office/drawing/2014/main" id="{9139DFAB-C14F-4166-A12B-1CBA9ABC8879}"/>
               </a:ext>
             </a:extLst>
           </p:cNvPr>
@@ -11680,7 +11645,7 @@
           <p:cNvPr id="20" name="">
             <a:extLst xmlns:a="http://schemas.openxmlformats.org/drawingml/2006/main">
               <a:ext uri="{FF2B5EF4-FFF2-40B4-BE49-F238E27FC236}">
-                <a16:creationId xmlns:a16="http://schemas.microsoft.com/office/drawing/2014/main" id="{EC6237CD-01B8-4F97-B66E-CDBF494FD89B}"/>
+                <a16:creationId xmlns:a16="http://schemas.microsoft.com/office/drawing/2014/main" id="{BFFE5575-AF03-438B-BBCC-D19E5487EBFC}"/>
               </a:ext>
             </a:extLst>
           </p:cNvPr>
@@ -11712,9 +11677,9 @@
                 <a:solidFill>
                   <a:srgbClr val="607084"/>
                 </a:solidFill>
-                <a:latin typeface="Microsoft YaHei"/>
-                <a:ea typeface="Microsoft YaHei"/>
-                <a:cs typeface="Microsoft YaHei"/>
+                <a:latin typeface="Aptos"/>
+                <a:ea typeface="Aptos"/>
+                <a:cs typeface="Aptos"/>
               </a:defRPr>
             </a:pPr>
             <a:r>
@@ -11722,11 +11687,11 @@
                 <a:solidFill>
                   <a:srgbClr val="607084"/>
                 </a:solidFill>
-                <a:latin typeface="Microsoft YaHei"/>
-                <a:ea typeface="Microsoft YaHei"/>
-                <a:cs typeface="Microsoft YaHei"/>
-              </a:rPr>
-              <a:t>best training reward</a:t>
+                <a:latin typeface="Aptos"/>
+                <a:ea typeface="Aptos"/>
+                <a:cs typeface="Aptos"/>
+              </a:rPr>
+              <a:t>best train</a:t>
             </a:r>
           </a:p>
         </p:txBody>
@@ -11736,7 +11701,7 @@
           <p:cNvPr id="21" name="">
             <a:extLst xmlns:a="http://schemas.openxmlformats.org/drawingml/2006/main">
               <a:ext uri="{FF2B5EF4-FFF2-40B4-BE49-F238E27FC236}">
-                <a16:creationId xmlns:a16="http://schemas.microsoft.com/office/drawing/2014/main" id="{EB84CE40-3F5C-4702-8577-FC5EC221097A}"/>
+                <a16:creationId xmlns:a16="http://schemas.microsoft.com/office/drawing/2014/main" id="{9587ECAE-69CD-4538-AFC7-1BF3B3510EB8}"/>
               </a:ext>
             </a:extLst>
           </p:cNvPr>
@@ -11777,7 +11742,7 @@
           <p:cNvPr id="22" name="">
             <a:extLst xmlns:a="http://schemas.openxmlformats.org/drawingml/2006/main">
               <a:ext uri="{FF2B5EF4-FFF2-40B4-BE49-F238E27FC236}">
-                <a16:creationId xmlns:a16="http://schemas.microsoft.com/office/drawing/2014/main" id="{9181A6FB-57B4-400E-8AA6-2D95CC024A5E}"/>
+                <a16:creationId xmlns:a16="http://schemas.microsoft.com/office/drawing/2014/main" id="{755B748A-B540-43CF-BD68-6AD1207FCA7D}"/>
               </a:ext>
             </a:extLst>
           </p:cNvPr>
@@ -11809,9 +11774,9 @@
                 <a:solidFill>
                   <a:srgbClr val="607084"/>
                 </a:solidFill>
-                <a:latin typeface="Microsoft YaHei"/>
-                <a:ea typeface="Microsoft YaHei"/>
-                <a:cs typeface="Microsoft YaHei"/>
+                <a:latin typeface="Aptos"/>
+                <a:ea typeface="Aptos"/>
+                <a:cs typeface="Aptos"/>
               </a:defRPr>
             </a:pPr>
             <a:r>
@@ -11819,11 +11784,11 @@
                 <a:solidFill>
                   <a:srgbClr val="607084"/>
                 </a:solidFill>
-                <a:latin typeface="Microsoft YaHei"/>
-                <a:ea typeface="Microsoft YaHei"/>
-                <a:cs typeface="Microsoft YaHei"/>
-              </a:rPr>
-              <a:t>x</a:t>
+                <a:latin typeface="Aptos"/>
+                <a:ea typeface="Aptos"/>
+                <a:cs typeface="Aptos"/>
+              </a:rPr>
+              <a:t>max_x</a:t>
             </a:r>
           </a:p>
         </p:txBody>
@@ -11833,7 +11798,7 @@
           <p:cNvPr id="23" name="">
             <a:extLst xmlns:a="http://schemas.openxmlformats.org/drawingml/2006/main">
               <a:ext uri="{FF2B5EF4-FFF2-40B4-BE49-F238E27FC236}">
-                <a16:creationId xmlns:a16="http://schemas.microsoft.com/office/drawing/2014/main" id="{4C011550-786C-4ECE-95DC-9D3970BD3BD2}"/>
+                <a16:creationId xmlns:a16="http://schemas.microsoft.com/office/drawing/2014/main" id="{BDAC2870-0C66-4C54-B3BA-D7CF6B7DCE48}"/>
               </a:ext>
             </a:extLst>
           </p:cNvPr>
@@ -11889,7 +11854,7 @@
           <p:cNvPr id="24" name="">
             <a:extLst xmlns:a="http://schemas.openxmlformats.org/drawingml/2006/main">
               <a:ext uri="{FF2B5EF4-FFF2-40B4-BE49-F238E27FC236}">
-                <a16:creationId xmlns:a16="http://schemas.microsoft.com/office/drawing/2014/main" id="{152661C9-AC12-4441-9780-4608406BC161}"/>
+                <a16:creationId xmlns:a16="http://schemas.microsoft.com/office/drawing/2014/main" id="{AD93E2AE-29A6-4321-955E-5041585ED0D7}"/>
               </a:ext>
             </a:extLst>
           </p:cNvPr>
@@ -11921,9 +11886,9 @@
                 <a:solidFill>
                   <a:srgbClr val="607084"/>
                 </a:solidFill>
-                <a:latin typeface="Microsoft YaHei"/>
-                <a:ea typeface="Microsoft YaHei"/>
-                <a:cs typeface="Microsoft YaHei"/>
+                <a:latin typeface="Aptos"/>
+                <a:ea typeface="Aptos"/>
+                <a:cs typeface="Aptos"/>
               </a:defRPr>
             </a:pPr>
             <a:r>
@@ -11931,11 +11896,11 @@
                 <a:solidFill>
                   <a:srgbClr val="607084"/>
                 </a:solidFill>
-                <a:latin typeface="Microsoft YaHei"/>
-                <a:ea typeface="Microsoft YaHei"/>
-                <a:cs typeface="Microsoft YaHei"/>
-              </a:rPr>
-              <a:t>max x_pos</a:t>
+                <a:latin typeface="Aptos"/>
+                <a:ea typeface="Aptos"/>
+                <a:cs typeface="Aptos"/>
+              </a:rPr>
+              <a:t>train max</a:t>
             </a:r>
           </a:p>
         </p:txBody>
@@ -11945,7 +11910,7 @@
           <p:cNvPr id="25" name="">
             <a:extLst xmlns:a="http://schemas.openxmlformats.org/drawingml/2006/main">
               <a:ext uri="{FF2B5EF4-FFF2-40B4-BE49-F238E27FC236}">
-                <a16:creationId xmlns:a16="http://schemas.microsoft.com/office/drawing/2014/main" id="{2D276B9C-8B9D-4D10-A894-2CA296C598A5}"/>
+                <a16:creationId xmlns:a16="http://schemas.microsoft.com/office/drawing/2014/main" id="{89A24D97-3240-499B-B8AA-93C195230F13}"/>
               </a:ext>
             </a:extLst>
           </p:cNvPr>
@@ -11986,7 +11951,7 @@
           <p:cNvPr id="26" name="">
             <a:extLst xmlns:a="http://schemas.openxmlformats.org/drawingml/2006/main">
               <a:ext uri="{FF2B5EF4-FFF2-40B4-BE49-F238E27FC236}">
-                <a16:creationId xmlns:a16="http://schemas.microsoft.com/office/drawing/2014/main" id="{112BC17A-5173-4A77-BCE7-E11086D88F46}"/>
+                <a16:creationId xmlns:a16="http://schemas.microsoft.com/office/drawing/2014/main" id="{79ABAEF7-2865-41C2-B963-8199FB2F67FB}"/>
               </a:ext>
             </a:extLst>
           </p:cNvPr>
@@ -12018,9 +11983,9 @@
                 <a:solidFill>
                   <a:srgbClr val="607084"/>
                 </a:solidFill>
-                <a:latin typeface="Microsoft YaHei"/>
-                <a:ea typeface="Microsoft YaHei"/>
-                <a:cs typeface="Microsoft YaHei"/>
+                <a:latin typeface="Aptos"/>
+                <a:ea typeface="Aptos"/>
+                <a:cs typeface="Aptos"/>
               </a:defRPr>
             </a:pPr>
             <a:r>
@@ -12028,11 +11993,11 @@
                 <a:solidFill>
                   <a:srgbClr val="607084"/>
                 </a:solidFill>
-                <a:latin typeface="Microsoft YaHei"/>
-                <a:ea typeface="Microsoft YaHei"/>
-                <a:cs typeface="Microsoft YaHei"/>
-              </a:rPr>
-              <a:t>reward vs progress</a:t>
+                <a:latin typeface="Aptos"/>
+                <a:ea typeface="Aptos"/>
+                <a:cs typeface="Aptos"/>
+              </a:rPr>
+              <a:t>reward/prog.</a:t>
             </a:r>
           </a:p>
         </p:txBody>
@@ -12042,7 +12007,7 @@
           <p:cNvPr id="27" name="">
             <a:extLst xmlns:a="http://schemas.openxmlformats.org/drawingml/2006/main">
               <a:ext uri="{FF2B5EF4-FFF2-40B4-BE49-F238E27FC236}">
-                <a16:creationId xmlns:a16="http://schemas.microsoft.com/office/drawing/2014/main" id="{9D09A9BF-4E5E-4CBE-AC58-0CBC8D8ECF96}"/>
+                <a16:creationId xmlns:a16="http://schemas.microsoft.com/office/drawing/2014/main" id="{7819C354-96DC-4632-921A-11CE45753F60}"/>
               </a:ext>
             </a:extLst>
           </p:cNvPr>
@@ -12088,7 +12053,7 @@
                 <a:ea typeface="Arial"/>
                 <a:cs typeface="Arial"/>
               </a:rPr>
-              <a:t>不同步</a:t>
+              <a:t>Diff.</a:t>
             </a:r>
           </a:p>
         </p:txBody>
@@ -12098,7 +12063,7 @@
           <p:cNvPr id="28" name="">
             <a:extLst xmlns:a="http://schemas.openxmlformats.org/drawingml/2006/main">
               <a:ext uri="{FF2B5EF4-FFF2-40B4-BE49-F238E27FC236}">
-                <a16:creationId xmlns:a16="http://schemas.microsoft.com/office/drawing/2014/main" id="{7C967C4B-1492-4A4F-B479-08C3B9A555ED}"/>
+                <a16:creationId xmlns:a16="http://schemas.microsoft.com/office/drawing/2014/main" id="{7D4E7ACF-FD96-41C8-821F-CEC467A7261D}"/>
               </a:ext>
             </a:extLst>
           </p:cNvPr>
@@ -12130,9 +12095,9 @@
                 <a:solidFill>
                   <a:srgbClr val="607084"/>
                 </a:solidFill>
-                <a:latin typeface="Microsoft YaHei"/>
-                <a:ea typeface="Microsoft YaHei"/>
-                <a:cs typeface="Microsoft YaHei"/>
+                <a:latin typeface="Aptos"/>
+                <a:ea typeface="Aptos"/>
+                <a:cs typeface="Aptos"/>
               </a:defRPr>
             </a:pPr>
             <a:r>
@@ -12140,11 +12105,11 @@
                 <a:solidFill>
                   <a:srgbClr val="607084"/>
                 </a:solidFill>
-                <a:latin typeface="Microsoft YaHei"/>
-                <a:ea typeface="Microsoft YaHei"/>
-                <a:cs typeface="Microsoft YaHei"/>
-              </a:rPr>
-              <a:t>best video from last.pt</a:t>
+                <a:latin typeface="Aptos"/>
+                <a:ea typeface="Aptos"/>
+                <a:cs typeface="Aptos"/>
+              </a:rPr>
+              <a:t>video &lt; train</a:t>
             </a:r>
           </a:p>
         </p:txBody>
@@ -12154,7 +12119,7 @@
           <p:cNvPr id="29" name="">
             <a:extLst xmlns:a="http://schemas.openxmlformats.org/drawingml/2006/main">
               <a:ext uri="{FF2B5EF4-FFF2-40B4-BE49-F238E27FC236}">
-                <a16:creationId xmlns:a16="http://schemas.microsoft.com/office/drawing/2014/main" id="{1FDD8010-7138-46C6-8855-626E616627A7}"/>
+                <a16:creationId xmlns:a16="http://schemas.microsoft.com/office/drawing/2014/main" id="{7EA65A64-2A37-4148-ADC8-766E3230F5C7}"/>
               </a:ext>
             </a:extLst>
           </p:cNvPr>
@@ -12195,7 +12160,7 @@
           <p:cNvPr id="30" name="">
             <a:extLst xmlns:a="http://schemas.openxmlformats.org/drawingml/2006/main">
               <a:ext uri="{FF2B5EF4-FFF2-40B4-BE49-F238E27FC236}">
-                <a16:creationId xmlns:a16="http://schemas.microsoft.com/office/drawing/2014/main" id="{A3F8D40E-8ADE-4864-9547-ABCE145B7783}"/>
+                <a16:creationId xmlns:a16="http://schemas.microsoft.com/office/drawing/2014/main" id="{EE9478B6-85C2-4407-ADE8-F3F336A0DE1C}"/>
               </a:ext>
             </a:extLst>
           </p:cNvPr>
@@ -12227,9 +12192,9 @@
                 <a:solidFill>
                   <a:srgbClr val="607084"/>
                 </a:solidFill>
-                <a:latin typeface="Microsoft YaHei"/>
-                <a:ea typeface="Microsoft YaHei"/>
-                <a:cs typeface="Microsoft YaHei"/>
+                <a:latin typeface="Aptos"/>
+                <a:ea typeface="Aptos"/>
+                <a:cs typeface="Aptos"/>
               </a:defRPr>
             </a:pPr>
             <a:r>
@@ -12237,11 +12202,11 @@
                 <a:solidFill>
                   <a:srgbClr val="607084"/>
                 </a:solidFill>
-                <a:latin typeface="Microsoft YaHei"/>
-                <a:ea typeface="Microsoft YaHei"/>
-                <a:cs typeface="Microsoft YaHei"/>
-              </a:rPr>
-              <a:t>通关 / 进度</a:t>
+                <a:latin typeface="Aptos"/>
+                <a:ea typeface="Aptos"/>
+                <a:cs typeface="Aptos"/>
+              </a:rPr>
+              <a:t>Clear / progress</a:t>
             </a:r>
           </a:p>
         </p:txBody>
@@ -12251,7 +12216,7 @@
           <p:cNvPr id="31" name="">
             <a:extLst xmlns:a="http://schemas.openxmlformats.org/drawingml/2006/main">
               <a:ext uri="{FF2B5EF4-FFF2-40B4-BE49-F238E27FC236}">
-                <a16:creationId xmlns:a16="http://schemas.microsoft.com/office/drawing/2014/main" id="{51A65807-59B2-4A9B-89DF-25C200B3DCF1}"/>
+                <a16:creationId xmlns:a16="http://schemas.microsoft.com/office/drawing/2014/main" id="{DFCA17B2-530E-4B43-8988-30F4AC25AAA8}"/>
               </a:ext>
             </a:extLst>
           </p:cNvPr>
@@ -12283,9 +12248,9 @@
                 <a:solidFill>
                   <a:srgbClr val="6243B6"/>
                 </a:solidFill>
-                <a:latin typeface="Microsoft YaHei"/>
-                <a:ea typeface="Microsoft YaHei"/>
-                <a:cs typeface="Microsoft YaHei"/>
+                <a:latin typeface="Aptos"/>
+                <a:ea typeface="Aptos"/>
+                <a:cs typeface="Aptos"/>
               </a:defRPr>
             </a:pPr>
             <a:r>
@@ -12293,11 +12258,11 @@
                 <a:solidFill>
                   <a:srgbClr val="6243B6"/>
                 </a:solidFill>
-                <a:latin typeface="Microsoft YaHei"/>
-                <a:ea typeface="Microsoft YaHei"/>
-                <a:cs typeface="Microsoft YaHei"/>
-              </a:rPr>
-              <a:t>达到 x=3161</a:t>
+                <a:latin typeface="Aptos"/>
+                <a:ea typeface="Aptos"/>
+                <a:cs typeface="Aptos"/>
+              </a:rPr>
+              <a:t>Reached x=3161</a:t>
             </a:r>
           </a:p>
         </p:txBody>
@@ -12307,7 +12272,7 @@
           <p:cNvPr id="32" name="">
             <a:extLst xmlns:a="http://schemas.openxmlformats.org/drawingml/2006/main">
               <a:ext uri="{FF2B5EF4-FFF2-40B4-BE49-F238E27FC236}">
-                <a16:creationId xmlns:a16="http://schemas.microsoft.com/office/drawing/2014/main" id="{D13F5207-43F9-4F91-9DF3-FE7661D764AF}"/>
+                <a16:creationId xmlns:a16="http://schemas.microsoft.com/office/drawing/2014/main" id="{12925E5E-FF8F-4388-B51E-8CAC36343296}"/>
               </a:ext>
             </a:extLst>
           </p:cNvPr>
@@ -12339,9 +12304,9 @@
                 <a:solidFill>
                   <a:srgbClr val="607084"/>
                 </a:solidFill>
-                <a:latin typeface="Microsoft YaHei"/>
-                <a:ea typeface="Microsoft YaHei"/>
-                <a:cs typeface="Microsoft YaHei"/>
+                <a:latin typeface="Aptos"/>
+                <a:ea typeface="Aptos"/>
+                <a:cs typeface="Aptos"/>
               </a:defRPr>
             </a:pPr>
             <a:r>
@@ -12349,9 +12314,9 @@
                 <a:solidFill>
                   <a:srgbClr val="607084"/>
                 </a:solidFill>
-                <a:latin typeface="Microsoft YaHei"/>
-                <a:ea typeface="Microsoft YaHei"/>
-                <a:cs typeface="Microsoft YaHei"/>
+                <a:latin typeface="Aptos"/>
+                <a:ea typeface="Aptos"/>
+                <a:cs typeface="Aptos"/>
               </a:rPr>
               <a:t>max_x = 3161 / 3161</a:t>
             </a:r>
@@ -12363,42 +12328,7 @@
           <p:cNvPr id="33" name="">
             <a:extLst xmlns:a="http://schemas.openxmlformats.org/drawingml/2006/main">
               <a:ext uri="{FF2B5EF4-FFF2-40B4-BE49-F238E27FC236}">
-                <a16:creationId xmlns:a16="http://schemas.microsoft.com/office/drawing/2014/main" id="{3C29471B-B1F5-4C86-9CC9-F93D91287B41}"/>
-              </a:ext>
-            </a:extLst>
-          </p:cNvPr>
-          <p:cNvSpPr>
-            <a:spLocks xmlns:a="http://schemas.openxmlformats.org/drawingml/2006/main" noGrp="1"/>
-          </p:cNvSpPr>
-          <p:nvPr/>
-        </p:nvSpPr>
-        <p:spPr>
-          <a:xfrm xmlns:a="http://schemas.openxmlformats.org/drawingml/2006/main">
-            <a:off x="4371975" y="2847975"/>
-            <a:ext cx="3533775" cy="85725"/>
-          </a:xfrm>
-          <a:prstGeom xmlns:a="http://schemas.openxmlformats.org/drawingml/2006/main" prst="roundRect">
-            <a:avLst>
-              <a:gd name="adj" fmla="val 44444"/>
-            </a:avLst>
-          </a:prstGeom>
-          <a:solidFill xmlns:a="http://schemas.openxmlformats.org/drawingml/2006/main">
-            <a:srgbClr val="DDE6EF"/>
-          </a:solidFill>
-          <a:ln xmlns:a="http://schemas.openxmlformats.org/drawingml/2006/main" w="0">
-            <a:solidFill>
-              <a:srgbClr val="DDE6EF"/>
-            </a:solidFill>
-            <a:prstDash val="solid"/>
-          </a:ln>
-        </p:spPr>
-      </p:sp>
-      <p:sp>
-        <p:nvSpPr>
-          <p:cNvPr id="34" name="">
-            <a:extLst xmlns:a="http://schemas.openxmlformats.org/drawingml/2006/main">
-              <a:ext uri="{FF2B5EF4-FFF2-40B4-BE49-F238E27FC236}">
-                <a16:creationId xmlns:a16="http://schemas.microsoft.com/office/drawing/2014/main" id="{0D10E6F4-13C7-4243-B242-16909C0BCC2B}"/>
+                <a16:creationId xmlns:a16="http://schemas.microsoft.com/office/drawing/2014/main" id="{C238F4EB-FE99-4604-96F6-CF6F4DA6C176}"/>
               </a:ext>
             </a:extLst>
           </p:cNvPr>
@@ -12430,7 +12360,7 @@
       </p:sp>
       <p:graphicFrame>
         <p:nvGraphicFramePr>
-          <p:cNvPr id="82" name=""/>
+          <p:cNvPr id="80" name=""/>
           <p:cNvGraphicFramePr/>
           <p:nvPr/>
         </p:nvGraphicFramePr>
@@ -12460,11 +12390,11 @@
                           <a:solidFill>
                             <a:srgbClr val="202938"/>
                           </a:solidFill>
-                          <a:latin typeface="Microsoft YaHei"/>
-                          <a:ea typeface="Microsoft YaHei"/>
-                          <a:cs typeface="Microsoft YaHei"/>
+                          <a:latin typeface="Aptos"/>
+                          <a:ea typeface="Aptos"/>
+                          <a:cs typeface="Aptos"/>
                         </a:rPr>
-                        <a:t>1000000 steps</a:t>
+                        <a:t>1M steps</a:t>
                       </a:r>
                     </a:p>
                   </a:txBody>
@@ -12485,9 +12415,9 @@
                           <a:solidFill>
                             <a:srgbClr val="202938"/>
                           </a:solidFill>
-                          <a:latin typeface="Microsoft YaHei"/>
-                          <a:ea typeface="Microsoft YaHei"/>
-                          <a:cs typeface="Microsoft YaHei"/>
+                          <a:latin typeface="Aptos"/>
+                          <a:ea typeface="Aptos"/>
+                          <a:cs typeface="Aptos"/>
                         </a:rPr>
                         <a:t>mean</a:t>
                       </a:r>
@@ -12510,9 +12440,9 @@
                           <a:solidFill>
                             <a:srgbClr val="202938"/>
                           </a:solidFill>
-                          <a:latin typeface="Microsoft YaHei"/>
-                          <a:ea typeface="Microsoft YaHei"/>
-                          <a:cs typeface="Microsoft YaHei"/>
+                          <a:latin typeface="Aptos"/>
+                          <a:ea typeface="Aptos"/>
+                          <a:cs typeface="Aptos"/>
                         </a:rPr>
                         <a:t>best</a:t>
                       </a:r>
@@ -12535,9 +12465,9 @@
                           <a:solidFill>
                             <a:srgbClr val="202938"/>
                           </a:solidFill>
-                          <a:latin typeface="Microsoft YaHei"/>
-                          <a:ea typeface="Microsoft YaHei"/>
-                          <a:cs typeface="Microsoft YaHei"/>
+                          <a:latin typeface="Aptos"/>
+                          <a:ea typeface="Aptos"/>
+                          <a:cs typeface="Aptos"/>
                         </a:rPr>
                         <a:t>max</a:t>
                       </a:r>
@@ -12562,9 +12492,9 @@
                           <a:solidFill>
                             <a:srgbClr val="202938"/>
                           </a:solidFill>
-                          <a:latin typeface="Microsoft YaHei"/>
-                          <a:ea typeface="Microsoft YaHei"/>
-                          <a:cs typeface="Microsoft YaHei"/>
+                          <a:latin typeface="Aptos"/>
+                          <a:ea typeface="Aptos"/>
+                          <a:cs typeface="Aptos"/>
                         </a:rPr>
                         <a:t>val max_x</a:t>
                       </a:r>
@@ -12648,9 +12578,9 @@
                           <a:solidFill>
                             <a:srgbClr val="202938"/>
                           </a:solidFill>
-                          <a:latin typeface="Microsoft YaHei"/>
-                          <a:ea typeface="Microsoft YaHei"/>
-                          <a:cs typeface="Microsoft YaHei"/>
+                          <a:latin typeface="Aptos"/>
+                          <a:ea typeface="Aptos"/>
+                          <a:cs typeface="Aptos"/>
                         </a:rPr>
                         <a:t>test max_x</a:t>
                       </a:r>
@@ -12728,10 +12658,10 @@
       </p:graphicFrame>
       <p:sp>
         <p:nvSpPr>
-          <p:cNvPr id="36" name="">
-            <a:extLst xmlns:a="http://schemas.openxmlformats.org/drawingml/2006/main">
-              <a:ext uri="{FF2B5EF4-FFF2-40B4-BE49-F238E27FC236}">
-                <a16:creationId xmlns:a16="http://schemas.microsoft.com/office/drawing/2014/main" id="{CE1DB3AF-62EA-4CA4-88FC-D45232113AD8}"/>
+          <p:cNvPr id="35" name="">
+            <a:extLst xmlns:a="http://schemas.openxmlformats.org/drawingml/2006/main">
+              <a:ext uri="{FF2B5EF4-FFF2-40B4-BE49-F238E27FC236}">
+                <a16:creationId xmlns:a16="http://schemas.microsoft.com/office/drawing/2014/main" id="{1C48C75E-D849-40F0-8BE4-01F28FD7814B}"/>
               </a:ext>
             </a:extLst>
           </p:cNvPr>
@@ -12769,10 +12699,10 @@
       </p:sp>
       <p:sp>
         <p:nvSpPr>
-          <p:cNvPr id="37" name="">
-            <a:extLst xmlns:a="http://schemas.openxmlformats.org/drawingml/2006/main">
-              <a:ext uri="{FF2B5EF4-FFF2-40B4-BE49-F238E27FC236}">
-                <a16:creationId xmlns:a16="http://schemas.microsoft.com/office/drawing/2014/main" id="{A2BB7E65-4AC6-425E-92F7-53B926BBA08C}"/>
+          <p:cNvPr id="36" name="">
+            <a:extLst xmlns:a="http://schemas.openxmlformats.org/drawingml/2006/main">
+              <a:ext uri="{FF2B5EF4-FFF2-40B4-BE49-F238E27FC236}">
+                <a16:creationId xmlns:a16="http://schemas.microsoft.com/office/drawing/2014/main" id="{F1B08E18-96BF-4DFF-8730-7D06719F29BE}"/>
               </a:ext>
             </a:extLst>
           </p:cNvPr>
@@ -12816,9 +12746,9 @@
                 <a:solidFill>
                   <a:srgbClr val="FFFFFF"/>
                 </a:solidFill>
-                <a:latin typeface="Microsoft YaHei"/>
-                <a:ea typeface="Microsoft YaHei"/>
-                <a:cs typeface="Microsoft YaHei"/>
+                <a:latin typeface="Aptos"/>
+                <a:ea typeface="Aptos"/>
+                <a:cs typeface="Aptos"/>
               </a:defRPr>
             </a:pPr>
             <a:r>
@@ -12826,21 +12756,21 @@
                 <a:solidFill>
                   <a:srgbClr val="FFFFFF"/>
                 </a:solidFill>
-                <a:latin typeface="Microsoft YaHei"/>
-                <a:ea typeface="Microsoft YaHei"/>
-                <a:cs typeface="Microsoft YaHei"/>
-              </a:rPr>
-              <a:t>best recorded video</a:t>
-            </a:r>
-          </a:p>
-        </p:txBody>
-      </p:sp>
-      <p:sp>
-        <p:nvSpPr>
-          <p:cNvPr id="38" name="">
-            <a:extLst xmlns:a="http://schemas.openxmlformats.org/drawingml/2006/main">
-              <a:ext uri="{FF2B5EF4-FFF2-40B4-BE49-F238E27FC236}">
-                <a16:creationId xmlns:a16="http://schemas.microsoft.com/office/drawing/2014/main" id="{877D6723-18AB-4238-B506-382C23D445DB}"/>
+                <a:latin typeface="Aptos"/>
+                <a:ea typeface="Aptos"/>
+                <a:cs typeface="Aptos"/>
+              </a:rPr>
+              <a:t>best saved video</a:t>
+            </a:r>
+          </a:p>
+        </p:txBody>
+      </p:sp>
+      <p:sp>
+        <p:nvSpPr>
+          <p:cNvPr id="37" name="">
+            <a:extLst xmlns:a="http://schemas.openxmlformats.org/drawingml/2006/main">
+              <a:ext uri="{FF2B5EF4-FFF2-40B4-BE49-F238E27FC236}">
+                <a16:creationId xmlns:a16="http://schemas.microsoft.com/office/drawing/2014/main" id="{5CD2C469-50E6-4F49-B28C-9F6DB0A9F938}"/>
               </a:ext>
             </a:extLst>
           </p:cNvPr>
@@ -12893,10 +12823,10 @@
       </p:sp>
       <p:sp>
         <p:nvSpPr>
-          <p:cNvPr id="39" name="">
-            <a:extLst xmlns:a="http://schemas.openxmlformats.org/drawingml/2006/main">
-              <a:ext uri="{FF2B5EF4-FFF2-40B4-BE49-F238E27FC236}">
-                <a16:creationId xmlns:a16="http://schemas.microsoft.com/office/drawing/2014/main" id="{751D518E-B2BD-4747-BD63-0084EAE727D0}"/>
+          <p:cNvPr id="38" name="">
+            <a:extLst xmlns:a="http://schemas.openxmlformats.org/drawingml/2006/main">
+              <a:ext uri="{FF2B5EF4-FFF2-40B4-BE49-F238E27FC236}">
+                <a16:creationId xmlns:a16="http://schemas.microsoft.com/office/drawing/2014/main" id="{F48C49BB-245F-4D91-8B59-99E55D479829}"/>
               </a:ext>
             </a:extLst>
           </p:cNvPr>
@@ -12949,10 +12879,10 @@
       </p:sp>
       <p:sp>
         <p:nvSpPr>
-          <p:cNvPr id="40" name="">
-            <a:extLst xmlns:a="http://schemas.openxmlformats.org/drawingml/2006/main">
-              <a:ext uri="{FF2B5EF4-FFF2-40B4-BE49-F238E27FC236}">
-                <a16:creationId xmlns:a16="http://schemas.microsoft.com/office/drawing/2014/main" id="{03A2CB90-3A58-498A-BAD7-1DC7D1ADEB6E}"/>
+          <p:cNvPr id="39" name="">
+            <a:extLst xmlns:a="http://schemas.openxmlformats.org/drawingml/2006/main">
+              <a:ext uri="{FF2B5EF4-FFF2-40B4-BE49-F238E27FC236}">
+                <a16:creationId xmlns:a16="http://schemas.microsoft.com/office/drawing/2014/main" id="{E4F2EFB9-FD11-4E26-BC25-8F1EFEBA19C3}"/>
               </a:ext>
             </a:extLst>
           </p:cNvPr>
@@ -12984,9 +12914,9 @@
                 <a:solidFill>
                   <a:srgbClr val="607084"/>
                 </a:solidFill>
-                <a:latin typeface="Microsoft YaHei"/>
-                <a:ea typeface="Microsoft YaHei"/>
-                <a:cs typeface="Microsoft YaHei"/>
+                <a:latin typeface="Aptos"/>
+                <a:ea typeface="Aptos"/>
+                <a:cs typeface="Aptos"/>
               </a:defRPr>
             </a:pPr>
             <a:r>
@@ -12994,21 +12924,21 @@
                 <a:solidFill>
                   <a:srgbClr val="607084"/>
                 </a:solidFill>
-                <a:latin typeface="Microsoft YaHei"/>
-                <a:ea typeface="Microsoft YaHei"/>
-                <a:cs typeface="Microsoft YaHei"/>
-              </a:rPr>
-              <a:t>录制视频未观察到完整通关；训练日志提供终点 x 证据。</a:t>
-            </a:r>
-          </a:p>
-        </p:txBody>
-      </p:sp>
-      <p:sp>
-        <p:nvSpPr>
-          <p:cNvPr id="41" name="">
-            <a:extLst xmlns:a="http://schemas.openxmlformats.org/drawingml/2006/main">
-              <a:ext uri="{FF2B5EF4-FFF2-40B4-BE49-F238E27FC236}">
-                <a16:creationId xmlns:a16="http://schemas.microsoft.com/office/drawing/2014/main" id="{F701F80E-9FC9-4554-95F3-4A6625417169}"/>
+                <a:latin typeface="Aptos"/>
+                <a:ea typeface="Aptos"/>
+                <a:cs typeface="Aptos"/>
+              </a:rPr>
+              <a:t>Saved videos show rollouts, not confirmed clears. Training logs provide terminal x evidence.</a:t>
+            </a:r>
+          </a:p>
+        </p:txBody>
+      </p:sp>
+      <p:sp>
+        <p:nvSpPr>
+          <p:cNvPr id="40" name="">
+            <a:extLst xmlns:a="http://schemas.openxmlformats.org/drawingml/2006/main">
+              <a:ext uri="{FF2B5EF4-FFF2-40B4-BE49-F238E27FC236}">
+                <a16:creationId xmlns:a16="http://schemas.microsoft.com/office/drawing/2014/main" id="{B0F6538F-2285-4E13-8733-938BDE4E6FF4}"/>
               </a:ext>
             </a:extLst>
           </p:cNvPr>
@@ -13046,10 +12976,10 @@
       </p:sp>
       <p:sp>
         <p:nvSpPr>
-          <p:cNvPr id="42" name="">
-            <a:extLst xmlns:a="http://schemas.openxmlformats.org/drawingml/2006/main">
-              <a:ext uri="{FF2B5EF4-FFF2-40B4-BE49-F238E27FC236}">
-                <a16:creationId xmlns:a16="http://schemas.microsoft.com/office/drawing/2014/main" id="{91484D80-A005-44A5-A8BB-997FC33E0AAD}"/>
+          <p:cNvPr id="41" name="">
+            <a:extLst xmlns:a="http://schemas.openxmlformats.org/drawingml/2006/main">
+              <a:ext uri="{FF2B5EF4-FFF2-40B4-BE49-F238E27FC236}">
+                <a16:creationId xmlns:a16="http://schemas.microsoft.com/office/drawing/2014/main" id="{6BB08E52-F5DF-4F9A-B311-1EB07376CD52}"/>
               </a:ext>
             </a:extLst>
           </p:cNvPr>
@@ -13093,9 +13023,9 @@
                 <a:solidFill>
                   <a:srgbClr val="FFFFFF"/>
                 </a:solidFill>
-                <a:latin typeface="Microsoft YaHei"/>
-                <a:ea typeface="Microsoft YaHei"/>
-                <a:cs typeface="Microsoft YaHei"/>
+                <a:latin typeface="Aptos"/>
+                <a:ea typeface="Aptos"/>
+                <a:cs typeface="Aptos"/>
               </a:defRPr>
             </a:pPr>
             <a:r>
@@ -13103,25 +13033,25 @@
                 <a:solidFill>
                   <a:srgbClr val="FFFFFF"/>
                 </a:solidFill>
-                <a:latin typeface="Microsoft YaHei"/>
-                <a:ea typeface="Microsoft YaHei"/>
-                <a:cs typeface="Microsoft YaHei"/>
-              </a:rPr>
-              <a:t>Reward–progress consistency</a:t>
+                <a:latin typeface="Aptos"/>
+                <a:ea typeface="Aptos"/>
+                <a:cs typeface="Aptos"/>
+              </a:rPr>
+              <a:t>Reward-progress consistency</a:t>
             </a:r>
           </a:p>
         </p:txBody>
       </p:sp>
       <p:pic>
         <p:nvPicPr>
-          <p:cNvPr id="90" name=""/>
+          <p:cNvPr id="88" name=""/>
           <p:cNvPicPr>
             <a:picLocks xmlns:a="http://schemas.openxmlformats.org/drawingml/2006/main" noChangeAspect="1"/>
           </p:cNvPicPr>
           <p:nvPr/>
         </p:nvPicPr>
         <p:blipFill>
-          <a:blip xmlns:r="http://schemas.openxmlformats.org/officeDocument/2006/relationships" xmlns:a="http://schemas.openxmlformats.org/drawingml/2006/main" r:embed="R19ba15dc55124a5f"/>
+          <a:blip xmlns:r="http://schemas.openxmlformats.org/officeDocument/2006/relationships" xmlns:a="http://schemas.openxmlformats.org/drawingml/2006/main" r:embed="R2d9c6c8819a24e66"/>
           <a:stretch xmlns:a="http://schemas.openxmlformats.org/drawingml/2006/main"/>
         </p:blipFill>
         <p:spPr>
@@ -13136,14 +13066,14 @@
       </p:pic>
       <p:pic>
         <p:nvPicPr>
-          <p:cNvPr id="91" name=""/>
+          <p:cNvPr id="89" name=""/>
           <p:cNvPicPr>
             <a:picLocks xmlns:a="http://schemas.openxmlformats.org/drawingml/2006/main" noChangeAspect="1"/>
           </p:cNvPicPr>
           <p:nvPr/>
         </p:nvPicPr>
         <p:blipFill>
-          <a:blip xmlns:r="http://schemas.openxmlformats.org/officeDocument/2006/relationships" xmlns:a="http://schemas.openxmlformats.org/drawingml/2006/main" r:embed="R6a30a256f12143bd"/>
+          <a:blip xmlns:r="http://schemas.openxmlformats.org/officeDocument/2006/relationships" xmlns:a="http://schemas.openxmlformats.org/drawingml/2006/main" r:embed="R1c4e0bfda9df4e60"/>
           <a:stretch xmlns:a="http://schemas.openxmlformats.org/drawingml/2006/main"/>
         </p:blipFill>
         <p:spPr>
@@ -13158,10 +13088,10 @@
       </p:pic>
       <p:sp>
         <p:nvSpPr>
-          <p:cNvPr id="45" name="">
-            <a:extLst xmlns:a="http://schemas.openxmlformats.org/drawingml/2006/main">
-              <a:ext uri="{FF2B5EF4-FFF2-40B4-BE49-F238E27FC236}">
-                <a16:creationId xmlns:a16="http://schemas.microsoft.com/office/drawing/2014/main" id="{3DDA7AAF-5894-4871-8AD0-056ABBDA1C4D}"/>
+          <p:cNvPr id="44" name="">
+            <a:extLst xmlns:a="http://schemas.openxmlformats.org/drawingml/2006/main">
+              <a:ext uri="{FF2B5EF4-FFF2-40B4-BE49-F238E27FC236}">
+                <a16:creationId xmlns:a16="http://schemas.microsoft.com/office/drawing/2014/main" id="{47A708C8-F563-4869-9C68-AE5A9E2DB53A}"/>
               </a:ext>
             </a:extLst>
           </p:cNvPr>
@@ -13199,10 +13129,10 @@
       </p:sp>
       <p:sp>
         <p:nvSpPr>
-          <p:cNvPr id="46" name="">
-            <a:extLst xmlns:a="http://schemas.openxmlformats.org/drawingml/2006/main">
-              <a:ext uri="{FF2B5EF4-FFF2-40B4-BE49-F238E27FC236}">
-                <a16:creationId xmlns:a16="http://schemas.microsoft.com/office/drawing/2014/main" id="{342A431E-5021-4AD1-B955-B0464E51BEED}"/>
+          <p:cNvPr id="45" name="">
+            <a:extLst xmlns:a="http://schemas.openxmlformats.org/drawingml/2006/main">
+              <a:ext uri="{FF2B5EF4-FFF2-40B4-BE49-F238E27FC236}">
+                <a16:creationId xmlns:a16="http://schemas.microsoft.com/office/drawing/2014/main" id="{A25FF3B1-279F-4DAD-9A32-31100167CB6E}"/>
               </a:ext>
             </a:extLst>
           </p:cNvPr>
@@ -13234,9 +13164,9 @@
                 <a:solidFill>
                   <a:srgbClr val="202938"/>
                 </a:solidFill>
-                <a:latin typeface="Microsoft YaHei"/>
-                <a:ea typeface="Microsoft YaHei"/>
-                <a:cs typeface="Microsoft YaHei"/>
+                <a:latin typeface="Aptos"/>
+                <a:ea typeface="Aptos"/>
+                <a:cs typeface="Aptos"/>
               </a:defRPr>
             </a:pPr>
             <a:r>
@@ -13244,33 +13174,33 @@
                 <a:solidFill>
                   <a:srgbClr val="202938"/>
                 </a:solidFill>
-                <a:latin typeface="Microsoft YaHei"/>
-                <a:ea typeface="Microsoft YaHei"/>
-                <a:cs typeface="Microsoft YaHei"/>
-              </a:rPr>
-              <a:t>Disagreement produced the strongest recorded sample rollout, reaching x=2009 in the saved videos.</a:t>
-            </a:r>
-          </a:p>
-        </p:txBody>
-      </p:sp>
-      <p:sp>
-        <p:nvSpPr>
-          <p:cNvPr id="47" name="">
-            <a:extLst xmlns:a="http://schemas.openxmlformats.org/drawingml/2006/main">
-              <a:ext uri="{FF2B5EF4-FFF2-40B4-BE49-F238E27FC236}">
-                <a16:creationId xmlns:a16="http://schemas.microsoft.com/office/drawing/2014/main" id="{7772BE13-6733-4241-9D38-58608E05C44E}"/>
-              </a:ext>
-            </a:extLst>
-          </p:cNvPr>
-          <p:cNvSpPr>
-            <a:spLocks xmlns:a="http://schemas.openxmlformats.org/drawingml/2006/main" noGrp="1"/>
-          </p:cNvSpPr>
-          <p:nvPr/>
-        </p:nvSpPr>
-        <p:spPr>
-          <a:xfrm xmlns:a="http://schemas.openxmlformats.org/drawingml/2006/main">
-            <a:off x="2400300" y="6572250"/>
-            <a:ext cx="7810500" cy="152400"/>
+                <a:latin typeface="Aptos"/>
+                <a:ea typeface="Aptos"/>
+                <a:cs typeface="Aptos"/>
+              </a:rPr>
+              <a:t>Disagreement gives the farthest saved rollout, reaching x=2009 in the recorded videos.</a:t>
+            </a:r>
+          </a:p>
+        </p:txBody>
+      </p:sp>
+      <p:sp>
+        <p:nvSpPr>
+          <p:cNvPr id="46" name="">
+            <a:extLst xmlns:a="http://schemas.openxmlformats.org/drawingml/2006/main">
+              <a:ext uri="{FF2B5EF4-FFF2-40B4-BE49-F238E27FC236}">
+                <a16:creationId xmlns:a16="http://schemas.microsoft.com/office/drawing/2014/main" id="{B8DFE95D-A456-40D1-B782-BB81C58D4949}"/>
+              </a:ext>
+            </a:extLst>
+          </p:cNvPr>
+          <p:cNvSpPr>
+            <a:spLocks xmlns:a="http://schemas.openxmlformats.org/drawingml/2006/main" noGrp="1"/>
+          </p:cNvSpPr>
+          <p:nvPr/>
+        </p:nvSpPr>
+        <p:spPr>
+          <a:xfrm xmlns:a="http://schemas.openxmlformats.org/drawingml/2006/main">
+            <a:off x="2190750" y="6572250"/>
+            <a:ext cx="8191500" cy="152400"/>
           </a:xfrm>
           <a:prstGeom xmlns:a="http://schemas.openxmlformats.org/drawingml/2006/main" prst="rect">
             <a:avLst/>
@@ -13290,9 +13220,9 @@
                 <a:solidFill>
                   <a:srgbClr val="607084"/>
                 </a:solidFill>
-                <a:latin typeface="Microsoft YaHei"/>
-                <a:ea typeface="Microsoft YaHei"/>
-                <a:cs typeface="Microsoft YaHei"/>
+                <a:latin typeface="Aptos"/>
+                <a:ea typeface="Aptos"/>
+                <a:cs typeface="Aptos"/>
               </a:defRPr>
             </a:pPr>
             <a:r>
@@ -13300,11 +13230,11 @@
                 <a:solidFill>
                   <a:srgbClr val="607084"/>
                 </a:solidFill>
-                <a:latin typeface="Microsoft YaHei"/>
-                <a:ea typeface="Microsoft YaHei"/>
-                <a:cs typeface="Microsoft YaHei"/>
-              </a:rPr>
-              <a:t>Evidence: final_selected_runs_1_1 plus xyDeng/videos; training completion is reported conservatively from x_pos unless flag_get is logged.</a:t>
+                <a:latin typeface="Aptos"/>
+                <a:ea typeface="Aptos"/>
+                <a:cs typeface="Aptos"/>
+              </a:rPr>
+              <a:t>Evidence: final_selected_runs_1_1 and xyDeng/videos. Completion claims are conservative.</a:t>
             </a:r>
           </a:p>
         </p:txBody>
@@ -13312,7 +13242,7 @@
     </p:spTree>
     <p:extLst>
       <p:ext uri="{BB962C8B-B14F-4D97-AF65-F5344CB8AC3E}">
-        <p14:creationId xmlns:p14="http://schemas.microsoft.com/office/powerpoint/2010/main" val="1950660600"/>
+        <p14:creationId xmlns:p14="http://schemas.microsoft.com/office/powerpoint/2010/main" val="1298548882"/>
       </p:ext>
     </p:extLst>
   </p:cSld>
@@ -13343,7 +13273,7 @@
           <p:cNvPr id="1" name="">
             <a:extLst xmlns:a="http://schemas.openxmlformats.org/drawingml/2006/main">
               <a:ext uri="{FF2B5EF4-FFF2-40B4-BE49-F238E27FC236}">
-                <a16:creationId xmlns:a16="http://schemas.microsoft.com/office/drawing/2014/main" id="{26167754-6C42-4E3F-8BDC-B233CE073B29}"/>
+                <a16:creationId xmlns:a16="http://schemas.microsoft.com/office/drawing/2014/main" id="{D6E90E3E-7290-4642-8919-41883D7EDB61}"/>
               </a:ext>
             </a:extLst>
           </p:cNvPr>
@@ -13355,7 +13285,7 @@
         <p:spPr>
           <a:xfrm xmlns:a="http://schemas.openxmlformats.org/drawingml/2006/main">
             <a:off x="381000" y="257175"/>
-            <a:ext cx="971550" cy="295275"/>
+            <a:ext cx="1066800" cy="295275"/>
           </a:xfrm>
           <a:prstGeom xmlns:a="http://schemas.openxmlformats.org/drawingml/2006/main" prst="roundRect">
             <a:avLst>
@@ -13383,25 +13313,25 @@
           <a:lstStyle xmlns:a="http://schemas.openxmlformats.org/drawingml/2006/main"/>
           <a:p xmlns:a="http://schemas.openxmlformats.org/drawingml/2006/main">
             <a:pPr algn="ctr">
-              <a:defRPr sz="1125" b="1">
+              <a:defRPr sz="1050" b="1">
                 <a:solidFill>
                   <a:srgbClr val="FFFFFF"/>
                 </a:solidFill>
-                <a:latin typeface="Microsoft YaHei"/>
-                <a:ea typeface="Microsoft YaHei"/>
-                <a:cs typeface="Microsoft YaHei"/>
-              </a:defRPr>
-            </a:pPr>
-            <a:r>
-              <a:rPr sz="1125" b="1">
+                <a:latin typeface="Aptos"/>
+                <a:ea typeface="Aptos"/>
+                <a:cs typeface="Aptos"/>
+              </a:defRPr>
+            </a:pPr>
+            <a:r>
+              <a:rPr sz="1050" b="1">
                 <a:solidFill>
                   <a:srgbClr val="FFFFFF"/>
                 </a:solidFill>
-                <a:latin typeface="Microsoft YaHei"/>
-                <a:ea typeface="Microsoft YaHei"/>
-                <a:cs typeface="Microsoft YaHei"/>
-              </a:rPr>
-              <a:t>对比</a:t>
+                <a:latin typeface="Aptos"/>
+                <a:ea typeface="Aptos"/>
+                <a:cs typeface="Aptos"/>
+              </a:rPr>
+              <a:t>Compare</a:t>
             </a:r>
           </a:p>
         </p:txBody>
@@ -13411,19 +13341,19 @@
           <p:cNvPr id="2" name="">
             <a:extLst xmlns:a="http://schemas.openxmlformats.org/drawingml/2006/main">
               <a:ext uri="{FF2B5EF4-FFF2-40B4-BE49-F238E27FC236}">
-                <a16:creationId xmlns:a16="http://schemas.microsoft.com/office/drawing/2014/main" id="{B662824C-951E-4E0D-82A6-030D32E4086B}"/>
-              </a:ext>
-            </a:extLst>
-          </p:cNvPr>
-          <p:cNvSpPr>
-            <a:spLocks xmlns:a="http://schemas.openxmlformats.org/drawingml/2006/main" noGrp="1"/>
-          </p:cNvSpPr>
-          <p:nvPr/>
-        </p:nvSpPr>
-        <p:spPr>
-          <a:xfrm xmlns:a="http://schemas.openxmlformats.org/drawingml/2006/main">
-            <a:off x="1524000" y="190500"/>
-            <a:ext cx="7239000" cy="361950"/>
+                <a16:creationId xmlns:a16="http://schemas.microsoft.com/office/drawing/2014/main" id="{7135A101-3408-421E-9587-FEE773D0C6BC}"/>
+              </a:ext>
+            </a:extLst>
+          </p:cNvPr>
+          <p:cNvSpPr>
+            <a:spLocks xmlns:a="http://schemas.openxmlformats.org/drawingml/2006/main" noGrp="1"/>
+          </p:cNvSpPr>
+          <p:nvPr/>
+        </p:nvSpPr>
+        <p:spPr>
+          <a:xfrm xmlns:a="http://schemas.openxmlformats.org/drawingml/2006/main">
+            <a:off x="1619250" y="190500"/>
+            <a:ext cx="7429500" cy="361950"/>
           </a:xfrm>
           <a:prstGeom xmlns:a="http://schemas.openxmlformats.org/drawingml/2006/main" prst="rect">
             <a:avLst/>
@@ -13443,9 +13373,9 @@
                 <a:solidFill>
                   <a:srgbClr val="202938"/>
                 </a:solidFill>
-                <a:latin typeface="Microsoft YaHei"/>
-                <a:ea typeface="Microsoft YaHei"/>
-                <a:cs typeface="Microsoft YaHei"/>
+                <a:latin typeface="Aptos"/>
+                <a:ea typeface="Aptos"/>
+                <a:cs typeface="Aptos"/>
               </a:defRPr>
             </a:pPr>
             <a:r>
@@ -13453,11 +13383,11 @@
                 <a:solidFill>
                   <a:srgbClr val="202938"/>
                 </a:solidFill>
-                <a:latin typeface="Microsoft YaHei"/>
-                <a:ea typeface="Microsoft YaHei"/>
-                <a:cs typeface="Microsoft YaHei"/>
-              </a:rPr>
-              <a:t>ICM vs Disagreement: 1-1 results</a:t>
+                <a:latin typeface="Aptos"/>
+                <a:ea typeface="Aptos"/>
+                <a:cs typeface="Aptos"/>
+              </a:rPr>
+              <a:t>ICM vs Disagreement: World 1-1</a:t>
             </a:r>
           </a:p>
         </p:txBody>
@@ -13467,19 +13397,19 @@
           <p:cNvPr id="3" name="">
             <a:extLst xmlns:a="http://schemas.openxmlformats.org/drawingml/2006/main">
               <a:ext uri="{FF2B5EF4-FFF2-40B4-BE49-F238E27FC236}">
-                <a16:creationId xmlns:a16="http://schemas.microsoft.com/office/drawing/2014/main" id="{9DBAAA95-7097-4F13-A60E-690CE6392090}"/>
-              </a:ext>
-            </a:extLst>
-          </p:cNvPr>
-          <p:cNvSpPr>
-            <a:spLocks xmlns:a="http://schemas.openxmlformats.org/drawingml/2006/main" noGrp="1"/>
-          </p:cNvSpPr>
-          <p:nvPr/>
-        </p:nvSpPr>
-        <p:spPr>
-          <a:xfrm xmlns:a="http://schemas.openxmlformats.org/drawingml/2006/main">
-            <a:off x="1524000" y="609600"/>
-            <a:ext cx="7048500" cy="209550"/>
+                <a16:creationId xmlns:a16="http://schemas.microsoft.com/office/drawing/2014/main" id="{73808C12-D763-459E-8F3F-570C736CBBE4}"/>
+              </a:ext>
+            </a:extLst>
+          </p:cNvPr>
+          <p:cNvSpPr>
+            <a:spLocks xmlns:a="http://schemas.openxmlformats.org/drawingml/2006/main" noGrp="1"/>
+          </p:cNvSpPr>
+          <p:nvPr/>
+        </p:nvSpPr>
+        <p:spPr>
+          <a:xfrm xmlns:a="http://schemas.openxmlformats.org/drawingml/2006/main">
+            <a:off x="1619250" y="609600"/>
+            <a:ext cx="7239000" cy="209550"/>
           </a:xfrm>
           <a:prstGeom xmlns:a="http://schemas.openxmlformats.org/drawingml/2006/main" prst="rect">
             <a:avLst/>
@@ -13499,9 +13429,9 @@
                 <a:solidFill>
                   <a:srgbClr val="607084"/>
                 </a:solidFill>
-                <a:latin typeface="Microsoft YaHei"/>
-                <a:ea typeface="Microsoft YaHei"/>
-                <a:cs typeface="Microsoft YaHei"/>
+                <a:latin typeface="Aptos"/>
+                <a:ea typeface="Aptos"/>
+                <a:cs typeface="Aptos"/>
               </a:defRPr>
             </a:pPr>
             <a:r>
@@ -13509,11 +13439,11 @@
                 <a:solidFill>
                   <a:srgbClr val="607084"/>
                 </a:solidFill>
-                <a:latin typeface="Microsoft YaHei"/>
-                <a:ea typeface="Microsoft YaHei"/>
-                <a:cs typeface="Microsoft YaHei"/>
-              </a:rPr>
-              <a:t>同一 PPO backbone、同一 1M steps、同一 SuperMarioBros-1-1-v0</a:t>
+                <a:latin typeface="Aptos"/>
+                <a:ea typeface="Aptos"/>
+                <a:cs typeface="Aptos"/>
+              </a:rPr>
+              <a:t>Same PPO backbone, same 1M-step budget, same environment</a:t>
             </a:r>
           </a:p>
         </p:txBody>
@@ -13523,7 +13453,7 @@
           <p:cNvPr id="4" name="">
             <a:extLst xmlns:a="http://schemas.openxmlformats.org/drawingml/2006/main">
               <a:ext uri="{FF2B5EF4-FFF2-40B4-BE49-F238E27FC236}">
-                <a16:creationId xmlns:a16="http://schemas.microsoft.com/office/drawing/2014/main" id="{AA5F6540-1797-48E6-A9FE-A308333E849F}"/>
+                <a16:creationId xmlns:a16="http://schemas.microsoft.com/office/drawing/2014/main" id="{323E321A-C7CF-445B-B2E6-9348695CB4E0}"/>
               </a:ext>
             </a:extLst>
           </p:cNvPr>
@@ -13567,9 +13497,9 @@
                 <a:solidFill>
                   <a:srgbClr val="607084"/>
                 </a:solidFill>
-                <a:latin typeface="Microsoft YaHei"/>
-                <a:ea typeface="Microsoft YaHei"/>
-                <a:cs typeface="Microsoft YaHei"/>
+                <a:latin typeface="Aptos"/>
+                <a:ea typeface="Aptos"/>
+                <a:cs typeface="Aptos"/>
               </a:defRPr>
             </a:pPr>
             <a:r>
@@ -13577,9 +13507,9 @@
                 <a:solidFill>
                   <a:srgbClr val="607084"/>
                 </a:solidFill>
-                <a:latin typeface="Microsoft YaHei"/>
-                <a:ea typeface="Microsoft YaHei"/>
-                <a:cs typeface="Microsoft YaHei"/>
+                <a:latin typeface="Aptos"/>
+                <a:ea typeface="Aptos"/>
+                <a:cs typeface="Aptos"/>
               </a:rPr>
               <a:t>Mario RL / PPO intrinsic rewards</a:t>
             </a:r>
@@ -13590,9 +13520,9 @@
                 <a:solidFill>
                   <a:srgbClr val="607084"/>
                 </a:solidFill>
-                <a:latin typeface="Microsoft YaHei"/>
-                <a:ea typeface="Microsoft YaHei"/>
-                <a:cs typeface="Microsoft YaHei"/>
+                <a:latin typeface="Aptos"/>
+                <a:ea typeface="Aptos"/>
+                <a:cs typeface="Aptos"/>
               </a:defRPr>
             </a:pPr>
             <a:r>
@@ -13600,11 +13530,11 @@
                 <a:solidFill>
                   <a:srgbClr val="607084"/>
                 </a:solidFill>
-                <a:latin typeface="Microsoft YaHei"/>
-                <a:ea typeface="Microsoft YaHei"/>
-                <a:cs typeface="Microsoft YaHei"/>
-              </a:rPr>
-              <a:t>1M steps · seed 1 · 1-1 only</a:t>
+                <a:latin typeface="Aptos"/>
+                <a:ea typeface="Aptos"/>
+                <a:cs typeface="Aptos"/>
+              </a:rPr>
+              <a:t>1M steps | seed 1 | World 1-1</a:t>
             </a:r>
           </a:p>
         </p:txBody>
@@ -13614,7 +13544,7 @@
           <p:cNvPr id="5" name="">
             <a:extLst xmlns:a="http://schemas.openxmlformats.org/drawingml/2006/main">
               <a:ext uri="{FF2B5EF4-FFF2-40B4-BE49-F238E27FC236}">
-                <a16:creationId xmlns:a16="http://schemas.microsoft.com/office/drawing/2014/main" id="{3876CC4C-A575-41E6-8239-BD36807DD947}"/>
+                <a16:creationId xmlns:a16="http://schemas.microsoft.com/office/drawing/2014/main" id="{E9D15756-218E-4D0C-937A-367FE7D1D204}"/>
               </a:ext>
             </a:extLst>
           </p:cNvPr>
@@ -13647,7 +13577,7 @@
           <p:cNvPr id="6" name="">
             <a:extLst xmlns:a="http://schemas.openxmlformats.org/drawingml/2006/main">
               <a:ext uri="{FF2B5EF4-FFF2-40B4-BE49-F238E27FC236}">
-                <a16:creationId xmlns:a16="http://schemas.microsoft.com/office/drawing/2014/main" id="{F0A30AFF-547C-4C68-9C96-1A3D6DE22DC6}"/>
+                <a16:creationId xmlns:a16="http://schemas.microsoft.com/office/drawing/2014/main" id="{510E372D-F936-4744-A70C-ACD73BAC3D03}"/>
               </a:ext>
             </a:extLst>
           </p:cNvPr>
@@ -13688,7 +13618,7 @@
           <p:cNvPr id="7" name="">
             <a:extLst xmlns:a="http://schemas.openxmlformats.org/drawingml/2006/main">
               <a:ext uri="{FF2B5EF4-FFF2-40B4-BE49-F238E27FC236}">
-                <a16:creationId xmlns:a16="http://schemas.microsoft.com/office/drawing/2014/main" id="{29B2EA33-33E2-46C6-A959-1A2BE9A2328E}"/>
+                <a16:creationId xmlns:a16="http://schemas.microsoft.com/office/drawing/2014/main" id="{92BB0676-4A7F-4F82-93D3-883B018CC640}"/>
               </a:ext>
             </a:extLst>
           </p:cNvPr>
@@ -13700,7 +13630,7 @@
         <p:spPr>
           <a:xfrm xmlns:a="http://schemas.openxmlformats.org/drawingml/2006/main">
             <a:off x="657225" y="1228725"/>
-            <a:ext cx="952500" cy="285750"/>
+            <a:ext cx="1047750" cy="285750"/>
           </a:xfrm>
           <a:prstGeom xmlns:a="http://schemas.openxmlformats.org/drawingml/2006/main" prst="roundRect">
             <a:avLst>
@@ -13732,9 +13662,9 @@
                 <a:solidFill>
                   <a:srgbClr val="FFFFFF"/>
                 </a:solidFill>
-                <a:latin typeface="Microsoft YaHei"/>
-                <a:ea typeface="Microsoft YaHei"/>
-                <a:cs typeface="Microsoft YaHei"/>
+                <a:latin typeface="Aptos"/>
+                <a:ea typeface="Aptos"/>
+                <a:cs typeface="Aptos"/>
               </a:defRPr>
             </a:pPr>
             <a:r>
@@ -13742,11 +13672,11 @@
                 <a:solidFill>
                   <a:srgbClr val="FFFFFF"/>
                 </a:solidFill>
-                <a:latin typeface="Microsoft YaHei"/>
-                <a:ea typeface="Microsoft YaHei"/>
-                <a:cs typeface="Microsoft YaHei"/>
-              </a:rPr>
-              <a:t>核心指标</a:t>
+                <a:latin typeface="Aptos"/>
+                <a:ea typeface="Aptos"/>
+                <a:cs typeface="Aptos"/>
+              </a:rPr>
+              <a:t>Key metrics</a:t>
             </a:r>
           </a:p>
         </p:txBody>
@@ -13782,9 +13712,9 @@
                           <a:solidFill>
                             <a:srgbClr val="202938"/>
                           </a:solidFill>
-                          <a:latin typeface="Microsoft YaHei"/>
-                          <a:ea typeface="Microsoft YaHei"/>
-                          <a:cs typeface="Microsoft YaHei"/>
+                          <a:latin typeface="Aptos"/>
+                          <a:ea typeface="Aptos"/>
+                          <a:cs typeface="Aptos"/>
                         </a:rPr>
                         <a:t>Metric</a:t>
                       </a:r>
@@ -13807,9 +13737,9 @@
                           <a:solidFill>
                             <a:srgbClr val="202938"/>
                           </a:solidFill>
-                          <a:latin typeface="Microsoft YaHei"/>
-                          <a:ea typeface="Microsoft YaHei"/>
-                          <a:cs typeface="Microsoft YaHei"/>
+                          <a:latin typeface="Aptos"/>
+                          <a:ea typeface="Aptos"/>
+                          <a:cs typeface="Aptos"/>
                         </a:rPr>
                         <a:t>PPO+ICM</a:t>
                       </a:r>
@@ -13832,11 +13762,11 @@
                           <a:solidFill>
                             <a:srgbClr val="202938"/>
                           </a:solidFill>
-                          <a:latin typeface="Microsoft YaHei"/>
-                          <a:ea typeface="Microsoft YaHei"/>
-                          <a:cs typeface="Microsoft YaHei"/>
+                          <a:latin typeface="Aptos"/>
+                          <a:ea typeface="Aptos"/>
+                          <a:cs typeface="Aptos"/>
                         </a:rPr>
-                        <a:t>PPO+Disagreement</a:t>
+                        <a:t>PPO+Dis.</a:t>
                       </a:r>
                     </a:p>
                   </a:txBody>
@@ -13859,9 +13789,9 @@
                           <a:solidFill>
                             <a:srgbClr val="202938"/>
                           </a:solidFill>
-                          <a:latin typeface="Microsoft YaHei"/>
-                          <a:ea typeface="Microsoft YaHei"/>
-                          <a:cs typeface="Microsoft YaHei"/>
+                          <a:latin typeface="Aptos"/>
+                          <a:ea typeface="Aptos"/>
+                          <a:cs typeface="Aptos"/>
                         </a:rPr>
                         <a:t>Device</a:t>
                       </a:r>
@@ -13924,9 +13854,9 @@
                           <a:solidFill>
                             <a:srgbClr val="202938"/>
                           </a:solidFill>
-                          <a:latin typeface="Microsoft YaHei"/>
-                          <a:ea typeface="Microsoft YaHei"/>
-                          <a:cs typeface="Microsoft YaHei"/>
+                          <a:latin typeface="Aptos"/>
+                          <a:ea typeface="Aptos"/>
+                          <a:cs typeface="Aptos"/>
                         </a:rPr>
                         <a:t>Episodes</a:t>
                       </a:r>
@@ -13989,9 +13919,9 @@
                           <a:solidFill>
                             <a:srgbClr val="202938"/>
                           </a:solidFill>
-                          <a:latin typeface="Microsoft YaHei"/>
-                          <a:ea typeface="Microsoft YaHei"/>
-                          <a:cs typeface="Microsoft YaHei"/>
+                          <a:latin typeface="Aptos"/>
+                          <a:ea typeface="Aptos"/>
+                          <a:cs typeface="Aptos"/>
                         </a:rPr>
                         <a:t>Best step</a:t>
                       </a:r>
@@ -14054,9 +13984,9 @@
                           <a:solidFill>
                             <a:srgbClr val="202938"/>
                           </a:solidFill>
-                          <a:latin typeface="Microsoft YaHei"/>
-                          <a:ea typeface="Microsoft YaHei"/>
-                          <a:cs typeface="Microsoft YaHei"/>
+                          <a:latin typeface="Aptos"/>
+                          <a:ea typeface="Aptos"/>
+                          <a:cs typeface="Aptos"/>
                         </a:rPr>
                         <a:t>Val mean max_x</a:t>
                       </a:r>
@@ -14119,9 +14049,9 @@
                           <a:solidFill>
                             <a:srgbClr val="202938"/>
                           </a:solidFill>
-                          <a:latin typeface="Microsoft YaHei"/>
-                          <a:ea typeface="Microsoft YaHei"/>
-                          <a:cs typeface="Microsoft YaHei"/>
+                          <a:latin typeface="Aptos"/>
+                          <a:ea typeface="Aptos"/>
+                          <a:cs typeface="Aptos"/>
                         </a:rPr>
                         <a:t>Test mean max_x</a:t>
                       </a:r>
@@ -14184,9 +14114,9 @@
                           <a:solidFill>
                             <a:srgbClr val="202938"/>
                           </a:solidFill>
-                          <a:latin typeface="Microsoft YaHei"/>
-                          <a:ea typeface="Microsoft YaHei"/>
-                          <a:cs typeface="Microsoft YaHei"/>
+                          <a:latin typeface="Aptos"/>
+                          <a:ea typeface="Aptos"/>
+                          <a:cs typeface="Aptos"/>
                         </a:rPr>
                         <a:t>Train max_x</a:t>
                       </a:r>
@@ -14249,9 +14179,9 @@
                           <a:solidFill>
                             <a:srgbClr val="202938"/>
                           </a:solidFill>
-                          <a:latin typeface="Microsoft YaHei"/>
-                          <a:ea typeface="Microsoft YaHei"/>
-                          <a:cs typeface="Microsoft YaHei"/>
+                          <a:latin typeface="Aptos"/>
+                          <a:ea typeface="Aptos"/>
+                          <a:cs typeface="Aptos"/>
                         </a:rPr>
                         <a:t>Best video max_x</a:t>
                       </a:r>
@@ -14311,7 +14241,7 @@
           <p:cNvPr id="9" name="">
             <a:extLst xmlns:a="http://schemas.openxmlformats.org/drawingml/2006/main">
               <a:ext uri="{FF2B5EF4-FFF2-40B4-BE49-F238E27FC236}">
-                <a16:creationId xmlns:a16="http://schemas.microsoft.com/office/drawing/2014/main" id="{100C3D95-8B66-4C1B-B9E1-6064001AB6FA}"/>
+                <a16:creationId xmlns:a16="http://schemas.microsoft.com/office/drawing/2014/main" id="{4AEDBACF-A652-4A16-896C-7E8CDA807A80}"/>
               </a:ext>
             </a:extLst>
           </p:cNvPr>
@@ -14343,9 +14273,9 @@
                 <a:solidFill>
                   <a:srgbClr val="202938"/>
                 </a:solidFill>
-                <a:latin typeface="Microsoft YaHei"/>
-                <a:ea typeface="Microsoft YaHei"/>
-                <a:cs typeface="Microsoft YaHei"/>
+                <a:latin typeface="Aptos"/>
+                <a:ea typeface="Aptos"/>
+                <a:cs typeface="Aptos"/>
               </a:defRPr>
             </a:pPr>
             <a:r>
@@ -14353,11 +14283,11 @@
                 <a:solidFill>
                   <a:srgbClr val="202938"/>
                 </a:solidFill>
-                <a:latin typeface="Microsoft YaHei"/>
-                <a:ea typeface="Microsoft YaHei"/>
-                <a:cs typeface="Microsoft YaHei"/>
-              </a:rPr>
-              <a:t>结论：ICM 的 validation mean max_x 略高；Disagreement 的 best recorded rollout 更远。两者训练中均到达 terminal x=3161。</a:t>
+                <a:latin typeface="Aptos"/>
+                <a:ea typeface="Aptos"/>
+                <a:cs typeface="Aptos"/>
+              </a:rPr>
+              <a:t>ICM has slightly higher mean validation progress. Disagreement has the farther saved rollout. Both reach terminal x=3161 during training.</a:t>
             </a:r>
           </a:p>
         </p:txBody>
@@ -14367,7 +14297,7 @@
           <p:cNvPr id="10" name="">
             <a:extLst xmlns:a="http://schemas.openxmlformats.org/drawingml/2006/main">
               <a:ext uri="{FF2B5EF4-FFF2-40B4-BE49-F238E27FC236}">
-                <a16:creationId xmlns:a16="http://schemas.microsoft.com/office/drawing/2014/main" id="{BDA0A35A-50FA-4AB5-BAF3-C42CE70A17E1}"/>
+                <a16:creationId xmlns:a16="http://schemas.microsoft.com/office/drawing/2014/main" id="{EE0ADC03-5FD9-4411-A4B6-9C65A04D3003}"/>
               </a:ext>
             </a:extLst>
           </p:cNvPr>
@@ -14408,7 +14338,7 @@
           <p:cNvPr id="11" name="">
             <a:extLst xmlns:a="http://schemas.openxmlformats.org/drawingml/2006/main">
               <a:ext uri="{FF2B5EF4-FFF2-40B4-BE49-F238E27FC236}">
-                <a16:creationId xmlns:a16="http://schemas.microsoft.com/office/drawing/2014/main" id="{FCF1DE61-1D83-4FEC-8B45-B5934E5FC970}"/>
+                <a16:creationId xmlns:a16="http://schemas.microsoft.com/office/drawing/2014/main" id="{CAB4C87E-69BE-42F2-8488-8DEC92A12673}"/>
               </a:ext>
             </a:extLst>
           </p:cNvPr>
@@ -14452,9 +14382,9 @@
                 <a:solidFill>
                   <a:srgbClr val="FFFFFF"/>
                 </a:solidFill>
-                <a:latin typeface="Microsoft YaHei"/>
-                <a:ea typeface="Microsoft YaHei"/>
-                <a:cs typeface="Microsoft YaHei"/>
+                <a:latin typeface="Aptos"/>
+                <a:ea typeface="Aptos"/>
+                <a:cs typeface="Aptos"/>
               </a:defRPr>
             </a:pPr>
             <a:r>
@@ -14462,11 +14392,11 @@
                 <a:solidFill>
                   <a:srgbClr val="FFFFFF"/>
                 </a:solidFill>
-                <a:latin typeface="Microsoft YaHei"/>
-                <a:ea typeface="Microsoft YaHei"/>
-                <a:cs typeface="Microsoft YaHei"/>
-              </a:rPr>
-              <a:t>曲线证据</a:t>
+                <a:latin typeface="Aptos"/>
+                <a:ea typeface="Aptos"/>
+                <a:cs typeface="Aptos"/>
+              </a:rPr>
+              <a:t>Curves</a:t>
             </a:r>
           </a:p>
         </p:txBody>
@@ -14480,7 +14410,7 @@
           <p:nvPr/>
         </p:nvPicPr>
         <p:blipFill>
-          <a:blip xmlns:r="http://schemas.openxmlformats.org/officeDocument/2006/relationships" xmlns:a="http://schemas.openxmlformats.org/drawingml/2006/main" r:embed="R107bed9ce916481d"/>
+          <a:blip xmlns:r="http://schemas.openxmlformats.org/officeDocument/2006/relationships" xmlns:a="http://schemas.openxmlformats.org/drawingml/2006/main" r:embed="R290927b255e74913"/>
           <a:stretch xmlns:a="http://schemas.openxmlformats.org/drawingml/2006/main"/>
         </p:blipFill>
         <p:spPr>
@@ -14502,7 +14432,7 @@
           <p:nvPr/>
         </p:nvPicPr>
         <p:blipFill>
-          <a:blip xmlns:r="http://schemas.openxmlformats.org/officeDocument/2006/relationships" xmlns:a="http://schemas.openxmlformats.org/drawingml/2006/main" r:embed="Rb2f092dd62b54ee7"/>
+          <a:blip xmlns:r="http://schemas.openxmlformats.org/officeDocument/2006/relationships" xmlns:a="http://schemas.openxmlformats.org/drawingml/2006/main" r:embed="Ra076f49b61db4c81"/>
           <a:stretch xmlns:a="http://schemas.openxmlformats.org/drawingml/2006/main"/>
         </p:blipFill>
         <p:spPr>
@@ -14520,7 +14450,7 @@
           <p:cNvPr id="14" name="">
             <a:extLst xmlns:a="http://schemas.openxmlformats.org/drawingml/2006/main">
               <a:ext uri="{FF2B5EF4-FFF2-40B4-BE49-F238E27FC236}">
-                <a16:creationId xmlns:a16="http://schemas.microsoft.com/office/drawing/2014/main" id="{D4BF116D-6065-44B3-8349-3100B6A0D1E4}"/>
+                <a16:creationId xmlns:a16="http://schemas.microsoft.com/office/drawing/2014/main" id="{6BC538CF-777A-4095-B45E-E0DD1362E104}"/>
               </a:ext>
             </a:extLst>
           </p:cNvPr>
@@ -14561,7 +14491,7 @@
           <p:cNvPr id="15" name="">
             <a:extLst xmlns:a="http://schemas.openxmlformats.org/drawingml/2006/main">
               <a:ext uri="{FF2B5EF4-FFF2-40B4-BE49-F238E27FC236}">
-                <a16:creationId xmlns:a16="http://schemas.microsoft.com/office/drawing/2014/main" id="{738DEC53-37D8-43D5-8547-063CB38A5604}"/>
+                <a16:creationId xmlns:a16="http://schemas.microsoft.com/office/drawing/2014/main" id="{F7E2CBF8-DB0C-469A-92AB-ECA8E31F8310}"/>
               </a:ext>
             </a:extLst>
           </p:cNvPr>
@@ -14605,9 +14535,9 @@
                 <a:solidFill>
                   <a:srgbClr val="FFFFFF"/>
                 </a:solidFill>
-                <a:latin typeface="Microsoft YaHei"/>
-                <a:ea typeface="Microsoft YaHei"/>
-                <a:cs typeface="Microsoft YaHei"/>
+                <a:latin typeface="Aptos"/>
+                <a:ea typeface="Aptos"/>
+                <a:cs typeface="Aptos"/>
               </a:defRPr>
             </a:pPr>
             <a:r>
@@ -14615,11 +14545,11 @@
                 <a:solidFill>
                   <a:srgbClr val="FFFFFF"/>
                 </a:solidFill>
-                <a:latin typeface="Microsoft YaHei"/>
-                <a:ea typeface="Microsoft YaHei"/>
-                <a:cs typeface="Microsoft YaHei"/>
-              </a:rPr>
-              <a:t>训练速度</a:t>
+                <a:latin typeface="Aptos"/>
+                <a:ea typeface="Aptos"/>
+                <a:cs typeface="Aptos"/>
+              </a:rPr>
+              <a:t>Speed</a:t>
             </a:r>
           </a:p>
         </p:txBody>
@@ -14656,9 +14586,9 @@
                           <a:solidFill>
                             <a:srgbClr val="202938"/>
                           </a:solidFill>
-                          <a:latin typeface="Microsoft YaHei"/>
-                          <a:ea typeface="Microsoft YaHei"/>
-                          <a:cs typeface="Microsoft YaHei"/>
+                          <a:latin typeface="Aptos"/>
+                          <a:ea typeface="Aptos"/>
+                          <a:cs typeface="Aptos"/>
                         </a:rPr>
                         <a:t>Method</a:t>
                       </a:r>
@@ -14681,9 +14611,9 @@
                           <a:solidFill>
                             <a:srgbClr val="202938"/>
                           </a:solidFill>
-                          <a:latin typeface="Microsoft YaHei"/>
-                          <a:ea typeface="Microsoft YaHei"/>
-                          <a:cs typeface="Microsoft YaHei"/>
+                          <a:latin typeface="Aptos"/>
+                          <a:ea typeface="Aptos"/>
+                          <a:cs typeface="Aptos"/>
                         </a:rPr>
                         <a:t>CPU sec/1k</a:t>
                       </a:r>
@@ -14706,9 +14636,9 @@
                           <a:solidFill>
                             <a:srgbClr val="202938"/>
                           </a:solidFill>
-                          <a:latin typeface="Microsoft YaHei"/>
-                          <a:ea typeface="Microsoft YaHei"/>
-                          <a:cs typeface="Microsoft YaHei"/>
+                          <a:latin typeface="Aptos"/>
+                          <a:ea typeface="Aptos"/>
+                          <a:cs typeface="Aptos"/>
                         </a:rPr>
                         <a:t>CUDA sec/1k</a:t>
                       </a:r>
@@ -14731,9 +14661,9 @@
                           <a:solidFill>
                             <a:srgbClr val="202938"/>
                           </a:solidFill>
-                          <a:latin typeface="Microsoft YaHei"/>
-                          <a:ea typeface="Microsoft YaHei"/>
-                          <a:cs typeface="Microsoft YaHei"/>
+                          <a:latin typeface="Aptos"/>
+                          <a:ea typeface="Aptos"/>
+                          <a:cs typeface="Aptos"/>
                         </a:rPr>
                         <a:t>Used</a:t>
                       </a:r>
@@ -14758,9 +14688,9 @@
                           <a:solidFill>
                             <a:srgbClr val="202938"/>
                           </a:solidFill>
-                          <a:latin typeface="Microsoft YaHei"/>
-                          <a:ea typeface="Microsoft YaHei"/>
-                          <a:cs typeface="Microsoft YaHei"/>
+                          <a:latin typeface="Aptos"/>
+                          <a:ea typeface="Aptos"/>
+                          <a:cs typeface="Aptos"/>
                         </a:rPr>
                         <a:t>ICM</a:t>
                       </a:r>
@@ -14844,9 +14774,9 @@
                           <a:solidFill>
                             <a:srgbClr val="202938"/>
                           </a:solidFill>
-                          <a:latin typeface="Microsoft YaHei"/>
-                          <a:ea typeface="Microsoft YaHei"/>
-                          <a:cs typeface="Microsoft YaHei"/>
+                          <a:latin typeface="Aptos"/>
+                          <a:ea typeface="Aptos"/>
+                          <a:cs typeface="Aptos"/>
                         </a:rPr>
                         <a:t>Disagreement</a:t>
                       </a:r>
@@ -14927,7 +14857,7 @@
           <p:cNvPr id="17" name="">
             <a:extLst xmlns:a="http://schemas.openxmlformats.org/drawingml/2006/main">
               <a:ext uri="{FF2B5EF4-FFF2-40B4-BE49-F238E27FC236}">
-                <a16:creationId xmlns:a16="http://schemas.microsoft.com/office/drawing/2014/main" id="{1AD77496-8ECF-46AA-9EC6-D0C4A0B9A75D}"/>
+                <a16:creationId xmlns:a16="http://schemas.microsoft.com/office/drawing/2014/main" id="{D8B8692A-195D-46B0-B3A5-ADB5AA06375B}"/>
               </a:ext>
             </a:extLst>
           </p:cNvPr>
@@ -14959,9 +14889,9 @@
                 <a:solidFill>
                   <a:srgbClr val="607084"/>
                 </a:solidFill>
-                <a:latin typeface="Microsoft YaHei"/>
-                <a:ea typeface="Microsoft YaHei"/>
-                <a:cs typeface="Microsoft YaHei"/>
+                <a:latin typeface="Aptos"/>
+                <a:ea typeface="Aptos"/>
+                <a:cs typeface="Aptos"/>
               </a:defRPr>
             </a:pPr>
             <a:r>
@@ -14969,11 +14899,11 @@
                 <a:solidFill>
                   <a:srgbClr val="607084"/>
                 </a:solidFill>
-                <a:latin typeface="Microsoft YaHei"/>
-                <a:ea typeface="Microsoft YaHei"/>
-                <a:cs typeface="Microsoft YaHei"/>
-              </a:rPr>
-              <a:t>设备选择来自 10k-step benchmark：ICM 在 CUDA 更快，Disagreement 在 CPU 更快。</a:t>
+                <a:latin typeface="Aptos"/>
+                <a:ea typeface="Aptos"/>
+                <a:cs typeface="Aptos"/>
+              </a:rPr>
+              <a:t>Device choice follows the 10k-step benchmark: CUDA for ICM, CPU for Disagreement.</a:t>
             </a:r>
           </a:p>
         </p:txBody>
@@ -14983,7 +14913,7 @@
           <p:cNvPr id="18" name="">
             <a:extLst xmlns:a="http://schemas.openxmlformats.org/drawingml/2006/main">
               <a:ext uri="{FF2B5EF4-FFF2-40B4-BE49-F238E27FC236}">
-                <a16:creationId xmlns:a16="http://schemas.microsoft.com/office/drawing/2014/main" id="{534D7770-2D44-45B5-80BF-B9BB949BC75C}"/>
+                <a16:creationId xmlns:a16="http://schemas.microsoft.com/office/drawing/2014/main" id="{68ECF0E1-38B2-4409-8B80-B8B08FF1B670}"/>
               </a:ext>
             </a:extLst>
           </p:cNvPr>
@@ -15024,7 +14954,7 @@
           <p:cNvPr id="19" name="">
             <a:extLst xmlns:a="http://schemas.openxmlformats.org/drawingml/2006/main">
               <a:ext uri="{FF2B5EF4-FFF2-40B4-BE49-F238E27FC236}">
-                <a16:creationId xmlns:a16="http://schemas.microsoft.com/office/drawing/2014/main" id="{CE4AEC71-BD26-4A94-A952-A745A8F5DB20}"/>
+                <a16:creationId xmlns:a16="http://schemas.microsoft.com/office/drawing/2014/main" id="{C7098178-F49E-46E9-BB18-30E56ADD961C}"/>
               </a:ext>
             </a:extLst>
           </p:cNvPr>
@@ -15068,9 +14998,9 @@
                 <a:solidFill>
                   <a:srgbClr val="FFFFFF"/>
                 </a:solidFill>
-                <a:latin typeface="Microsoft YaHei"/>
-                <a:ea typeface="Microsoft YaHei"/>
-                <a:cs typeface="Microsoft YaHei"/>
+                <a:latin typeface="Aptos"/>
+                <a:ea typeface="Aptos"/>
+                <a:cs typeface="Aptos"/>
               </a:defRPr>
             </a:pPr>
             <a:r>
@@ -15078,11 +15008,11 @@
                 <a:solidFill>
                   <a:srgbClr val="FFFFFF"/>
                 </a:solidFill>
-                <a:latin typeface="Microsoft YaHei"/>
-                <a:ea typeface="Microsoft YaHei"/>
-                <a:cs typeface="Microsoft YaHei"/>
-              </a:rPr>
-              <a:t>公正比较</a:t>
+                <a:latin typeface="Aptos"/>
+                <a:ea typeface="Aptos"/>
+                <a:cs typeface="Aptos"/>
+              </a:rPr>
+              <a:t>Fair read</a:t>
             </a:r>
           </a:p>
         </p:txBody>
@@ -15092,7 +15022,7 @@
           <p:cNvPr id="20" name="">
             <a:extLst xmlns:a="http://schemas.openxmlformats.org/drawingml/2006/main">
               <a:ext uri="{FF2B5EF4-FFF2-40B4-BE49-F238E27FC236}">
-                <a16:creationId xmlns:a16="http://schemas.microsoft.com/office/drawing/2014/main" id="{1C10E2CC-A0C8-4AB9-A49E-C5EB69AC73E6}"/>
+                <a16:creationId xmlns:a16="http://schemas.microsoft.com/office/drawing/2014/main" id="{55DE0AC0-D003-441A-A751-74B1F5A10CA8}"/>
               </a:ext>
             </a:extLst>
           </p:cNvPr>
@@ -15124,9 +15054,9 @@
                 <a:solidFill>
                   <a:srgbClr val="005CA8"/>
                 </a:solidFill>
-                <a:latin typeface="Microsoft YaHei"/>
-                <a:ea typeface="Microsoft YaHei"/>
-                <a:cs typeface="Microsoft YaHei"/>
+                <a:latin typeface="Aptos"/>
+                <a:ea typeface="Aptos"/>
+                <a:cs typeface="Aptos"/>
               </a:defRPr>
             </a:pPr>
             <a:r>
@@ -15134,9 +15064,9 @@
                 <a:solidFill>
                   <a:srgbClr val="005CA8"/>
                 </a:solidFill>
-                <a:latin typeface="Microsoft YaHei"/>
-                <a:ea typeface="Microsoft YaHei"/>
-                <a:cs typeface="Microsoft YaHei"/>
+                <a:latin typeface="Aptos"/>
+                <a:ea typeface="Aptos"/>
+                <a:cs typeface="Aptos"/>
               </a:rPr>
               <a:t>ICM</a:t>
             </a:r>
@@ -15148,7 +15078,7 @@
           <p:cNvPr id="21" name="">
             <a:extLst xmlns:a="http://schemas.openxmlformats.org/drawingml/2006/main">
               <a:ext uri="{FF2B5EF4-FFF2-40B4-BE49-F238E27FC236}">
-                <a16:creationId xmlns:a16="http://schemas.microsoft.com/office/drawing/2014/main" id="{5CEFE977-1EBF-41BC-ACE4-9350068C4B87}"/>
+                <a16:creationId xmlns:a16="http://schemas.microsoft.com/office/drawing/2014/main" id="{C49F2CA2-2017-40EF-B966-79EABF355B3A}"/>
               </a:ext>
             </a:extLst>
           </p:cNvPr>
@@ -15180,9 +15110,9 @@
                 <a:solidFill>
                   <a:srgbClr val="202938"/>
                 </a:solidFill>
-                <a:latin typeface="Microsoft YaHei"/>
-                <a:ea typeface="Microsoft YaHei"/>
-                <a:cs typeface="Microsoft YaHei"/>
+                <a:latin typeface="Aptos"/>
+                <a:ea typeface="Aptos"/>
+                <a:cs typeface="Aptos"/>
               </a:defRPr>
             </a:pPr>
             <a:r>
@@ -15190,11 +15120,11 @@
                 <a:solidFill>
                   <a:srgbClr val="202938"/>
                 </a:solidFill>
-                <a:latin typeface="Microsoft YaHei"/>
-                <a:ea typeface="Microsoft YaHei"/>
-                <a:cs typeface="Microsoft YaHei"/>
-              </a:rPr>
-              <a:t>Forward model prediction error gives dense curiosity; in this run it produced slightly stronger validation progress.</a:t>
+                <a:latin typeface="Aptos"/>
+                <a:ea typeface="Aptos"/>
+                <a:cs typeface="Aptos"/>
+              </a:rPr>
+              <a:t>Forward-model error gives dense curiosity. This run shows stronger mean validation progress.</a:t>
             </a:r>
           </a:p>
         </p:txBody>
@@ -15204,7 +15134,7 @@
           <p:cNvPr id="22" name="">
             <a:extLst xmlns:a="http://schemas.openxmlformats.org/drawingml/2006/main">
               <a:ext uri="{FF2B5EF4-FFF2-40B4-BE49-F238E27FC236}">
-                <a16:creationId xmlns:a16="http://schemas.microsoft.com/office/drawing/2014/main" id="{722697F4-C420-452D-B7D9-008E2DFAB3F9}"/>
+                <a16:creationId xmlns:a16="http://schemas.microsoft.com/office/drawing/2014/main" id="{686A3E9A-E895-4A59-8FE7-8735E4B40F63}"/>
               </a:ext>
             </a:extLst>
           </p:cNvPr>
@@ -15236,9 +15166,9 @@
                 <a:solidFill>
                   <a:srgbClr val="6243B6"/>
                 </a:solidFill>
-                <a:latin typeface="Microsoft YaHei"/>
-                <a:ea typeface="Microsoft YaHei"/>
-                <a:cs typeface="Microsoft YaHei"/>
+                <a:latin typeface="Aptos"/>
+                <a:ea typeface="Aptos"/>
+                <a:cs typeface="Aptos"/>
               </a:defRPr>
             </a:pPr>
             <a:r>
@@ -15246,9 +15176,9 @@
                 <a:solidFill>
                   <a:srgbClr val="6243B6"/>
                 </a:solidFill>
-                <a:latin typeface="Microsoft YaHei"/>
-                <a:ea typeface="Microsoft YaHei"/>
-                <a:cs typeface="Microsoft YaHei"/>
+                <a:latin typeface="Aptos"/>
+                <a:ea typeface="Aptos"/>
+                <a:cs typeface="Aptos"/>
               </a:rPr>
               <a:t>Disagreement</a:t>
             </a:r>
@@ -15260,7 +15190,7 @@
           <p:cNvPr id="23" name="">
             <a:extLst xmlns:a="http://schemas.openxmlformats.org/drawingml/2006/main">
               <a:ext uri="{FF2B5EF4-FFF2-40B4-BE49-F238E27FC236}">
-                <a16:creationId xmlns:a16="http://schemas.microsoft.com/office/drawing/2014/main" id="{C2711598-27E0-4927-9A1C-8D382101299E}"/>
+                <a16:creationId xmlns:a16="http://schemas.microsoft.com/office/drawing/2014/main" id="{CC3DFFED-C1A8-4920-BE02-98720813195A}"/>
               </a:ext>
             </a:extLst>
           </p:cNvPr>
@@ -15292,9 +15222,9 @@
                 <a:solidFill>
                   <a:srgbClr val="202938"/>
                 </a:solidFill>
-                <a:latin typeface="Microsoft YaHei"/>
-                <a:ea typeface="Microsoft YaHei"/>
-                <a:cs typeface="Microsoft YaHei"/>
+                <a:latin typeface="Aptos"/>
+                <a:ea typeface="Aptos"/>
+                <a:cs typeface="Aptos"/>
               </a:defRPr>
             </a:pPr>
             <a:r>
@@ -15302,11 +15232,11 @@
                 <a:solidFill>
                   <a:srgbClr val="202938"/>
                 </a:solidFill>
-                <a:latin typeface="Microsoft YaHei"/>
-                <a:ea typeface="Microsoft YaHei"/>
-                <a:cs typeface="Microsoft YaHei"/>
-              </a:rPr>
-              <a:t>Ensemble uncertainty encouraged longer sampled rollouts; best recorded video reached max_x=2009.</a:t>
+                <a:latin typeface="Aptos"/>
+                <a:ea typeface="Aptos"/>
+                <a:cs typeface="Aptos"/>
+              </a:rPr>
+              <a:t>Ensemble uncertainty gives the best saved rollout, reaching max_x=2009.</a:t>
             </a:r>
           </a:p>
         </p:txBody>
@@ -15316,19 +15246,19 @@
           <p:cNvPr id="24" name="">
             <a:extLst xmlns:a="http://schemas.openxmlformats.org/drawingml/2006/main">
               <a:ext uri="{FF2B5EF4-FFF2-40B4-BE49-F238E27FC236}">
-                <a16:creationId xmlns:a16="http://schemas.microsoft.com/office/drawing/2014/main" id="{AC5C18E8-8D2D-4B02-9F09-CFD6BE9C5236}"/>
-              </a:ext>
-            </a:extLst>
-          </p:cNvPr>
-          <p:cNvSpPr>
-            <a:spLocks xmlns:a="http://schemas.openxmlformats.org/drawingml/2006/main" noGrp="1"/>
-          </p:cNvSpPr>
-          <p:nvPr/>
-        </p:nvSpPr>
-        <p:spPr>
-          <a:xfrm xmlns:a="http://schemas.openxmlformats.org/drawingml/2006/main">
-            <a:off x="2400300" y="6572250"/>
-            <a:ext cx="7810500" cy="152400"/>
+                <a16:creationId xmlns:a16="http://schemas.microsoft.com/office/drawing/2014/main" id="{6F2D1EAF-8387-4F8C-8A63-36AEF420602C}"/>
+              </a:ext>
+            </a:extLst>
+          </p:cNvPr>
+          <p:cNvSpPr>
+            <a:spLocks xmlns:a="http://schemas.openxmlformats.org/drawingml/2006/main" noGrp="1"/>
+          </p:cNvSpPr>
+          <p:nvPr/>
+        </p:nvSpPr>
+        <p:spPr>
+          <a:xfrm xmlns:a="http://schemas.openxmlformats.org/drawingml/2006/main">
+            <a:off x="2190750" y="6572250"/>
+            <a:ext cx="8191500" cy="152400"/>
           </a:xfrm>
           <a:prstGeom xmlns:a="http://schemas.openxmlformats.org/drawingml/2006/main" prst="rect">
             <a:avLst/>
@@ -15348,9 +15278,9 @@
                 <a:solidFill>
                   <a:srgbClr val="607084"/>
                 </a:solidFill>
-                <a:latin typeface="Microsoft YaHei"/>
-                <a:ea typeface="Microsoft YaHei"/>
-                <a:cs typeface="Microsoft YaHei"/>
+                <a:latin typeface="Aptos"/>
+                <a:ea typeface="Aptos"/>
+                <a:cs typeface="Aptos"/>
               </a:defRPr>
             </a:pPr>
             <a:r>
@@ -15358,11 +15288,11 @@
                 <a:solidFill>
                   <a:srgbClr val="607084"/>
                 </a:solidFill>
-                <a:latin typeface="Microsoft YaHei"/>
-                <a:ea typeface="Microsoft YaHei"/>
-                <a:cs typeface="Microsoft YaHei"/>
-              </a:rPr>
-              <a:t>Evidence: xyDeng/notes/run_summary.md, device_benchmark_10k.csv, one_million_run_metrics.csv, and videos under xyDeng/videos.</a:t>
+                <a:latin typeface="Aptos"/>
+                <a:ea typeface="Aptos"/>
+                <a:cs typeface="Aptos"/>
+              </a:rPr>
+              <a:t>Evidence: run_summary.md, device_benchmark_10k.csv, one_million_run_metrics.csv, and xyDeng/videos.</a:t>
             </a:r>
           </a:p>
         </p:txBody>
@@ -15370,7 +15300,7 @@
     </p:spTree>
     <p:extLst>
       <p:ext uri="{BB962C8B-B14F-4D97-AF65-F5344CB8AC3E}">
-        <p14:creationId xmlns:p14="http://schemas.microsoft.com/office/powerpoint/2010/main" val="1454403800"/>
+        <p14:creationId xmlns:p14="http://schemas.microsoft.com/office/powerpoint/2010/main" val="556771340"/>
       </p:ext>
     </p:extLst>
   </p:cSld>
@@ -15401,7 +15331,7 @@
           <p:cNvPr id="1" name="">
             <a:extLst xmlns:a="http://schemas.openxmlformats.org/drawingml/2006/main">
               <a:ext uri="{FF2B5EF4-FFF2-40B4-BE49-F238E27FC236}">
-                <a16:creationId xmlns:a16="http://schemas.microsoft.com/office/drawing/2014/main" id="{7E4FC20A-208E-4D5A-820E-82DE1532C34F}"/>
+                <a16:creationId xmlns:a16="http://schemas.microsoft.com/office/drawing/2014/main" id="{A38247A8-3E14-4B32-A624-DFD50532CB09}"/>
               </a:ext>
             </a:extLst>
           </p:cNvPr>
@@ -15413,7 +15343,7 @@
         <p:spPr>
           <a:xfrm xmlns:a="http://schemas.openxmlformats.org/drawingml/2006/main">
             <a:off x="381000" y="257175"/>
-            <a:ext cx="971550" cy="295275"/>
+            <a:ext cx="1066800" cy="295275"/>
           </a:xfrm>
           <a:prstGeom xmlns:a="http://schemas.openxmlformats.org/drawingml/2006/main" prst="roundRect">
             <a:avLst>
@@ -15441,25 +15371,25 @@
           <a:lstStyle xmlns:a="http://schemas.openxmlformats.org/drawingml/2006/main"/>
           <a:p xmlns:a="http://schemas.openxmlformats.org/drawingml/2006/main">
             <a:pPr algn="ctr">
-              <a:defRPr sz="1125" b="1">
+              <a:defRPr sz="1050" b="1">
                 <a:solidFill>
                   <a:srgbClr val="FFFFFF"/>
                 </a:solidFill>
-                <a:latin typeface="Microsoft YaHei"/>
-                <a:ea typeface="Microsoft YaHei"/>
-                <a:cs typeface="Microsoft YaHei"/>
-              </a:defRPr>
-            </a:pPr>
-            <a:r>
-              <a:rPr sz="1125" b="1">
+                <a:latin typeface="Aptos"/>
+                <a:ea typeface="Aptos"/>
+                <a:cs typeface="Aptos"/>
+              </a:defRPr>
+            </a:pPr>
+            <a:r>
+              <a:rPr sz="1050" b="1">
                 <a:solidFill>
                   <a:srgbClr val="FFFFFF"/>
                 </a:solidFill>
-                <a:latin typeface="Microsoft YaHei"/>
-                <a:ea typeface="Microsoft YaHei"/>
-                <a:cs typeface="Microsoft YaHei"/>
-              </a:rPr>
-              <a:t>结论</a:t>
+                <a:latin typeface="Aptos"/>
+                <a:ea typeface="Aptos"/>
+                <a:cs typeface="Aptos"/>
+              </a:rPr>
+              <a:t>Summary</a:t>
             </a:r>
           </a:p>
         </p:txBody>
@@ -15469,19 +15399,19 @@
           <p:cNvPr id="2" name="">
             <a:extLst xmlns:a="http://schemas.openxmlformats.org/drawingml/2006/main">
               <a:ext uri="{FF2B5EF4-FFF2-40B4-BE49-F238E27FC236}">
-                <a16:creationId xmlns:a16="http://schemas.microsoft.com/office/drawing/2014/main" id="{CD4C20E3-B9F3-46C7-BF0A-3599740481AA}"/>
-              </a:ext>
-            </a:extLst>
-          </p:cNvPr>
-          <p:cNvSpPr>
-            <a:spLocks xmlns:a="http://schemas.openxmlformats.org/drawingml/2006/main" noGrp="1"/>
-          </p:cNvSpPr>
-          <p:nvPr/>
-        </p:nvSpPr>
-        <p:spPr>
-          <a:xfrm xmlns:a="http://schemas.openxmlformats.org/drawingml/2006/main">
-            <a:off x="1524000" y="190500"/>
-            <a:ext cx="7239000" cy="361950"/>
+                <a16:creationId xmlns:a16="http://schemas.microsoft.com/office/drawing/2014/main" id="{624D6EAF-A196-44D2-BB89-488FE4FB1801}"/>
+              </a:ext>
+            </a:extLst>
+          </p:cNvPr>
+          <p:cNvSpPr>
+            <a:spLocks xmlns:a="http://schemas.openxmlformats.org/drawingml/2006/main" noGrp="1"/>
+          </p:cNvSpPr>
+          <p:nvPr/>
+        </p:nvSpPr>
+        <p:spPr>
+          <a:xfrm xmlns:a="http://schemas.openxmlformats.org/drawingml/2006/main">
+            <a:off x="1619250" y="190500"/>
+            <a:ext cx="7429500" cy="361950"/>
           </a:xfrm>
           <a:prstGeom xmlns:a="http://schemas.openxmlformats.org/drawingml/2006/main" prst="rect">
             <a:avLst/>
@@ -15501,9 +15431,9 @@
                 <a:solidFill>
                   <a:srgbClr val="202938"/>
                 </a:solidFill>
-                <a:latin typeface="Microsoft YaHei"/>
-                <a:ea typeface="Microsoft YaHei"/>
-                <a:cs typeface="Microsoft YaHei"/>
+                <a:latin typeface="Aptos"/>
+                <a:ea typeface="Aptos"/>
+                <a:cs typeface="Aptos"/>
               </a:defRPr>
             </a:pPr>
             <a:r>
@@ -15511,11 +15441,11 @@
                 <a:solidFill>
                   <a:srgbClr val="202938"/>
                 </a:solidFill>
-                <a:latin typeface="Microsoft YaHei"/>
-                <a:ea typeface="Microsoft YaHei"/>
-                <a:cs typeface="Microsoft YaHei"/>
-              </a:rPr>
-              <a:t>What we can claim for the report</a:t>
+                <a:latin typeface="Aptos"/>
+                <a:ea typeface="Aptos"/>
+                <a:cs typeface="Aptos"/>
+              </a:rPr>
+              <a:t>What we can claim</a:t>
             </a:r>
           </a:p>
         </p:txBody>
@@ -15525,19 +15455,19 @@
           <p:cNvPr id="3" name="">
             <a:extLst xmlns:a="http://schemas.openxmlformats.org/drawingml/2006/main">
               <a:ext uri="{FF2B5EF4-FFF2-40B4-BE49-F238E27FC236}">
-                <a16:creationId xmlns:a16="http://schemas.microsoft.com/office/drawing/2014/main" id="{19003902-52DC-49E8-BB04-4DFFC2F017C2}"/>
-              </a:ext>
-            </a:extLst>
-          </p:cNvPr>
-          <p:cNvSpPr>
-            <a:spLocks xmlns:a="http://schemas.openxmlformats.org/drawingml/2006/main" noGrp="1"/>
-          </p:cNvSpPr>
-          <p:nvPr/>
-        </p:nvSpPr>
-        <p:spPr>
-          <a:xfrm xmlns:a="http://schemas.openxmlformats.org/drawingml/2006/main">
-            <a:off x="1524000" y="609600"/>
-            <a:ext cx="7048500" cy="209550"/>
+                <a16:creationId xmlns:a16="http://schemas.microsoft.com/office/drawing/2014/main" id="{677F3A65-E321-4942-9851-4E7341DF4140}"/>
+              </a:ext>
+            </a:extLst>
+          </p:cNvPr>
+          <p:cNvSpPr>
+            <a:spLocks xmlns:a="http://schemas.openxmlformats.org/drawingml/2006/main" noGrp="1"/>
+          </p:cNvSpPr>
+          <p:nvPr/>
+        </p:nvSpPr>
+        <p:spPr>
+          <a:xfrm xmlns:a="http://schemas.openxmlformats.org/drawingml/2006/main">
+            <a:off x="1619250" y="609600"/>
+            <a:ext cx="7239000" cy="209550"/>
           </a:xfrm>
           <a:prstGeom xmlns:a="http://schemas.openxmlformats.org/drawingml/2006/main" prst="rect">
             <a:avLst/>
@@ -15557,9 +15487,9 @@
                 <a:solidFill>
                   <a:srgbClr val="607084"/>
                 </a:solidFill>
-                <a:latin typeface="Microsoft YaHei"/>
-                <a:ea typeface="Microsoft YaHei"/>
-                <a:cs typeface="Microsoft YaHei"/>
+                <a:latin typeface="Aptos"/>
+                <a:ea typeface="Aptos"/>
+                <a:cs typeface="Aptos"/>
               </a:defRPr>
             </a:pPr>
             <a:r>
@@ -15567,11 +15497,11 @@
                 <a:solidFill>
                   <a:srgbClr val="607084"/>
                 </a:solidFill>
-                <a:latin typeface="Microsoft YaHei"/>
-                <a:ea typeface="Microsoft YaHei"/>
-                <a:cs typeface="Microsoft YaHei"/>
-              </a:rPr>
-              <a:t>结果边界、展示素材与后续训练方向</a:t>
+                <a:latin typeface="Aptos"/>
+                <a:ea typeface="Aptos"/>
+                <a:cs typeface="Aptos"/>
+              </a:rPr>
+              <a:t>Claim boundary, evidence, and next steps</a:t>
             </a:r>
           </a:p>
         </p:txBody>
@@ -15581,7 +15511,7 @@
           <p:cNvPr id="4" name="">
             <a:extLst xmlns:a="http://schemas.openxmlformats.org/drawingml/2006/main">
               <a:ext uri="{FF2B5EF4-FFF2-40B4-BE49-F238E27FC236}">
-                <a16:creationId xmlns:a16="http://schemas.microsoft.com/office/drawing/2014/main" id="{9B65A624-75B0-4069-944F-E70F7DC0C9C6}"/>
+                <a16:creationId xmlns:a16="http://schemas.microsoft.com/office/drawing/2014/main" id="{C6F2C4D5-BBF3-4B19-9D07-EC1882035FFC}"/>
               </a:ext>
             </a:extLst>
           </p:cNvPr>
@@ -15625,9 +15555,9 @@
                 <a:solidFill>
                   <a:srgbClr val="607084"/>
                 </a:solidFill>
-                <a:latin typeface="Microsoft YaHei"/>
-                <a:ea typeface="Microsoft YaHei"/>
-                <a:cs typeface="Microsoft YaHei"/>
+                <a:latin typeface="Aptos"/>
+                <a:ea typeface="Aptos"/>
+                <a:cs typeface="Aptos"/>
               </a:defRPr>
             </a:pPr>
             <a:r>
@@ -15635,9 +15565,9 @@
                 <a:solidFill>
                   <a:srgbClr val="607084"/>
                 </a:solidFill>
-                <a:latin typeface="Microsoft YaHei"/>
-                <a:ea typeface="Microsoft YaHei"/>
-                <a:cs typeface="Microsoft YaHei"/>
+                <a:latin typeface="Aptos"/>
+                <a:ea typeface="Aptos"/>
+                <a:cs typeface="Aptos"/>
               </a:rPr>
               <a:t>Mario RL / PPO intrinsic rewards</a:t>
             </a:r>
@@ -15648,9 +15578,9 @@
                 <a:solidFill>
                   <a:srgbClr val="607084"/>
                 </a:solidFill>
-                <a:latin typeface="Microsoft YaHei"/>
-                <a:ea typeface="Microsoft YaHei"/>
-                <a:cs typeface="Microsoft YaHei"/>
+                <a:latin typeface="Aptos"/>
+                <a:ea typeface="Aptos"/>
+                <a:cs typeface="Aptos"/>
               </a:defRPr>
             </a:pPr>
             <a:r>
@@ -15658,11 +15588,11 @@
                 <a:solidFill>
                   <a:srgbClr val="607084"/>
                 </a:solidFill>
-                <a:latin typeface="Microsoft YaHei"/>
-                <a:ea typeface="Microsoft YaHei"/>
-                <a:cs typeface="Microsoft YaHei"/>
-              </a:rPr>
-              <a:t>1M steps · seed 1 · 1-1 only</a:t>
+                <a:latin typeface="Aptos"/>
+                <a:ea typeface="Aptos"/>
+                <a:cs typeface="Aptos"/>
+              </a:rPr>
+              <a:t>1M steps | seed 1 | World 1-1</a:t>
             </a:r>
           </a:p>
         </p:txBody>
@@ -15672,7 +15602,7 @@
           <p:cNvPr id="5" name="">
             <a:extLst xmlns:a="http://schemas.openxmlformats.org/drawingml/2006/main">
               <a:ext uri="{FF2B5EF4-FFF2-40B4-BE49-F238E27FC236}">
-                <a16:creationId xmlns:a16="http://schemas.microsoft.com/office/drawing/2014/main" id="{5DFD4D2C-60D7-45E0-BDD8-CE74FD739844}"/>
+                <a16:creationId xmlns:a16="http://schemas.microsoft.com/office/drawing/2014/main" id="{1745F02A-7541-4C4C-A017-2DC7C9312AE8}"/>
               </a:ext>
             </a:extLst>
           </p:cNvPr>
@@ -15705,7 +15635,7 @@
           <p:cNvPr id="6" name="">
             <a:extLst xmlns:a="http://schemas.openxmlformats.org/drawingml/2006/main">
               <a:ext uri="{FF2B5EF4-FFF2-40B4-BE49-F238E27FC236}">
-                <a16:creationId xmlns:a16="http://schemas.microsoft.com/office/drawing/2014/main" id="{5F6C0A49-2ED6-40C4-A7AD-C0E2B4AB9A16}"/>
+                <a16:creationId xmlns:a16="http://schemas.microsoft.com/office/drawing/2014/main" id="{5F23232E-18EE-4F08-B3B9-A33268A573E9}"/>
               </a:ext>
             </a:extLst>
           </p:cNvPr>
@@ -15746,7 +15676,7 @@
           <p:cNvPr id="7" name="">
             <a:extLst xmlns:a="http://schemas.openxmlformats.org/drawingml/2006/main">
               <a:ext uri="{FF2B5EF4-FFF2-40B4-BE49-F238E27FC236}">
-                <a16:creationId xmlns:a16="http://schemas.microsoft.com/office/drawing/2014/main" id="{128B85D3-8A2B-46B3-A21D-68258379BA22}"/>
+                <a16:creationId xmlns:a16="http://schemas.microsoft.com/office/drawing/2014/main" id="{CD78A695-8AE8-4E5B-AD9D-8E5970B3FB3D}"/>
               </a:ext>
             </a:extLst>
           </p:cNvPr>
@@ -15790,9 +15720,9 @@
                 <a:solidFill>
                   <a:srgbClr val="FFFFFF"/>
                 </a:solidFill>
-                <a:latin typeface="Microsoft YaHei"/>
-                <a:ea typeface="Microsoft YaHei"/>
-                <a:cs typeface="Microsoft YaHei"/>
+                <a:latin typeface="Aptos"/>
+                <a:ea typeface="Aptos"/>
+                <a:cs typeface="Aptos"/>
               </a:defRPr>
             </a:pPr>
             <a:r>
@@ -15800,11 +15730,11 @@
                 <a:solidFill>
                   <a:srgbClr val="FFFFFF"/>
                 </a:solidFill>
-                <a:latin typeface="Microsoft YaHei"/>
-                <a:ea typeface="Microsoft YaHei"/>
-                <a:cs typeface="Microsoft YaHei"/>
-              </a:rPr>
-              <a:t>1. 可确认结论</a:t>
+                <a:latin typeface="Aptos"/>
+                <a:ea typeface="Aptos"/>
+                <a:cs typeface="Aptos"/>
+              </a:rPr>
+              <a:t>1. Main claim</a:t>
             </a:r>
           </a:p>
         </p:txBody>
@@ -15814,19 +15744,19 @@
           <p:cNvPr id="8" name="">
             <a:extLst xmlns:a="http://schemas.openxmlformats.org/drawingml/2006/main">
               <a:ext uri="{FF2B5EF4-FFF2-40B4-BE49-F238E27FC236}">
-                <a16:creationId xmlns:a16="http://schemas.microsoft.com/office/drawing/2014/main" id="{14B8442A-6004-4B24-8913-1D18FF29F8B7}"/>
-              </a:ext>
-            </a:extLst>
-          </p:cNvPr>
-          <p:cNvSpPr>
-            <a:spLocks xmlns:a="http://schemas.openxmlformats.org/drawingml/2006/main" noGrp="1"/>
-          </p:cNvSpPr>
-          <p:nvPr/>
-        </p:nvSpPr>
-        <p:spPr>
-          <a:xfrm xmlns:a="http://schemas.openxmlformats.org/drawingml/2006/main">
-            <a:off x="800100" y="1685925"/>
-            <a:ext cx="2876550" cy="704850"/>
+                <a16:creationId xmlns:a16="http://schemas.microsoft.com/office/drawing/2014/main" id="{BAC53869-E908-4CE7-ABCF-6D09D9DDC01F}"/>
+              </a:ext>
+            </a:extLst>
+          </p:cNvPr>
+          <p:cNvSpPr>
+            <a:spLocks xmlns:a="http://schemas.openxmlformats.org/drawingml/2006/main" noGrp="1"/>
+          </p:cNvSpPr>
+          <p:nvPr/>
+        </p:nvSpPr>
+        <p:spPr>
+          <a:xfrm xmlns:a="http://schemas.openxmlformats.org/drawingml/2006/main">
+            <a:off x="800100" y="1714500"/>
+            <a:ext cx="2876550" cy="723900"/>
           </a:xfrm>
           <a:prstGeom xmlns:a="http://schemas.openxmlformats.org/drawingml/2006/main" prst="rect">
             <a:avLst/>
@@ -15846,9 +15776,9 @@
                 <a:solidFill>
                   <a:srgbClr val="202938"/>
                 </a:solidFill>
-                <a:latin typeface="Microsoft YaHei"/>
-                <a:ea typeface="Microsoft YaHei"/>
-                <a:cs typeface="Microsoft YaHei"/>
+                <a:latin typeface="Aptos"/>
+                <a:ea typeface="Aptos"/>
+                <a:cs typeface="Aptos"/>
               </a:defRPr>
             </a:pPr>
             <a:r>
@@ -15856,11 +15786,11 @@
                 <a:solidFill>
                   <a:srgbClr val="202938"/>
                 </a:solidFill>
-                <a:latin typeface="Microsoft YaHei"/>
-                <a:ea typeface="Microsoft YaHei"/>
-                <a:cs typeface="Microsoft YaHei"/>
-              </a:rPr>
-              <a:t>Both methods learned useful exploration behavior on World 1-1 and reached terminal x_pos=3161 during training.</a:t>
+                <a:latin typeface="Aptos"/>
+                <a:ea typeface="Aptos"/>
+                <a:cs typeface="Aptos"/>
+              </a:rPr>
+              <a:t>Both methods learn useful exploration on World 1-1 and reach terminal x_pos=3161 during training.</a:t>
             </a:r>
           </a:p>
         </p:txBody>
@@ -15870,18 +15800,18 @@
           <p:cNvPr id="9" name="">
             <a:extLst xmlns:a="http://schemas.openxmlformats.org/drawingml/2006/main">
               <a:ext uri="{FF2B5EF4-FFF2-40B4-BE49-F238E27FC236}">
-                <a16:creationId xmlns:a16="http://schemas.microsoft.com/office/drawing/2014/main" id="{37876F55-4D22-4286-AC51-8915068D2B73}"/>
-              </a:ext>
-            </a:extLst>
-          </p:cNvPr>
-          <p:cNvSpPr>
-            <a:spLocks xmlns:a="http://schemas.openxmlformats.org/drawingml/2006/main" noGrp="1"/>
-          </p:cNvSpPr>
-          <p:nvPr/>
-        </p:nvSpPr>
-        <p:spPr>
-          <a:xfrm xmlns:a="http://schemas.openxmlformats.org/drawingml/2006/main">
-            <a:off x="790575" y="2619375"/>
+                <a16:creationId xmlns:a16="http://schemas.microsoft.com/office/drawing/2014/main" id="{6F287402-5BF1-4EBA-B436-62F6A6A0A614}"/>
+              </a:ext>
+            </a:extLst>
+          </p:cNvPr>
+          <p:cNvSpPr>
+            <a:spLocks xmlns:a="http://schemas.openxmlformats.org/drawingml/2006/main" noGrp="1"/>
+          </p:cNvSpPr>
+          <p:nvPr/>
+        </p:nvSpPr>
+        <p:spPr>
+          <a:xfrm xmlns:a="http://schemas.openxmlformats.org/drawingml/2006/main">
+            <a:off x="790575" y="2667000"/>
             <a:ext cx="2886075" cy="361950"/>
           </a:xfrm>
           <a:prstGeom xmlns:a="http://schemas.openxmlformats.org/drawingml/2006/main" prst="rect">
@@ -15902,9 +15832,9 @@
                 <a:solidFill>
                   <a:srgbClr val="607084"/>
                 </a:solidFill>
-                <a:latin typeface="Microsoft YaHei"/>
-                <a:ea typeface="Microsoft YaHei"/>
-                <a:cs typeface="Microsoft YaHei"/>
+                <a:latin typeface="Aptos"/>
+                <a:ea typeface="Aptos"/>
+                <a:cs typeface="Aptos"/>
               </a:defRPr>
             </a:pPr>
             <a:r>
@@ -15912,11 +15842,11 @@
                 <a:solidFill>
                   <a:srgbClr val="607084"/>
                 </a:solidFill>
-                <a:latin typeface="Microsoft YaHei"/>
-                <a:ea typeface="Microsoft YaHei"/>
-                <a:cs typeface="Microsoft YaHei"/>
-              </a:rPr>
-              <a:t>PPT 中不要把 sampled video 说成通关视频；它们是展示策略行为的可视化证据。</a:t>
+                <a:latin typeface="Aptos"/>
+                <a:ea typeface="Aptos"/>
+                <a:cs typeface="Aptos"/>
+              </a:rPr>
+              <a:t>Do not present sampled videos as full-clear proof. They are policy visualizations.</a:t>
             </a:r>
           </a:p>
         </p:txBody>
@@ -15926,7 +15856,7 @@
           <p:cNvPr id="10" name="">
             <a:extLst xmlns:a="http://schemas.openxmlformats.org/drawingml/2006/main">
               <a:ext uri="{FF2B5EF4-FFF2-40B4-BE49-F238E27FC236}">
-                <a16:creationId xmlns:a16="http://schemas.microsoft.com/office/drawing/2014/main" id="{10201D11-B34C-4D3C-9764-72ECD1A412EB}"/>
+                <a16:creationId xmlns:a16="http://schemas.microsoft.com/office/drawing/2014/main" id="{AF22D536-E605-44AD-81B2-7C6D7C096DFD}"/>
               </a:ext>
             </a:extLst>
           </p:cNvPr>
@@ -15967,7 +15897,7 @@
           <p:cNvPr id="11" name="">
             <a:extLst xmlns:a="http://schemas.openxmlformats.org/drawingml/2006/main">
               <a:ext uri="{FF2B5EF4-FFF2-40B4-BE49-F238E27FC236}">
-                <a16:creationId xmlns:a16="http://schemas.microsoft.com/office/drawing/2014/main" id="{9BA5E3F0-9DDE-4197-884C-B254B67DBCFE}"/>
+                <a16:creationId xmlns:a16="http://schemas.microsoft.com/office/drawing/2014/main" id="{F038CEE6-BD14-438E-B8E4-39C266D822B6}"/>
               </a:ext>
             </a:extLst>
           </p:cNvPr>
@@ -15979,7 +15909,7 @@
         <p:spPr>
           <a:xfrm xmlns:a="http://schemas.openxmlformats.org/drawingml/2006/main">
             <a:off x="4591050" y="1228725"/>
-            <a:ext cx="1047750" cy="285750"/>
+            <a:ext cx="1143000" cy="285750"/>
           </a:xfrm>
           <a:prstGeom xmlns:a="http://schemas.openxmlformats.org/drawingml/2006/main" prst="roundRect">
             <a:avLst>
@@ -16011,9 +15941,9 @@
                 <a:solidFill>
                   <a:srgbClr val="FFFFFF"/>
                 </a:solidFill>
-                <a:latin typeface="Microsoft YaHei"/>
-                <a:ea typeface="Microsoft YaHei"/>
-                <a:cs typeface="Microsoft YaHei"/>
+                <a:latin typeface="Aptos"/>
+                <a:ea typeface="Aptos"/>
+                <a:cs typeface="Aptos"/>
               </a:defRPr>
             </a:pPr>
             <a:r>
@@ -16021,11 +15951,11 @@
                 <a:solidFill>
                   <a:srgbClr val="FFFFFF"/>
                 </a:solidFill>
-                <a:latin typeface="Microsoft YaHei"/>
-                <a:ea typeface="Microsoft YaHei"/>
-                <a:cs typeface="Microsoft YaHei"/>
-              </a:rPr>
-              <a:t>2. 哪个更好</a:t>
+                <a:latin typeface="Aptos"/>
+                <a:ea typeface="Aptos"/>
+                <a:cs typeface="Aptos"/>
+              </a:rPr>
+              <a:t>2. Best method</a:t>
             </a:r>
           </a:p>
         </p:txBody>
@@ -16035,19 +15965,19 @@
           <p:cNvPr id="12" name="">
             <a:extLst xmlns:a="http://schemas.openxmlformats.org/drawingml/2006/main">
               <a:ext uri="{FF2B5EF4-FFF2-40B4-BE49-F238E27FC236}">
-                <a16:creationId xmlns:a16="http://schemas.microsoft.com/office/drawing/2014/main" id="{2EF05E58-5071-4F52-9AA1-C03001763242}"/>
-              </a:ext>
-            </a:extLst>
-          </p:cNvPr>
-          <p:cNvSpPr>
-            <a:spLocks xmlns:a="http://schemas.openxmlformats.org/drawingml/2006/main" noGrp="1"/>
-          </p:cNvSpPr>
-          <p:nvPr/>
-        </p:nvSpPr>
-        <p:spPr>
-          <a:xfrm xmlns:a="http://schemas.openxmlformats.org/drawingml/2006/main">
-            <a:off x="4705350" y="1685925"/>
-            <a:ext cx="2857500" cy="819150"/>
+                <a16:creationId xmlns:a16="http://schemas.microsoft.com/office/drawing/2014/main" id="{A90613B6-3E21-4D45-A920-8E43EF21382D}"/>
+              </a:ext>
+            </a:extLst>
+          </p:cNvPr>
+          <p:cNvSpPr>
+            <a:spLocks xmlns:a="http://schemas.openxmlformats.org/drawingml/2006/main" noGrp="1"/>
+          </p:cNvSpPr>
+          <p:nvPr/>
+        </p:nvSpPr>
+        <p:spPr>
+          <a:xfrm xmlns:a="http://schemas.openxmlformats.org/drawingml/2006/main">
+            <a:off x="4705350" y="1762125"/>
+            <a:ext cx="2857500" cy="666750"/>
           </a:xfrm>
           <a:prstGeom xmlns:a="http://schemas.openxmlformats.org/drawingml/2006/main" prst="rect">
             <a:avLst/>
@@ -16063,25 +15993,25 @@
           <a:lstStyle xmlns:a="http://schemas.openxmlformats.org/drawingml/2006/main"/>
           <a:p xmlns:a="http://schemas.openxmlformats.org/drawingml/2006/main">
             <a:pPr algn="ctr">
-              <a:defRPr sz="1275" b="1">
+              <a:defRPr sz="1350" b="1">
                 <a:solidFill>
                   <a:srgbClr val="202938"/>
                 </a:solidFill>
-                <a:latin typeface="Microsoft YaHei"/>
-                <a:ea typeface="Microsoft YaHei"/>
-                <a:cs typeface="Microsoft YaHei"/>
-              </a:defRPr>
-            </a:pPr>
-            <a:r>
-              <a:rPr sz="1275" b="1">
+                <a:latin typeface="Aptos"/>
+                <a:ea typeface="Aptos"/>
+                <a:cs typeface="Aptos"/>
+              </a:defRPr>
+            </a:pPr>
+            <a:r>
+              <a:rPr sz="1350" b="1">
                 <a:solidFill>
                   <a:srgbClr val="202938"/>
                 </a:solidFill>
-                <a:latin typeface="Microsoft YaHei"/>
-                <a:ea typeface="Microsoft YaHei"/>
-                <a:cs typeface="Microsoft YaHei"/>
-              </a:rPr>
-              <a:t>If the report emphasizes mean validation progress, choose ICM. If it emphasizes best demonstrable rollout video, choose Disagreement.</a:t>
+                <a:latin typeface="Aptos"/>
+                <a:ea typeface="Aptos"/>
+                <a:cs typeface="Aptos"/>
+              </a:rPr>
+              <a:t>Use ICM for mean validation progress. Use Disagreement for the farthest saved rollout.</a:t>
             </a:r>
           </a:p>
         </p:txBody>
@@ -16091,7 +16021,7 @@
           <p:cNvPr id="13" name="">
             <a:extLst xmlns:a="http://schemas.openxmlformats.org/drawingml/2006/main">
               <a:ext uri="{FF2B5EF4-FFF2-40B4-BE49-F238E27FC236}">
-                <a16:creationId xmlns:a16="http://schemas.microsoft.com/office/drawing/2014/main" id="{2E0AC43B-3B17-4B53-9F41-8045F3421B80}"/>
+                <a16:creationId xmlns:a16="http://schemas.microsoft.com/office/drawing/2014/main" id="{121AD45A-22D6-411E-8366-71B35E105FB1}"/>
               </a:ext>
             </a:extLst>
           </p:cNvPr>
@@ -16123,9 +16053,9 @@
                 <a:solidFill>
                   <a:srgbClr val="607084"/>
                 </a:solidFill>
-                <a:latin typeface="Microsoft YaHei"/>
-                <a:ea typeface="Microsoft YaHei"/>
-                <a:cs typeface="Microsoft YaHei"/>
+                <a:latin typeface="Aptos"/>
+                <a:ea typeface="Aptos"/>
+                <a:cs typeface="Aptos"/>
               </a:defRPr>
             </a:pPr>
             <a:r>
@@ -16133,11 +16063,11 @@
                 <a:solidFill>
                   <a:srgbClr val="607084"/>
                 </a:solidFill>
-                <a:latin typeface="Microsoft YaHei"/>
-                <a:ea typeface="Microsoft YaHei"/>
-                <a:cs typeface="Microsoft YaHei"/>
-              </a:rPr>
-              <a:t>公正表述：两者接近，优势维度不同；单 seed 不足以做强排名。</a:t>
+                <a:latin typeface="Aptos"/>
+                <a:ea typeface="Aptos"/>
+                <a:cs typeface="Aptos"/>
+              </a:rPr>
+              <a:t>Fair wording: the methods are close. One seed is not enough for a strong ranking.</a:t>
             </a:r>
           </a:p>
         </p:txBody>
@@ -16147,7 +16077,7 @@
           <p:cNvPr id="14" name="">
             <a:extLst xmlns:a="http://schemas.openxmlformats.org/drawingml/2006/main">
               <a:ext uri="{FF2B5EF4-FFF2-40B4-BE49-F238E27FC236}">
-                <a16:creationId xmlns:a16="http://schemas.microsoft.com/office/drawing/2014/main" id="{B15EE318-ECF7-474F-92D0-4785E233766E}"/>
+                <a16:creationId xmlns:a16="http://schemas.microsoft.com/office/drawing/2014/main" id="{41643A4B-CA95-401E-AB68-D5D92BDEC879}"/>
               </a:ext>
             </a:extLst>
           </p:cNvPr>
@@ -16188,7 +16118,7 @@
           <p:cNvPr id="15" name="">
             <a:extLst xmlns:a="http://schemas.openxmlformats.org/drawingml/2006/main">
               <a:ext uri="{FF2B5EF4-FFF2-40B4-BE49-F238E27FC236}">
-                <a16:creationId xmlns:a16="http://schemas.microsoft.com/office/drawing/2014/main" id="{ECCF0731-F344-447C-A3B8-EAA3B2C86917}"/>
+                <a16:creationId xmlns:a16="http://schemas.microsoft.com/office/drawing/2014/main" id="{924421B0-0FED-400C-A780-AA96AB8FC2F6}"/>
               </a:ext>
             </a:extLst>
           </p:cNvPr>
@@ -16232,9 +16162,9 @@
                 <a:solidFill>
                   <a:srgbClr val="FFFFFF"/>
                 </a:solidFill>
-                <a:latin typeface="Microsoft YaHei"/>
-                <a:ea typeface="Microsoft YaHei"/>
-                <a:cs typeface="Microsoft YaHei"/>
+                <a:latin typeface="Aptos"/>
+                <a:ea typeface="Aptos"/>
+                <a:cs typeface="Aptos"/>
               </a:defRPr>
             </a:pPr>
             <a:r>
@@ -16242,11 +16172,11 @@
                 <a:solidFill>
                   <a:srgbClr val="FFFFFF"/>
                 </a:solidFill>
-                <a:latin typeface="Microsoft YaHei"/>
-                <a:ea typeface="Microsoft YaHei"/>
-                <a:cs typeface="Microsoft YaHei"/>
-              </a:rPr>
-              <a:t>3. 展示素材</a:t>
+                <a:latin typeface="Aptos"/>
+                <a:ea typeface="Aptos"/>
+                <a:cs typeface="Aptos"/>
+              </a:rPr>
+              <a:t>3. Evidence</a:t>
             </a:r>
           </a:p>
         </p:txBody>
@@ -16256,7 +16186,7 @@
           <p:cNvPr id="16" name="">
             <a:extLst xmlns:a="http://schemas.openxmlformats.org/drawingml/2006/main">
               <a:ext uri="{FF2B5EF4-FFF2-40B4-BE49-F238E27FC236}">
-                <a16:creationId xmlns:a16="http://schemas.microsoft.com/office/drawing/2014/main" id="{9F0213C9-D6F5-4771-BD50-01954B8B32D6}"/>
+                <a16:creationId xmlns:a16="http://schemas.microsoft.com/office/drawing/2014/main" id="{0BCF8ECA-2E98-43AC-8213-296213F70D3D}"/>
               </a:ext>
             </a:extLst>
           </p:cNvPr>
@@ -16302,7 +16232,7 @@
                 <a:ea typeface="Arial"/>
                 <a:cs typeface="Arial"/>
               </a:rPr>
-              <a:t>Use 1-1 only:</a:t>
+              <a:t>Use World 1-1 only:</a:t>
             </a:r>
           </a:p>
           <a:p xmlns:a="http://schemas.openxmlformats.org/drawingml/2006/main">
@@ -16325,7 +16255,7 @@
                 <a:ea typeface="Arial"/>
                 <a:cs typeface="Arial"/>
               </a:rPr>
-              <a:t>• xyDeng_ppo_icm_1m_cuda_best_sample.mp4</a:t>
+              <a:t>- ICM best-sample video</a:t>
             </a:r>
           </a:p>
           <a:p xmlns:a="http://schemas.openxmlformats.org/drawingml/2006/main">
@@ -16348,7 +16278,7 @@
                 <a:ea typeface="Arial"/>
                 <a:cs typeface="Arial"/>
               </a:rPr>
-              <a:t>• xyDeng_ppo_disagreement_1m_cpu_seed1_1780679739_last_sample20.mp4</a:t>
+              <a:t>- Disagreement last-sample20 video</a:t>
             </a:r>
           </a:p>
           <a:p xmlns:a="http://schemas.openxmlformats.org/drawingml/2006/main">
@@ -16371,7 +16301,7 @@
                 <a:ea typeface="Arial"/>
                 <a:cs typeface="Arial"/>
               </a:rPr>
-              <a:t>• 1m_comparison plots</a:t>
+              <a:t>- 1m_comparison plots</a:t>
             </a:r>
           </a:p>
         </p:txBody>
@@ -16381,7 +16311,7 @@
           <p:cNvPr id="17" name="">
             <a:extLst xmlns:a="http://schemas.openxmlformats.org/drawingml/2006/main">
               <a:ext uri="{FF2B5EF4-FFF2-40B4-BE49-F238E27FC236}">
-                <a16:creationId xmlns:a16="http://schemas.microsoft.com/office/drawing/2014/main" id="{01551F76-7A62-4DDA-A744-3F90D983BC8B}"/>
+                <a16:creationId xmlns:a16="http://schemas.microsoft.com/office/drawing/2014/main" id="{0260FDA7-9EAC-40EB-A87E-927DD8FE134F}"/>
               </a:ext>
             </a:extLst>
           </p:cNvPr>
@@ -16422,7 +16352,7 @@
           <p:cNvPr id="18" name="">
             <a:extLst xmlns:a="http://schemas.openxmlformats.org/drawingml/2006/main">
               <a:ext uri="{FF2B5EF4-FFF2-40B4-BE49-F238E27FC236}">
-                <a16:creationId xmlns:a16="http://schemas.microsoft.com/office/drawing/2014/main" id="{1C3C1D47-80F2-453E-8CDB-93AC9EF9C898}"/>
+                <a16:creationId xmlns:a16="http://schemas.microsoft.com/office/drawing/2014/main" id="{E33AFB7D-639D-4E5F-81C5-170DD3B58AA2}"/>
               </a:ext>
             </a:extLst>
           </p:cNvPr>
@@ -16466,9 +16396,9 @@
                 <a:solidFill>
                   <a:srgbClr val="FFFFFF"/>
                 </a:solidFill>
-                <a:latin typeface="Microsoft YaHei"/>
-                <a:ea typeface="Microsoft YaHei"/>
-                <a:cs typeface="Microsoft YaHei"/>
+                <a:latin typeface="Aptos"/>
+                <a:ea typeface="Aptos"/>
+                <a:cs typeface="Aptos"/>
               </a:defRPr>
             </a:pPr>
             <a:r>
@@ -16476,11 +16406,11 @@
                 <a:solidFill>
                   <a:srgbClr val="FFFFFF"/>
                 </a:solidFill>
-                <a:latin typeface="Microsoft YaHei"/>
-                <a:ea typeface="Microsoft YaHei"/>
-                <a:cs typeface="Microsoft YaHei"/>
-              </a:rPr>
-              <a:t>4. 后续若要录到明确通关</a:t>
+                <a:latin typeface="Aptos"/>
+                <a:ea typeface="Aptos"/>
+                <a:cs typeface="Aptos"/>
+              </a:rPr>
+              <a:t>4. To record a confirmed clear</a:t>
             </a:r>
           </a:p>
         </p:txBody>
@@ -16490,7 +16420,7 @@
           <p:cNvPr id="19" name="">
             <a:extLst xmlns:a="http://schemas.openxmlformats.org/drawingml/2006/main">
               <a:ext uri="{FF2B5EF4-FFF2-40B4-BE49-F238E27FC236}">
-                <a16:creationId xmlns:a16="http://schemas.microsoft.com/office/drawing/2014/main" id="{03B623FB-AD5B-4613-AC7C-86F6738CBF76}"/>
+                <a16:creationId xmlns:a16="http://schemas.microsoft.com/office/drawing/2014/main" id="{22302A40-5C24-4AD8-A04E-172E9268C54F}"/>
               </a:ext>
             </a:extLst>
           </p:cNvPr>
@@ -16531,7 +16461,7 @@
           <p:cNvPr id="20" name="">
             <a:extLst xmlns:a="http://schemas.openxmlformats.org/drawingml/2006/main">
               <a:ext uri="{FF2B5EF4-FFF2-40B4-BE49-F238E27FC236}">
-                <a16:creationId xmlns:a16="http://schemas.microsoft.com/office/drawing/2014/main" id="{B7864184-E68C-412A-99DC-588112A70763}"/>
+                <a16:creationId xmlns:a16="http://schemas.microsoft.com/office/drawing/2014/main" id="{621FF707-2446-4BDC-93C0-E2CB7BD029C4}"/>
               </a:ext>
             </a:extLst>
           </p:cNvPr>
@@ -16563,9 +16493,9 @@
                 <a:solidFill>
                   <a:srgbClr val="059669"/>
                 </a:solidFill>
-                <a:latin typeface="Microsoft YaHei"/>
-                <a:ea typeface="Microsoft YaHei"/>
-                <a:cs typeface="Microsoft YaHei"/>
+                <a:latin typeface="Aptos"/>
+                <a:ea typeface="Aptos"/>
+                <a:cs typeface="Aptos"/>
               </a:defRPr>
             </a:pPr>
             <a:r>
@@ -16573,9 +16503,9 @@
                 <a:solidFill>
                   <a:srgbClr val="059669"/>
                 </a:solidFill>
-                <a:latin typeface="Microsoft YaHei"/>
-                <a:ea typeface="Microsoft YaHei"/>
-                <a:cs typeface="Microsoft YaHei"/>
+                <a:latin typeface="Aptos"/>
+                <a:ea typeface="Aptos"/>
+                <a:cs typeface="Aptos"/>
               </a:rPr>
               <a:t>Checkpoint search</a:t>
             </a:r>
@@ -16587,7 +16517,7 @@
           <p:cNvPr id="21" name="">
             <a:extLst xmlns:a="http://schemas.openxmlformats.org/drawingml/2006/main">
               <a:ext uri="{FF2B5EF4-FFF2-40B4-BE49-F238E27FC236}">
-                <a16:creationId xmlns:a16="http://schemas.microsoft.com/office/drawing/2014/main" id="{3DF3707F-9417-4237-A722-E914BA3A1728}"/>
+                <a16:creationId xmlns:a16="http://schemas.microsoft.com/office/drawing/2014/main" id="{BB65F5EC-E81E-4395-995A-8E93327D2537}"/>
               </a:ext>
             </a:extLst>
           </p:cNvPr>
@@ -16599,7 +16529,7 @@
         <p:spPr>
           <a:xfrm xmlns:a="http://schemas.openxmlformats.org/drawingml/2006/main">
             <a:off x="952500" y="4895850"/>
-            <a:ext cx="2095500" cy="428625"/>
+            <a:ext cx="2095500" cy="495300"/>
           </a:xfrm>
           <a:prstGeom xmlns:a="http://schemas.openxmlformats.org/drawingml/2006/main" prst="rect">
             <a:avLst/>
@@ -16619,9 +16549,9 @@
                 <a:solidFill>
                   <a:srgbClr val="202938"/>
                 </a:solidFill>
-                <a:latin typeface="Microsoft YaHei"/>
-                <a:ea typeface="Microsoft YaHei"/>
-                <a:cs typeface="Microsoft YaHei"/>
+                <a:latin typeface="Aptos"/>
+                <a:ea typeface="Aptos"/>
+                <a:cs typeface="Aptos"/>
               </a:defRPr>
             </a:pPr>
             <a:r>
@@ -16629,11 +16559,11 @@
                 <a:solidFill>
                   <a:srgbClr val="202938"/>
                 </a:solidFill>
-                <a:latin typeface="Microsoft YaHei"/>
-                <a:ea typeface="Microsoft YaHei"/>
-                <a:cs typeface="Microsoft YaHei"/>
-              </a:rPr>
-              <a:t>对 400k/800k/best/last 增加 sample episodes，保存最远且 flag_get=1 的视频。</a:t>
+                <a:latin typeface="Aptos"/>
+                <a:ea typeface="Aptos"/>
+                <a:cs typeface="Aptos"/>
+              </a:rPr>
+              <a:t>Run more sample episodes on 400k, 800k, best, and last checkpoints. Save the farthest flag_get=1 video.</a:t>
             </a:r>
           </a:p>
         </p:txBody>
@@ -16643,7 +16573,7 @@
           <p:cNvPr id="22" name="">
             <a:extLst xmlns:a="http://schemas.openxmlformats.org/drawingml/2006/main">
               <a:ext uri="{FF2B5EF4-FFF2-40B4-BE49-F238E27FC236}">
-                <a16:creationId xmlns:a16="http://schemas.microsoft.com/office/drawing/2014/main" id="{7550527D-0D75-4896-A4E7-DA6686963C66}"/>
+                <a16:creationId xmlns:a16="http://schemas.microsoft.com/office/drawing/2014/main" id="{31BE3325-9F88-43F4-BCF4-D54D6745CE09}"/>
               </a:ext>
             </a:extLst>
           </p:cNvPr>
@@ -16684,7 +16614,7 @@
           <p:cNvPr id="23" name="">
             <a:extLst xmlns:a="http://schemas.openxmlformats.org/drawingml/2006/main">
               <a:ext uri="{FF2B5EF4-FFF2-40B4-BE49-F238E27FC236}">
-                <a16:creationId xmlns:a16="http://schemas.microsoft.com/office/drawing/2014/main" id="{4F4A0613-5D95-4981-948E-31C496F335F7}"/>
+                <a16:creationId xmlns:a16="http://schemas.microsoft.com/office/drawing/2014/main" id="{305F9F01-7AD5-48E2-B390-0DA6E92E4BD7}"/>
               </a:ext>
             </a:extLst>
           </p:cNvPr>
@@ -16716,9 +16646,9 @@
                 <a:solidFill>
                   <a:srgbClr val="059669"/>
                 </a:solidFill>
-                <a:latin typeface="Microsoft YaHei"/>
-                <a:ea typeface="Microsoft YaHei"/>
-                <a:cs typeface="Microsoft YaHei"/>
+                <a:latin typeface="Aptos"/>
+                <a:ea typeface="Aptos"/>
+                <a:cs typeface="Aptos"/>
               </a:defRPr>
             </a:pPr>
             <a:r>
@@ -16726,9 +16656,9 @@
                 <a:solidFill>
                   <a:srgbClr val="059669"/>
                 </a:solidFill>
-                <a:latin typeface="Microsoft YaHei"/>
-                <a:ea typeface="Microsoft YaHei"/>
-                <a:cs typeface="Microsoft YaHei"/>
+                <a:latin typeface="Aptos"/>
+                <a:ea typeface="Aptos"/>
+                <a:cs typeface="Aptos"/>
               </a:rPr>
               <a:t>Flag logging</a:t>
             </a:r>
@@ -16740,7 +16670,7 @@
           <p:cNvPr id="24" name="">
             <a:extLst xmlns:a="http://schemas.openxmlformats.org/drawingml/2006/main">
               <a:ext uri="{FF2B5EF4-FFF2-40B4-BE49-F238E27FC236}">
-                <a16:creationId xmlns:a16="http://schemas.microsoft.com/office/drawing/2014/main" id="{1027AB8C-E1D9-4C65-9648-3773DD0C8C56}"/>
+                <a16:creationId xmlns:a16="http://schemas.microsoft.com/office/drawing/2014/main" id="{5BC6DC4B-8ADF-4056-B615-C79F3F39A56D}"/>
               </a:ext>
             </a:extLst>
           </p:cNvPr>
@@ -16752,7 +16682,7 @@
         <p:spPr>
           <a:xfrm xmlns:a="http://schemas.openxmlformats.org/drawingml/2006/main">
             <a:off x="3657600" y="4895850"/>
-            <a:ext cx="2095500" cy="428625"/>
+            <a:ext cx="2095500" cy="495300"/>
           </a:xfrm>
           <a:prstGeom xmlns:a="http://schemas.openxmlformats.org/drawingml/2006/main" prst="rect">
             <a:avLst/>
@@ -16772,9 +16702,9 @@
                 <a:solidFill>
                   <a:srgbClr val="202938"/>
                 </a:solidFill>
-                <a:latin typeface="Microsoft YaHei"/>
-                <a:ea typeface="Microsoft YaHei"/>
-                <a:cs typeface="Microsoft YaHei"/>
+                <a:latin typeface="Aptos"/>
+                <a:ea typeface="Aptos"/>
+                <a:cs typeface="Aptos"/>
               </a:defRPr>
             </a:pPr>
             <a:r>
@@ -16782,11 +16712,11 @@
                 <a:solidFill>
                   <a:srgbClr val="202938"/>
                 </a:solidFill>
-                <a:latin typeface="Microsoft YaHei"/>
-                <a:ea typeface="Microsoft YaHei"/>
-                <a:cs typeface="Microsoft YaHei"/>
-              </a:rPr>
-              <a:t>训练与评估都记录 episode_flag_get，避免只靠 x_pos 推断。</a:t>
+                <a:latin typeface="Aptos"/>
+                <a:ea typeface="Aptos"/>
+                <a:cs typeface="Aptos"/>
+              </a:rPr>
+              <a:t>Log episode_flag_get in training and evaluation. Do not rely only on x_pos.</a:t>
             </a:r>
           </a:p>
         </p:txBody>
@@ -16796,7 +16726,7 @@
           <p:cNvPr id="25" name="">
             <a:extLst xmlns:a="http://schemas.openxmlformats.org/drawingml/2006/main">
               <a:ext uri="{FF2B5EF4-FFF2-40B4-BE49-F238E27FC236}">
-                <a16:creationId xmlns:a16="http://schemas.microsoft.com/office/drawing/2014/main" id="{22B5ADFF-B6F0-4AC6-B7C6-1CA69C642781}"/>
+                <a16:creationId xmlns:a16="http://schemas.microsoft.com/office/drawing/2014/main" id="{BD906787-31A3-4642-84ED-9B137C56ECD3}"/>
               </a:ext>
             </a:extLst>
           </p:cNvPr>
@@ -16837,7 +16767,7 @@
           <p:cNvPr id="26" name="">
             <a:extLst xmlns:a="http://schemas.openxmlformats.org/drawingml/2006/main">
               <a:ext uri="{FF2B5EF4-FFF2-40B4-BE49-F238E27FC236}">
-                <a16:creationId xmlns:a16="http://schemas.microsoft.com/office/drawing/2014/main" id="{9E2AE806-F22F-4AB6-AF07-CF29AFF1C6B9}"/>
+                <a16:creationId xmlns:a16="http://schemas.microsoft.com/office/drawing/2014/main" id="{77585734-9325-4052-9273-394D4B2E29CD}"/>
               </a:ext>
             </a:extLst>
           </p:cNvPr>
@@ -16869,9 +16799,9 @@
                 <a:solidFill>
                   <a:srgbClr val="059669"/>
                 </a:solidFill>
-                <a:latin typeface="Microsoft YaHei"/>
-                <a:ea typeface="Microsoft YaHei"/>
-                <a:cs typeface="Microsoft YaHei"/>
+                <a:latin typeface="Aptos"/>
+                <a:ea typeface="Aptos"/>
+                <a:cs typeface="Aptos"/>
               </a:defRPr>
             </a:pPr>
             <a:r>
@@ -16879,9 +16809,9 @@
                 <a:solidFill>
                   <a:srgbClr val="059669"/>
                 </a:solidFill>
-                <a:latin typeface="Microsoft YaHei"/>
-                <a:ea typeface="Microsoft YaHei"/>
-                <a:cs typeface="Microsoft YaHei"/>
+                <a:latin typeface="Aptos"/>
+                <a:ea typeface="Aptos"/>
+                <a:cs typeface="Aptos"/>
               </a:rPr>
               <a:t>More seeds</a:t>
             </a:r>
@@ -16893,7 +16823,7 @@
           <p:cNvPr id="27" name="">
             <a:extLst xmlns:a="http://schemas.openxmlformats.org/drawingml/2006/main">
               <a:ext uri="{FF2B5EF4-FFF2-40B4-BE49-F238E27FC236}">
-                <a16:creationId xmlns:a16="http://schemas.microsoft.com/office/drawing/2014/main" id="{264EFDA4-32ED-4560-9BCE-ECEC605674FE}"/>
+                <a16:creationId xmlns:a16="http://schemas.microsoft.com/office/drawing/2014/main" id="{0E539914-934F-4726-8852-A3ADAFDDB036}"/>
               </a:ext>
             </a:extLst>
           </p:cNvPr>
@@ -16905,7 +16835,7 @@
         <p:spPr>
           <a:xfrm xmlns:a="http://schemas.openxmlformats.org/drawingml/2006/main">
             <a:off x="6362700" y="4895850"/>
-            <a:ext cx="2095500" cy="428625"/>
+            <a:ext cx="2095500" cy="495300"/>
           </a:xfrm>
           <a:prstGeom xmlns:a="http://schemas.openxmlformats.org/drawingml/2006/main" prst="rect">
             <a:avLst/>
@@ -16925,9 +16855,9 @@
                 <a:solidFill>
                   <a:srgbClr val="202938"/>
                 </a:solidFill>
-                <a:latin typeface="Microsoft YaHei"/>
-                <a:ea typeface="Microsoft YaHei"/>
-                <a:cs typeface="Microsoft YaHei"/>
+                <a:latin typeface="Aptos"/>
+                <a:ea typeface="Aptos"/>
+                <a:cs typeface="Aptos"/>
               </a:defRPr>
             </a:pPr>
             <a:r>
@@ -16935,11 +16865,11 @@
                 <a:solidFill>
                   <a:srgbClr val="202938"/>
                 </a:solidFill>
-                <a:latin typeface="Microsoft YaHei"/>
-                <a:ea typeface="Microsoft YaHei"/>
-                <a:cs typeface="Microsoft YaHei"/>
-              </a:rPr>
-              <a:t>至少 3 seeds 比较均值和方差，避免单次运行偶然性。</a:t>
+                <a:latin typeface="Aptos"/>
+                <a:ea typeface="Aptos"/>
+                <a:cs typeface="Aptos"/>
+              </a:rPr>
+              <a:t>Use at least 3 seeds to report mean and variance, not one-run luck.</a:t>
             </a:r>
           </a:p>
         </p:txBody>
@@ -16949,7 +16879,7 @@
           <p:cNvPr id="28" name="">
             <a:extLst xmlns:a="http://schemas.openxmlformats.org/drawingml/2006/main">
               <a:ext uri="{FF2B5EF4-FFF2-40B4-BE49-F238E27FC236}">
-                <a16:creationId xmlns:a16="http://schemas.microsoft.com/office/drawing/2014/main" id="{868F8367-7DD8-4F99-A81E-13F928B0B4C1}"/>
+                <a16:creationId xmlns:a16="http://schemas.microsoft.com/office/drawing/2014/main" id="{C105267C-1A76-4E06-9B68-073B90583AA3}"/>
               </a:ext>
             </a:extLst>
           </p:cNvPr>
@@ -16990,7 +16920,7 @@
           <p:cNvPr id="29" name="">
             <a:extLst xmlns:a="http://schemas.openxmlformats.org/drawingml/2006/main">
               <a:ext uri="{FF2B5EF4-FFF2-40B4-BE49-F238E27FC236}">
-                <a16:creationId xmlns:a16="http://schemas.microsoft.com/office/drawing/2014/main" id="{59900D8F-D74C-40D0-9109-17B719DCAA89}"/>
+                <a16:creationId xmlns:a16="http://schemas.microsoft.com/office/drawing/2014/main" id="{2B3EFE87-54DB-48DB-8B9C-3C9460D9B7A1}"/>
               </a:ext>
             </a:extLst>
           </p:cNvPr>
@@ -17022,9 +16952,9 @@
                 <a:solidFill>
                   <a:srgbClr val="059669"/>
                 </a:solidFill>
-                <a:latin typeface="Microsoft YaHei"/>
-                <a:ea typeface="Microsoft YaHei"/>
-                <a:cs typeface="Microsoft YaHei"/>
+                <a:latin typeface="Aptos"/>
+                <a:ea typeface="Aptos"/>
+                <a:cs typeface="Aptos"/>
               </a:defRPr>
             </a:pPr>
             <a:r>
@@ -17032,11 +16962,11 @@
                 <a:solidFill>
                   <a:srgbClr val="059669"/>
                 </a:solidFill>
-                <a:latin typeface="Microsoft YaHei"/>
-                <a:ea typeface="Microsoft YaHei"/>
-                <a:cs typeface="Microsoft YaHei"/>
-              </a:rPr>
-              <a:t>Longer / staged run</a:t>
+                <a:latin typeface="Aptos"/>
+                <a:ea typeface="Aptos"/>
+                <a:cs typeface="Aptos"/>
+              </a:rPr>
+              <a:t>Longer run</a:t>
             </a:r>
           </a:p>
         </p:txBody>
@@ -17046,7 +16976,7 @@
           <p:cNvPr id="30" name="">
             <a:extLst xmlns:a="http://schemas.openxmlformats.org/drawingml/2006/main">
               <a:ext uri="{FF2B5EF4-FFF2-40B4-BE49-F238E27FC236}">
-                <a16:creationId xmlns:a16="http://schemas.microsoft.com/office/drawing/2014/main" id="{4FC1E7D5-64CE-483C-A4E4-7D17C59DC2E9}"/>
+                <a16:creationId xmlns:a16="http://schemas.microsoft.com/office/drawing/2014/main" id="{D5ACBAA9-0C41-41A2-9ADB-8FC83F722CE6}"/>
               </a:ext>
             </a:extLst>
           </p:cNvPr>
@@ -17058,7 +16988,7 @@
         <p:spPr>
           <a:xfrm xmlns:a="http://schemas.openxmlformats.org/drawingml/2006/main">
             <a:off x="9067800" y="4895850"/>
-            <a:ext cx="2095500" cy="428625"/>
+            <a:ext cx="2095500" cy="495300"/>
           </a:xfrm>
           <a:prstGeom xmlns:a="http://schemas.openxmlformats.org/drawingml/2006/main" prst="rect">
             <a:avLst/>
@@ -17078,9 +17008,9 @@
                 <a:solidFill>
                   <a:srgbClr val="202938"/>
                 </a:solidFill>
-                <a:latin typeface="Microsoft YaHei"/>
-                <a:ea typeface="Microsoft YaHei"/>
-                <a:cs typeface="Microsoft YaHei"/>
+                <a:latin typeface="Aptos"/>
+                <a:ea typeface="Aptos"/>
+                <a:cs typeface="Aptos"/>
               </a:defRPr>
             </a:pPr>
             <a:r>
@@ -17088,11 +17018,11 @@
                 <a:solidFill>
                   <a:srgbClr val="202938"/>
                 </a:solidFill>
-                <a:latin typeface="Microsoft YaHei"/>
-                <a:ea typeface="Microsoft YaHei"/>
-                <a:cs typeface="Microsoft YaHei"/>
-              </a:rPr>
-              <a:t>在 1-1 上继续训练或从较好 checkpoint resume，再用 greedy+sample 搜索通关视频。</a:t>
+                <a:latin typeface="Aptos"/>
+                <a:ea typeface="Aptos"/>
+                <a:cs typeface="Aptos"/>
+              </a:rPr>
+              <a:t>Continue from a strong 1-1 checkpoint, then search with greedy and sample policies.</a:t>
             </a:r>
           </a:p>
         </p:txBody>
@@ -17102,19 +17032,19 @@
           <p:cNvPr id="31" name="">
             <a:extLst xmlns:a="http://schemas.openxmlformats.org/drawingml/2006/main">
               <a:ext uri="{FF2B5EF4-FFF2-40B4-BE49-F238E27FC236}">
-                <a16:creationId xmlns:a16="http://schemas.microsoft.com/office/drawing/2014/main" id="{D7031008-4E47-4A6B-A069-418AEFCE8343}"/>
-              </a:ext>
-            </a:extLst>
-          </p:cNvPr>
-          <p:cNvSpPr>
-            <a:spLocks xmlns:a="http://schemas.openxmlformats.org/drawingml/2006/main" noGrp="1"/>
-          </p:cNvSpPr>
-          <p:nvPr/>
-        </p:nvSpPr>
-        <p:spPr>
-          <a:xfrm xmlns:a="http://schemas.openxmlformats.org/drawingml/2006/main">
-            <a:off x="2400300" y="6572250"/>
-            <a:ext cx="7810500" cy="152400"/>
+                <a16:creationId xmlns:a16="http://schemas.microsoft.com/office/drawing/2014/main" id="{7ADC38C9-A909-4461-8821-E91363AD774F}"/>
+              </a:ext>
+            </a:extLst>
+          </p:cNvPr>
+          <p:cNvSpPr>
+            <a:spLocks xmlns:a="http://schemas.openxmlformats.org/drawingml/2006/main" noGrp="1"/>
+          </p:cNvSpPr>
+          <p:nvPr/>
+        </p:nvSpPr>
+        <p:spPr>
+          <a:xfrm xmlns:a="http://schemas.openxmlformats.org/drawingml/2006/main">
+            <a:off x="2190750" y="6572250"/>
+            <a:ext cx="8191500" cy="152400"/>
           </a:xfrm>
           <a:prstGeom xmlns:a="http://schemas.openxmlformats.org/drawingml/2006/main" prst="rect">
             <a:avLst/>
@@ -17134,9 +17064,9 @@
                 <a:solidFill>
                   <a:srgbClr val="607084"/>
                 </a:solidFill>
-                <a:latin typeface="Microsoft YaHei"/>
-                <a:ea typeface="Microsoft YaHei"/>
-                <a:cs typeface="Microsoft YaHei"/>
+                <a:latin typeface="Aptos"/>
+                <a:ea typeface="Aptos"/>
+                <a:cs typeface="Aptos"/>
               </a:defRPr>
             </a:pPr>
             <a:r>
@@ -17144,11 +17074,11 @@
                 <a:solidFill>
                   <a:srgbClr val="607084"/>
                 </a:solidFill>
-                <a:latin typeface="Microsoft YaHei"/>
-                <a:ea typeface="Microsoft YaHei"/>
-                <a:cs typeface="Microsoft YaHei"/>
-              </a:rPr>
-              <a:t>Claim boundary: current selected 1-1 videos are visual rollouts, not strict full-clear evidence; training logs provide terminal-progress evidence.</a:t>
+                <a:latin typeface="Aptos"/>
+                <a:ea typeface="Aptos"/>
+                <a:cs typeface="Aptos"/>
+              </a:rPr>
+              <a:t>Claim boundary: current saved videos are rollouts, not strict full-clear evidence.</a:t>
             </a:r>
           </a:p>
         </p:txBody>
@@ -17156,7 +17086,7 @@
     </p:spTree>
     <p:extLst>
       <p:ext uri="{BB962C8B-B14F-4D97-AF65-F5344CB8AC3E}">
-        <p14:creationId xmlns:p14="http://schemas.microsoft.com/office/powerpoint/2010/main" val="324282467"/>
+        <p14:creationId xmlns:p14="http://schemas.microsoft.com/office/powerpoint/2010/main" val="567927706"/>
       </p:ext>
     </p:extLst>
   </p:cSld>
